--- a/architecture/architecture.pptx
+++ b/architecture/architecture.pptx
@@ -104,6 +104,11 @@
       </a:defRPr>
     </a:lvl9pPr>
   </p:defaultTextStyle>
+  <p:extLst>
+    <p:ext uri="{EFAFB233-063F-42B5-8137-9DF3F51BA10A}">
+      <p15:sldGuideLst xmlns:p15="http://schemas.microsoft.com/office/powerpoint/2012/main"/>
+    </p:ext>
+  </p:extLst>
 </p:presentation>
 </file>
 
@@ -238,7 +243,7 @@
           <a:p>
             <a:fld id="{3CA2CC2A-5CFF-450D-AB10-594363CFED2D}" type="datetimeFigureOut">
               <a:rPr lang="en-AU" smtClean="0"/>
-              <a:t>14/08/2026</a:t>
+              <a:t>16/08/2026</a:t>
             </a:fld>
             <a:endParaRPr lang="en-AU"/>
           </a:p>
@@ -408,7 +413,7 @@
           <a:p>
             <a:fld id="{3CA2CC2A-5CFF-450D-AB10-594363CFED2D}" type="datetimeFigureOut">
               <a:rPr lang="en-AU" smtClean="0"/>
-              <a:t>14/08/2026</a:t>
+              <a:t>16/08/2026</a:t>
             </a:fld>
             <a:endParaRPr lang="en-AU"/>
           </a:p>
@@ -588,7 +593,7 @@
           <a:p>
             <a:fld id="{3CA2CC2A-5CFF-450D-AB10-594363CFED2D}" type="datetimeFigureOut">
               <a:rPr lang="en-AU" smtClean="0"/>
-              <a:t>14/08/2026</a:t>
+              <a:t>16/08/2026</a:t>
             </a:fld>
             <a:endParaRPr lang="en-AU"/>
           </a:p>
@@ -758,7 +763,7 @@
           <a:p>
             <a:fld id="{3CA2CC2A-5CFF-450D-AB10-594363CFED2D}" type="datetimeFigureOut">
               <a:rPr lang="en-AU" smtClean="0"/>
-              <a:t>14/08/2026</a:t>
+              <a:t>16/08/2026</a:t>
             </a:fld>
             <a:endParaRPr lang="en-AU"/>
           </a:p>
@@ -1004,7 +1009,7 @@
           <a:p>
             <a:fld id="{3CA2CC2A-5CFF-450D-AB10-594363CFED2D}" type="datetimeFigureOut">
               <a:rPr lang="en-AU" smtClean="0"/>
-              <a:t>14/08/2026</a:t>
+              <a:t>16/08/2026</a:t>
             </a:fld>
             <a:endParaRPr lang="en-AU"/>
           </a:p>
@@ -1236,7 +1241,7 @@
           <a:p>
             <a:fld id="{3CA2CC2A-5CFF-450D-AB10-594363CFED2D}" type="datetimeFigureOut">
               <a:rPr lang="en-AU" smtClean="0"/>
-              <a:t>14/08/2026</a:t>
+              <a:t>16/08/2026</a:t>
             </a:fld>
             <a:endParaRPr lang="en-AU"/>
           </a:p>
@@ -1603,7 +1608,7 @@
           <a:p>
             <a:fld id="{3CA2CC2A-5CFF-450D-AB10-594363CFED2D}" type="datetimeFigureOut">
               <a:rPr lang="en-AU" smtClean="0"/>
-              <a:t>14/08/2026</a:t>
+              <a:t>16/08/2026</a:t>
             </a:fld>
             <a:endParaRPr lang="en-AU"/>
           </a:p>
@@ -1721,7 +1726,7 @@
           <a:p>
             <a:fld id="{3CA2CC2A-5CFF-450D-AB10-594363CFED2D}" type="datetimeFigureOut">
               <a:rPr lang="en-AU" smtClean="0"/>
-              <a:t>14/08/2026</a:t>
+              <a:t>16/08/2026</a:t>
             </a:fld>
             <a:endParaRPr lang="en-AU"/>
           </a:p>
@@ -1816,7 +1821,7 @@
           <a:p>
             <a:fld id="{3CA2CC2A-5CFF-450D-AB10-594363CFED2D}" type="datetimeFigureOut">
               <a:rPr lang="en-AU" smtClean="0"/>
-              <a:t>14/08/2026</a:t>
+              <a:t>16/08/2026</a:t>
             </a:fld>
             <a:endParaRPr lang="en-AU"/>
           </a:p>
@@ -2093,7 +2098,7 @@
           <a:p>
             <a:fld id="{3CA2CC2A-5CFF-450D-AB10-594363CFED2D}" type="datetimeFigureOut">
               <a:rPr lang="en-AU" smtClean="0"/>
-              <a:t>14/08/2026</a:t>
+              <a:t>16/08/2026</a:t>
             </a:fld>
             <a:endParaRPr lang="en-AU"/>
           </a:p>
@@ -2346,7 +2351,7 @@
           <a:p>
             <a:fld id="{3CA2CC2A-5CFF-450D-AB10-594363CFED2D}" type="datetimeFigureOut">
               <a:rPr lang="en-AU" smtClean="0"/>
-              <a:t>14/08/2026</a:t>
+              <a:t>16/08/2026</a:t>
             </a:fld>
             <a:endParaRPr lang="en-AU"/>
           </a:p>
@@ -2559,7 +2564,7 @@
           <a:p>
             <a:fld id="{3CA2CC2A-5CFF-450D-AB10-594363CFED2D}" type="datetimeFigureOut">
               <a:rPr lang="en-AU" smtClean="0"/>
-              <a:t>14/08/2026</a:t>
+              <a:t>16/08/2026</a:t>
             </a:fld>
             <a:endParaRPr lang="en-AU"/>
           </a:p>
@@ -3774,7 +3779,7 @@
         <p:spPr>
           <a:xfrm>
             <a:off x="5650168" y="579608"/>
-            <a:ext cx="6143028" cy="1446550"/>
+            <a:ext cx="6388287" cy="1446550"/>
           </a:xfrm>
           <a:prstGeom prst="rect">
             <a:avLst/>
@@ -3835,8 +3840,25 @@
             </a:r>
             <a:r>
               <a:rPr lang="en-US" sz="1100" dirty="0" smtClean="0"/>
-              <a:t>: null,</a:t>
-            </a:r>
+              <a:t>: </a:t>
+            </a:r>
+            <a:r>
+              <a:rPr lang="en-US" sz="1100" dirty="0" smtClean="0"/>
+              <a:t>null</a:t>
+            </a:r>
+            <a:r>
+              <a:rPr lang="en-US" sz="1100" dirty="0"/>
+              <a:t>, </a:t>
+            </a:r>
+            <a:r>
+              <a:rPr lang="en-US" sz="1100" dirty="0" err="1" smtClean="0"/>
+              <a:t>severity_pc</a:t>
+            </a:r>
+            <a:r>
+              <a:rPr lang="en-US" sz="1100" dirty="0"/>
+              <a:t>: null, </a:t>
+            </a:r>
+            <a:endParaRPr lang="en-US" sz="1100" dirty="0" smtClean="0"/>
           </a:p>
           <a:p>
             <a:r>
@@ -3857,11 +3879,7 @@
             </a:r>
             <a:r>
               <a:rPr lang="en-US" sz="1100" dirty="0" smtClean="0"/>
-              <a:t>: </a:t>
-            </a:r>
-            <a:r>
-              <a:rPr lang="en-US" sz="1100" dirty="0" smtClean="0"/>
-              <a:t>"Dehydrated Skin“, </a:t>
+              <a:t>: "Dehydrated Skin“, </a:t>
             </a:r>
             <a:r>
               <a:rPr lang="en-US" sz="1100" dirty="0" err="1" smtClean="0"/>
@@ -3869,6 +3887,18 @@
             </a:r>
             <a:r>
               <a:rPr lang="en-US" sz="1100" dirty="0" smtClean="0"/>
+              <a:t>: null</a:t>
+            </a:r>
+            <a:r>
+              <a:rPr lang="en-US" sz="1100" dirty="0"/>
+              <a:t>, </a:t>
+            </a:r>
+            <a:r>
+              <a:rPr lang="en-US" sz="1100" dirty="0" err="1"/>
+              <a:t>severity_pc</a:t>
+            </a:r>
+            <a:r>
+              <a:rPr lang="en-US" sz="1100" dirty="0"/>
               <a:t>: null,</a:t>
             </a:r>
             <a:endParaRPr lang="en-US" sz="1100" dirty="0" smtClean="0"/>
@@ -3892,11 +3922,7 @@
             </a:r>
             <a:r>
               <a:rPr lang="en-US" sz="1100" dirty="0" smtClean="0"/>
-              <a:t>: </a:t>
-            </a:r>
-            <a:r>
-              <a:rPr lang="en-US" sz="1100" dirty="0" smtClean="0"/>
-              <a:t>"Compromised Skin Barrier“, </a:t>
+              <a:t>: "Compromised Skin Barrier“, </a:t>
             </a:r>
             <a:r>
               <a:rPr lang="en-US" sz="1100" dirty="0" err="1" smtClean="0"/>
@@ -3904,6 +3930,18 @@
             </a:r>
             <a:r>
               <a:rPr lang="en-US" sz="1100" dirty="0" smtClean="0"/>
+              <a:t>: null</a:t>
+            </a:r>
+            <a:r>
+              <a:rPr lang="en-US" sz="1100" dirty="0"/>
+              <a:t>, </a:t>
+            </a:r>
+            <a:r>
+              <a:rPr lang="en-US" sz="1100" dirty="0" err="1"/>
+              <a:t>severity_pc</a:t>
+            </a:r>
+            <a:r>
+              <a:rPr lang="en-US" sz="1100" dirty="0"/>
               <a:t>: null,</a:t>
             </a:r>
             <a:endParaRPr lang="en-US" sz="1100" dirty="0" smtClean="0"/>
@@ -3927,11 +3965,7 @@
             </a:r>
             <a:r>
               <a:rPr lang="en-US" sz="1100" dirty="0" smtClean="0"/>
-              <a:t>: </a:t>
-            </a:r>
-            <a:r>
-              <a:rPr lang="en-US" sz="1100" dirty="0" smtClean="0"/>
-              <a:t>"Sensitive Skin“, </a:t>
+              <a:t>: "Sensitive Skin“, </a:t>
             </a:r>
             <a:r>
               <a:rPr lang="en-US" sz="1100" dirty="0" err="1" smtClean="0"/>
@@ -3939,6 +3973,18 @@
             </a:r>
             <a:r>
               <a:rPr lang="en-US" sz="1100" dirty="0" smtClean="0"/>
+              <a:t>: null</a:t>
+            </a:r>
+            <a:r>
+              <a:rPr lang="en-US" sz="1100" dirty="0"/>
+              <a:t>, </a:t>
+            </a:r>
+            <a:r>
+              <a:rPr lang="en-US" sz="1100" dirty="0" err="1"/>
+              <a:t>severity_pc</a:t>
+            </a:r>
+            <a:r>
+              <a:rPr lang="en-US" sz="1100" dirty="0"/>
               <a:t>: null,</a:t>
             </a:r>
             <a:endParaRPr lang="en-US" sz="1100" dirty="0" smtClean="0"/>
@@ -3960,11 +4006,7 @@
             </a:r>
             <a:r>
               <a:rPr lang="en-US" sz="1100" dirty="0" smtClean="0"/>
-              <a:t> </a:t>
-            </a:r>
-            <a:r>
-              <a:rPr lang="en-US" sz="1100" dirty="0" smtClean="0"/>
-              <a:t>&gt; get me the &lt;</a:t>
+              <a:t> &gt; get me the &lt;</a:t>
             </a:r>
             <a:r>
               <a:rPr lang="en-US" sz="1100" dirty="0" err="1" smtClean="0"/>

--- a/architecture/architecture.pptx
+++ b/architecture/architecture.pptx
@@ -5,7 +5,10 @@
     <p:sldMasterId id="2147483648" r:id="rId1"/>
   </p:sldMasterIdLst>
   <p:sldIdLst>
-    <p:sldId id="256" r:id="rId2"/>
+    <p:sldId id="259" r:id="rId2"/>
+    <p:sldId id="256" r:id="rId3"/>
+    <p:sldId id="257" r:id="rId4"/>
+    <p:sldId id="258" r:id="rId5"/>
   </p:sldIdLst>
   <p:sldSz cx="12192000" cy="6858000"/>
   <p:notesSz cx="6858000" cy="9144000"/>
@@ -243,7 +246,7 @@
           <a:p>
             <a:fld id="{3CA2CC2A-5CFF-450D-AB10-594363CFED2D}" type="datetimeFigureOut">
               <a:rPr lang="en-AU" smtClean="0"/>
-              <a:t>16/08/2026</a:t>
+              <a:t>25/08/2026</a:t>
             </a:fld>
             <a:endParaRPr lang="en-AU"/>
           </a:p>
@@ -413,7 +416,7 @@
           <a:p>
             <a:fld id="{3CA2CC2A-5CFF-450D-AB10-594363CFED2D}" type="datetimeFigureOut">
               <a:rPr lang="en-AU" smtClean="0"/>
-              <a:t>16/08/2026</a:t>
+              <a:t>25/08/2026</a:t>
             </a:fld>
             <a:endParaRPr lang="en-AU"/>
           </a:p>
@@ -593,7 +596,7 @@
           <a:p>
             <a:fld id="{3CA2CC2A-5CFF-450D-AB10-594363CFED2D}" type="datetimeFigureOut">
               <a:rPr lang="en-AU" smtClean="0"/>
-              <a:t>16/08/2026</a:t>
+              <a:t>25/08/2026</a:t>
             </a:fld>
             <a:endParaRPr lang="en-AU"/>
           </a:p>
@@ -763,7 +766,7 @@
           <a:p>
             <a:fld id="{3CA2CC2A-5CFF-450D-AB10-594363CFED2D}" type="datetimeFigureOut">
               <a:rPr lang="en-AU" smtClean="0"/>
-              <a:t>16/08/2026</a:t>
+              <a:t>25/08/2026</a:t>
             </a:fld>
             <a:endParaRPr lang="en-AU"/>
           </a:p>
@@ -1009,7 +1012,7 @@
           <a:p>
             <a:fld id="{3CA2CC2A-5CFF-450D-AB10-594363CFED2D}" type="datetimeFigureOut">
               <a:rPr lang="en-AU" smtClean="0"/>
-              <a:t>16/08/2026</a:t>
+              <a:t>25/08/2026</a:t>
             </a:fld>
             <a:endParaRPr lang="en-AU"/>
           </a:p>
@@ -1241,7 +1244,7 @@
           <a:p>
             <a:fld id="{3CA2CC2A-5CFF-450D-AB10-594363CFED2D}" type="datetimeFigureOut">
               <a:rPr lang="en-AU" smtClean="0"/>
-              <a:t>16/08/2026</a:t>
+              <a:t>25/08/2026</a:t>
             </a:fld>
             <a:endParaRPr lang="en-AU"/>
           </a:p>
@@ -1608,7 +1611,7 @@
           <a:p>
             <a:fld id="{3CA2CC2A-5CFF-450D-AB10-594363CFED2D}" type="datetimeFigureOut">
               <a:rPr lang="en-AU" smtClean="0"/>
-              <a:t>16/08/2026</a:t>
+              <a:t>25/08/2026</a:t>
             </a:fld>
             <a:endParaRPr lang="en-AU"/>
           </a:p>
@@ -1726,7 +1729,7 @@
           <a:p>
             <a:fld id="{3CA2CC2A-5CFF-450D-AB10-594363CFED2D}" type="datetimeFigureOut">
               <a:rPr lang="en-AU" smtClean="0"/>
-              <a:t>16/08/2026</a:t>
+              <a:t>25/08/2026</a:t>
             </a:fld>
             <a:endParaRPr lang="en-AU"/>
           </a:p>
@@ -1821,7 +1824,7 @@
           <a:p>
             <a:fld id="{3CA2CC2A-5CFF-450D-AB10-594363CFED2D}" type="datetimeFigureOut">
               <a:rPr lang="en-AU" smtClean="0"/>
-              <a:t>16/08/2026</a:t>
+              <a:t>25/08/2026</a:t>
             </a:fld>
             <a:endParaRPr lang="en-AU"/>
           </a:p>
@@ -2098,7 +2101,7 @@
           <a:p>
             <a:fld id="{3CA2CC2A-5CFF-450D-AB10-594363CFED2D}" type="datetimeFigureOut">
               <a:rPr lang="en-AU" smtClean="0"/>
-              <a:t>16/08/2026</a:t>
+              <a:t>25/08/2026</a:t>
             </a:fld>
             <a:endParaRPr lang="en-AU"/>
           </a:p>
@@ -2351,7 +2354,7 @@
           <a:p>
             <a:fld id="{3CA2CC2A-5CFF-450D-AB10-594363CFED2D}" type="datetimeFigureOut">
               <a:rPr lang="en-AU" smtClean="0"/>
-              <a:t>16/08/2026</a:t>
+              <a:t>25/08/2026</a:t>
             </a:fld>
             <a:endParaRPr lang="en-AU"/>
           </a:p>
@@ -2564,7 +2567,7 @@
           <a:p>
             <a:fld id="{3CA2CC2A-5CFF-450D-AB10-594363CFED2D}" type="datetimeFigureOut">
               <a:rPr lang="en-AU" smtClean="0"/>
-              <a:t>16/08/2026</a:t>
+              <a:t>25/08/2026</a:t>
             </a:fld>
             <a:endParaRPr lang="en-AU"/>
           </a:p>
@@ -2971,21 +2974,429 @@
       </p:grpSpPr>
       <p:sp>
         <p:nvSpPr>
+          <p:cNvPr id="6" name="AutoShape 2" descr="Shopify logo and symbol, meaning, history, PNG"/>
+          <p:cNvSpPr>
+            <a:spLocks noChangeAspect="1" noChangeArrowheads="1"/>
+          </p:cNvSpPr>
+          <p:nvPr/>
+        </p:nvSpPr>
+        <p:spPr bwMode="auto">
+          <a:xfrm>
+            <a:off x="749265" y="212671"/>
+            <a:ext cx="274338" cy="274339"/>
+          </a:xfrm>
+          <a:prstGeom prst="rect">
+            <a:avLst/>
+          </a:prstGeom>
+          <a:noFill/>
+          <a:extLst>
+            <a:ext uri="{909E8E84-426E-40DD-AFC4-6F175D3DCCD1}">
+              <a14:hiddenFill xmlns:a14="http://schemas.microsoft.com/office/drawing/2010/main">
+                <a:solidFill>
+                  <a:srgbClr val="FFFFFF"/>
+                </a:solidFill>
+              </a14:hiddenFill>
+            </a:ext>
+          </a:extLst>
+        </p:spPr>
+        <p:txBody>
+          <a:bodyPr vert="horz" wrap="square" lIns="82302" tIns="41151" rIns="82302" bIns="41151" numCol="1" anchor="t" anchorCtr="0" compatLnSpc="1">
+            <a:prstTxWarp prst="textNoShape">
+              <a:avLst/>
+            </a:prstTxWarp>
+          </a:bodyPr>
+          <a:lstStyle/>
+          <a:p>
+            <a:endParaRPr lang="en-AU" sz="1260"/>
+          </a:p>
+        </p:txBody>
+      </p:sp>
+      <p:pic>
+        <p:nvPicPr>
+          <p:cNvPr id="7" name="Picture 6"/>
+          <p:cNvPicPr>
+            <a:picLocks noChangeAspect="1"/>
+          </p:cNvPicPr>
+          <p:nvPr/>
+        </p:nvPicPr>
+        <p:blipFill rotWithShape="1">
+          <a:blip r:embed="rId2" cstate="print">
+            <a:extLst>
+              <a:ext uri="{28A0092B-C50C-407E-A947-70E740481C1C}">
+                <a14:useLocalDpi xmlns:a14="http://schemas.microsoft.com/office/drawing/2010/main" val="0"/>
+              </a:ext>
+            </a:extLst>
+          </a:blip>
+          <a:srcRect t="28812" b="26164"/>
+          <a:stretch/>
+        </p:blipFill>
+        <p:spPr>
+          <a:xfrm>
+            <a:off x="7661521" y="3255546"/>
+            <a:ext cx="684847" cy="192716"/>
+          </a:xfrm>
+          <a:prstGeom prst="rect">
+            <a:avLst/>
+          </a:prstGeom>
+        </p:spPr>
+      </p:pic>
+      <p:sp>
+        <p:nvSpPr>
+          <p:cNvPr id="8" name="TextBox 7"/>
+          <p:cNvSpPr txBox="1"/>
+          <p:nvPr/>
+        </p:nvSpPr>
+        <p:spPr>
+          <a:xfrm>
+            <a:off x="6973758" y="3213395"/>
+            <a:ext cx="2157129" cy="286232"/>
+          </a:xfrm>
+          <a:prstGeom prst="rect">
+            <a:avLst/>
+          </a:prstGeom>
+          <a:noFill/>
+        </p:spPr>
+        <p:txBody>
+          <a:bodyPr wrap="none" rtlCol="0">
+            <a:spAutoFit/>
+          </a:bodyPr>
+          <a:lstStyle/>
+          <a:p>
+            <a:r>
+              <a:rPr lang="en-US" sz="1260" b="1" dirty="0"/>
+              <a:t>Existing                       </a:t>
+            </a:r>
+            <a:r>
+              <a:rPr lang="en-US" sz="1260" b="1" dirty="0"/>
+              <a:t>Frontend</a:t>
+            </a:r>
+            <a:endParaRPr lang="en-AU" sz="1260" b="1" dirty="0"/>
+          </a:p>
+        </p:txBody>
+      </p:sp>
+      <p:sp>
+        <p:nvSpPr>
+          <p:cNvPr id="9" name="TextBox 8"/>
+          <p:cNvSpPr txBox="1"/>
+          <p:nvPr/>
+        </p:nvSpPr>
+        <p:spPr>
+          <a:xfrm>
+            <a:off x="5313736" y="1878695"/>
+            <a:ext cx="2084970" cy="286232"/>
+          </a:xfrm>
+          <a:prstGeom prst="rect">
+            <a:avLst/>
+          </a:prstGeom>
+          <a:noFill/>
+        </p:spPr>
+        <p:txBody>
+          <a:bodyPr wrap="square" rtlCol="0">
+            <a:spAutoFit/>
+          </a:bodyPr>
+          <a:lstStyle/>
+          <a:p>
+            <a:r>
+              <a:rPr lang="en-US" sz="1260" dirty="0"/>
+              <a:t>URL: https://celrevive.com/</a:t>
+            </a:r>
+            <a:endParaRPr lang="en-AU" sz="1260" dirty="0"/>
+          </a:p>
+        </p:txBody>
+      </p:sp>
+      <p:sp>
+        <p:nvSpPr>
+          <p:cNvPr id="11" name="TextBox 10"/>
+          <p:cNvSpPr txBox="1"/>
+          <p:nvPr/>
+        </p:nvSpPr>
+        <p:spPr>
+          <a:xfrm>
+            <a:off x="5790529" y="1639005"/>
+            <a:ext cx="939616" cy="286232"/>
+          </a:xfrm>
+          <a:prstGeom prst="rect">
+            <a:avLst/>
+          </a:prstGeom>
+          <a:noFill/>
+        </p:spPr>
+        <p:txBody>
+          <a:bodyPr wrap="none" rtlCol="0">
+            <a:spAutoFit/>
+          </a:bodyPr>
+          <a:lstStyle/>
+          <a:p>
+            <a:r>
+              <a:rPr lang="en-US" sz="1260" b="1" dirty="0"/>
+              <a:t>DNS Server</a:t>
+            </a:r>
+            <a:endParaRPr lang="en-AU" sz="1260" b="1" dirty="0"/>
+          </a:p>
+        </p:txBody>
+      </p:sp>
+      <p:cxnSp>
+        <p:nvCxnSpPr>
+          <p:cNvPr id="13" name="Straight Arrow Connector 12"/>
+          <p:cNvCxnSpPr>
+            <a:stCxn id="4" idx="0"/>
+            <a:endCxn id="9" idx="2"/>
+          </p:cNvCxnSpPr>
+          <p:nvPr/>
+        </p:nvCxnSpPr>
+        <p:spPr>
+          <a:xfrm flipH="1" flipV="1">
+            <a:off x="6356221" y="2164927"/>
+            <a:ext cx="1705344" cy="954728"/>
+          </a:xfrm>
+          <a:prstGeom prst="straightConnector1">
+            <a:avLst/>
+          </a:prstGeom>
+          <a:ln w="47625">
+            <a:tailEnd type="triangle"/>
+          </a:ln>
+        </p:spPr>
+        <p:style>
+          <a:lnRef idx="1">
+            <a:schemeClr val="accent1"/>
+          </a:lnRef>
+          <a:fillRef idx="0">
+            <a:schemeClr val="accent1"/>
+          </a:fillRef>
+          <a:effectRef idx="0">
+            <a:schemeClr val="accent1"/>
+          </a:effectRef>
+          <a:fontRef idx="minor">
+            <a:schemeClr val="tx1"/>
+          </a:fontRef>
+        </p:style>
+      </p:cxnSp>
+      <p:cxnSp>
+        <p:nvCxnSpPr>
+          <p:cNvPr id="18" name="Straight Arrow Connector 17"/>
+          <p:cNvCxnSpPr>
+            <a:stCxn id="10" idx="0"/>
+            <a:endCxn id="23" idx="2"/>
+          </p:cNvCxnSpPr>
+          <p:nvPr/>
+        </p:nvCxnSpPr>
+        <p:spPr>
+          <a:xfrm flipV="1">
+            <a:off x="6301354" y="994173"/>
+            <a:ext cx="0" cy="665408"/>
+          </a:xfrm>
+          <a:prstGeom prst="straightConnector1">
+            <a:avLst/>
+          </a:prstGeom>
+          <a:ln w="47625">
+            <a:tailEnd type="triangle"/>
+          </a:ln>
+        </p:spPr>
+        <p:style>
+          <a:lnRef idx="1">
+            <a:schemeClr val="accent1"/>
+          </a:lnRef>
+          <a:fillRef idx="0">
+            <a:schemeClr val="accent1"/>
+          </a:fillRef>
+          <a:effectRef idx="0">
+            <a:schemeClr val="accent1"/>
+          </a:effectRef>
+          <a:fontRef idx="minor">
+            <a:schemeClr val="tx1"/>
+          </a:fontRef>
+        </p:style>
+      </p:cxnSp>
+      <p:pic>
+        <p:nvPicPr>
+          <p:cNvPr id="23" name="Picture 22"/>
+          <p:cNvPicPr>
+            <a:picLocks noChangeAspect="1"/>
+          </p:cNvPicPr>
+          <p:nvPr/>
+        </p:nvPicPr>
+        <p:blipFill>
+          <a:blip r:embed="rId3" cstate="print">
+            <a:extLst>
+              <a:ext uri="{28A0092B-C50C-407E-A947-70E740481C1C}">
+                <a14:useLocalDpi xmlns:a14="http://schemas.microsoft.com/office/drawing/2010/main" val="0"/>
+              </a:ext>
+            </a:extLst>
+          </a:blip>
+          <a:stretch>
+            <a:fillRect/>
+          </a:stretch>
+        </p:blipFill>
+        <p:spPr>
+          <a:xfrm>
+            <a:off x="5733439" y="286281"/>
+            <a:ext cx="1135830" cy="707892"/>
+          </a:xfrm>
+          <a:prstGeom prst="rect">
+            <a:avLst/>
+          </a:prstGeom>
+        </p:spPr>
+      </p:pic>
+      <p:pic>
+        <p:nvPicPr>
+          <p:cNvPr id="24" name="Picture 23"/>
+          <p:cNvPicPr>
+            <a:picLocks noChangeAspect="1"/>
+          </p:cNvPicPr>
+          <p:nvPr/>
+        </p:nvPicPr>
+        <p:blipFill rotWithShape="1">
+          <a:blip r:embed="rId4" cstate="print">
+            <a:extLst>
+              <a:ext uri="{28A0092B-C50C-407E-A947-70E740481C1C}">
+                <a14:useLocalDpi xmlns:a14="http://schemas.microsoft.com/office/drawing/2010/main" val="0"/>
+              </a:ext>
+            </a:extLst>
+          </a:blip>
+          <a:srcRect t="22660" b="29958"/>
+          <a:stretch/>
+        </p:blipFill>
+        <p:spPr>
+          <a:xfrm>
+            <a:off x="6168182" y="473731"/>
+            <a:ext cx="443303" cy="226576"/>
+          </a:xfrm>
+          <a:prstGeom prst="rect">
+            <a:avLst/>
+          </a:prstGeom>
+        </p:spPr>
+      </p:pic>
+      <p:sp>
+        <p:nvSpPr>
+          <p:cNvPr id="27" name="TextBox 26"/>
+          <p:cNvSpPr txBox="1"/>
+          <p:nvPr/>
+        </p:nvSpPr>
+        <p:spPr>
+          <a:xfrm>
+            <a:off x="6978865" y="3477738"/>
+            <a:ext cx="2242538" cy="2419124"/>
+          </a:xfrm>
+          <a:prstGeom prst="rect">
+            <a:avLst/>
+          </a:prstGeom>
+          <a:noFill/>
+        </p:spPr>
+        <p:txBody>
+          <a:bodyPr wrap="square" rtlCol="0">
+            <a:spAutoFit/>
+          </a:bodyPr>
+          <a:lstStyle/>
+          <a:p>
+            <a:pPr marL="257174" indent="-257174">
+              <a:lnSpc>
+                <a:spcPct val="200000"/>
+              </a:lnSpc>
+              <a:buFont typeface="Wingdings" panose="05000000000000000000" pitchFamily="2" charset="2"/>
+              <a:buChar char="v"/>
+            </a:pPr>
+            <a:r>
+              <a:rPr lang="en-US" sz="1260" dirty="0"/>
+              <a:t>Authentication UI</a:t>
+            </a:r>
+          </a:p>
+          <a:p>
+            <a:pPr marL="257174" indent="-257174">
+              <a:lnSpc>
+                <a:spcPct val="200000"/>
+              </a:lnSpc>
+              <a:buFont typeface="Wingdings" panose="05000000000000000000" pitchFamily="2" charset="2"/>
+              <a:buChar char="v"/>
+            </a:pPr>
+            <a:r>
+              <a:rPr lang="en-US" sz="1260" dirty="0"/>
+              <a:t>User Profile UI (Partial)</a:t>
+            </a:r>
+          </a:p>
+          <a:p>
+            <a:pPr marL="257174" indent="-257174">
+              <a:lnSpc>
+                <a:spcPct val="200000"/>
+              </a:lnSpc>
+              <a:buFont typeface="Wingdings" panose="05000000000000000000" pitchFamily="2" charset="2"/>
+              <a:buChar char="v"/>
+            </a:pPr>
+            <a:r>
+              <a:rPr lang="en-US" sz="1260" dirty="0"/>
+              <a:t>Shopping Cart (UX Issues)</a:t>
+            </a:r>
+          </a:p>
+          <a:p>
+            <a:pPr marL="257174" indent="-257174">
+              <a:lnSpc>
+                <a:spcPct val="200000"/>
+              </a:lnSpc>
+              <a:buFont typeface="Wingdings" panose="05000000000000000000" pitchFamily="2" charset="2"/>
+              <a:buChar char="v"/>
+            </a:pPr>
+            <a:r>
+              <a:rPr lang="en-US" sz="1260" dirty="0"/>
+              <a:t>Create Order (UX Issues)</a:t>
+            </a:r>
+          </a:p>
+          <a:p>
+            <a:pPr marL="257174" indent="-257174">
+              <a:lnSpc>
+                <a:spcPct val="200000"/>
+              </a:lnSpc>
+              <a:buFont typeface="Wingdings" panose="05000000000000000000" pitchFamily="2" charset="2"/>
+              <a:buChar char="v"/>
+            </a:pPr>
+            <a:r>
+              <a:rPr lang="en-US" sz="1260" dirty="0"/>
+              <a:t>Purchase </a:t>
+            </a:r>
+            <a:r>
+              <a:rPr lang="en-US" sz="1260" dirty="0"/>
+              <a:t>- Card </a:t>
+            </a:r>
+            <a:r>
+              <a:rPr lang="en-US" sz="1260" dirty="0"/>
+              <a:t>etc. </a:t>
+            </a:r>
+            <a:r>
+              <a:rPr lang="en-US" sz="1260" dirty="0"/>
+              <a:t>(Issues</a:t>
+            </a:r>
+            <a:r>
+              <a:rPr lang="en-US" sz="1260" dirty="0"/>
+              <a:t>)</a:t>
+            </a:r>
+          </a:p>
+        </p:txBody>
+      </p:sp>
+      <p:sp>
+        <p:nvSpPr>
           <p:cNvPr id="4" name="Rectangle 3"/>
           <p:cNvSpPr/>
           <p:nvPr/>
         </p:nvSpPr>
         <p:spPr>
           <a:xfrm>
-            <a:off x="552734" y="675564"/>
-            <a:ext cx="1310185" cy="805218"/>
+            <a:off x="6956711" y="3119655"/>
+            <a:ext cx="2209708" cy="2406148"/>
           </a:xfrm>
           <a:prstGeom prst="rect">
             <a:avLst/>
           </a:prstGeom>
           <a:solidFill>
-            <a:schemeClr val="bg1"/>
+            <a:schemeClr val="accent6">
+              <a:lumMod val="60000"/>
+              <a:lumOff val="40000"/>
+              <a:alpha val="16000"/>
+            </a:schemeClr>
           </a:solidFill>
+          <a:ln>
+            <a:solidFill>
+              <a:schemeClr val="accent6">
+                <a:lumMod val="75000"/>
+              </a:schemeClr>
+            </a:solidFill>
+          </a:ln>
         </p:spPr>
         <p:style>
           <a:lnRef idx="2">
@@ -3004,37 +3415,47 @@
           </a:fontRef>
         </p:style>
         <p:txBody>
-          <a:bodyPr rtlCol="0" anchor="ctr"/>
-          <a:lstStyle/>
-          <a:p>
-            <a:r>
-              <a:rPr lang="en-US" sz="1100" dirty="0" smtClean="0">
-                <a:solidFill>
-                  <a:schemeClr val="tx1"/>
-                </a:solidFill>
-              </a:rPr>
-              <a:t>Questionnaire + answers {demographic, lifestyle, issues, etc.}</a:t>
-            </a:r>
-          </a:p>
-        </p:txBody>
-      </p:sp>
-      <p:sp>
-        <p:nvSpPr>
-          <p:cNvPr id="5" name="Rectangle 4"/>
+          <a:bodyPr rot="0" spcFirstLastPara="0" vertOverflow="overflow" horzOverflow="overflow" vert="horz" wrap="square" lIns="82302" tIns="41151" rIns="82302" bIns="41151" numCol="1" spcCol="0" rtlCol="0" fromWordArt="0" anchor="ctr" anchorCtr="0" forceAA="0" compatLnSpc="1">
+            <a:prstTxWarp prst="textNoShape">
+              <a:avLst/>
+            </a:prstTxWarp>
+            <a:noAutofit/>
+          </a:bodyPr>
+          <a:lstStyle/>
+          <a:p>
+            <a:pPr algn="ctr"/>
+            <a:endParaRPr lang="en-AU" sz="1260"/>
+          </a:p>
+        </p:txBody>
+      </p:sp>
+      <p:sp>
+        <p:nvSpPr>
+          <p:cNvPr id="10" name="Rectangle 9"/>
           <p:cNvSpPr/>
           <p:nvPr/>
         </p:nvSpPr>
         <p:spPr>
           <a:xfrm>
-            <a:off x="552733" y="1817426"/>
-            <a:ext cx="1310185" cy="857535"/>
+            <a:off x="5305486" y="1659581"/>
+            <a:ext cx="1991736" cy="522297"/>
           </a:xfrm>
           <a:prstGeom prst="rect">
             <a:avLst/>
           </a:prstGeom>
           <a:solidFill>
-            <a:schemeClr val="bg1"/>
+            <a:schemeClr val="accent6">
+              <a:lumMod val="60000"/>
+              <a:lumOff val="40000"/>
+              <a:alpha val="16000"/>
+            </a:schemeClr>
           </a:solidFill>
+          <a:ln>
+            <a:solidFill>
+              <a:schemeClr val="accent6">
+                <a:lumMod val="75000"/>
+              </a:schemeClr>
+            </a:solidFill>
+          </a:ln>
         </p:spPr>
         <p:style>
           <a:lnRef idx="2">
@@ -3053,39 +3474,182 @@
           </a:fontRef>
         </p:style>
         <p:txBody>
-          <a:bodyPr rtlCol="0" anchor="ctr"/>
-          <a:lstStyle/>
-          <a:p>
-            <a:r>
-              <a:rPr lang="en-US" sz="1100" dirty="0" smtClean="0">
-                <a:solidFill>
-                  <a:schemeClr val="tx1"/>
-                </a:solidFill>
-              </a:rPr>
-              <a:t>Image {}</a:t>
-            </a:r>
-            <a:endParaRPr lang="en-AU" sz="1100" dirty="0">
-              <a:solidFill>
-                <a:schemeClr val="tx1"/>
-              </a:solidFill>
-            </a:endParaRPr>
-          </a:p>
-        </p:txBody>
-      </p:sp>
-      <p:sp>
-        <p:nvSpPr>
-          <p:cNvPr id="6" name="Right Arrow 5"/>
+          <a:bodyPr rot="0" spcFirstLastPara="0" vertOverflow="overflow" horzOverflow="overflow" vert="horz" wrap="square" lIns="82302" tIns="41151" rIns="82302" bIns="41151" numCol="1" spcCol="0" rtlCol="0" fromWordArt="0" anchor="ctr" anchorCtr="0" forceAA="0" compatLnSpc="1">
+            <a:prstTxWarp prst="textNoShape">
+              <a:avLst/>
+            </a:prstTxWarp>
+            <a:noAutofit/>
+          </a:bodyPr>
+          <a:lstStyle/>
+          <a:p>
+            <a:pPr algn="ctr"/>
+            <a:endParaRPr lang="en-AU" sz="1260"/>
+          </a:p>
+        </p:txBody>
+      </p:sp>
+      <p:sp>
+        <p:nvSpPr>
+          <p:cNvPr id="34" name="TextBox 33"/>
+          <p:cNvSpPr txBox="1"/>
+          <p:nvPr/>
+        </p:nvSpPr>
+        <p:spPr>
+          <a:xfrm>
+            <a:off x="9521672" y="3213394"/>
+            <a:ext cx="1669240" cy="286232"/>
+          </a:xfrm>
+          <a:prstGeom prst="rect">
+            <a:avLst/>
+          </a:prstGeom>
+          <a:noFill/>
+        </p:spPr>
+        <p:txBody>
+          <a:bodyPr wrap="none" rtlCol="0">
+            <a:spAutoFit/>
+          </a:bodyPr>
+          <a:lstStyle/>
+          <a:p>
+            <a:r>
+              <a:rPr lang="en-US" sz="1260" b="1" dirty="0"/>
+              <a:t>API</a:t>
+            </a:r>
+            <a:r>
+              <a:rPr lang="en-US" sz="1260" b="1" dirty="0"/>
+              <a:t>/ Backend Services</a:t>
+            </a:r>
+            <a:endParaRPr lang="en-AU" sz="1260" b="1" dirty="0"/>
+          </a:p>
+        </p:txBody>
+      </p:sp>
+      <p:sp>
+        <p:nvSpPr>
+          <p:cNvPr id="38" name="TextBox 37"/>
+          <p:cNvSpPr txBox="1"/>
+          <p:nvPr/>
+        </p:nvSpPr>
+        <p:spPr>
+          <a:xfrm>
+            <a:off x="9576656" y="3448263"/>
+            <a:ext cx="1609399" cy="2031325"/>
+          </a:xfrm>
+          <a:prstGeom prst="rect">
+            <a:avLst/>
+          </a:prstGeom>
+          <a:noFill/>
+        </p:spPr>
+        <p:txBody>
+          <a:bodyPr wrap="square" rtlCol="0">
+            <a:spAutoFit/>
+          </a:bodyPr>
+          <a:lstStyle/>
+          <a:p>
+            <a:pPr marL="257174" indent="-257174">
+              <a:lnSpc>
+                <a:spcPct val="200000"/>
+              </a:lnSpc>
+              <a:buFont typeface="Wingdings" panose="05000000000000000000" pitchFamily="2" charset="2"/>
+              <a:buChar char="v"/>
+            </a:pPr>
+            <a:r>
+              <a:rPr lang="en-US" sz="1260" dirty="0" err="1"/>
+              <a:t>Auth</a:t>
+            </a:r>
+            <a:r>
+              <a:rPr lang="en-US" sz="1260" dirty="0"/>
+              <a:t> </a:t>
+            </a:r>
+            <a:r>
+              <a:rPr lang="en-US" sz="1260" dirty="0"/>
+              <a:t>Service</a:t>
+            </a:r>
+          </a:p>
+          <a:p>
+            <a:pPr marL="257174" indent="-257174">
+              <a:lnSpc>
+                <a:spcPct val="200000"/>
+              </a:lnSpc>
+              <a:buFont typeface="Wingdings" panose="05000000000000000000" pitchFamily="2" charset="2"/>
+              <a:buChar char="v"/>
+            </a:pPr>
+            <a:r>
+              <a:rPr lang="en-US" sz="1260" dirty="0"/>
+              <a:t>User Profile API</a:t>
+            </a:r>
+          </a:p>
+          <a:p>
+            <a:pPr marL="257174" indent="-257174">
+              <a:lnSpc>
+                <a:spcPct val="200000"/>
+              </a:lnSpc>
+              <a:buFont typeface="Wingdings" panose="05000000000000000000" pitchFamily="2" charset="2"/>
+              <a:buChar char="v"/>
+            </a:pPr>
+            <a:r>
+              <a:rPr lang="en-US" sz="1260" dirty="0"/>
+              <a:t>Shopping </a:t>
+            </a:r>
+            <a:r>
+              <a:rPr lang="en-US" sz="1260" dirty="0"/>
+              <a:t>Cart</a:t>
+            </a:r>
+            <a:endParaRPr lang="en-US" sz="1260" dirty="0"/>
+          </a:p>
+          <a:p>
+            <a:pPr marL="257174" indent="-257174">
+              <a:lnSpc>
+                <a:spcPct val="200000"/>
+              </a:lnSpc>
+              <a:buFont typeface="Wingdings" panose="05000000000000000000" pitchFamily="2" charset="2"/>
+              <a:buChar char="v"/>
+            </a:pPr>
+            <a:r>
+              <a:rPr lang="en-US" sz="1260" dirty="0"/>
+              <a:t>Order Service</a:t>
+            </a:r>
+          </a:p>
+          <a:p>
+            <a:pPr marL="257174" indent="-257174">
+              <a:lnSpc>
+                <a:spcPct val="200000"/>
+              </a:lnSpc>
+              <a:buFont typeface="Wingdings" panose="05000000000000000000" pitchFamily="2" charset="2"/>
+              <a:buChar char="v"/>
+            </a:pPr>
+            <a:r>
+              <a:rPr lang="en-US" sz="1260" dirty="0"/>
+              <a:t>Purchase API</a:t>
+            </a:r>
+          </a:p>
+        </p:txBody>
+      </p:sp>
+      <p:sp>
+        <p:nvSpPr>
+          <p:cNvPr id="32" name="Flowchart: Magnetic Disk 31"/>
           <p:cNvSpPr/>
           <p:nvPr/>
         </p:nvSpPr>
         <p:spPr>
           <a:xfrm>
-            <a:off x="1862919" y="928047"/>
-            <a:ext cx="532262" cy="293427"/>
-          </a:xfrm>
-          <a:prstGeom prst="rightArrow">
-            <a:avLst/>
-          </a:prstGeom>
+            <a:off x="9472897" y="3032701"/>
+            <a:ext cx="1753574" cy="2471311"/>
+          </a:xfrm>
+          <a:prstGeom prst="flowChartMagneticDisk">
+            <a:avLst/>
+          </a:prstGeom>
+          <a:solidFill>
+            <a:schemeClr val="accent6">
+              <a:lumMod val="60000"/>
+              <a:lumOff val="40000"/>
+              <a:alpha val="16000"/>
+            </a:schemeClr>
+          </a:solidFill>
+          <a:ln>
+            <a:solidFill>
+              <a:schemeClr val="accent6">
+                <a:lumMod val="75000"/>
+              </a:schemeClr>
+            </a:solidFill>
+          </a:ln>
         </p:spPr>
         <p:style>
           <a:lnRef idx="2">
@@ -3104,28 +3668,36 @@
           </a:fontRef>
         </p:style>
         <p:txBody>
-          <a:bodyPr rtlCol="0" anchor="ctr"/>
+          <a:bodyPr rot="0" spcFirstLastPara="0" vertOverflow="overflow" horzOverflow="overflow" vert="horz" wrap="square" lIns="82302" tIns="41151" rIns="82302" bIns="41151" numCol="1" spcCol="0" rtlCol="0" fromWordArt="0" anchor="ctr" anchorCtr="0" forceAA="0" compatLnSpc="1">
+            <a:prstTxWarp prst="textNoShape">
+              <a:avLst/>
+            </a:prstTxWarp>
+            <a:noAutofit/>
+          </a:bodyPr>
           <a:lstStyle/>
           <a:p>
             <a:pPr algn="ctr"/>
-            <a:endParaRPr lang="en-AU"/>
-          </a:p>
-        </p:txBody>
-      </p:sp>
-      <p:sp>
-        <p:nvSpPr>
-          <p:cNvPr id="7" name="Right Arrow 6"/>
+            <a:endParaRPr lang="en-AU" sz="1260"/>
+          </a:p>
+        </p:txBody>
+      </p:sp>
+      <p:sp>
+        <p:nvSpPr>
+          <p:cNvPr id="36" name="Left-Right Arrow 35"/>
           <p:cNvSpPr/>
           <p:nvPr/>
         </p:nvSpPr>
         <p:spPr>
           <a:xfrm>
-            <a:off x="1862918" y="2099479"/>
-            <a:ext cx="532262" cy="293427"/>
-          </a:xfrm>
-          <a:prstGeom prst="rightArrow">
-            <a:avLst/>
-          </a:prstGeom>
+            <a:off x="9016145" y="4146054"/>
+            <a:ext cx="603944" cy="396045"/>
+          </a:xfrm>
+          <a:prstGeom prst="leftRightArrow">
+            <a:avLst/>
+          </a:prstGeom>
+          <a:ln>
+            <a:noFill/>
+          </a:ln>
         </p:spPr>
         <p:style>
           <a:lnRef idx="2">
@@ -3144,28 +3716,176 @@
           </a:fontRef>
         </p:style>
         <p:txBody>
-          <a:bodyPr rtlCol="0" anchor="ctr"/>
+          <a:bodyPr rot="0" spcFirstLastPara="0" vertOverflow="overflow" horzOverflow="overflow" vert="horz" wrap="square" lIns="82302" tIns="41151" rIns="82302" bIns="41151" numCol="1" spcCol="0" rtlCol="0" fromWordArt="0" anchor="ctr" anchorCtr="0" forceAA="0" compatLnSpc="1">
+            <a:prstTxWarp prst="textNoShape">
+              <a:avLst/>
+            </a:prstTxWarp>
+            <a:noAutofit/>
+          </a:bodyPr>
           <a:lstStyle/>
           <a:p>
             <a:pPr algn="ctr"/>
-            <a:endParaRPr lang="en-AU"/>
-          </a:p>
-        </p:txBody>
-      </p:sp>
-      <p:sp>
-        <p:nvSpPr>
-          <p:cNvPr id="8" name="Oval 7"/>
+            <a:endParaRPr lang="en-AU" sz="1990"/>
+          </a:p>
+        </p:txBody>
+      </p:sp>
+      <p:sp>
+        <p:nvSpPr>
+          <p:cNvPr id="48" name="TextBox 47"/>
+          <p:cNvSpPr txBox="1"/>
+          <p:nvPr/>
+        </p:nvSpPr>
+        <p:spPr>
+          <a:xfrm>
+            <a:off x="4216526" y="3232994"/>
+            <a:ext cx="1817613" cy="286232"/>
+          </a:xfrm>
+          <a:prstGeom prst="rect">
+            <a:avLst/>
+          </a:prstGeom>
+          <a:noFill/>
+        </p:spPr>
+        <p:txBody>
+          <a:bodyPr wrap="none" rtlCol="0">
+            <a:spAutoFit/>
+          </a:bodyPr>
+          <a:lstStyle/>
+          <a:p>
+            <a:r>
+              <a:rPr lang="en-US" sz="1260" b="1" dirty="0"/>
+              <a:t>Frontend Enhancements</a:t>
+            </a:r>
+            <a:endParaRPr lang="en-AU" sz="1260" b="1" dirty="0"/>
+          </a:p>
+        </p:txBody>
+      </p:sp>
+      <p:sp>
+        <p:nvSpPr>
+          <p:cNvPr id="49" name="TextBox 48"/>
+          <p:cNvSpPr txBox="1"/>
+          <p:nvPr/>
+        </p:nvSpPr>
+        <p:spPr>
+          <a:xfrm>
+            <a:off x="4221633" y="3497336"/>
+            <a:ext cx="2242538" cy="2806922"/>
+          </a:xfrm>
+          <a:prstGeom prst="rect">
+            <a:avLst/>
+          </a:prstGeom>
+          <a:noFill/>
+        </p:spPr>
+        <p:txBody>
+          <a:bodyPr wrap="square" rtlCol="0">
+            <a:spAutoFit/>
+          </a:bodyPr>
+          <a:lstStyle/>
+          <a:p>
+            <a:pPr marL="257174" indent="-257174">
+              <a:lnSpc>
+                <a:spcPct val="200000"/>
+              </a:lnSpc>
+              <a:buFont typeface="Wingdings" panose="05000000000000000000" pitchFamily="2" charset="2"/>
+              <a:buChar char="v"/>
+            </a:pPr>
+            <a:r>
+              <a:rPr lang="en-US" sz="1260" dirty="0"/>
+              <a:t>Questionnaire</a:t>
+            </a:r>
+          </a:p>
+          <a:p>
+            <a:pPr marL="257174" indent="-257174">
+              <a:lnSpc>
+                <a:spcPct val="200000"/>
+              </a:lnSpc>
+              <a:buFont typeface="Wingdings" panose="05000000000000000000" pitchFamily="2" charset="2"/>
+              <a:buChar char="v"/>
+            </a:pPr>
+            <a:r>
+              <a:rPr lang="en-US" sz="1260" dirty="0"/>
+              <a:t>User Image Analysis</a:t>
+            </a:r>
+          </a:p>
+          <a:p>
+            <a:pPr marL="257174" indent="-257174">
+              <a:lnSpc>
+                <a:spcPct val="200000"/>
+              </a:lnSpc>
+              <a:buFont typeface="Wingdings" panose="05000000000000000000" pitchFamily="2" charset="2"/>
+              <a:buChar char="v"/>
+            </a:pPr>
+            <a:r>
+              <a:rPr lang="en-US" sz="1260" dirty="0"/>
+              <a:t>Recommendation</a:t>
+            </a:r>
+          </a:p>
+          <a:p>
+            <a:pPr marL="257174" indent="-257174">
+              <a:lnSpc>
+                <a:spcPct val="200000"/>
+              </a:lnSpc>
+              <a:buFont typeface="Wingdings" panose="05000000000000000000" pitchFamily="2" charset="2"/>
+              <a:buChar char="v"/>
+            </a:pPr>
+            <a:r>
+              <a:rPr lang="en-US" sz="1260" dirty="0"/>
+              <a:t>Profile Detail Out (?)</a:t>
+            </a:r>
+          </a:p>
+          <a:p>
+            <a:pPr marL="257174" indent="-257174">
+              <a:lnSpc>
+                <a:spcPct val="200000"/>
+              </a:lnSpc>
+              <a:buFont typeface="Wingdings" panose="05000000000000000000" pitchFamily="2" charset="2"/>
+              <a:buChar char="v"/>
+            </a:pPr>
+            <a:r>
+              <a:rPr lang="en-US" sz="1260" dirty="0"/>
+              <a:t>Support &amp; Order Returns (?)</a:t>
+            </a:r>
+          </a:p>
+          <a:p>
+            <a:pPr marL="257174" indent="-257174">
+              <a:lnSpc>
+                <a:spcPct val="200000"/>
+              </a:lnSpc>
+              <a:buFont typeface="Wingdings" panose="05000000000000000000" pitchFamily="2" charset="2"/>
+              <a:buChar char="v"/>
+            </a:pPr>
+            <a:r>
+              <a:rPr lang="en-US" sz="1260" dirty="0"/>
+              <a:t>Fix Existing Issues (?)</a:t>
+            </a:r>
+          </a:p>
+        </p:txBody>
+      </p:sp>
+      <p:sp>
+        <p:nvSpPr>
+          <p:cNvPr id="50" name="Rectangle 49"/>
           <p:cNvSpPr/>
           <p:nvPr/>
         </p:nvSpPr>
         <p:spPr>
           <a:xfrm>
-            <a:off x="2395180" y="675564"/>
-            <a:ext cx="880281" cy="766548"/>
-          </a:xfrm>
-          <a:prstGeom prst="ellipse">
-            <a:avLst/>
-          </a:prstGeom>
+            <a:off x="4208882" y="3164582"/>
+            <a:ext cx="2209708" cy="2730902"/>
+          </a:xfrm>
+          <a:prstGeom prst="rect">
+            <a:avLst/>
+          </a:prstGeom>
+          <a:solidFill>
+            <a:srgbClr val="FFC000">
+              <a:alpha val="16000"/>
+            </a:srgbClr>
+          </a:solidFill>
+          <a:ln>
+            <a:solidFill>
+              <a:schemeClr val="accent4">
+                <a:lumMod val="75000"/>
+              </a:schemeClr>
+            </a:solidFill>
+          </a:ln>
         </p:spPr>
         <p:style>
           <a:lnRef idx="2">
@@ -3184,32 +3904,172 @@
           </a:fontRef>
         </p:style>
         <p:txBody>
-          <a:bodyPr rtlCol="0" anchor="ctr"/>
+          <a:bodyPr rot="0" spcFirstLastPara="0" vertOverflow="overflow" horzOverflow="overflow" vert="horz" wrap="square" lIns="82302" tIns="41151" rIns="82302" bIns="41151" numCol="1" spcCol="0" rtlCol="0" fromWordArt="0" anchor="ctr" anchorCtr="0" forceAA="0" compatLnSpc="1">
+            <a:prstTxWarp prst="textNoShape">
+              <a:avLst/>
+            </a:prstTxWarp>
+            <a:noAutofit/>
+          </a:bodyPr>
           <a:lstStyle/>
           <a:p>
             <a:pPr algn="ctr"/>
-            <a:r>
-              <a:rPr lang="en-US" dirty="0" smtClean="0"/>
-              <a:t>AI 1</a:t>
-            </a:r>
-            <a:endParaRPr lang="en-AU" dirty="0"/>
-          </a:p>
-        </p:txBody>
-      </p:sp>
-      <p:sp>
-        <p:nvSpPr>
-          <p:cNvPr id="9" name="Oval 8"/>
+            <a:endParaRPr lang="en-AU" sz="1260"/>
+          </a:p>
+        </p:txBody>
+      </p:sp>
+      <p:sp>
+        <p:nvSpPr>
+          <p:cNvPr id="51" name="TextBox 50"/>
+          <p:cNvSpPr txBox="1"/>
+          <p:nvPr/>
+        </p:nvSpPr>
+        <p:spPr>
+          <a:xfrm>
+            <a:off x="1372007" y="3232994"/>
+            <a:ext cx="2169825" cy="286232"/>
+          </a:xfrm>
+          <a:prstGeom prst="rect">
+            <a:avLst/>
+          </a:prstGeom>
+          <a:noFill/>
+        </p:spPr>
+        <p:txBody>
+          <a:bodyPr wrap="none" rtlCol="0">
+            <a:spAutoFit/>
+          </a:bodyPr>
+          <a:lstStyle/>
+          <a:p>
+            <a:r>
+              <a:rPr lang="en-US" sz="1260" b="1" dirty="0"/>
+              <a:t>New/ Enhanced API/ Services</a:t>
+            </a:r>
+            <a:endParaRPr lang="en-AU" sz="1260" b="1" dirty="0"/>
+          </a:p>
+        </p:txBody>
+      </p:sp>
+      <p:sp>
+        <p:nvSpPr>
+          <p:cNvPr id="52" name="TextBox 51"/>
+          <p:cNvSpPr txBox="1"/>
+          <p:nvPr/>
+        </p:nvSpPr>
+        <p:spPr>
+          <a:xfrm>
+            <a:off x="1034180" y="3535217"/>
+            <a:ext cx="2863123" cy="2419124"/>
+          </a:xfrm>
+          <a:prstGeom prst="rect">
+            <a:avLst/>
+          </a:prstGeom>
+          <a:noFill/>
+        </p:spPr>
+        <p:txBody>
+          <a:bodyPr wrap="square" rtlCol="0">
+            <a:spAutoFit/>
+          </a:bodyPr>
+          <a:lstStyle/>
+          <a:p>
+            <a:pPr marL="257174" indent="-257174">
+              <a:lnSpc>
+                <a:spcPct val="200000"/>
+              </a:lnSpc>
+              <a:buFont typeface="Wingdings" panose="05000000000000000000" pitchFamily="2" charset="2"/>
+              <a:buChar char="v"/>
+            </a:pPr>
+            <a:r>
+              <a:rPr lang="en-US" sz="1260" dirty="0"/>
+              <a:t>AI Image Analysis Service</a:t>
+            </a:r>
+          </a:p>
+          <a:p>
+            <a:pPr marL="257174" indent="-257174">
+              <a:lnSpc>
+                <a:spcPct val="200000"/>
+              </a:lnSpc>
+              <a:buFont typeface="Wingdings" panose="05000000000000000000" pitchFamily="2" charset="2"/>
+              <a:buChar char="v"/>
+            </a:pPr>
+            <a:r>
+              <a:rPr lang="en-US" sz="1260" dirty="0"/>
+              <a:t>Recommendation Service</a:t>
+            </a:r>
+          </a:p>
+          <a:p>
+            <a:r>
+              <a:rPr lang="en-US" sz="1260" dirty="0"/>
+              <a:t>        Image, Questionnaire &amp; Profile based</a:t>
+            </a:r>
+            <a:endParaRPr lang="en-US" sz="1260" dirty="0"/>
+          </a:p>
+          <a:p>
+            <a:pPr marL="257174" indent="-257174">
+              <a:lnSpc>
+                <a:spcPct val="200000"/>
+              </a:lnSpc>
+              <a:buFont typeface="Wingdings" panose="05000000000000000000" pitchFamily="2" charset="2"/>
+              <a:buChar char="v"/>
+            </a:pPr>
+            <a:r>
+              <a:rPr lang="en-US" sz="1260" dirty="0"/>
+              <a:t>AI Profile Analysis Service (?)</a:t>
+            </a:r>
+          </a:p>
+          <a:p>
+            <a:pPr marL="257174" indent="-257174">
+              <a:lnSpc>
+                <a:spcPct val="200000"/>
+              </a:lnSpc>
+              <a:buFont typeface="Wingdings" panose="05000000000000000000" pitchFamily="2" charset="2"/>
+              <a:buChar char="v"/>
+            </a:pPr>
+            <a:r>
+              <a:rPr lang="en-US" sz="1260" dirty="0"/>
+              <a:t>Profile API (?)</a:t>
+            </a:r>
+            <a:endParaRPr lang="en-US" sz="1260" dirty="0"/>
+          </a:p>
+          <a:p>
+            <a:pPr marL="257174" indent="-257174">
+              <a:lnSpc>
+                <a:spcPct val="200000"/>
+              </a:lnSpc>
+              <a:buFont typeface="Wingdings" panose="05000000000000000000" pitchFamily="2" charset="2"/>
+              <a:buChar char="v"/>
+            </a:pPr>
+            <a:r>
+              <a:rPr lang="en-US" sz="1260" dirty="0"/>
+              <a:t>Support &amp; Returns API (?)</a:t>
+            </a:r>
+            <a:endParaRPr lang="en-US" sz="1260" dirty="0"/>
+          </a:p>
+        </p:txBody>
+      </p:sp>
+      <p:sp>
+        <p:nvSpPr>
+          <p:cNvPr id="53" name="Flowchart: Magnetic Disk 52"/>
           <p:cNvSpPr/>
           <p:nvPr/>
         </p:nvSpPr>
         <p:spPr>
           <a:xfrm>
-            <a:off x="2395179" y="1862918"/>
-            <a:ext cx="880281" cy="766548"/>
-          </a:xfrm>
-          <a:prstGeom prst="ellipse">
-            <a:avLst/>
-          </a:prstGeom>
+            <a:off x="941795" y="2839829"/>
+            <a:ext cx="2955508" cy="3055656"/>
+          </a:xfrm>
+          <a:prstGeom prst="flowChartMagneticDisk">
+            <a:avLst/>
+          </a:prstGeom>
+          <a:solidFill>
+            <a:srgbClr val="FFC000">
+              <a:alpha val="16000"/>
+            </a:srgbClr>
+          </a:solidFill>
+          <a:ln>
+            <a:solidFill>
+              <a:schemeClr val="accent4">
+                <a:lumMod val="75000"/>
+              </a:schemeClr>
+            </a:solidFill>
+          </a:ln>
         </p:spPr>
         <p:style>
           <a:lnRef idx="2">
@@ -3228,32 +4088,173 @@
           </a:fontRef>
         </p:style>
         <p:txBody>
-          <a:bodyPr rtlCol="0" anchor="ctr"/>
+          <a:bodyPr rot="0" spcFirstLastPara="0" vertOverflow="overflow" horzOverflow="overflow" vert="horz" wrap="square" lIns="82302" tIns="41151" rIns="82302" bIns="41151" numCol="1" spcCol="0" rtlCol="0" fromWordArt="0" anchor="ctr" anchorCtr="0" forceAA="0" compatLnSpc="1">
+            <a:prstTxWarp prst="textNoShape">
+              <a:avLst/>
+            </a:prstTxWarp>
+            <a:noAutofit/>
+          </a:bodyPr>
           <a:lstStyle/>
           <a:p>
             <a:pPr algn="ctr"/>
-            <a:r>
-              <a:rPr lang="en-US" dirty="0" smtClean="0"/>
-              <a:t>AI 2</a:t>
-            </a:r>
-            <a:endParaRPr lang="en-AU" dirty="0"/>
-          </a:p>
-        </p:txBody>
-      </p:sp>
-      <p:sp>
-        <p:nvSpPr>
-          <p:cNvPr id="11" name="Right Arrow 10"/>
+            <a:endParaRPr lang="en-AU" sz="1260"/>
+          </a:p>
+        </p:txBody>
+      </p:sp>
+      <p:cxnSp>
+        <p:nvCxnSpPr>
+          <p:cNvPr id="57" name="Straight Arrow Connector 56"/>
+          <p:cNvCxnSpPr/>
+          <p:nvPr/>
+        </p:nvCxnSpPr>
+        <p:spPr>
+          <a:xfrm>
+            <a:off x="6237690" y="3910706"/>
+            <a:ext cx="971204" cy="9300"/>
+          </a:xfrm>
+          <a:prstGeom prst="straightConnector1">
+            <a:avLst/>
+          </a:prstGeom>
+          <a:ln w="47625">
+            <a:tailEnd type="triangle"/>
+          </a:ln>
+        </p:spPr>
+        <p:style>
+          <a:lnRef idx="1">
+            <a:schemeClr val="accent1"/>
+          </a:lnRef>
+          <a:fillRef idx="0">
+            <a:schemeClr val="accent1"/>
+          </a:fillRef>
+          <a:effectRef idx="0">
+            <a:schemeClr val="accent1"/>
+          </a:effectRef>
+          <a:fontRef idx="minor">
+            <a:schemeClr val="tx1"/>
+          </a:fontRef>
+        </p:style>
+      </p:cxnSp>
+      <p:cxnSp>
+        <p:nvCxnSpPr>
+          <p:cNvPr id="61" name="Straight Arrow Connector 60"/>
+          <p:cNvCxnSpPr/>
+          <p:nvPr/>
+        </p:nvCxnSpPr>
+        <p:spPr>
+          <a:xfrm>
+            <a:off x="6237690" y="4302581"/>
+            <a:ext cx="971204" cy="9300"/>
+          </a:xfrm>
+          <a:prstGeom prst="straightConnector1">
+            <a:avLst/>
+          </a:prstGeom>
+          <a:ln w="47625">
+            <a:tailEnd type="triangle"/>
+          </a:ln>
+        </p:spPr>
+        <p:style>
+          <a:lnRef idx="1">
+            <a:schemeClr val="accent1"/>
+          </a:lnRef>
+          <a:fillRef idx="0">
+            <a:schemeClr val="accent1"/>
+          </a:fillRef>
+          <a:effectRef idx="0">
+            <a:schemeClr val="accent1"/>
+          </a:effectRef>
+          <a:fontRef idx="minor">
+            <a:schemeClr val="tx1"/>
+          </a:fontRef>
+        </p:style>
+      </p:cxnSp>
+      <p:cxnSp>
+        <p:nvCxnSpPr>
+          <p:cNvPr id="62" name="Straight Arrow Connector 61"/>
+          <p:cNvCxnSpPr/>
+          <p:nvPr/>
+        </p:nvCxnSpPr>
+        <p:spPr>
+          <a:xfrm>
+            <a:off x="6224839" y="5093674"/>
+            <a:ext cx="971204" cy="9300"/>
+          </a:xfrm>
+          <a:prstGeom prst="straightConnector1">
+            <a:avLst/>
+          </a:prstGeom>
+          <a:ln w="47625">
+            <a:tailEnd type="triangle"/>
+          </a:ln>
+        </p:spPr>
+        <p:style>
+          <a:lnRef idx="1">
+            <a:schemeClr val="accent1"/>
+          </a:lnRef>
+          <a:fillRef idx="0">
+            <a:schemeClr val="accent1"/>
+          </a:fillRef>
+          <a:effectRef idx="0">
+            <a:schemeClr val="accent1"/>
+          </a:effectRef>
+          <a:fontRef idx="minor">
+            <a:schemeClr val="tx1"/>
+          </a:fontRef>
+        </p:style>
+      </p:cxnSp>
+      <p:sp>
+        <p:nvSpPr>
+          <p:cNvPr id="63" name="TextBox 62"/>
+          <p:cNvSpPr txBox="1"/>
+          <p:nvPr/>
+        </p:nvSpPr>
+        <p:spPr>
+          <a:xfrm>
+            <a:off x="6492080" y="4530032"/>
+            <a:ext cx="434734" cy="514436"/>
+          </a:xfrm>
+          <a:prstGeom prst="rect">
+            <a:avLst/>
+          </a:prstGeom>
+          <a:noFill/>
+        </p:spPr>
+        <p:txBody>
+          <a:bodyPr wrap="none" rtlCol="0">
+            <a:spAutoFit/>
+          </a:bodyPr>
+          <a:lstStyle/>
+          <a:p>
+            <a:r>
+              <a:rPr lang="en-US" sz="2743" b="1" dirty="0">
+                <a:solidFill>
+                  <a:srgbClr val="0070C0"/>
+                </a:solidFill>
+              </a:rPr>
+              <a:t>…</a:t>
+            </a:r>
+            <a:endParaRPr lang="en-AU" sz="1372" b="1" dirty="0">
+              <a:solidFill>
+                <a:srgbClr val="0070C0"/>
+              </a:solidFill>
+            </a:endParaRPr>
+          </a:p>
+        </p:txBody>
+      </p:sp>
+      <p:sp>
+        <p:nvSpPr>
+          <p:cNvPr id="64" name="Left-Right Arrow 63"/>
           <p:cNvSpPr/>
           <p:nvPr/>
         </p:nvSpPr>
         <p:spPr>
           <a:xfrm>
-            <a:off x="3275461" y="928047"/>
-            <a:ext cx="532262" cy="293427"/>
-          </a:xfrm>
-          <a:prstGeom prst="rightArrow">
-            <a:avLst/>
-          </a:prstGeom>
+            <a:off x="3751121" y="4542099"/>
+            <a:ext cx="603944" cy="396045"/>
+          </a:xfrm>
+          <a:prstGeom prst="leftRightArrow">
+            <a:avLst/>
+          </a:prstGeom>
+          <a:ln>
+            <a:noFill/>
+          </a:ln>
         </p:spPr>
         <p:style>
           <a:lnRef idx="2">
@@ -3272,28 +4273,73 @@
           </a:fontRef>
         </p:style>
         <p:txBody>
-          <a:bodyPr rtlCol="0" anchor="ctr"/>
+          <a:bodyPr rot="0" spcFirstLastPara="0" vertOverflow="overflow" horzOverflow="overflow" vert="horz" wrap="square" lIns="82302" tIns="41151" rIns="82302" bIns="41151" numCol="1" spcCol="0" rtlCol="0" fromWordArt="0" anchor="ctr" anchorCtr="0" forceAA="0" compatLnSpc="1">
+            <a:prstTxWarp prst="textNoShape">
+              <a:avLst/>
+            </a:prstTxWarp>
+            <a:noAutofit/>
+          </a:bodyPr>
           <a:lstStyle/>
           <a:p>
             <a:pPr algn="ctr"/>
-            <a:endParaRPr lang="en-AU"/>
-          </a:p>
-        </p:txBody>
-      </p:sp>
-      <p:sp>
-        <p:nvSpPr>
-          <p:cNvPr id="12" name="Right Arrow 11"/>
+            <a:endParaRPr lang="en-AU" sz="1990"/>
+          </a:p>
+        </p:txBody>
+      </p:sp>
+    </p:spTree>
+    <p:extLst>
+      <p:ext uri="{BB962C8B-B14F-4D97-AF65-F5344CB8AC3E}">
+        <p14:creationId xmlns:p14="http://schemas.microsoft.com/office/powerpoint/2010/main" val="1067928977"/>
+      </p:ext>
+    </p:extLst>
+  </p:cSld>
+  <p:clrMapOvr>
+    <a:masterClrMapping/>
+  </p:clrMapOvr>
+  <p:timing>
+    <p:tnLst>
+      <p:par>
+        <p:cTn id="1" dur="indefinite" restart="never" nodeType="tmRoot"/>
+      </p:par>
+    </p:tnLst>
+  </p:timing>
+</p:sld>
+</file>
+
+<file path=ppt/slides/slide2.xml><?xml version="1.0" encoding="utf-8"?>
+<p:sld xmlns:a="http://schemas.openxmlformats.org/drawingml/2006/main" xmlns:r="http://schemas.openxmlformats.org/officeDocument/2006/relationships" xmlns:p="http://schemas.openxmlformats.org/presentationml/2006/main">
+  <p:cSld>
+    <p:spTree>
+      <p:nvGrpSpPr>
+        <p:cNvPr id="1" name=""/>
+        <p:cNvGrpSpPr/>
+        <p:nvPr/>
+      </p:nvGrpSpPr>
+      <p:grpSpPr>
+        <a:xfrm>
+          <a:off x="0" y="0"/>
+          <a:ext cx="0" cy="0"/>
+          <a:chOff x="0" y="0"/>
+          <a:chExt cx="0" cy="0"/>
+        </a:xfrm>
+      </p:grpSpPr>
+      <p:sp>
+        <p:nvSpPr>
+          <p:cNvPr id="4" name="Rectangle 3"/>
           <p:cNvSpPr/>
           <p:nvPr/>
         </p:nvSpPr>
         <p:spPr>
           <a:xfrm>
-            <a:off x="3275460" y="2099479"/>
-            <a:ext cx="532262" cy="293427"/>
-          </a:xfrm>
-          <a:prstGeom prst="rightArrow">
-            <a:avLst/>
-          </a:prstGeom>
+            <a:off x="552734" y="675564"/>
+            <a:ext cx="1310185" cy="805218"/>
+          </a:xfrm>
+          <a:prstGeom prst="rect">
+            <a:avLst/>
+          </a:prstGeom>
+          <a:solidFill>
+            <a:schemeClr val="bg1"/>
+          </a:solidFill>
         </p:spPr>
         <p:style>
           <a:lnRef idx="2">
@@ -3315,21 +4361,27 @@
           <a:bodyPr rtlCol="0" anchor="ctr"/>
           <a:lstStyle/>
           <a:p>
-            <a:pPr algn="ctr"/>
-            <a:endParaRPr lang="en-AU"/>
-          </a:p>
-        </p:txBody>
-      </p:sp>
-      <p:sp>
-        <p:nvSpPr>
-          <p:cNvPr id="14" name="Rectangle 13"/>
+            <a:r>
+              <a:rPr lang="en-US" sz="1100" dirty="0" smtClean="0">
+                <a:solidFill>
+                  <a:schemeClr val="tx1"/>
+                </a:solidFill>
+              </a:rPr>
+              <a:t>Questionnaire + answers {demographic, lifestyle, issues, etc.}</a:t>
+            </a:r>
+          </a:p>
+        </p:txBody>
+      </p:sp>
+      <p:sp>
+        <p:nvSpPr>
+          <p:cNvPr id="5" name="Rectangle 4"/>
           <p:cNvSpPr/>
           <p:nvPr/>
         </p:nvSpPr>
         <p:spPr>
           <a:xfrm>
-            <a:off x="3807722" y="675564"/>
-            <a:ext cx="1310185" cy="805218"/>
+            <a:off x="552733" y="1817426"/>
+            <a:ext cx="1310185" cy="857535"/>
           </a:xfrm>
           <a:prstGeom prst="rect">
             <a:avLst/>
@@ -3359,66 +4411,33 @@
           <a:lstStyle/>
           <a:p>
             <a:r>
-              <a:rPr lang="en-US" sz="1100" dirty="0" err="1" smtClean="0">
-                <a:solidFill>
-                  <a:schemeClr val="tx1"/>
-                </a:solidFill>
-              </a:rPr>
-              <a:t>skin_concerns</a:t>
-            </a:r>
-            <a:r>
               <a:rPr lang="en-US" sz="1100" dirty="0" smtClean="0">
                 <a:solidFill>
                   <a:schemeClr val="tx1"/>
                 </a:solidFill>
               </a:rPr>
-              <a:t> (SC00--, SC20--)</a:t>
-            </a:r>
-            <a:endParaRPr lang="en-US" sz="1100" dirty="0">
+              <a:t>Image {}</a:t>
+            </a:r>
+            <a:endParaRPr lang="en-AU" sz="1100" dirty="0">
               <a:solidFill>
                 <a:schemeClr val="tx1"/>
               </a:solidFill>
             </a:endParaRPr>
           </a:p>
-          <a:p>
-            <a:r>
-              <a:rPr lang="en-US" sz="1100" dirty="0">
-                <a:solidFill>
-                  <a:schemeClr val="tx1"/>
-                </a:solidFill>
-              </a:rPr>
-              <a:t>s</a:t>
-            </a:r>
-            <a:r>
-              <a:rPr lang="en-US" sz="1100" dirty="0" smtClean="0">
-                <a:solidFill>
-                  <a:schemeClr val="tx1"/>
-                </a:solidFill>
-              </a:rPr>
-              <a:t>kin type?</a:t>
-            </a:r>
-          </a:p>
-          <a:p>
-            <a:endParaRPr lang="en-US" sz="1100" dirty="0" smtClean="0">
-              <a:solidFill>
-                <a:schemeClr val="tx1"/>
-              </a:solidFill>
-            </a:endParaRPr>
-          </a:p>
-        </p:txBody>
-      </p:sp>
-      <p:sp>
-        <p:nvSpPr>
-          <p:cNvPr id="15" name="Rectangle 14"/>
+        </p:txBody>
+      </p:sp>
+      <p:sp>
+        <p:nvSpPr>
+          <p:cNvPr id="6" name="Right Arrow 5"/>
           <p:cNvSpPr/>
           <p:nvPr/>
         </p:nvSpPr>
         <p:spPr>
           <a:xfrm>
-            <a:off x="8911988" y="4943900"/>
-            <a:ext cx="2224585" cy="1317009"/>
-          </a:xfrm>
-          <a:prstGeom prst="rect">
+            <a:off x="1862919" y="928047"/>
+            <a:ext cx="532262" cy="293427"/>
+          </a:xfrm>
+          <a:prstGeom prst="rightArrow">
             <a:avLst/>
           </a:prstGeom>
         </p:spPr>
@@ -3443,33 +4462,22 @@
           <a:lstStyle/>
           <a:p>
             <a:pPr algn="ctr"/>
-            <a:r>
-              <a:rPr lang="en-US" dirty="0" smtClean="0"/>
-              <a:t>Formula (Base + Active)</a:t>
-            </a:r>
-          </a:p>
-          <a:p>
-            <a:pPr algn="ctr"/>
-            <a:r>
-              <a:rPr lang="en-US" dirty="0" smtClean="0"/>
-              <a:t>Recommendation</a:t>
-            </a:r>
-            <a:endParaRPr lang="en-AU" dirty="0"/>
-          </a:p>
-        </p:txBody>
-      </p:sp>
-      <p:sp>
-        <p:nvSpPr>
-          <p:cNvPr id="16" name="Rectangle 15"/>
+            <a:endParaRPr lang="en-AU"/>
+          </a:p>
+        </p:txBody>
+      </p:sp>
+      <p:sp>
+        <p:nvSpPr>
+          <p:cNvPr id="7" name="Right Arrow 6"/>
           <p:cNvSpPr/>
           <p:nvPr/>
         </p:nvSpPr>
         <p:spPr>
           <a:xfrm>
-            <a:off x="2906973" y="4930253"/>
-            <a:ext cx="1392071" cy="1139588"/>
-          </a:xfrm>
-          <a:prstGeom prst="rect">
+            <a:off x="1862918" y="2099479"/>
+            <a:ext cx="532262" cy="293427"/>
+          </a:xfrm>
+          <a:prstGeom prst="rightArrow">
             <a:avLst/>
           </a:prstGeom>
         </p:spPr>
@@ -3494,26 +4502,22 @@
           <a:lstStyle/>
           <a:p>
             <a:pPr algn="ctr"/>
-            <a:r>
-              <a:rPr lang="en-US" dirty="0" smtClean="0"/>
-              <a:t>benefits</a:t>
-            </a:r>
-            <a:endParaRPr lang="en-AU" dirty="0"/>
-          </a:p>
-        </p:txBody>
-      </p:sp>
-      <p:sp>
-        <p:nvSpPr>
-          <p:cNvPr id="17" name="Rectangle 16"/>
+            <a:endParaRPr lang="en-AU"/>
+          </a:p>
+        </p:txBody>
+      </p:sp>
+      <p:sp>
+        <p:nvSpPr>
+          <p:cNvPr id="8" name="Oval 7"/>
           <p:cNvSpPr/>
           <p:nvPr/>
         </p:nvSpPr>
         <p:spPr>
           <a:xfrm>
-            <a:off x="4724400" y="4930253"/>
-            <a:ext cx="1392071" cy="1139588"/>
-          </a:xfrm>
-          <a:prstGeom prst="rect">
+            <a:off x="2395180" y="675564"/>
+            <a:ext cx="880281" cy="766548"/>
+          </a:xfrm>
+          <a:prstGeom prst="ellipse">
             <a:avLst/>
           </a:prstGeom>
         </p:spPr>
@@ -3540,7 +4544,7 @@
             <a:pPr algn="ctr"/>
             <a:r>
               <a:rPr lang="en-US" dirty="0" smtClean="0"/>
-              <a:t>active</a:t>
+              <a:t>AI 1</a:t>
             </a:r>
             <a:endParaRPr lang="en-AU" dirty="0"/>
           </a:p>
@@ -3548,16 +4552,16 @@
       </p:sp>
       <p:sp>
         <p:nvSpPr>
-          <p:cNvPr id="18" name="Rectangle 17"/>
+          <p:cNvPr id="9" name="Oval 8"/>
           <p:cNvSpPr/>
           <p:nvPr/>
         </p:nvSpPr>
         <p:spPr>
           <a:xfrm>
-            <a:off x="1092958" y="4930253"/>
-            <a:ext cx="1392071" cy="1139588"/>
-          </a:xfrm>
-          <a:prstGeom prst="rect">
+            <a:off x="2395179" y="1862918"/>
+            <a:ext cx="880281" cy="766548"/>
+          </a:xfrm>
+          <a:prstGeom prst="ellipse">
             <a:avLst/>
           </a:prstGeom>
         </p:spPr>
@@ -3583,29 +4587,25 @@
           <a:p>
             <a:pPr algn="ctr"/>
             <a:r>
-              <a:rPr lang="en-US" sz="1400" dirty="0" err="1"/>
-              <a:t>s</a:t>
-            </a:r>
-            <a:r>
-              <a:rPr lang="en-US" sz="1400" dirty="0" err="1" smtClean="0"/>
-              <a:t>kin_concern</a:t>
-            </a:r>
-            <a:endParaRPr lang="en-AU" sz="1400" dirty="0"/>
-          </a:p>
-        </p:txBody>
-      </p:sp>
-      <p:sp>
-        <p:nvSpPr>
-          <p:cNvPr id="19" name="Rectangle 18"/>
+              <a:rPr lang="en-US" dirty="0" smtClean="0"/>
+              <a:t>AI 2</a:t>
+            </a:r>
+            <a:endParaRPr lang="en-AU" dirty="0"/>
+          </a:p>
+        </p:txBody>
+      </p:sp>
+      <p:sp>
+        <p:nvSpPr>
+          <p:cNvPr id="11" name="Right Arrow 10"/>
           <p:cNvSpPr/>
           <p:nvPr/>
         </p:nvSpPr>
         <p:spPr>
           <a:xfrm>
-            <a:off x="6064155" y="3568622"/>
-            <a:ext cx="1392071" cy="1139588"/>
-          </a:xfrm>
-          <a:prstGeom prst="rect">
+            <a:off x="3275461" y="928047"/>
+            <a:ext cx="532262" cy="293427"/>
+          </a:xfrm>
+          <a:prstGeom prst="rightArrow">
             <a:avLst/>
           </a:prstGeom>
         </p:spPr>
@@ -3630,26 +4630,22 @@
           <a:lstStyle/>
           <a:p>
             <a:pPr algn="ctr"/>
-            <a:r>
-              <a:rPr lang="en-US" dirty="0" smtClean="0"/>
-              <a:t>base</a:t>
-            </a:r>
-            <a:endParaRPr lang="en-AU" dirty="0"/>
-          </a:p>
-        </p:txBody>
-      </p:sp>
-      <p:sp>
-        <p:nvSpPr>
-          <p:cNvPr id="20" name="Rectangle 19"/>
+            <a:endParaRPr lang="en-AU"/>
+          </a:p>
+        </p:txBody>
+      </p:sp>
+      <p:sp>
+        <p:nvSpPr>
+          <p:cNvPr id="12" name="Right Arrow 11"/>
           <p:cNvSpPr/>
           <p:nvPr/>
         </p:nvSpPr>
         <p:spPr>
           <a:xfrm>
-            <a:off x="2538480" y="3568622"/>
-            <a:ext cx="3153769" cy="1139588"/>
-          </a:xfrm>
-          <a:prstGeom prst="rect">
+            <a:off x="3275460" y="2099479"/>
+            <a:ext cx="532262" cy="293427"/>
+          </a:xfrm>
+          <a:prstGeom prst="rightArrow">
             <a:avLst/>
           </a:prstGeom>
         </p:spPr>
@@ -3674,50 +4670,20 @@
           <a:lstStyle/>
           <a:p>
             <a:pPr algn="ctr"/>
-            <a:r>
-              <a:rPr lang="en-US" dirty="0" smtClean="0"/>
-              <a:t>Age, </a:t>
-            </a:r>
-            <a:r>
-              <a:rPr lang="en-US" dirty="0" err="1" smtClean="0"/>
-              <a:t>Skin_type</a:t>
-            </a:r>
-            <a:r>
-              <a:rPr lang="en-US" dirty="0" smtClean="0"/>
-              <a:t>,</a:t>
-            </a:r>
-            <a:br>
-              <a:rPr lang="en-US" dirty="0" smtClean="0"/>
-            </a:br>
-            <a:r>
-              <a:rPr lang="en-US" dirty="0" smtClean="0"/>
-              <a:t>Acne </a:t>
-            </a:r>
-            <a:r>
-              <a:rPr lang="en-US" dirty="0" err="1" smtClean="0"/>
-              <a:t>Sutable</a:t>
-            </a:r>
-            <a:r>
-              <a:rPr lang="en-US" dirty="0" smtClean="0"/>
-              <a:t>, </a:t>
-            </a:r>
-            <a:r>
-              <a:rPr lang="en-AU" dirty="0"/>
-              <a:t>Climate </a:t>
-            </a:r>
-          </a:p>
-        </p:txBody>
-      </p:sp>
-      <p:sp>
-        <p:nvSpPr>
-          <p:cNvPr id="21" name="Rectangle 20"/>
+            <a:endParaRPr lang="en-AU"/>
+          </a:p>
+        </p:txBody>
+      </p:sp>
+      <p:sp>
+        <p:nvSpPr>
+          <p:cNvPr id="14" name="Rectangle 13"/>
           <p:cNvSpPr/>
           <p:nvPr/>
         </p:nvSpPr>
         <p:spPr>
           <a:xfrm>
-            <a:off x="3807722" y="1817426"/>
-            <a:ext cx="1310185" cy="857535"/>
+            <a:off x="3807722" y="675564"/>
+            <a:ext cx="1310185" cy="805218"/>
           </a:xfrm>
           <a:prstGeom prst="rect">
             <a:avLst/>
@@ -3768,28 +4734,370 @@
               </a:solidFill>
             </a:endParaRPr>
           </a:p>
-        </p:txBody>
-      </p:sp>
-      <p:sp>
-        <p:nvSpPr>
-          <p:cNvPr id="22" name="TextBox 21"/>
-          <p:cNvSpPr txBox="1"/>
-          <p:nvPr/>
-        </p:nvSpPr>
-        <p:spPr>
-          <a:xfrm>
-            <a:off x="5650168" y="579608"/>
-            <a:ext cx="6388287" cy="1446550"/>
+          <a:p>
+            <a:r>
+              <a:rPr lang="en-US" sz="1100" dirty="0">
+                <a:solidFill>
+                  <a:schemeClr val="tx1"/>
+                </a:solidFill>
+              </a:rPr>
+              <a:t>s</a:t>
+            </a:r>
+            <a:r>
+              <a:rPr lang="en-US" sz="1100" dirty="0" smtClean="0">
+                <a:solidFill>
+                  <a:schemeClr val="tx1"/>
+                </a:solidFill>
+              </a:rPr>
+              <a:t>kin type?</a:t>
+            </a:r>
+          </a:p>
+          <a:p>
+            <a:endParaRPr lang="en-US" sz="1100" dirty="0" smtClean="0">
+              <a:solidFill>
+                <a:schemeClr val="tx1"/>
+              </a:solidFill>
+            </a:endParaRPr>
+          </a:p>
+        </p:txBody>
+      </p:sp>
+      <p:sp>
+        <p:nvSpPr>
+          <p:cNvPr id="15" name="Rectangle 14"/>
+          <p:cNvSpPr/>
+          <p:nvPr/>
+        </p:nvSpPr>
+        <p:spPr>
+          <a:xfrm>
+            <a:off x="8911988" y="4943900"/>
+            <a:ext cx="2224585" cy="1317009"/>
           </a:xfrm>
           <a:prstGeom prst="rect">
             <a:avLst/>
           </a:prstGeom>
-          <a:noFill/>
-        </p:spPr>
-        <p:txBody>
-          <a:bodyPr wrap="none" rtlCol="0">
-            <a:spAutoFit/>
-          </a:bodyPr>
+        </p:spPr>
+        <p:style>
+          <a:lnRef idx="2">
+            <a:schemeClr val="accent1">
+              <a:shade val="50000"/>
+            </a:schemeClr>
+          </a:lnRef>
+          <a:fillRef idx="1">
+            <a:schemeClr val="accent1"/>
+          </a:fillRef>
+          <a:effectRef idx="0">
+            <a:schemeClr val="accent1"/>
+          </a:effectRef>
+          <a:fontRef idx="minor">
+            <a:schemeClr val="lt1"/>
+          </a:fontRef>
+        </p:style>
+        <p:txBody>
+          <a:bodyPr rtlCol="0" anchor="ctr"/>
+          <a:lstStyle/>
+          <a:p>
+            <a:pPr algn="ctr"/>
+            <a:r>
+              <a:rPr lang="en-US" dirty="0" smtClean="0"/>
+              <a:t>Formula (Base + Active)</a:t>
+            </a:r>
+          </a:p>
+          <a:p>
+            <a:pPr algn="ctr"/>
+            <a:r>
+              <a:rPr lang="en-US" dirty="0" smtClean="0"/>
+              <a:t>Recommendation</a:t>
+            </a:r>
+            <a:endParaRPr lang="en-AU" dirty="0"/>
+          </a:p>
+        </p:txBody>
+      </p:sp>
+      <p:sp>
+        <p:nvSpPr>
+          <p:cNvPr id="16" name="Rectangle 15"/>
+          <p:cNvSpPr/>
+          <p:nvPr/>
+        </p:nvSpPr>
+        <p:spPr>
+          <a:xfrm>
+            <a:off x="2906973" y="4930253"/>
+            <a:ext cx="1392071" cy="1139588"/>
+          </a:xfrm>
+          <a:prstGeom prst="rect">
+            <a:avLst/>
+          </a:prstGeom>
+        </p:spPr>
+        <p:style>
+          <a:lnRef idx="2">
+            <a:schemeClr val="accent1">
+              <a:shade val="50000"/>
+            </a:schemeClr>
+          </a:lnRef>
+          <a:fillRef idx="1">
+            <a:schemeClr val="accent1"/>
+          </a:fillRef>
+          <a:effectRef idx="0">
+            <a:schemeClr val="accent1"/>
+          </a:effectRef>
+          <a:fontRef idx="minor">
+            <a:schemeClr val="lt1"/>
+          </a:fontRef>
+        </p:style>
+        <p:txBody>
+          <a:bodyPr rtlCol="0" anchor="ctr"/>
+          <a:lstStyle/>
+          <a:p>
+            <a:pPr algn="ctr"/>
+            <a:r>
+              <a:rPr lang="en-US" dirty="0" smtClean="0"/>
+              <a:t>benefits</a:t>
+            </a:r>
+            <a:endParaRPr lang="en-AU" dirty="0"/>
+          </a:p>
+        </p:txBody>
+      </p:sp>
+      <p:sp>
+        <p:nvSpPr>
+          <p:cNvPr id="17" name="Rectangle 16"/>
+          <p:cNvSpPr/>
+          <p:nvPr/>
+        </p:nvSpPr>
+        <p:spPr>
+          <a:xfrm>
+            <a:off x="4724400" y="4930253"/>
+            <a:ext cx="1392071" cy="1139588"/>
+          </a:xfrm>
+          <a:prstGeom prst="rect">
+            <a:avLst/>
+          </a:prstGeom>
+        </p:spPr>
+        <p:style>
+          <a:lnRef idx="2">
+            <a:schemeClr val="accent1">
+              <a:shade val="50000"/>
+            </a:schemeClr>
+          </a:lnRef>
+          <a:fillRef idx="1">
+            <a:schemeClr val="accent1"/>
+          </a:fillRef>
+          <a:effectRef idx="0">
+            <a:schemeClr val="accent1"/>
+          </a:effectRef>
+          <a:fontRef idx="minor">
+            <a:schemeClr val="lt1"/>
+          </a:fontRef>
+        </p:style>
+        <p:txBody>
+          <a:bodyPr rtlCol="0" anchor="ctr"/>
+          <a:lstStyle/>
+          <a:p>
+            <a:pPr algn="ctr"/>
+            <a:r>
+              <a:rPr lang="en-US" dirty="0" smtClean="0"/>
+              <a:t>active</a:t>
+            </a:r>
+            <a:endParaRPr lang="en-AU" dirty="0"/>
+          </a:p>
+        </p:txBody>
+      </p:sp>
+      <p:sp>
+        <p:nvSpPr>
+          <p:cNvPr id="18" name="Rectangle 17"/>
+          <p:cNvSpPr/>
+          <p:nvPr/>
+        </p:nvSpPr>
+        <p:spPr>
+          <a:xfrm>
+            <a:off x="1092958" y="4930253"/>
+            <a:ext cx="1392071" cy="1139588"/>
+          </a:xfrm>
+          <a:prstGeom prst="rect">
+            <a:avLst/>
+          </a:prstGeom>
+        </p:spPr>
+        <p:style>
+          <a:lnRef idx="2">
+            <a:schemeClr val="accent1">
+              <a:shade val="50000"/>
+            </a:schemeClr>
+          </a:lnRef>
+          <a:fillRef idx="1">
+            <a:schemeClr val="accent1"/>
+          </a:fillRef>
+          <a:effectRef idx="0">
+            <a:schemeClr val="accent1"/>
+          </a:effectRef>
+          <a:fontRef idx="minor">
+            <a:schemeClr val="lt1"/>
+          </a:fontRef>
+        </p:style>
+        <p:txBody>
+          <a:bodyPr rtlCol="0" anchor="ctr"/>
+          <a:lstStyle/>
+          <a:p>
+            <a:pPr algn="ctr"/>
+            <a:r>
+              <a:rPr lang="en-US" sz="1400" dirty="0" err="1"/>
+              <a:t>s</a:t>
+            </a:r>
+            <a:r>
+              <a:rPr lang="en-US" sz="1400" dirty="0" err="1" smtClean="0"/>
+              <a:t>kin_concern</a:t>
+            </a:r>
+            <a:endParaRPr lang="en-AU" sz="1400" dirty="0"/>
+          </a:p>
+        </p:txBody>
+      </p:sp>
+      <p:sp>
+        <p:nvSpPr>
+          <p:cNvPr id="19" name="Rectangle 18"/>
+          <p:cNvSpPr/>
+          <p:nvPr/>
+        </p:nvSpPr>
+        <p:spPr>
+          <a:xfrm>
+            <a:off x="6064155" y="3568622"/>
+            <a:ext cx="1392071" cy="1139588"/>
+          </a:xfrm>
+          <a:prstGeom prst="rect">
+            <a:avLst/>
+          </a:prstGeom>
+        </p:spPr>
+        <p:style>
+          <a:lnRef idx="2">
+            <a:schemeClr val="accent1">
+              <a:shade val="50000"/>
+            </a:schemeClr>
+          </a:lnRef>
+          <a:fillRef idx="1">
+            <a:schemeClr val="accent1"/>
+          </a:fillRef>
+          <a:effectRef idx="0">
+            <a:schemeClr val="accent1"/>
+          </a:effectRef>
+          <a:fontRef idx="minor">
+            <a:schemeClr val="lt1"/>
+          </a:fontRef>
+        </p:style>
+        <p:txBody>
+          <a:bodyPr rtlCol="0" anchor="ctr"/>
+          <a:lstStyle/>
+          <a:p>
+            <a:pPr algn="ctr"/>
+            <a:r>
+              <a:rPr lang="en-US" dirty="0" smtClean="0"/>
+              <a:t>base</a:t>
+            </a:r>
+            <a:endParaRPr lang="en-AU" dirty="0"/>
+          </a:p>
+        </p:txBody>
+      </p:sp>
+      <p:sp>
+        <p:nvSpPr>
+          <p:cNvPr id="20" name="Rectangle 19"/>
+          <p:cNvSpPr/>
+          <p:nvPr/>
+        </p:nvSpPr>
+        <p:spPr>
+          <a:xfrm>
+            <a:off x="2538480" y="3568622"/>
+            <a:ext cx="3153769" cy="1139588"/>
+          </a:xfrm>
+          <a:prstGeom prst="rect">
+            <a:avLst/>
+          </a:prstGeom>
+        </p:spPr>
+        <p:style>
+          <a:lnRef idx="2">
+            <a:schemeClr val="accent1">
+              <a:shade val="50000"/>
+            </a:schemeClr>
+          </a:lnRef>
+          <a:fillRef idx="1">
+            <a:schemeClr val="accent1"/>
+          </a:fillRef>
+          <a:effectRef idx="0">
+            <a:schemeClr val="accent1"/>
+          </a:effectRef>
+          <a:fontRef idx="minor">
+            <a:schemeClr val="lt1"/>
+          </a:fontRef>
+        </p:style>
+        <p:txBody>
+          <a:bodyPr rtlCol="0" anchor="ctr"/>
+          <a:lstStyle/>
+          <a:p>
+            <a:pPr algn="ctr"/>
+            <a:r>
+              <a:rPr lang="en-US" dirty="0" smtClean="0"/>
+              <a:t>Age, </a:t>
+            </a:r>
+            <a:r>
+              <a:rPr lang="en-US" dirty="0" err="1" smtClean="0"/>
+              <a:t>Skin_type</a:t>
+            </a:r>
+            <a:r>
+              <a:rPr lang="en-US" dirty="0" smtClean="0"/>
+              <a:t>,</a:t>
+            </a:r>
+            <a:br>
+              <a:rPr lang="en-US" dirty="0" smtClean="0"/>
+            </a:br>
+            <a:r>
+              <a:rPr lang="en-US" dirty="0" smtClean="0"/>
+              <a:t>Acne </a:t>
+            </a:r>
+            <a:r>
+              <a:rPr lang="en-US" dirty="0" err="1" smtClean="0"/>
+              <a:t>Sutable</a:t>
+            </a:r>
+            <a:r>
+              <a:rPr lang="en-US" dirty="0" smtClean="0"/>
+              <a:t>, </a:t>
+            </a:r>
+            <a:r>
+              <a:rPr lang="en-AU" dirty="0"/>
+              <a:t>Climate </a:t>
+            </a:r>
+          </a:p>
+        </p:txBody>
+      </p:sp>
+      <p:sp>
+        <p:nvSpPr>
+          <p:cNvPr id="21" name="Rectangle 20"/>
+          <p:cNvSpPr/>
+          <p:nvPr/>
+        </p:nvSpPr>
+        <p:spPr>
+          <a:xfrm>
+            <a:off x="3807722" y="1817426"/>
+            <a:ext cx="1310185" cy="857535"/>
+          </a:xfrm>
+          <a:prstGeom prst="rect">
+            <a:avLst/>
+          </a:prstGeom>
+          <a:solidFill>
+            <a:schemeClr val="bg1"/>
+          </a:solidFill>
+        </p:spPr>
+        <p:style>
+          <a:lnRef idx="2">
+            <a:schemeClr val="accent1">
+              <a:shade val="50000"/>
+            </a:schemeClr>
+          </a:lnRef>
+          <a:fillRef idx="1">
+            <a:schemeClr val="accent1"/>
+          </a:fillRef>
+          <a:effectRef idx="0">
+            <a:schemeClr val="accent1"/>
+          </a:effectRef>
+          <a:fontRef idx="minor">
+            <a:schemeClr val="lt1"/>
+          </a:fontRef>
+        </p:style>
+        <p:txBody>
+          <a:bodyPr rtlCol="0" anchor="ctr"/>
           <a:lstStyle/>
           <a:p>
             <a:r>
@@ -3806,6 +5114,52 @@
                   <a:schemeClr val="tx1"/>
                 </a:solidFill>
               </a:rPr>
+              <a:t> (SC00--, SC20--)</a:t>
+            </a:r>
+            <a:endParaRPr lang="en-US" sz="1100" dirty="0">
+              <a:solidFill>
+                <a:schemeClr val="tx1"/>
+              </a:solidFill>
+            </a:endParaRPr>
+          </a:p>
+        </p:txBody>
+      </p:sp>
+      <p:sp>
+        <p:nvSpPr>
+          <p:cNvPr id="22" name="TextBox 21"/>
+          <p:cNvSpPr txBox="1"/>
+          <p:nvPr/>
+        </p:nvSpPr>
+        <p:spPr>
+          <a:xfrm>
+            <a:off x="5650168" y="579608"/>
+            <a:ext cx="6388287" cy="1446550"/>
+          </a:xfrm>
+          <a:prstGeom prst="rect">
+            <a:avLst/>
+          </a:prstGeom>
+          <a:noFill/>
+        </p:spPr>
+        <p:txBody>
+          <a:bodyPr wrap="none" rtlCol="0">
+            <a:spAutoFit/>
+          </a:bodyPr>
+          <a:lstStyle/>
+          <a:p>
+            <a:r>
+              <a:rPr lang="en-US" sz="1100" dirty="0" err="1" smtClean="0">
+                <a:solidFill>
+                  <a:schemeClr val="tx1"/>
+                </a:solidFill>
+              </a:rPr>
+              <a:t>skin_concerns</a:t>
+            </a:r>
+            <a:r>
+              <a:rPr lang="en-US" sz="1100" dirty="0" smtClean="0">
+                <a:solidFill>
+                  <a:schemeClr val="tx1"/>
+                </a:solidFill>
+              </a:rPr>
               <a:t>: {</a:t>
             </a:r>
           </a:p>
@@ -3840,11 +5194,7 @@
             </a:r>
             <a:r>
               <a:rPr lang="en-US" sz="1100" dirty="0" smtClean="0"/>
-              <a:t>: </a:t>
-            </a:r>
-            <a:r>
-              <a:rPr lang="en-US" sz="1100" dirty="0" smtClean="0"/>
-              <a:t>null</a:t>
+              <a:t>: null</a:t>
             </a:r>
             <a:r>
               <a:rPr lang="en-US" sz="1100" dirty="0"/>
@@ -4136,6 +5486,2856 @@
   <p:clrMapOvr>
     <a:masterClrMapping/>
   </p:clrMapOvr>
+</p:sld>
+</file>
+
+<file path=ppt/slides/slide3.xml><?xml version="1.0" encoding="utf-8"?>
+<p:sld xmlns:a="http://schemas.openxmlformats.org/drawingml/2006/main" xmlns:r="http://schemas.openxmlformats.org/officeDocument/2006/relationships" xmlns:p="http://schemas.openxmlformats.org/presentationml/2006/main">
+  <p:cSld>
+    <p:spTree>
+      <p:nvGrpSpPr>
+        <p:cNvPr id="1" name=""/>
+        <p:cNvGrpSpPr/>
+        <p:nvPr/>
+      </p:nvGrpSpPr>
+      <p:grpSpPr>
+        <a:xfrm>
+          <a:off x="0" y="0"/>
+          <a:ext cx="0" cy="0"/>
+          <a:chOff x="0" y="0"/>
+          <a:chExt cx="0" cy="0"/>
+        </a:xfrm>
+      </p:grpSpPr>
+      <p:sp>
+        <p:nvSpPr>
+          <p:cNvPr id="2" name="Rectangle 1"/>
+          <p:cNvSpPr/>
+          <p:nvPr/>
+        </p:nvSpPr>
+        <p:spPr>
+          <a:xfrm>
+            <a:off x="2786764" y="203235"/>
+            <a:ext cx="8187501" cy="5792222"/>
+          </a:xfrm>
+          <a:prstGeom prst="rect">
+            <a:avLst/>
+          </a:prstGeom>
+          <a:solidFill>
+            <a:schemeClr val="accent6">
+              <a:lumMod val="20000"/>
+              <a:lumOff val="80000"/>
+            </a:schemeClr>
+          </a:solidFill>
+          <a:ln>
+            <a:solidFill>
+              <a:schemeClr val="tx1"/>
+            </a:solidFill>
+          </a:ln>
+        </p:spPr>
+        <p:style>
+          <a:lnRef idx="2">
+            <a:schemeClr val="accent1">
+              <a:shade val="50000"/>
+            </a:schemeClr>
+          </a:lnRef>
+          <a:fillRef idx="1">
+            <a:schemeClr val="accent1"/>
+          </a:fillRef>
+          <a:effectRef idx="0">
+            <a:schemeClr val="accent1"/>
+          </a:effectRef>
+          <a:fontRef idx="minor">
+            <a:schemeClr val="lt1"/>
+          </a:fontRef>
+        </p:style>
+        <p:txBody>
+          <a:bodyPr rtlCol="0" anchor="ctr"/>
+          <a:lstStyle/>
+          <a:p>
+            <a:pPr algn="ctr"/>
+            <a:endParaRPr lang="en-AU" sz="1372"/>
+          </a:p>
+        </p:txBody>
+      </p:sp>
+      <p:grpSp>
+        <p:nvGrpSpPr>
+          <p:cNvPr id="14" name="Group 13"/>
+          <p:cNvGrpSpPr/>
+          <p:nvPr/>
+        </p:nvGrpSpPr>
+        <p:grpSpPr>
+          <a:xfrm>
+            <a:off x="997563" y="921820"/>
+            <a:ext cx="301225" cy="399213"/>
+            <a:chOff x="8634412" y="1219200"/>
+            <a:chExt cx="676275" cy="933450"/>
+          </a:xfrm>
+        </p:grpSpPr>
+        <p:sp>
+          <p:nvSpPr>
+            <p:cNvPr id="5" name="Smiley Face 4"/>
+            <p:cNvSpPr/>
+            <p:nvPr/>
+          </p:nvSpPr>
+          <p:spPr>
+            <a:xfrm>
+              <a:off x="8753475" y="1219200"/>
+              <a:ext cx="438150" cy="428625"/>
+            </a:xfrm>
+            <a:prstGeom prst="smileyFace">
+              <a:avLst/>
+            </a:prstGeom>
+          </p:spPr>
+          <p:style>
+            <a:lnRef idx="2">
+              <a:schemeClr val="accent1">
+                <a:shade val="50000"/>
+              </a:schemeClr>
+            </a:lnRef>
+            <a:fillRef idx="1">
+              <a:schemeClr val="accent1"/>
+            </a:fillRef>
+            <a:effectRef idx="0">
+              <a:schemeClr val="accent1"/>
+            </a:effectRef>
+            <a:fontRef idx="minor">
+              <a:schemeClr val="lt1"/>
+            </a:fontRef>
+          </p:style>
+          <p:txBody>
+            <a:bodyPr rtlCol="0" anchor="ctr"/>
+            <a:lstStyle/>
+            <a:p>
+              <a:pPr algn="ctr"/>
+              <a:endParaRPr lang="en-AU" sz="1372"/>
+            </a:p>
+          </p:txBody>
+        </p:sp>
+        <p:sp>
+          <p:nvSpPr>
+            <p:cNvPr id="12" name="Snip Same Side Corner Rectangle 11"/>
+            <p:cNvSpPr/>
+            <p:nvPr/>
+          </p:nvSpPr>
+          <p:spPr>
+            <a:xfrm>
+              <a:off x="8634412" y="1647825"/>
+              <a:ext cx="676275" cy="504825"/>
+            </a:xfrm>
+            <a:prstGeom prst="snip2SameRect">
+              <a:avLst/>
+            </a:prstGeom>
+          </p:spPr>
+          <p:style>
+            <a:lnRef idx="2">
+              <a:schemeClr val="accent1">
+                <a:shade val="50000"/>
+              </a:schemeClr>
+            </a:lnRef>
+            <a:fillRef idx="1">
+              <a:schemeClr val="accent1"/>
+            </a:fillRef>
+            <a:effectRef idx="0">
+              <a:schemeClr val="accent1"/>
+            </a:effectRef>
+            <a:fontRef idx="minor">
+              <a:schemeClr val="lt1"/>
+            </a:fontRef>
+          </p:style>
+          <p:txBody>
+            <a:bodyPr rtlCol="0" anchor="ctr"/>
+            <a:lstStyle/>
+            <a:p>
+              <a:pPr algn="ctr"/>
+              <a:endParaRPr lang="en-AU" sz="1372"/>
+            </a:p>
+          </p:txBody>
+        </p:sp>
+      </p:grpSp>
+      <p:sp>
+        <p:nvSpPr>
+          <p:cNvPr id="15" name="Down Arrow 14"/>
+          <p:cNvSpPr/>
+          <p:nvPr/>
+        </p:nvSpPr>
+        <p:spPr>
+          <a:xfrm rot="16200000">
+            <a:off x="1921607" y="352035"/>
+            <a:ext cx="420989" cy="1560561"/>
+          </a:xfrm>
+          <a:prstGeom prst="downArrow">
+            <a:avLst/>
+          </a:prstGeom>
+        </p:spPr>
+        <p:style>
+          <a:lnRef idx="2">
+            <a:schemeClr val="accent1">
+              <a:shade val="50000"/>
+            </a:schemeClr>
+          </a:lnRef>
+          <a:fillRef idx="1">
+            <a:schemeClr val="accent1"/>
+          </a:fillRef>
+          <a:effectRef idx="0">
+            <a:schemeClr val="accent1"/>
+          </a:effectRef>
+          <a:fontRef idx="minor">
+            <a:schemeClr val="lt1"/>
+          </a:fontRef>
+        </p:style>
+        <p:txBody>
+          <a:bodyPr rtlCol="0" anchor="ctr"/>
+          <a:lstStyle/>
+          <a:p>
+            <a:pPr algn="ctr"/>
+            <a:endParaRPr lang="en-AU" sz="1372" dirty="0"/>
+          </a:p>
+        </p:txBody>
+      </p:sp>
+      <p:sp>
+        <p:nvSpPr>
+          <p:cNvPr id="16" name="TextBox 15"/>
+          <p:cNvSpPr txBox="1"/>
+          <p:nvPr/>
+        </p:nvSpPr>
+        <p:spPr>
+          <a:xfrm>
+            <a:off x="1793889" y="1026773"/>
+            <a:ext cx="489236" cy="233013"/>
+          </a:xfrm>
+          <a:prstGeom prst="rect">
+            <a:avLst/>
+          </a:prstGeom>
+          <a:noFill/>
+        </p:spPr>
+        <p:txBody>
+          <a:bodyPr wrap="none" rtlCol="0">
+            <a:spAutoFit/>
+          </a:bodyPr>
+          <a:lstStyle/>
+          <a:p>
+            <a:r>
+              <a:rPr lang="en-US" sz="914" dirty="0"/>
+              <a:t>L</a:t>
+            </a:r>
+            <a:r>
+              <a:rPr lang="en-US" sz="914" dirty="0"/>
+              <a:t>OGIN</a:t>
+            </a:r>
+            <a:endParaRPr lang="en-AU" sz="914" dirty="0"/>
+          </a:p>
+        </p:txBody>
+      </p:sp>
+      <p:pic>
+        <p:nvPicPr>
+          <p:cNvPr id="26" name="Picture 25"/>
+          <p:cNvPicPr>
+            <a:picLocks noChangeAspect="1"/>
+          </p:cNvPicPr>
+          <p:nvPr/>
+        </p:nvPicPr>
+        <p:blipFill>
+          <a:blip r:embed="rId2" cstate="print">
+            <a:extLst>
+              <a:ext uri="{28A0092B-C50C-407E-A947-70E740481C1C}">
+                <a14:useLocalDpi xmlns:a14="http://schemas.microsoft.com/office/drawing/2010/main" val="0"/>
+              </a:ext>
+            </a:extLst>
+          </a:blip>
+          <a:stretch>
+            <a:fillRect/>
+          </a:stretch>
+        </p:blipFill>
+        <p:spPr>
+          <a:xfrm>
+            <a:off x="8754034" y="4497056"/>
+            <a:ext cx="1340899" cy="1340899"/>
+          </a:xfrm>
+          <a:prstGeom prst="rect">
+            <a:avLst/>
+          </a:prstGeom>
+        </p:spPr>
+      </p:pic>
+      <p:pic>
+        <p:nvPicPr>
+          <p:cNvPr id="28" name="Picture 27"/>
+          <p:cNvPicPr>
+            <a:picLocks noChangeAspect="1"/>
+          </p:cNvPicPr>
+          <p:nvPr/>
+        </p:nvPicPr>
+        <p:blipFill>
+          <a:blip r:embed="rId3" cstate="print">
+            <a:extLst>
+              <a:ext uri="{28A0092B-C50C-407E-A947-70E740481C1C}">
+                <a14:useLocalDpi xmlns:a14="http://schemas.microsoft.com/office/drawing/2010/main" val="0"/>
+              </a:ext>
+            </a:extLst>
+          </a:blip>
+          <a:stretch>
+            <a:fillRect/>
+          </a:stretch>
+        </p:blipFill>
+        <p:spPr>
+          <a:xfrm>
+            <a:off x="10038427" y="4791312"/>
+            <a:ext cx="868805" cy="868805"/>
+          </a:xfrm>
+          <a:prstGeom prst="rect">
+            <a:avLst/>
+          </a:prstGeom>
+        </p:spPr>
+      </p:pic>
+      <p:pic>
+        <p:nvPicPr>
+          <p:cNvPr id="29" name="Picture 28"/>
+          <p:cNvPicPr>
+            <a:picLocks noChangeAspect="1"/>
+          </p:cNvPicPr>
+          <p:nvPr/>
+        </p:nvPicPr>
+        <p:blipFill>
+          <a:blip r:embed="rId4" cstate="print">
+            <a:extLst>
+              <a:ext uri="{28A0092B-C50C-407E-A947-70E740481C1C}">
+                <a14:useLocalDpi xmlns:a14="http://schemas.microsoft.com/office/drawing/2010/main" val="0"/>
+              </a:ext>
+            </a:extLst>
+          </a:blip>
+          <a:stretch>
+            <a:fillRect/>
+          </a:stretch>
+        </p:blipFill>
+        <p:spPr>
+          <a:xfrm rot="13345969">
+            <a:off x="9870005" y="4612532"/>
+            <a:ext cx="604688" cy="675930"/>
+          </a:xfrm>
+          <a:prstGeom prst="rect">
+            <a:avLst/>
+          </a:prstGeom>
+        </p:spPr>
+      </p:pic>
+      <p:sp>
+        <p:nvSpPr>
+          <p:cNvPr id="41" name="Rectangle 40"/>
+          <p:cNvSpPr/>
+          <p:nvPr/>
+        </p:nvSpPr>
+        <p:spPr>
+          <a:xfrm>
+            <a:off x="2950967" y="447319"/>
+            <a:ext cx="2146268" cy="1531527"/>
+          </a:xfrm>
+          <a:prstGeom prst="rect">
+            <a:avLst/>
+          </a:prstGeom>
+          <a:solidFill>
+            <a:schemeClr val="accent1">
+              <a:lumMod val="20000"/>
+              <a:lumOff val="80000"/>
+            </a:schemeClr>
+          </a:solidFill>
+        </p:spPr>
+        <p:style>
+          <a:lnRef idx="2">
+            <a:schemeClr val="accent1">
+              <a:shade val="50000"/>
+            </a:schemeClr>
+          </a:lnRef>
+          <a:fillRef idx="1">
+            <a:schemeClr val="accent1"/>
+          </a:fillRef>
+          <a:effectRef idx="0">
+            <a:schemeClr val="accent1"/>
+          </a:effectRef>
+          <a:fontRef idx="minor">
+            <a:schemeClr val="lt1"/>
+          </a:fontRef>
+        </p:style>
+        <p:txBody>
+          <a:bodyPr rtlCol="0" anchor="ctr"/>
+          <a:lstStyle/>
+          <a:p>
+            <a:pPr algn="ctr"/>
+            <a:endParaRPr lang="en-AU" sz="1372"/>
+          </a:p>
+        </p:txBody>
+      </p:sp>
+      <p:grpSp>
+        <p:nvGrpSpPr>
+          <p:cNvPr id="20" name="Group 19"/>
+          <p:cNvGrpSpPr/>
+          <p:nvPr/>
+        </p:nvGrpSpPr>
+        <p:grpSpPr>
+          <a:xfrm>
+            <a:off x="3045164" y="869364"/>
+            <a:ext cx="474810" cy="547828"/>
+            <a:chOff x="3337214" y="1450230"/>
+            <a:chExt cx="623079" cy="718898"/>
+          </a:xfrm>
+        </p:grpSpPr>
+        <p:sp>
+          <p:nvSpPr>
+            <p:cNvPr id="17" name="Frame 16"/>
+            <p:cNvSpPr/>
+            <p:nvPr/>
+          </p:nvSpPr>
+          <p:spPr>
+            <a:xfrm>
+              <a:off x="3337214" y="1450230"/>
+              <a:ext cx="568104" cy="690121"/>
+            </a:xfrm>
+            <a:prstGeom prst="frame">
+              <a:avLst/>
+            </a:prstGeom>
+          </p:spPr>
+          <p:style>
+            <a:lnRef idx="2">
+              <a:schemeClr val="accent1">
+                <a:shade val="50000"/>
+              </a:schemeClr>
+            </a:lnRef>
+            <a:fillRef idx="1">
+              <a:schemeClr val="accent1"/>
+            </a:fillRef>
+            <a:effectRef idx="0">
+              <a:schemeClr val="accent1"/>
+            </a:effectRef>
+            <a:fontRef idx="minor">
+              <a:schemeClr val="lt1"/>
+            </a:fontRef>
+          </p:style>
+          <p:txBody>
+            <a:bodyPr rtlCol="0" anchor="ctr"/>
+            <a:lstStyle/>
+            <a:p>
+              <a:pPr algn="ctr"/>
+              <a:endParaRPr lang="en-AU" sz="1372">
+                <a:solidFill>
+                  <a:schemeClr val="tx1"/>
+                </a:solidFill>
+              </a:endParaRPr>
+            </a:p>
+          </p:txBody>
+        </p:sp>
+        <p:sp>
+          <p:nvSpPr>
+            <p:cNvPr id="19" name="Smiley Face 18"/>
+            <p:cNvSpPr/>
+            <p:nvPr/>
+          </p:nvSpPr>
+          <p:spPr>
+            <a:xfrm>
+              <a:off x="3476950" y="1577604"/>
+              <a:ext cx="276225" cy="295273"/>
+            </a:xfrm>
+            <a:prstGeom prst="smileyFace">
+              <a:avLst/>
+            </a:prstGeom>
+          </p:spPr>
+          <p:style>
+            <a:lnRef idx="2">
+              <a:schemeClr val="accent1">
+                <a:shade val="50000"/>
+              </a:schemeClr>
+            </a:lnRef>
+            <a:fillRef idx="1">
+              <a:schemeClr val="accent1"/>
+            </a:fillRef>
+            <a:effectRef idx="0">
+              <a:schemeClr val="accent1"/>
+            </a:effectRef>
+            <a:fontRef idx="minor">
+              <a:schemeClr val="lt1"/>
+            </a:fontRef>
+          </p:style>
+          <p:txBody>
+            <a:bodyPr rtlCol="0" anchor="ctr"/>
+            <a:lstStyle/>
+            <a:p>
+              <a:pPr algn="ctr"/>
+              <a:endParaRPr lang="en-AU" sz="1372"/>
+            </a:p>
+          </p:txBody>
+        </p:sp>
+        <p:sp>
+          <p:nvSpPr>
+            <p:cNvPr id="39" name="TextBox 38"/>
+            <p:cNvSpPr txBox="1"/>
+            <p:nvPr/>
+          </p:nvSpPr>
+          <p:spPr>
+            <a:xfrm>
+              <a:off x="3337214" y="1863352"/>
+              <a:ext cx="623079" cy="305776"/>
+            </a:xfrm>
+            <a:prstGeom prst="rect">
+              <a:avLst/>
+            </a:prstGeom>
+            <a:noFill/>
+          </p:spPr>
+          <p:txBody>
+            <a:bodyPr wrap="none" rtlCol="0">
+              <a:spAutoFit/>
+            </a:bodyPr>
+            <a:lstStyle/>
+            <a:p>
+              <a:r>
+                <a:rPr lang="en-US" sz="914" dirty="0"/>
+                <a:t>Image</a:t>
+              </a:r>
+              <a:endParaRPr lang="en-AU" sz="914" dirty="0"/>
+            </a:p>
+          </p:txBody>
+        </p:sp>
+      </p:grpSp>
+      <p:sp>
+        <p:nvSpPr>
+          <p:cNvPr id="22" name="Folded Corner 21"/>
+          <p:cNvSpPr/>
+          <p:nvPr/>
+        </p:nvSpPr>
+        <p:spPr>
+          <a:xfrm>
+            <a:off x="3682362" y="869364"/>
+            <a:ext cx="831908" cy="525899"/>
+          </a:xfrm>
+          <a:prstGeom prst="foldedCorner">
+            <a:avLst/>
+          </a:prstGeom>
+        </p:spPr>
+        <p:style>
+          <a:lnRef idx="2">
+            <a:schemeClr val="accent1">
+              <a:shade val="50000"/>
+            </a:schemeClr>
+          </a:lnRef>
+          <a:fillRef idx="1">
+            <a:schemeClr val="accent1"/>
+          </a:fillRef>
+          <a:effectRef idx="0">
+            <a:schemeClr val="accent1"/>
+          </a:effectRef>
+          <a:fontRef idx="minor">
+            <a:schemeClr val="lt1"/>
+          </a:fontRef>
+        </p:style>
+        <p:txBody>
+          <a:bodyPr rtlCol="0" anchor="ctr"/>
+          <a:lstStyle/>
+          <a:p>
+            <a:pPr algn="ctr"/>
+            <a:r>
+              <a:rPr lang="en-US" sz="914" dirty="0">
+                <a:solidFill>
+                  <a:schemeClr val="tx1"/>
+                </a:solidFill>
+              </a:rPr>
+              <a:t>Questionnaire</a:t>
+            </a:r>
+            <a:endParaRPr lang="en-AU" sz="914" dirty="0">
+              <a:solidFill>
+                <a:schemeClr val="tx1"/>
+              </a:solidFill>
+            </a:endParaRPr>
+          </a:p>
+        </p:txBody>
+      </p:sp>
+      <p:sp>
+        <p:nvSpPr>
+          <p:cNvPr id="40" name="Left Arrow 39"/>
+          <p:cNvSpPr/>
+          <p:nvPr/>
+        </p:nvSpPr>
+        <p:spPr>
+          <a:xfrm rot="12961895">
+            <a:off x="3970934" y="2835936"/>
+            <a:ext cx="6352092" cy="363637"/>
+          </a:xfrm>
+          <a:prstGeom prst="leftArrow">
+            <a:avLst/>
+          </a:prstGeom>
+        </p:spPr>
+        <p:style>
+          <a:lnRef idx="2">
+            <a:schemeClr val="accent1">
+              <a:shade val="50000"/>
+            </a:schemeClr>
+          </a:lnRef>
+          <a:fillRef idx="1">
+            <a:schemeClr val="accent1"/>
+          </a:fillRef>
+          <a:effectRef idx="0">
+            <a:schemeClr val="accent1"/>
+          </a:effectRef>
+          <a:fontRef idx="minor">
+            <a:schemeClr val="lt1"/>
+          </a:fontRef>
+        </p:style>
+        <p:txBody>
+          <a:bodyPr rtlCol="0" anchor="ctr"/>
+          <a:lstStyle/>
+          <a:p>
+            <a:pPr algn="ctr"/>
+            <a:endParaRPr lang="en-AU" sz="1372"/>
+          </a:p>
+        </p:txBody>
+      </p:sp>
+      <p:sp>
+        <p:nvSpPr>
+          <p:cNvPr id="24" name="Rectangle 23"/>
+          <p:cNvSpPr/>
+          <p:nvPr/>
+        </p:nvSpPr>
+        <p:spPr>
+          <a:xfrm>
+            <a:off x="5994160" y="2503562"/>
+            <a:ext cx="1488804" cy="370773"/>
+          </a:xfrm>
+          <a:prstGeom prst="rect">
+            <a:avLst/>
+          </a:prstGeom>
+          <a:solidFill>
+            <a:schemeClr val="accent1">
+              <a:lumMod val="20000"/>
+              <a:lumOff val="80000"/>
+            </a:schemeClr>
+          </a:solidFill>
+        </p:spPr>
+        <p:style>
+          <a:lnRef idx="2">
+            <a:schemeClr val="accent1">
+              <a:shade val="50000"/>
+            </a:schemeClr>
+          </a:lnRef>
+          <a:fillRef idx="1">
+            <a:schemeClr val="accent1"/>
+          </a:fillRef>
+          <a:effectRef idx="0">
+            <a:schemeClr val="accent1"/>
+          </a:effectRef>
+          <a:fontRef idx="minor">
+            <a:schemeClr val="lt1"/>
+          </a:fontRef>
+        </p:style>
+        <p:txBody>
+          <a:bodyPr rtlCol="0" anchor="ctr"/>
+          <a:lstStyle/>
+          <a:p>
+            <a:r>
+              <a:rPr lang="en-US" sz="914" dirty="0">
+                <a:solidFill>
+                  <a:schemeClr val="tx1"/>
+                </a:solidFill>
+              </a:rPr>
+              <a:t>Concatenate 2 or 3 answers to questionnaire questions</a:t>
+            </a:r>
+            <a:endParaRPr lang="en-AU" sz="914" dirty="0">
+              <a:solidFill>
+                <a:schemeClr val="tx1"/>
+              </a:solidFill>
+            </a:endParaRPr>
+          </a:p>
+        </p:txBody>
+      </p:sp>
+      <p:grpSp>
+        <p:nvGrpSpPr>
+          <p:cNvPr id="25" name="Group 24"/>
+          <p:cNvGrpSpPr/>
+          <p:nvPr/>
+        </p:nvGrpSpPr>
+        <p:grpSpPr>
+          <a:xfrm>
+            <a:off x="9107228" y="4111837"/>
+            <a:ext cx="1596243" cy="397494"/>
+            <a:chOff x="4200525" y="2438400"/>
+            <a:chExt cx="2094700" cy="2984430"/>
+          </a:xfrm>
+        </p:grpSpPr>
+        <p:sp>
+          <p:nvSpPr>
+            <p:cNvPr id="27" name="Folded Corner 26"/>
+            <p:cNvSpPr/>
+            <p:nvPr/>
+          </p:nvSpPr>
+          <p:spPr>
+            <a:xfrm>
+              <a:off x="4200525" y="2438400"/>
+              <a:ext cx="2047875" cy="2892268"/>
+            </a:xfrm>
+            <a:prstGeom prst="foldedCorner">
+              <a:avLst/>
+            </a:prstGeom>
+            <a:solidFill>
+              <a:schemeClr val="accent1">
+                <a:lumMod val="20000"/>
+                <a:lumOff val="80000"/>
+              </a:schemeClr>
+            </a:solidFill>
+          </p:spPr>
+          <p:style>
+            <a:lnRef idx="2">
+              <a:schemeClr val="accent1">
+                <a:shade val="50000"/>
+              </a:schemeClr>
+            </a:lnRef>
+            <a:fillRef idx="1">
+              <a:schemeClr val="accent1"/>
+            </a:fillRef>
+            <a:effectRef idx="0">
+              <a:schemeClr val="accent1"/>
+            </a:effectRef>
+            <a:fontRef idx="minor">
+              <a:schemeClr val="lt1"/>
+            </a:fontRef>
+          </p:style>
+          <p:txBody>
+            <a:bodyPr rtlCol="0" anchor="ctr"/>
+            <a:lstStyle/>
+            <a:p>
+              <a:pPr algn="ctr"/>
+              <a:endParaRPr lang="en-AU" sz="1372" dirty="0"/>
+            </a:p>
+          </p:txBody>
+        </p:sp>
+        <p:sp>
+          <p:nvSpPr>
+            <p:cNvPr id="31" name="TextBox 30"/>
+            <p:cNvSpPr txBox="1"/>
+            <p:nvPr/>
+          </p:nvSpPr>
+          <p:spPr>
+            <a:xfrm>
+              <a:off x="4285895" y="2617108"/>
+              <a:ext cx="2009330" cy="2805722"/>
+            </a:xfrm>
+            <a:prstGeom prst="rect">
+              <a:avLst/>
+            </a:prstGeom>
+            <a:noFill/>
+          </p:spPr>
+          <p:txBody>
+            <a:bodyPr wrap="none" rtlCol="0">
+              <a:spAutoFit/>
+            </a:bodyPr>
+            <a:lstStyle/>
+            <a:p>
+              <a:r>
+                <a:rPr lang="en-US" sz="914" dirty="0"/>
+                <a:t>All Skin Concerns:</a:t>
+              </a:r>
+            </a:p>
+            <a:p>
+              <a:r>
+                <a:rPr lang="en-US" sz="914" dirty="0"/>
+                <a:t>Serum + Vitamin C + 8 hours</a:t>
+              </a:r>
+            </a:p>
+          </p:txBody>
+        </p:sp>
+      </p:grpSp>
+      <p:pic>
+        <p:nvPicPr>
+          <p:cNvPr id="32" name="Picture 31"/>
+          <p:cNvPicPr>
+            <a:picLocks noChangeAspect="1"/>
+          </p:cNvPicPr>
+          <p:nvPr/>
+        </p:nvPicPr>
+        <p:blipFill rotWithShape="1">
+          <a:blip r:embed="rId5" cstate="print">
+            <a:extLst>
+              <a:ext uri="{28A0092B-C50C-407E-A947-70E740481C1C}">
+                <a14:useLocalDpi xmlns:a14="http://schemas.microsoft.com/office/drawing/2010/main" val="0"/>
+              </a:ext>
+            </a:extLst>
+          </a:blip>
+          <a:srcRect t="28812" b="26164"/>
+          <a:stretch/>
+        </p:blipFill>
+        <p:spPr>
+          <a:xfrm>
+            <a:off x="6515890" y="507351"/>
+            <a:ext cx="1261387" cy="271709"/>
+          </a:xfrm>
+          <a:prstGeom prst="rect">
+            <a:avLst/>
+          </a:prstGeom>
+        </p:spPr>
+      </p:pic>
+    </p:spTree>
+    <p:extLst>
+      <p:ext uri="{BB962C8B-B14F-4D97-AF65-F5344CB8AC3E}">
+        <p14:creationId xmlns:p14="http://schemas.microsoft.com/office/powerpoint/2010/main" val="3082136242"/>
+      </p:ext>
+    </p:extLst>
+  </p:cSld>
+  <p:clrMapOvr>
+    <a:masterClrMapping/>
+  </p:clrMapOvr>
+  <p:timing>
+    <p:tnLst>
+      <p:par>
+        <p:cTn id="1" dur="indefinite" restart="never" nodeType="tmRoot"/>
+      </p:par>
+    </p:tnLst>
+  </p:timing>
+</p:sld>
+</file>
+
+<file path=ppt/slides/slide4.xml><?xml version="1.0" encoding="utf-8"?>
+<p:sld xmlns:a="http://schemas.openxmlformats.org/drawingml/2006/main" xmlns:r="http://schemas.openxmlformats.org/officeDocument/2006/relationships" xmlns:p="http://schemas.openxmlformats.org/presentationml/2006/main">
+  <p:cSld>
+    <p:spTree>
+      <p:nvGrpSpPr>
+        <p:cNvPr id="1" name=""/>
+        <p:cNvGrpSpPr/>
+        <p:nvPr/>
+      </p:nvGrpSpPr>
+      <p:grpSpPr>
+        <a:xfrm>
+          <a:off x="0" y="0"/>
+          <a:ext cx="0" cy="0"/>
+          <a:chOff x="0" y="0"/>
+          <a:chExt cx="0" cy="0"/>
+        </a:xfrm>
+      </p:grpSpPr>
+      <p:grpSp>
+        <p:nvGrpSpPr>
+          <p:cNvPr id="3" name="Group 2"/>
+          <p:cNvGrpSpPr/>
+          <p:nvPr/>
+        </p:nvGrpSpPr>
+        <p:grpSpPr>
+          <a:xfrm>
+            <a:off x="2539978" y="159685"/>
+            <a:ext cx="8434288" cy="5792222"/>
+            <a:chOff x="942975" y="419100"/>
+            <a:chExt cx="4981575" cy="7600950"/>
+          </a:xfrm>
+        </p:grpSpPr>
+        <p:sp>
+          <p:nvSpPr>
+            <p:cNvPr id="2" name="Rectangle 1"/>
+            <p:cNvSpPr/>
+            <p:nvPr/>
+          </p:nvSpPr>
+          <p:spPr>
+            <a:xfrm>
+              <a:off x="942975" y="419100"/>
+              <a:ext cx="4981575" cy="7600950"/>
+            </a:xfrm>
+            <a:prstGeom prst="rect">
+              <a:avLst/>
+            </a:prstGeom>
+            <a:solidFill>
+              <a:schemeClr val="accent6">
+                <a:lumMod val="20000"/>
+                <a:lumOff val="80000"/>
+              </a:schemeClr>
+            </a:solidFill>
+            <a:ln>
+              <a:solidFill>
+                <a:schemeClr val="tx1"/>
+              </a:solidFill>
+            </a:ln>
+          </p:spPr>
+          <p:style>
+            <a:lnRef idx="2">
+              <a:schemeClr val="accent1">
+                <a:shade val="50000"/>
+              </a:schemeClr>
+            </a:lnRef>
+            <a:fillRef idx="1">
+              <a:schemeClr val="accent1"/>
+            </a:fillRef>
+            <a:effectRef idx="0">
+              <a:schemeClr val="accent1"/>
+            </a:effectRef>
+            <a:fontRef idx="minor">
+              <a:schemeClr val="lt1"/>
+            </a:fontRef>
+          </p:style>
+          <p:txBody>
+            <a:bodyPr rtlCol="0" anchor="ctr"/>
+            <a:lstStyle/>
+            <a:p>
+              <a:pPr algn="ctr"/>
+              <a:endParaRPr lang="en-AU" sz="1372" dirty="0"/>
+            </a:p>
+          </p:txBody>
+        </p:sp>
+        <p:pic>
+          <p:nvPicPr>
+            <p:cNvPr id="30" name="Picture 29"/>
+            <p:cNvPicPr>
+              <a:picLocks noChangeAspect="1"/>
+            </p:cNvPicPr>
+            <p:nvPr/>
+          </p:nvPicPr>
+          <p:blipFill rotWithShape="1">
+            <a:blip r:embed="rId2" cstate="print">
+              <a:extLst>
+                <a:ext uri="{28A0092B-C50C-407E-A947-70E740481C1C}">
+                  <a14:useLocalDpi xmlns:a14="http://schemas.microsoft.com/office/drawing/2010/main" val="0"/>
+                </a:ext>
+              </a:extLst>
+            </a:blip>
+            <a:srcRect t="28812" b="26164"/>
+            <a:stretch/>
+          </p:blipFill>
+          <p:spPr>
+            <a:xfrm>
+              <a:off x="3291283" y="875330"/>
+              <a:ext cx="745018" cy="356555"/>
+            </a:xfrm>
+            <a:prstGeom prst="rect">
+              <a:avLst/>
+            </a:prstGeom>
+          </p:spPr>
+        </p:pic>
+      </p:grpSp>
+      <p:grpSp>
+        <p:nvGrpSpPr>
+          <p:cNvPr id="14" name="Group 13"/>
+          <p:cNvGrpSpPr/>
+          <p:nvPr/>
+        </p:nvGrpSpPr>
+        <p:grpSpPr>
+          <a:xfrm>
+            <a:off x="997563" y="921820"/>
+            <a:ext cx="301225" cy="399213"/>
+            <a:chOff x="8634412" y="1219200"/>
+            <a:chExt cx="676275" cy="933450"/>
+          </a:xfrm>
+        </p:grpSpPr>
+        <p:sp>
+          <p:nvSpPr>
+            <p:cNvPr id="5" name="Smiley Face 4"/>
+            <p:cNvSpPr/>
+            <p:nvPr/>
+          </p:nvSpPr>
+          <p:spPr>
+            <a:xfrm>
+              <a:off x="8753475" y="1219200"/>
+              <a:ext cx="438150" cy="428625"/>
+            </a:xfrm>
+            <a:prstGeom prst="smileyFace">
+              <a:avLst/>
+            </a:prstGeom>
+          </p:spPr>
+          <p:style>
+            <a:lnRef idx="2">
+              <a:schemeClr val="accent1">
+                <a:shade val="50000"/>
+              </a:schemeClr>
+            </a:lnRef>
+            <a:fillRef idx="1">
+              <a:schemeClr val="accent1"/>
+            </a:fillRef>
+            <a:effectRef idx="0">
+              <a:schemeClr val="accent1"/>
+            </a:effectRef>
+            <a:fontRef idx="minor">
+              <a:schemeClr val="lt1"/>
+            </a:fontRef>
+          </p:style>
+          <p:txBody>
+            <a:bodyPr rtlCol="0" anchor="ctr"/>
+            <a:lstStyle/>
+            <a:p>
+              <a:pPr algn="ctr"/>
+              <a:endParaRPr lang="en-AU" sz="1372"/>
+            </a:p>
+          </p:txBody>
+        </p:sp>
+        <p:sp>
+          <p:nvSpPr>
+            <p:cNvPr id="12" name="Snip Same Side Corner Rectangle 11"/>
+            <p:cNvSpPr/>
+            <p:nvPr/>
+          </p:nvSpPr>
+          <p:spPr>
+            <a:xfrm>
+              <a:off x="8634412" y="1647825"/>
+              <a:ext cx="676275" cy="504825"/>
+            </a:xfrm>
+            <a:prstGeom prst="snip2SameRect">
+              <a:avLst/>
+            </a:prstGeom>
+          </p:spPr>
+          <p:style>
+            <a:lnRef idx="2">
+              <a:schemeClr val="accent1">
+                <a:shade val="50000"/>
+              </a:schemeClr>
+            </a:lnRef>
+            <a:fillRef idx="1">
+              <a:schemeClr val="accent1"/>
+            </a:fillRef>
+            <a:effectRef idx="0">
+              <a:schemeClr val="accent1"/>
+            </a:effectRef>
+            <a:fontRef idx="minor">
+              <a:schemeClr val="lt1"/>
+            </a:fontRef>
+          </p:style>
+          <p:txBody>
+            <a:bodyPr rtlCol="0" anchor="ctr"/>
+            <a:lstStyle/>
+            <a:p>
+              <a:pPr algn="ctr"/>
+              <a:endParaRPr lang="en-AU" sz="1372"/>
+            </a:p>
+          </p:txBody>
+        </p:sp>
+      </p:grpSp>
+      <p:sp>
+        <p:nvSpPr>
+          <p:cNvPr id="15" name="Down Arrow 14"/>
+          <p:cNvSpPr/>
+          <p:nvPr/>
+        </p:nvSpPr>
+        <p:spPr>
+          <a:xfrm rot="16200000">
+            <a:off x="1921607" y="352035"/>
+            <a:ext cx="420989" cy="1560561"/>
+          </a:xfrm>
+          <a:prstGeom prst="downArrow">
+            <a:avLst/>
+          </a:prstGeom>
+        </p:spPr>
+        <p:style>
+          <a:lnRef idx="2">
+            <a:schemeClr val="accent1">
+              <a:shade val="50000"/>
+            </a:schemeClr>
+          </a:lnRef>
+          <a:fillRef idx="1">
+            <a:schemeClr val="accent1"/>
+          </a:fillRef>
+          <a:effectRef idx="0">
+            <a:schemeClr val="accent1"/>
+          </a:effectRef>
+          <a:fontRef idx="minor">
+            <a:schemeClr val="lt1"/>
+          </a:fontRef>
+        </p:style>
+        <p:txBody>
+          <a:bodyPr rtlCol="0" anchor="ctr"/>
+          <a:lstStyle/>
+          <a:p>
+            <a:pPr algn="ctr"/>
+            <a:endParaRPr lang="en-AU" sz="1372" dirty="0"/>
+          </a:p>
+        </p:txBody>
+      </p:sp>
+      <p:sp>
+        <p:nvSpPr>
+          <p:cNvPr id="16" name="TextBox 15"/>
+          <p:cNvSpPr txBox="1"/>
+          <p:nvPr/>
+        </p:nvSpPr>
+        <p:spPr>
+          <a:xfrm>
+            <a:off x="1793889" y="1026773"/>
+            <a:ext cx="489236" cy="233013"/>
+          </a:xfrm>
+          <a:prstGeom prst="rect">
+            <a:avLst/>
+          </a:prstGeom>
+          <a:noFill/>
+        </p:spPr>
+        <p:txBody>
+          <a:bodyPr wrap="none" rtlCol="0">
+            <a:spAutoFit/>
+          </a:bodyPr>
+          <a:lstStyle/>
+          <a:p>
+            <a:r>
+              <a:rPr lang="en-US" sz="914" dirty="0"/>
+              <a:t>L</a:t>
+            </a:r>
+            <a:r>
+              <a:rPr lang="en-US" sz="914" dirty="0"/>
+              <a:t>OGIN</a:t>
+            </a:r>
+            <a:endParaRPr lang="en-AU" sz="914" dirty="0"/>
+          </a:p>
+        </p:txBody>
+      </p:sp>
+      <p:pic>
+        <p:nvPicPr>
+          <p:cNvPr id="26" name="Picture 25"/>
+          <p:cNvPicPr>
+            <a:picLocks noChangeAspect="1"/>
+          </p:cNvPicPr>
+          <p:nvPr/>
+        </p:nvPicPr>
+        <p:blipFill>
+          <a:blip r:embed="rId3" cstate="print">
+            <a:extLst>
+              <a:ext uri="{28A0092B-C50C-407E-A947-70E740481C1C}">
+                <a14:useLocalDpi xmlns:a14="http://schemas.microsoft.com/office/drawing/2010/main" val="0"/>
+              </a:ext>
+            </a:extLst>
+          </a:blip>
+          <a:stretch>
+            <a:fillRect/>
+          </a:stretch>
+        </p:blipFill>
+        <p:spPr>
+          <a:xfrm>
+            <a:off x="8754034" y="4497056"/>
+            <a:ext cx="1340899" cy="1340899"/>
+          </a:xfrm>
+          <a:prstGeom prst="rect">
+            <a:avLst/>
+          </a:prstGeom>
+        </p:spPr>
+      </p:pic>
+      <p:pic>
+        <p:nvPicPr>
+          <p:cNvPr id="28" name="Picture 27"/>
+          <p:cNvPicPr>
+            <a:picLocks noChangeAspect="1"/>
+          </p:cNvPicPr>
+          <p:nvPr/>
+        </p:nvPicPr>
+        <p:blipFill>
+          <a:blip r:embed="rId4" cstate="print">
+            <a:extLst>
+              <a:ext uri="{28A0092B-C50C-407E-A947-70E740481C1C}">
+                <a14:useLocalDpi xmlns:a14="http://schemas.microsoft.com/office/drawing/2010/main" val="0"/>
+              </a:ext>
+            </a:extLst>
+          </a:blip>
+          <a:stretch>
+            <a:fillRect/>
+          </a:stretch>
+        </p:blipFill>
+        <p:spPr>
+          <a:xfrm>
+            <a:off x="10038427" y="4791312"/>
+            <a:ext cx="868805" cy="868805"/>
+          </a:xfrm>
+          <a:prstGeom prst="rect">
+            <a:avLst/>
+          </a:prstGeom>
+        </p:spPr>
+      </p:pic>
+      <p:pic>
+        <p:nvPicPr>
+          <p:cNvPr id="29" name="Picture 28"/>
+          <p:cNvPicPr>
+            <a:picLocks noChangeAspect="1"/>
+          </p:cNvPicPr>
+          <p:nvPr/>
+        </p:nvPicPr>
+        <p:blipFill>
+          <a:blip r:embed="rId5" cstate="print">
+            <a:extLst>
+              <a:ext uri="{28A0092B-C50C-407E-A947-70E740481C1C}">
+                <a14:useLocalDpi xmlns:a14="http://schemas.microsoft.com/office/drawing/2010/main" val="0"/>
+              </a:ext>
+            </a:extLst>
+          </a:blip>
+          <a:stretch>
+            <a:fillRect/>
+          </a:stretch>
+        </p:blipFill>
+        <p:spPr>
+          <a:xfrm rot="13345969">
+            <a:off x="9870005" y="4612532"/>
+            <a:ext cx="604688" cy="675930"/>
+          </a:xfrm>
+          <a:prstGeom prst="rect">
+            <a:avLst/>
+          </a:prstGeom>
+        </p:spPr>
+      </p:pic>
+      <p:grpSp>
+        <p:nvGrpSpPr>
+          <p:cNvPr id="37" name="Group 36"/>
+          <p:cNvGrpSpPr/>
+          <p:nvPr/>
+        </p:nvGrpSpPr>
+        <p:grpSpPr>
+          <a:xfrm>
+            <a:off x="6742459" y="3889229"/>
+            <a:ext cx="1560561" cy="1921167"/>
+            <a:chOff x="4200525" y="2413236"/>
+            <a:chExt cx="2047875" cy="3059062"/>
+          </a:xfrm>
+        </p:grpSpPr>
+        <p:sp>
+          <p:nvSpPr>
+            <p:cNvPr id="33" name="Folded Corner 32"/>
+            <p:cNvSpPr/>
+            <p:nvPr/>
+          </p:nvSpPr>
+          <p:spPr>
+            <a:xfrm>
+              <a:off x="4200525" y="2438400"/>
+              <a:ext cx="2047875" cy="2892268"/>
+            </a:xfrm>
+            <a:prstGeom prst="foldedCorner">
+              <a:avLst/>
+            </a:prstGeom>
+            <a:solidFill>
+              <a:schemeClr val="accent1">
+                <a:lumMod val="20000"/>
+                <a:lumOff val="80000"/>
+              </a:schemeClr>
+            </a:solidFill>
+          </p:spPr>
+          <p:style>
+            <a:lnRef idx="2">
+              <a:schemeClr val="accent1">
+                <a:shade val="50000"/>
+              </a:schemeClr>
+            </a:lnRef>
+            <a:fillRef idx="1">
+              <a:schemeClr val="accent1"/>
+            </a:fillRef>
+            <a:effectRef idx="0">
+              <a:schemeClr val="accent1"/>
+            </a:effectRef>
+            <a:fontRef idx="minor">
+              <a:schemeClr val="lt1"/>
+            </a:fontRef>
+          </p:style>
+          <p:txBody>
+            <a:bodyPr rtlCol="0" anchor="ctr"/>
+            <a:lstStyle/>
+            <a:p>
+              <a:pPr algn="ctr"/>
+              <a:endParaRPr lang="en-AU" sz="1372" dirty="0"/>
+            </a:p>
+          </p:txBody>
+        </p:sp>
+        <p:sp>
+          <p:nvSpPr>
+            <p:cNvPr id="35" name="TextBox 34"/>
+            <p:cNvSpPr txBox="1"/>
+            <p:nvPr/>
+          </p:nvSpPr>
+          <p:spPr>
+            <a:xfrm>
+              <a:off x="4414067" y="2413236"/>
+              <a:ext cx="1810333" cy="3059062"/>
+            </a:xfrm>
+            <a:prstGeom prst="rect">
+              <a:avLst/>
+            </a:prstGeom>
+            <a:noFill/>
+          </p:spPr>
+          <p:txBody>
+            <a:bodyPr wrap="none" rtlCol="0">
+              <a:spAutoFit/>
+            </a:bodyPr>
+            <a:lstStyle/>
+            <a:p>
+              <a:r>
+                <a:rPr lang="en-US" sz="914" dirty="0"/>
+                <a:t>All Skin Concerns:</a:t>
+              </a:r>
+            </a:p>
+            <a:p>
+              <a:pPr marL="130645" indent="-130645">
+                <a:buFont typeface="Arial" panose="020B0604020202020204" pitchFamily="34" charset="0"/>
+                <a:buChar char="•"/>
+              </a:pPr>
+              <a:r>
+                <a:rPr lang="en-US" sz="914" dirty="0"/>
+                <a:t>SC00x + SC10y + …</a:t>
+              </a:r>
+            </a:p>
+            <a:p>
+              <a:endParaRPr lang="en-US" sz="914" dirty="0"/>
+            </a:p>
+            <a:p>
+              <a:r>
+                <a:rPr lang="en-US" sz="914" dirty="0"/>
+                <a:t>Actives:</a:t>
+              </a:r>
+            </a:p>
+            <a:p>
+              <a:pPr marL="130645" indent="-130645">
+                <a:buFont typeface="Arial" panose="020B0604020202020204" pitchFamily="34" charset="0"/>
+                <a:buChar char="•"/>
+              </a:pPr>
+              <a:r>
+                <a:rPr lang="en-US" sz="914" dirty="0"/>
+                <a:t>Active a + Active b + …</a:t>
+              </a:r>
+            </a:p>
+            <a:p>
+              <a:r>
+                <a:rPr lang="en-US" sz="914" dirty="0"/>
+                <a:t>Base:</a:t>
+              </a:r>
+            </a:p>
+            <a:p>
+              <a:pPr marL="130645" indent="-130645">
+                <a:buFont typeface="Arial" panose="020B0604020202020204" pitchFamily="34" charset="0"/>
+                <a:buChar char="•"/>
+              </a:pPr>
+              <a:r>
+                <a:rPr lang="en-US" sz="914" dirty="0"/>
+                <a:t>Base n</a:t>
+              </a:r>
+            </a:p>
+            <a:p>
+              <a:endParaRPr lang="en-US" sz="914" dirty="0"/>
+            </a:p>
+            <a:p>
+              <a:r>
+                <a:rPr lang="en-US" sz="914" dirty="0"/>
+                <a:t>AI Explanation:</a:t>
+              </a:r>
+              <a:endParaRPr lang="en-US" sz="914" dirty="0"/>
+            </a:p>
+            <a:p>
+              <a:pPr marL="130645" indent="-130645">
+                <a:buFont typeface="Arial" panose="020B0604020202020204" pitchFamily="34" charset="0"/>
+                <a:buChar char="•"/>
+              </a:pPr>
+              <a:r>
+                <a:rPr lang="en-US" sz="914" dirty="0"/>
+                <a:t>Summation of </a:t>
+              </a:r>
+            </a:p>
+            <a:p>
+              <a:r>
+                <a:rPr lang="en-US" sz="914" dirty="0"/>
+                <a:t> </a:t>
+              </a:r>
+              <a:r>
+                <a:rPr lang="en-US" sz="914" dirty="0"/>
+                <a:t>    AI Explanation Texts</a:t>
+              </a:r>
+            </a:p>
+            <a:p>
+              <a:endParaRPr lang="en-US" sz="914" dirty="0"/>
+            </a:p>
+            <a:p>
+              <a:r>
+                <a:rPr lang="en-US" sz="914" strike="sngStrike" dirty="0"/>
+                <a:t>Price: $20</a:t>
+              </a:r>
+              <a:endParaRPr lang="en-AU" sz="914" strike="sngStrike" dirty="0"/>
+            </a:p>
+          </p:txBody>
+        </p:sp>
+      </p:grpSp>
+      <p:sp>
+        <p:nvSpPr>
+          <p:cNvPr id="41" name="Rectangle 40"/>
+          <p:cNvSpPr/>
+          <p:nvPr/>
+        </p:nvSpPr>
+        <p:spPr>
+          <a:xfrm>
+            <a:off x="2950967" y="710863"/>
+            <a:ext cx="1897189" cy="859659"/>
+          </a:xfrm>
+          <a:prstGeom prst="rect">
+            <a:avLst/>
+          </a:prstGeom>
+          <a:solidFill>
+            <a:schemeClr val="accent1">
+              <a:lumMod val="20000"/>
+              <a:lumOff val="80000"/>
+            </a:schemeClr>
+          </a:solidFill>
+        </p:spPr>
+        <p:style>
+          <a:lnRef idx="2">
+            <a:schemeClr val="accent1">
+              <a:shade val="50000"/>
+            </a:schemeClr>
+          </a:lnRef>
+          <a:fillRef idx="1">
+            <a:schemeClr val="accent1"/>
+          </a:fillRef>
+          <a:effectRef idx="0">
+            <a:schemeClr val="accent1"/>
+          </a:effectRef>
+          <a:fontRef idx="minor">
+            <a:schemeClr val="lt1"/>
+          </a:fontRef>
+        </p:style>
+        <p:txBody>
+          <a:bodyPr rtlCol="0" anchor="ctr"/>
+          <a:lstStyle/>
+          <a:p>
+            <a:pPr algn="ctr"/>
+            <a:endParaRPr lang="en-AU" sz="1372"/>
+          </a:p>
+        </p:txBody>
+      </p:sp>
+      <p:grpSp>
+        <p:nvGrpSpPr>
+          <p:cNvPr id="20" name="Group 19"/>
+          <p:cNvGrpSpPr/>
+          <p:nvPr/>
+        </p:nvGrpSpPr>
+        <p:grpSpPr>
+          <a:xfrm>
+            <a:off x="3045164" y="869364"/>
+            <a:ext cx="474810" cy="547828"/>
+            <a:chOff x="3337214" y="1450230"/>
+            <a:chExt cx="623079" cy="718898"/>
+          </a:xfrm>
+        </p:grpSpPr>
+        <p:sp>
+          <p:nvSpPr>
+            <p:cNvPr id="17" name="Frame 16"/>
+            <p:cNvSpPr/>
+            <p:nvPr/>
+          </p:nvSpPr>
+          <p:spPr>
+            <a:xfrm>
+              <a:off x="3337214" y="1450230"/>
+              <a:ext cx="568104" cy="690121"/>
+            </a:xfrm>
+            <a:prstGeom prst="frame">
+              <a:avLst/>
+            </a:prstGeom>
+          </p:spPr>
+          <p:style>
+            <a:lnRef idx="2">
+              <a:schemeClr val="accent1">
+                <a:shade val="50000"/>
+              </a:schemeClr>
+            </a:lnRef>
+            <a:fillRef idx="1">
+              <a:schemeClr val="accent1"/>
+            </a:fillRef>
+            <a:effectRef idx="0">
+              <a:schemeClr val="accent1"/>
+            </a:effectRef>
+            <a:fontRef idx="minor">
+              <a:schemeClr val="lt1"/>
+            </a:fontRef>
+          </p:style>
+          <p:txBody>
+            <a:bodyPr rtlCol="0" anchor="ctr"/>
+            <a:lstStyle/>
+            <a:p>
+              <a:pPr algn="ctr"/>
+              <a:endParaRPr lang="en-AU" sz="1372">
+                <a:solidFill>
+                  <a:schemeClr val="tx1"/>
+                </a:solidFill>
+              </a:endParaRPr>
+            </a:p>
+          </p:txBody>
+        </p:sp>
+        <p:sp>
+          <p:nvSpPr>
+            <p:cNvPr id="19" name="Smiley Face 18"/>
+            <p:cNvSpPr/>
+            <p:nvPr/>
+          </p:nvSpPr>
+          <p:spPr>
+            <a:xfrm>
+              <a:off x="3476950" y="1577604"/>
+              <a:ext cx="276225" cy="295273"/>
+            </a:xfrm>
+            <a:prstGeom prst="smileyFace">
+              <a:avLst/>
+            </a:prstGeom>
+          </p:spPr>
+          <p:style>
+            <a:lnRef idx="2">
+              <a:schemeClr val="accent1">
+                <a:shade val="50000"/>
+              </a:schemeClr>
+            </a:lnRef>
+            <a:fillRef idx="1">
+              <a:schemeClr val="accent1"/>
+            </a:fillRef>
+            <a:effectRef idx="0">
+              <a:schemeClr val="accent1"/>
+            </a:effectRef>
+            <a:fontRef idx="minor">
+              <a:schemeClr val="lt1"/>
+            </a:fontRef>
+          </p:style>
+          <p:txBody>
+            <a:bodyPr rtlCol="0" anchor="ctr"/>
+            <a:lstStyle/>
+            <a:p>
+              <a:pPr algn="ctr"/>
+              <a:endParaRPr lang="en-AU" sz="1372"/>
+            </a:p>
+          </p:txBody>
+        </p:sp>
+        <p:sp>
+          <p:nvSpPr>
+            <p:cNvPr id="39" name="TextBox 38"/>
+            <p:cNvSpPr txBox="1"/>
+            <p:nvPr/>
+          </p:nvSpPr>
+          <p:spPr>
+            <a:xfrm>
+              <a:off x="3337214" y="1863352"/>
+              <a:ext cx="623079" cy="305776"/>
+            </a:xfrm>
+            <a:prstGeom prst="rect">
+              <a:avLst/>
+            </a:prstGeom>
+            <a:noFill/>
+          </p:spPr>
+          <p:txBody>
+            <a:bodyPr wrap="none" rtlCol="0">
+              <a:spAutoFit/>
+            </a:bodyPr>
+            <a:lstStyle/>
+            <a:p>
+              <a:r>
+                <a:rPr lang="en-US" sz="914" dirty="0"/>
+                <a:t>Image</a:t>
+              </a:r>
+              <a:endParaRPr lang="en-AU" sz="914" dirty="0"/>
+            </a:p>
+          </p:txBody>
+        </p:sp>
+      </p:grpSp>
+      <p:sp>
+        <p:nvSpPr>
+          <p:cNvPr id="22" name="Folded Corner 21"/>
+          <p:cNvSpPr/>
+          <p:nvPr/>
+        </p:nvSpPr>
+        <p:spPr>
+          <a:xfrm>
+            <a:off x="3841979" y="869364"/>
+            <a:ext cx="831908" cy="525899"/>
+          </a:xfrm>
+          <a:prstGeom prst="foldedCorner">
+            <a:avLst/>
+          </a:prstGeom>
+        </p:spPr>
+        <p:style>
+          <a:lnRef idx="2">
+            <a:schemeClr val="accent1">
+              <a:shade val="50000"/>
+            </a:schemeClr>
+          </a:lnRef>
+          <a:fillRef idx="1">
+            <a:schemeClr val="accent1"/>
+          </a:fillRef>
+          <a:effectRef idx="0">
+            <a:schemeClr val="accent1"/>
+          </a:effectRef>
+          <a:fontRef idx="minor">
+            <a:schemeClr val="lt1"/>
+          </a:fontRef>
+        </p:style>
+        <p:txBody>
+          <a:bodyPr rtlCol="0" anchor="ctr"/>
+          <a:lstStyle/>
+          <a:p>
+            <a:pPr algn="ctr"/>
+            <a:r>
+              <a:rPr lang="en-US" sz="914" dirty="0">
+                <a:solidFill>
+                  <a:schemeClr val="tx1"/>
+                </a:solidFill>
+              </a:rPr>
+              <a:t>Questionnaire</a:t>
+            </a:r>
+            <a:endParaRPr lang="en-AU" sz="914" dirty="0">
+              <a:solidFill>
+                <a:schemeClr val="tx1"/>
+              </a:solidFill>
+            </a:endParaRPr>
+          </a:p>
+        </p:txBody>
+      </p:sp>
+      <p:sp>
+        <p:nvSpPr>
+          <p:cNvPr id="40" name="Left Arrow 39"/>
+          <p:cNvSpPr/>
+          <p:nvPr/>
+        </p:nvSpPr>
+        <p:spPr>
+          <a:xfrm rot="16200000">
+            <a:off x="3094753" y="1435828"/>
+            <a:ext cx="339542" cy="286262"/>
+          </a:xfrm>
+          <a:prstGeom prst="leftArrow">
+            <a:avLst/>
+          </a:prstGeom>
+        </p:spPr>
+        <p:style>
+          <a:lnRef idx="2">
+            <a:schemeClr val="accent1">
+              <a:shade val="50000"/>
+            </a:schemeClr>
+          </a:lnRef>
+          <a:fillRef idx="1">
+            <a:schemeClr val="accent1"/>
+          </a:fillRef>
+          <a:effectRef idx="0">
+            <a:schemeClr val="accent1"/>
+          </a:effectRef>
+          <a:fontRef idx="minor">
+            <a:schemeClr val="lt1"/>
+          </a:fontRef>
+        </p:style>
+        <p:txBody>
+          <a:bodyPr rtlCol="0" anchor="ctr"/>
+          <a:lstStyle/>
+          <a:p>
+            <a:pPr algn="ctr"/>
+            <a:endParaRPr lang="en-AU" sz="1372" dirty="0"/>
+          </a:p>
+        </p:txBody>
+      </p:sp>
+      <p:sp>
+        <p:nvSpPr>
+          <p:cNvPr id="42" name="Rounded Rectangle 41"/>
+          <p:cNvSpPr/>
+          <p:nvPr/>
+        </p:nvSpPr>
+        <p:spPr>
+          <a:xfrm>
+            <a:off x="2949561" y="1744554"/>
+            <a:ext cx="672808" cy="228263"/>
+          </a:xfrm>
+          <a:prstGeom prst="roundRect">
+            <a:avLst/>
+          </a:prstGeom>
+        </p:spPr>
+        <p:style>
+          <a:lnRef idx="2">
+            <a:schemeClr val="accent1">
+              <a:shade val="50000"/>
+            </a:schemeClr>
+          </a:lnRef>
+          <a:fillRef idx="1">
+            <a:schemeClr val="accent1"/>
+          </a:fillRef>
+          <a:effectRef idx="0">
+            <a:schemeClr val="accent1"/>
+          </a:effectRef>
+          <a:fontRef idx="minor">
+            <a:schemeClr val="lt1"/>
+          </a:fontRef>
+        </p:style>
+        <p:txBody>
+          <a:bodyPr rtlCol="0" anchor="ctr"/>
+          <a:lstStyle/>
+          <a:p>
+            <a:pPr algn="ctr"/>
+            <a:r>
+              <a:rPr lang="en-US" sz="914" dirty="0"/>
+              <a:t>Visual AI</a:t>
+            </a:r>
+            <a:endParaRPr lang="en-AU" sz="914" dirty="0"/>
+          </a:p>
+        </p:txBody>
+      </p:sp>
+      <p:sp>
+        <p:nvSpPr>
+          <p:cNvPr id="58" name="Left Arrow 57"/>
+          <p:cNvSpPr/>
+          <p:nvPr/>
+        </p:nvSpPr>
+        <p:spPr>
+          <a:xfrm rot="16200000">
+            <a:off x="3110972" y="1985715"/>
+            <a:ext cx="327942" cy="322058"/>
+          </a:xfrm>
+          <a:prstGeom prst="leftArrow">
+            <a:avLst/>
+          </a:prstGeom>
+        </p:spPr>
+        <p:style>
+          <a:lnRef idx="2">
+            <a:schemeClr val="accent1">
+              <a:shade val="50000"/>
+            </a:schemeClr>
+          </a:lnRef>
+          <a:fillRef idx="1">
+            <a:schemeClr val="accent1"/>
+          </a:fillRef>
+          <a:effectRef idx="0">
+            <a:schemeClr val="accent1"/>
+          </a:effectRef>
+          <a:fontRef idx="minor">
+            <a:schemeClr val="lt1"/>
+          </a:fontRef>
+        </p:style>
+        <p:txBody>
+          <a:bodyPr rtlCol="0" anchor="ctr"/>
+          <a:lstStyle/>
+          <a:p>
+            <a:pPr algn="ctr"/>
+            <a:endParaRPr lang="en-AU" sz="1372"/>
+          </a:p>
+        </p:txBody>
+      </p:sp>
+      <p:sp>
+        <p:nvSpPr>
+          <p:cNvPr id="43" name="Rectangle 42"/>
+          <p:cNvSpPr/>
+          <p:nvPr/>
+        </p:nvSpPr>
+        <p:spPr>
+          <a:xfrm>
+            <a:off x="2706922" y="2293660"/>
+            <a:ext cx="1246083" cy="379001"/>
+          </a:xfrm>
+          <a:prstGeom prst="rect">
+            <a:avLst/>
+          </a:prstGeom>
+          <a:solidFill>
+            <a:schemeClr val="accent1">
+              <a:lumMod val="20000"/>
+              <a:lumOff val="80000"/>
+            </a:schemeClr>
+          </a:solidFill>
+        </p:spPr>
+        <p:style>
+          <a:lnRef idx="2">
+            <a:schemeClr val="accent1">
+              <a:shade val="50000"/>
+            </a:schemeClr>
+          </a:lnRef>
+          <a:fillRef idx="1">
+            <a:schemeClr val="accent1"/>
+          </a:fillRef>
+          <a:effectRef idx="0">
+            <a:schemeClr val="accent1"/>
+          </a:effectRef>
+          <a:fontRef idx="minor">
+            <a:schemeClr val="lt1"/>
+          </a:fontRef>
+        </p:style>
+        <p:txBody>
+          <a:bodyPr rtlCol="0" anchor="ctr"/>
+          <a:lstStyle/>
+          <a:p>
+            <a:pPr marL="130645" indent="-130645">
+              <a:buFont typeface="Arial" panose="020B0604020202020204" pitchFamily="34" charset="0"/>
+              <a:buChar char="•"/>
+            </a:pPr>
+            <a:r>
+              <a:rPr lang="en-US" sz="914" dirty="0">
+                <a:solidFill>
+                  <a:schemeClr val="tx1"/>
+                </a:solidFill>
+              </a:rPr>
+              <a:t>Visual Skin Concerns</a:t>
+            </a:r>
+          </a:p>
+          <a:p>
+            <a:r>
+              <a:rPr lang="en-US" sz="914" dirty="0">
+                <a:solidFill>
+                  <a:schemeClr val="tx1"/>
+                </a:solidFill>
+              </a:rPr>
+              <a:t>     + AI Explanations</a:t>
+            </a:r>
+            <a:endParaRPr lang="en-AU" sz="914" dirty="0">
+              <a:solidFill>
+                <a:schemeClr val="tx1"/>
+              </a:solidFill>
+            </a:endParaRPr>
+          </a:p>
+        </p:txBody>
+      </p:sp>
+      <p:sp>
+        <p:nvSpPr>
+          <p:cNvPr id="59" name="Left Arrow 58"/>
+          <p:cNvSpPr/>
+          <p:nvPr/>
+        </p:nvSpPr>
+        <p:spPr>
+          <a:xfrm rot="16200000">
+            <a:off x="3598393" y="2031580"/>
+            <a:ext cx="1582600" cy="309962"/>
+          </a:xfrm>
+          <a:prstGeom prst="leftArrow">
+            <a:avLst/>
+          </a:prstGeom>
+        </p:spPr>
+        <p:style>
+          <a:lnRef idx="2">
+            <a:schemeClr val="accent1">
+              <a:shade val="50000"/>
+            </a:schemeClr>
+          </a:lnRef>
+          <a:fillRef idx="1">
+            <a:schemeClr val="accent1"/>
+          </a:fillRef>
+          <a:effectRef idx="0">
+            <a:schemeClr val="accent1"/>
+          </a:effectRef>
+          <a:fontRef idx="minor">
+            <a:schemeClr val="lt1"/>
+          </a:fontRef>
+        </p:style>
+        <p:txBody>
+          <a:bodyPr rtlCol="0" anchor="ctr"/>
+          <a:lstStyle/>
+          <a:p>
+            <a:pPr algn="ctr"/>
+            <a:endParaRPr lang="en-AU" sz="1372"/>
+          </a:p>
+        </p:txBody>
+      </p:sp>
+      <p:grpSp>
+        <p:nvGrpSpPr>
+          <p:cNvPr id="47" name="Group 46"/>
+          <p:cNvGrpSpPr/>
+          <p:nvPr/>
+        </p:nvGrpSpPr>
+        <p:grpSpPr>
+          <a:xfrm>
+            <a:off x="3545175" y="3653703"/>
+            <a:ext cx="2359285" cy="407993"/>
+            <a:chOff x="2951322" y="3685146"/>
+            <a:chExt cx="3096015" cy="535396"/>
+          </a:xfrm>
+        </p:grpSpPr>
+        <p:sp>
+          <p:nvSpPr>
+            <p:cNvPr id="60" name="Rounded Rectangle 59"/>
+            <p:cNvSpPr/>
+            <p:nvPr/>
+          </p:nvSpPr>
+          <p:spPr>
+            <a:xfrm>
+              <a:off x="2951322" y="3690688"/>
+              <a:ext cx="2425306" cy="529854"/>
+            </a:xfrm>
+            <a:prstGeom prst="roundRect">
+              <a:avLst/>
+            </a:prstGeom>
+          </p:spPr>
+          <p:style>
+            <a:lnRef idx="2">
+              <a:schemeClr val="accent1">
+                <a:shade val="50000"/>
+              </a:schemeClr>
+            </a:lnRef>
+            <a:fillRef idx="1">
+              <a:schemeClr val="accent1"/>
+            </a:fillRef>
+            <a:effectRef idx="0">
+              <a:schemeClr val="accent1"/>
+            </a:effectRef>
+            <a:fontRef idx="minor">
+              <a:schemeClr val="lt1"/>
+            </a:fontRef>
+          </p:style>
+          <p:txBody>
+            <a:bodyPr rtlCol="0" anchor="ctr"/>
+            <a:lstStyle/>
+            <a:p>
+              <a:pPr algn="ctr"/>
+              <a:r>
+                <a:rPr lang="en-US" sz="914" dirty="0"/>
+                <a:t>  LLM    .  </a:t>
+              </a:r>
+              <a:endParaRPr lang="en-AU" sz="914" dirty="0"/>
+            </a:p>
+          </p:txBody>
+        </p:sp>
+        <p:sp>
+          <p:nvSpPr>
+            <p:cNvPr id="68" name="Left Arrow 67"/>
+            <p:cNvSpPr/>
+            <p:nvPr/>
+          </p:nvSpPr>
+          <p:spPr>
+            <a:xfrm>
+              <a:off x="5040693" y="3718773"/>
+              <a:ext cx="472314" cy="426053"/>
+            </a:xfrm>
+            <a:prstGeom prst="leftArrow">
+              <a:avLst/>
+            </a:prstGeom>
+            <a:solidFill>
+              <a:schemeClr val="accent1">
+                <a:lumMod val="60000"/>
+                <a:lumOff val="40000"/>
+              </a:schemeClr>
+            </a:solidFill>
+          </p:spPr>
+          <p:style>
+            <a:lnRef idx="2">
+              <a:schemeClr val="accent1">
+                <a:shade val="50000"/>
+              </a:schemeClr>
+            </a:lnRef>
+            <a:fillRef idx="1">
+              <a:schemeClr val="accent1"/>
+            </a:fillRef>
+            <a:effectRef idx="0">
+              <a:schemeClr val="accent1"/>
+            </a:effectRef>
+            <a:fontRef idx="minor">
+              <a:schemeClr val="lt1"/>
+            </a:fontRef>
+          </p:style>
+          <p:txBody>
+            <a:bodyPr rtlCol="0" anchor="ctr"/>
+            <a:lstStyle/>
+            <a:p>
+              <a:pPr algn="ctr"/>
+              <a:endParaRPr lang="en-AU" sz="1372"/>
+            </a:p>
+          </p:txBody>
+        </p:sp>
+        <p:sp>
+          <p:nvSpPr>
+            <p:cNvPr id="67" name="Rounded Rectangle 66"/>
+            <p:cNvSpPr/>
+            <p:nvPr/>
+          </p:nvSpPr>
+          <p:spPr>
+            <a:xfrm>
+              <a:off x="5383997" y="3685146"/>
+              <a:ext cx="663340" cy="529854"/>
+            </a:xfrm>
+            <a:prstGeom prst="roundRect">
+              <a:avLst/>
+            </a:prstGeom>
+          </p:spPr>
+          <p:style>
+            <a:lnRef idx="2">
+              <a:schemeClr val="accent1">
+                <a:shade val="50000"/>
+              </a:schemeClr>
+            </a:lnRef>
+            <a:fillRef idx="1">
+              <a:schemeClr val="accent1"/>
+            </a:fillRef>
+            <a:effectRef idx="0">
+              <a:schemeClr val="accent1"/>
+            </a:effectRef>
+            <a:fontRef idx="minor">
+              <a:schemeClr val="lt1"/>
+            </a:fontRef>
+          </p:style>
+          <p:txBody>
+            <a:bodyPr rtlCol="0" anchor="ctr"/>
+            <a:lstStyle/>
+            <a:p>
+              <a:pPr algn="ctr"/>
+              <a:r>
+                <a:rPr lang="en-US" sz="914" dirty="0" err="1"/>
+                <a:t>CelRev</a:t>
+              </a:r>
+              <a:endParaRPr lang="en-US" sz="914" dirty="0"/>
+            </a:p>
+            <a:p>
+              <a:pPr algn="ctr"/>
+              <a:r>
+                <a:rPr lang="en-US" sz="914" dirty="0"/>
+                <a:t>RAG</a:t>
+              </a:r>
+              <a:endParaRPr lang="en-AU" sz="914" dirty="0"/>
+            </a:p>
+          </p:txBody>
+        </p:sp>
+      </p:grpSp>
+      <p:sp>
+        <p:nvSpPr>
+          <p:cNvPr id="46" name="TextBox 45"/>
+          <p:cNvSpPr txBox="1"/>
+          <p:nvPr/>
+        </p:nvSpPr>
+        <p:spPr>
+          <a:xfrm>
+            <a:off x="3141436" y="1342810"/>
+            <a:ext cx="259927" cy="303481"/>
+          </a:xfrm>
+          <a:prstGeom prst="rect">
+            <a:avLst/>
+          </a:prstGeom>
+          <a:noFill/>
+        </p:spPr>
+        <p:txBody>
+          <a:bodyPr wrap="square" rtlCol="0">
+            <a:spAutoFit/>
+          </a:bodyPr>
+          <a:lstStyle/>
+          <a:p>
+            <a:r>
+              <a:rPr lang="en-US" sz="1372" b="1" dirty="0">
+                <a:solidFill>
+                  <a:srgbClr val="FF0000"/>
+                </a:solidFill>
+                <a:effectLst>
+                  <a:outerShdw blurRad="38100" dist="38100" dir="2700000" algn="tl">
+                    <a:srgbClr val="000000">
+                      <a:alpha val="43137"/>
+                    </a:srgbClr>
+                  </a:outerShdw>
+                </a:effectLst>
+              </a:rPr>
+              <a:t>1</a:t>
+            </a:r>
+            <a:endParaRPr lang="en-AU" sz="1372" b="1" dirty="0">
+              <a:solidFill>
+                <a:srgbClr val="FF0000"/>
+              </a:solidFill>
+              <a:effectLst>
+                <a:outerShdw blurRad="38100" dist="38100" dir="2700000" algn="tl">
+                  <a:srgbClr val="000000">
+                    <a:alpha val="43137"/>
+                  </a:srgbClr>
+                </a:outerShdw>
+              </a:effectLst>
+            </a:endParaRPr>
+          </a:p>
+        </p:txBody>
+      </p:sp>
+      <p:sp>
+        <p:nvSpPr>
+          <p:cNvPr id="83" name="TextBox 82"/>
+          <p:cNvSpPr txBox="1"/>
+          <p:nvPr/>
+        </p:nvSpPr>
+        <p:spPr>
+          <a:xfrm>
+            <a:off x="3152321" y="1969738"/>
+            <a:ext cx="274434" cy="303481"/>
+          </a:xfrm>
+          <a:prstGeom prst="rect">
+            <a:avLst/>
+          </a:prstGeom>
+          <a:noFill/>
+        </p:spPr>
+        <p:txBody>
+          <a:bodyPr wrap="none" rtlCol="0">
+            <a:spAutoFit/>
+          </a:bodyPr>
+          <a:lstStyle/>
+          <a:p>
+            <a:r>
+              <a:rPr lang="en-US" sz="1372" b="1" dirty="0">
+                <a:solidFill>
+                  <a:srgbClr val="FF0000"/>
+                </a:solidFill>
+                <a:effectLst>
+                  <a:outerShdw blurRad="38100" dist="38100" dir="2700000" algn="tl">
+                    <a:srgbClr val="000000">
+                      <a:alpha val="43137"/>
+                    </a:srgbClr>
+                  </a:outerShdw>
+                </a:effectLst>
+              </a:rPr>
+              <a:t>2</a:t>
+            </a:r>
+            <a:endParaRPr lang="en-AU" sz="1372" b="1" dirty="0">
+              <a:solidFill>
+                <a:srgbClr val="FF0000"/>
+              </a:solidFill>
+              <a:effectLst>
+                <a:outerShdw blurRad="38100" dist="38100" dir="2700000" algn="tl">
+                  <a:srgbClr val="000000">
+                    <a:alpha val="43137"/>
+                  </a:srgbClr>
+                </a:outerShdw>
+              </a:effectLst>
+            </a:endParaRPr>
+          </a:p>
+        </p:txBody>
+      </p:sp>
+      <p:sp>
+        <p:nvSpPr>
+          <p:cNvPr id="86" name="Left Arrow 85"/>
+          <p:cNvSpPr/>
+          <p:nvPr/>
+        </p:nvSpPr>
+        <p:spPr>
+          <a:xfrm rot="16200000">
+            <a:off x="3163522" y="2638422"/>
+            <a:ext cx="327942" cy="322058"/>
+          </a:xfrm>
+          <a:prstGeom prst="leftArrow">
+            <a:avLst/>
+          </a:prstGeom>
+        </p:spPr>
+        <p:style>
+          <a:lnRef idx="2">
+            <a:schemeClr val="accent1">
+              <a:shade val="50000"/>
+            </a:schemeClr>
+          </a:lnRef>
+          <a:fillRef idx="1">
+            <a:schemeClr val="accent1"/>
+          </a:fillRef>
+          <a:effectRef idx="0">
+            <a:schemeClr val="accent1"/>
+          </a:effectRef>
+          <a:fontRef idx="minor">
+            <a:schemeClr val="lt1"/>
+          </a:fontRef>
+        </p:style>
+        <p:txBody>
+          <a:bodyPr rtlCol="0" anchor="ctr"/>
+          <a:lstStyle/>
+          <a:p>
+            <a:pPr algn="ctr"/>
+            <a:endParaRPr lang="en-AU" sz="1372"/>
+          </a:p>
+        </p:txBody>
+      </p:sp>
+      <p:sp>
+        <p:nvSpPr>
+          <p:cNvPr id="90" name="Rectangle 89"/>
+          <p:cNvSpPr/>
+          <p:nvPr/>
+        </p:nvSpPr>
+        <p:spPr>
+          <a:xfrm>
+            <a:off x="3641079" y="4377966"/>
+            <a:ext cx="1969212" cy="725347"/>
+          </a:xfrm>
+          <a:prstGeom prst="rect">
+            <a:avLst/>
+          </a:prstGeom>
+          <a:solidFill>
+            <a:schemeClr val="accent1">
+              <a:lumMod val="20000"/>
+              <a:lumOff val="80000"/>
+            </a:schemeClr>
+          </a:solidFill>
+        </p:spPr>
+        <p:style>
+          <a:lnRef idx="2">
+            <a:schemeClr val="accent1">
+              <a:shade val="50000"/>
+            </a:schemeClr>
+          </a:lnRef>
+          <a:fillRef idx="1">
+            <a:schemeClr val="accent1"/>
+          </a:fillRef>
+          <a:effectRef idx="0">
+            <a:schemeClr val="accent1"/>
+          </a:effectRef>
+          <a:fontRef idx="minor">
+            <a:schemeClr val="lt1"/>
+          </a:fontRef>
+        </p:style>
+        <p:txBody>
+          <a:bodyPr rtlCol="0" anchor="ctr"/>
+          <a:lstStyle/>
+          <a:p>
+            <a:pPr marL="130645" indent="-130645">
+              <a:buFont typeface="Arial" panose="020B0604020202020204" pitchFamily="34" charset="0"/>
+              <a:buChar char="•"/>
+            </a:pPr>
+            <a:r>
+              <a:rPr lang="en-US" sz="914" dirty="0">
+                <a:solidFill>
+                  <a:schemeClr val="tx1"/>
+                </a:solidFill>
+              </a:rPr>
+              <a:t>All Skin Concerns + </a:t>
+            </a:r>
+            <a:r>
+              <a:rPr lang="en-US" sz="914" dirty="0">
+                <a:solidFill>
+                  <a:schemeClr val="tx1"/>
+                </a:solidFill>
+              </a:rPr>
+              <a:t>AI Explanations</a:t>
+            </a:r>
+            <a:endParaRPr lang="en-US" sz="914" dirty="0">
+              <a:solidFill>
+                <a:schemeClr val="tx1"/>
+              </a:solidFill>
+            </a:endParaRPr>
+          </a:p>
+          <a:p>
+            <a:pPr marL="130645" indent="-130645">
+              <a:buFont typeface="Arial" panose="020B0604020202020204" pitchFamily="34" charset="0"/>
+              <a:buChar char="•"/>
+            </a:pPr>
+            <a:r>
+              <a:rPr lang="en-US" sz="914" dirty="0">
+                <a:solidFill>
+                  <a:schemeClr val="tx1"/>
+                </a:solidFill>
+              </a:rPr>
+              <a:t>List of bases + </a:t>
+            </a:r>
+            <a:r>
+              <a:rPr lang="en-US" sz="914" dirty="0">
+                <a:solidFill>
+                  <a:schemeClr val="tx1"/>
+                </a:solidFill>
+              </a:rPr>
+              <a:t>AI Explanations</a:t>
+            </a:r>
+            <a:endParaRPr lang="en-US" sz="914" dirty="0">
+              <a:solidFill>
+                <a:schemeClr val="tx1"/>
+              </a:solidFill>
+            </a:endParaRPr>
+          </a:p>
+          <a:p>
+            <a:pPr marL="130645" indent="-130645">
+              <a:buFont typeface="Arial" panose="020B0604020202020204" pitchFamily="34" charset="0"/>
+              <a:buChar char="•"/>
+            </a:pPr>
+            <a:r>
+              <a:rPr lang="en-US" sz="914" dirty="0">
+                <a:solidFill>
+                  <a:schemeClr val="tx1"/>
+                </a:solidFill>
+              </a:rPr>
+              <a:t>Actives + </a:t>
+            </a:r>
+            <a:r>
+              <a:rPr lang="en-US" sz="914" dirty="0">
+                <a:solidFill>
+                  <a:schemeClr val="tx1"/>
+                </a:solidFill>
+              </a:rPr>
+              <a:t>AI Explanations</a:t>
+            </a:r>
+            <a:endParaRPr lang="en-US" sz="914" dirty="0">
+              <a:solidFill>
+                <a:schemeClr val="tx1"/>
+              </a:solidFill>
+            </a:endParaRPr>
+          </a:p>
+          <a:p>
+            <a:pPr marL="558568" lvl="1" indent="-130645">
+              <a:buFont typeface="Courier New" panose="02070309020205020404" pitchFamily="49" charset="0"/>
+              <a:buChar char="o"/>
+            </a:pPr>
+            <a:r>
+              <a:rPr lang="en-US" sz="914" dirty="0">
+                <a:solidFill>
+                  <a:schemeClr val="tx1"/>
+                </a:solidFill>
+              </a:rPr>
+              <a:t>compatible to </a:t>
+            </a:r>
+            <a:r>
+              <a:rPr lang="en-US" sz="914" dirty="0">
+                <a:solidFill>
+                  <a:schemeClr val="tx1"/>
+                </a:solidFill>
+              </a:rPr>
+              <a:t>bases</a:t>
+            </a:r>
+          </a:p>
+          <a:p>
+            <a:pPr marL="558568" lvl="1" indent="-130645">
+              <a:buFont typeface="Courier New" panose="02070309020205020404" pitchFamily="49" charset="0"/>
+              <a:buChar char="o"/>
+            </a:pPr>
+            <a:r>
+              <a:rPr lang="en-US" sz="914" dirty="0">
+                <a:solidFill>
+                  <a:schemeClr val="tx1"/>
+                </a:solidFill>
+              </a:rPr>
+              <a:t>effective for skin concerns</a:t>
+            </a:r>
+          </a:p>
+        </p:txBody>
+      </p:sp>
+      <p:sp>
+        <p:nvSpPr>
+          <p:cNvPr id="91" name="Left Arrow 90"/>
+          <p:cNvSpPr/>
+          <p:nvPr/>
+        </p:nvSpPr>
+        <p:spPr>
+          <a:xfrm rot="16200000">
+            <a:off x="3583254" y="3929463"/>
+            <a:ext cx="541217" cy="318877"/>
+          </a:xfrm>
+          <a:prstGeom prst="leftArrow">
+            <a:avLst/>
+          </a:prstGeom>
+        </p:spPr>
+        <p:style>
+          <a:lnRef idx="2">
+            <a:schemeClr val="accent1">
+              <a:shade val="50000"/>
+            </a:schemeClr>
+          </a:lnRef>
+          <a:fillRef idx="1">
+            <a:schemeClr val="accent1"/>
+          </a:fillRef>
+          <a:effectRef idx="0">
+            <a:schemeClr val="accent1"/>
+          </a:effectRef>
+          <a:fontRef idx="minor">
+            <a:schemeClr val="lt1"/>
+          </a:fontRef>
+        </p:style>
+        <p:txBody>
+          <a:bodyPr rtlCol="0" anchor="ctr"/>
+          <a:lstStyle/>
+          <a:p>
+            <a:pPr algn="ctr"/>
+            <a:endParaRPr lang="en-AU" sz="1372"/>
+          </a:p>
+        </p:txBody>
+      </p:sp>
+      <p:sp>
+        <p:nvSpPr>
+          <p:cNvPr id="92" name="TextBox 91"/>
+          <p:cNvSpPr txBox="1"/>
+          <p:nvPr/>
+        </p:nvSpPr>
+        <p:spPr>
+          <a:xfrm>
+            <a:off x="3730689" y="4026634"/>
+            <a:ext cx="274434" cy="303481"/>
+          </a:xfrm>
+          <a:prstGeom prst="rect">
+            <a:avLst/>
+          </a:prstGeom>
+          <a:noFill/>
+        </p:spPr>
+        <p:txBody>
+          <a:bodyPr wrap="none" rtlCol="0">
+            <a:spAutoFit/>
+          </a:bodyPr>
+          <a:lstStyle/>
+          <a:p>
+            <a:r>
+              <a:rPr lang="en-US" sz="1372" b="1" dirty="0">
+                <a:solidFill>
+                  <a:srgbClr val="FF0000"/>
+                </a:solidFill>
+                <a:effectLst>
+                  <a:outerShdw blurRad="38100" dist="38100" dir="2700000" algn="tl">
+                    <a:srgbClr val="000000">
+                      <a:alpha val="43137"/>
+                    </a:srgbClr>
+                  </a:outerShdw>
+                </a:effectLst>
+              </a:rPr>
+              <a:t>4</a:t>
+            </a:r>
+            <a:endParaRPr lang="en-AU" sz="1372" b="1" dirty="0">
+              <a:solidFill>
+                <a:srgbClr val="FF0000"/>
+              </a:solidFill>
+              <a:effectLst>
+                <a:outerShdw blurRad="38100" dist="38100" dir="2700000" algn="tl">
+                  <a:srgbClr val="000000">
+                    <a:alpha val="43137"/>
+                  </a:srgbClr>
+                </a:outerShdw>
+              </a:effectLst>
+            </a:endParaRPr>
+          </a:p>
+        </p:txBody>
+      </p:sp>
+      <p:sp>
+        <p:nvSpPr>
+          <p:cNvPr id="54" name="Half Frame 53"/>
+          <p:cNvSpPr/>
+          <p:nvPr/>
+        </p:nvSpPr>
+        <p:spPr>
+          <a:xfrm rot="13475004">
+            <a:off x="3431497" y="2441386"/>
+            <a:ext cx="871663" cy="880726"/>
+          </a:xfrm>
+          <a:prstGeom prst="halfFrame">
+            <a:avLst>
+              <a:gd name="adj1" fmla="val 11711"/>
+              <a:gd name="adj2" fmla="val 13527"/>
+            </a:avLst>
+          </a:prstGeom>
+        </p:spPr>
+        <p:style>
+          <a:lnRef idx="2">
+            <a:schemeClr val="accent1">
+              <a:shade val="50000"/>
+            </a:schemeClr>
+          </a:lnRef>
+          <a:fillRef idx="1">
+            <a:schemeClr val="accent1"/>
+          </a:fillRef>
+          <a:effectRef idx="0">
+            <a:schemeClr val="accent1"/>
+          </a:effectRef>
+          <a:fontRef idx="minor">
+            <a:schemeClr val="lt1"/>
+          </a:fontRef>
+        </p:style>
+        <p:txBody>
+          <a:bodyPr rtlCol="0" anchor="ctr"/>
+          <a:lstStyle/>
+          <a:p>
+            <a:pPr algn="ctr"/>
+            <a:endParaRPr lang="en-AU" sz="1372">
+              <a:solidFill>
+                <a:schemeClr val="tx1"/>
+              </a:solidFill>
+            </a:endParaRPr>
+          </a:p>
+        </p:txBody>
+      </p:sp>
+      <p:sp>
+        <p:nvSpPr>
+          <p:cNvPr id="97" name="Left Arrow 96"/>
+          <p:cNvSpPr/>
+          <p:nvPr/>
+        </p:nvSpPr>
+        <p:spPr>
+          <a:xfrm rot="16200000">
+            <a:off x="3621881" y="3393495"/>
+            <a:ext cx="480140" cy="354264"/>
+          </a:xfrm>
+          <a:prstGeom prst="leftArrow">
+            <a:avLst/>
+          </a:prstGeom>
+        </p:spPr>
+        <p:style>
+          <a:lnRef idx="2">
+            <a:schemeClr val="accent1">
+              <a:shade val="50000"/>
+            </a:schemeClr>
+          </a:lnRef>
+          <a:fillRef idx="1">
+            <a:schemeClr val="accent1"/>
+          </a:fillRef>
+          <a:effectRef idx="0">
+            <a:schemeClr val="accent1"/>
+          </a:effectRef>
+          <a:fontRef idx="minor">
+            <a:schemeClr val="lt1"/>
+          </a:fontRef>
+        </p:style>
+        <p:txBody>
+          <a:bodyPr rtlCol="0" anchor="ctr"/>
+          <a:lstStyle/>
+          <a:p>
+            <a:pPr algn="ctr"/>
+            <a:endParaRPr lang="en-AU" sz="1372"/>
+          </a:p>
+        </p:txBody>
+      </p:sp>
+      <p:sp>
+        <p:nvSpPr>
+          <p:cNvPr id="98" name="TextBox 97"/>
+          <p:cNvSpPr txBox="1"/>
+          <p:nvPr/>
+        </p:nvSpPr>
+        <p:spPr>
+          <a:xfrm>
+            <a:off x="3730689" y="3350072"/>
+            <a:ext cx="273820" cy="303481"/>
+          </a:xfrm>
+          <a:prstGeom prst="rect">
+            <a:avLst/>
+          </a:prstGeom>
+          <a:noFill/>
+        </p:spPr>
+        <p:txBody>
+          <a:bodyPr wrap="square" rtlCol="0">
+            <a:spAutoFit/>
+          </a:bodyPr>
+          <a:lstStyle/>
+          <a:p>
+            <a:r>
+              <a:rPr lang="en-US" sz="1372" b="1" dirty="0">
+                <a:solidFill>
+                  <a:srgbClr val="FF0000"/>
+                </a:solidFill>
+                <a:effectLst>
+                  <a:outerShdw blurRad="38100" dist="38100" dir="2700000" algn="tl">
+                    <a:srgbClr val="000000">
+                      <a:alpha val="43137"/>
+                    </a:srgbClr>
+                  </a:outerShdw>
+                </a:effectLst>
+              </a:rPr>
+              <a:t>3</a:t>
+            </a:r>
+            <a:endParaRPr lang="en-AU" sz="1372" b="1" dirty="0">
+              <a:solidFill>
+                <a:srgbClr val="FF0000"/>
+              </a:solidFill>
+              <a:effectLst>
+                <a:outerShdw blurRad="38100" dist="38100" dir="2700000" algn="tl">
+                  <a:srgbClr val="000000">
+                    <a:alpha val="43137"/>
+                  </a:srgbClr>
+                </a:outerShdw>
+              </a:effectLst>
+            </a:endParaRPr>
+          </a:p>
+        </p:txBody>
+      </p:sp>
+      <p:sp>
+        <p:nvSpPr>
+          <p:cNvPr id="99" name="Left Arrow 98"/>
+          <p:cNvSpPr/>
+          <p:nvPr/>
+        </p:nvSpPr>
+        <p:spPr>
+          <a:xfrm rot="10800000">
+            <a:off x="5610291" y="4523976"/>
+            <a:ext cx="1189030" cy="309962"/>
+          </a:xfrm>
+          <a:prstGeom prst="leftArrow">
+            <a:avLst/>
+          </a:prstGeom>
+        </p:spPr>
+        <p:style>
+          <a:lnRef idx="2">
+            <a:schemeClr val="accent1">
+              <a:shade val="50000"/>
+            </a:schemeClr>
+          </a:lnRef>
+          <a:fillRef idx="1">
+            <a:schemeClr val="accent1"/>
+          </a:fillRef>
+          <a:effectRef idx="0">
+            <a:schemeClr val="accent1"/>
+          </a:effectRef>
+          <a:fontRef idx="minor">
+            <a:schemeClr val="lt1"/>
+          </a:fontRef>
+        </p:style>
+        <p:txBody>
+          <a:bodyPr rtlCol="0" anchor="ctr"/>
+          <a:lstStyle/>
+          <a:p>
+            <a:pPr algn="ctr"/>
+            <a:endParaRPr lang="en-AU" sz="1372"/>
+          </a:p>
+        </p:txBody>
+      </p:sp>
+      <p:sp>
+        <p:nvSpPr>
+          <p:cNvPr id="100" name="TextBox 99"/>
+          <p:cNvSpPr txBox="1"/>
+          <p:nvPr/>
+        </p:nvSpPr>
+        <p:spPr>
+          <a:xfrm>
+            <a:off x="5850540" y="4573415"/>
+            <a:ext cx="710451" cy="233013"/>
+          </a:xfrm>
+          <a:prstGeom prst="rect">
+            <a:avLst/>
+          </a:prstGeom>
+          <a:noFill/>
+        </p:spPr>
+        <p:txBody>
+          <a:bodyPr wrap="none" rtlCol="0">
+            <a:spAutoFit/>
+          </a:bodyPr>
+          <a:lstStyle/>
+          <a:p>
+            <a:r>
+              <a:rPr lang="en-US" sz="914" dirty="0"/>
+              <a:t>Formatting</a:t>
+            </a:r>
+            <a:endParaRPr lang="en-AU" sz="914" dirty="0"/>
+          </a:p>
+        </p:txBody>
+      </p:sp>
+      <p:sp>
+        <p:nvSpPr>
+          <p:cNvPr id="101" name="Left Arrow 100"/>
+          <p:cNvSpPr/>
+          <p:nvPr/>
+        </p:nvSpPr>
+        <p:spPr>
+          <a:xfrm rot="10800000">
+            <a:off x="8313665" y="4512963"/>
+            <a:ext cx="1724761" cy="320974"/>
+          </a:xfrm>
+          <a:prstGeom prst="leftArrow">
+            <a:avLst/>
+          </a:prstGeom>
+        </p:spPr>
+        <p:style>
+          <a:lnRef idx="2">
+            <a:schemeClr val="accent1">
+              <a:shade val="50000"/>
+            </a:schemeClr>
+          </a:lnRef>
+          <a:fillRef idx="1">
+            <a:schemeClr val="accent1"/>
+          </a:fillRef>
+          <a:effectRef idx="0">
+            <a:schemeClr val="accent1"/>
+          </a:effectRef>
+          <a:fontRef idx="minor">
+            <a:schemeClr val="lt1"/>
+          </a:fontRef>
+        </p:style>
+        <p:txBody>
+          <a:bodyPr rtlCol="0" anchor="ctr"/>
+          <a:lstStyle/>
+          <a:p>
+            <a:pPr algn="ctr"/>
+            <a:endParaRPr lang="en-AU" sz="1372"/>
+          </a:p>
+        </p:txBody>
+      </p:sp>
+      <p:sp>
+        <p:nvSpPr>
+          <p:cNvPr id="102" name="TextBox 101"/>
+          <p:cNvSpPr txBox="1"/>
+          <p:nvPr/>
+        </p:nvSpPr>
+        <p:spPr>
+          <a:xfrm>
+            <a:off x="8403302" y="4566516"/>
+            <a:ext cx="1510350" cy="233013"/>
+          </a:xfrm>
+          <a:prstGeom prst="rect">
+            <a:avLst/>
+          </a:prstGeom>
+          <a:noFill/>
+        </p:spPr>
+        <p:txBody>
+          <a:bodyPr wrap="none" rtlCol="0">
+            <a:spAutoFit/>
+          </a:bodyPr>
+          <a:lstStyle/>
+          <a:p>
+            <a:r>
+              <a:rPr lang="en-US" sz="914" dirty="0"/>
+              <a:t>To check out/ shopping cart</a:t>
+            </a:r>
+            <a:endParaRPr lang="en-AU" sz="914" dirty="0"/>
+          </a:p>
+        </p:txBody>
+      </p:sp>
+      <p:sp>
+        <p:nvSpPr>
+          <p:cNvPr id="103" name="TextBox 102"/>
+          <p:cNvSpPr txBox="1"/>
+          <p:nvPr/>
+        </p:nvSpPr>
+        <p:spPr>
+          <a:xfrm>
+            <a:off x="6037883" y="4349334"/>
+            <a:ext cx="274434" cy="303481"/>
+          </a:xfrm>
+          <a:prstGeom prst="rect">
+            <a:avLst/>
+          </a:prstGeom>
+          <a:noFill/>
+        </p:spPr>
+        <p:txBody>
+          <a:bodyPr wrap="none" rtlCol="0">
+            <a:spAutoFit/>
+          </a:bodyPr>
+          <a:lstStyle/>
+          <a:p>
+            <a:r>
+              <a:rPr lang="en-US" sz="1372" b="1" dirty="0">
+                <a:solidFill>
+                  <a:srgbClr val="FF0000"/>
+                </a:solidFill>
+                <a:effectLst>
+                  <a:outerShdw blurRad="38100" dist="38100" dir="2700000" algn="tl">
+                    <a:srgbClr val="000000">
+                      <a:alpha val="43137"/>
+                    </a:srgbClr>
+                  </a:outerShdw>
+                </a:effectLst>
+              </a:rPr>
+              <a:t>5</a:t>
+            </a:r>
+            <a:endParaRPr lang="en-AU" sz="1372" b="1" dirty="0">
+              <a:solidFill>
+                <a:srgbClr val="FF0000"/>
+              </a:solidFill>
+              <a:effectLst>
+                <a:outerShdw blurRad="38100" dist="38100" dir="2700000" algn="tl">
+                  <a:srgbClr val="000000">
+                    <a:alpha val="43137"/>
+                  </a:srgbClr>
+                </a:outerShdw>
+              </a:effectLst>
+            </a:endParaRPr>
+          </a:p>
+        </p:txBody>
+      </p:sp>
+      <p:sp>
+        <p:nvSpPr>
+          <p:cNvPr id="104" name="TextBox 103"/>
+          <p:cNvSpPr txBox="1"/>
+          <p:nvPr/>
+        </p:nvSpPr>
+        <p:spPr>
+          <a:xfrm>
+            <a:off x="9120491" y="4332245"/>
+            <a:ext cx="274434" cy="303481"/>
+          </a:xfrm>
+          <a:prstGeom prst="rect">
+            <a:avLst/>
+          </a:prstGeom>
+          <a:noFill/>
+        </p:spPr>
+        <p:txBody>
+          <a:bodyPr wrap="none" rtlCol="0">
+            <a:spAutoFit/>
+          </a:bodyPr>
+          <a:lstStyle/>
+          <a:p>
+            <a:r>
+              <a:rPr lang="en-US" sz="1372" b="1" dirty="0">
+                <a:solidFill>
+                  <a:srgbClr val="FF0000"/>
+                </a:solidFill>
+                <a:effectLst>
+                  <a:outerShdw blurRad="38100" dist="38100" dir="2700000" algn="tl">
+                    <a:srgbClr val="000000">
+                      <a:alpha val="43137"/>
+                    </a:srgbClr>
+                  </a:outerShdw>
+                </a:effectLst>
+              </a:rPr>
+              <a:t>6</a:t>
+            </a:r>
+            <a:endParaRPr lang="en-AU" sz="1372" b="1" dirty="0">
+              <a:solidFill>
+                <a:srgbClr val="FF0000"/>
+              </a:solidFill>
+              <a:effectLst>
+                <a:outerShdw blurRad="38100" dist="38100" dir="2700000" algn="tl">
+                  <a:srgbClr val="000000">
+                    <a:alpha val="43137"/>
+                  </a:srgbClr>
+                </a:outerShdw>
+              </a:effectLst>
+            </a:endParaRPr>
+          </a:p>
+        </p:txBody>
+      </p:sp>
+      <p:sp>
+        <p:nvSpPr>
+          <p:cNvPr id="105" name="Rectangle 104"/>
+          <p:cNvSpPr/>
+          <p:nvPr/>
+        </p:nvSpPr>
+        <p:spPr>
+          <a:xfrm>
+            <a:off x="4090240" y="1850305"/>
+            <a:ext cx="720286" cy="205629"/>
+          </a:xfrm>
+          <a:prstGeom prst="rect">
+            <a:avLst/>
+          </a:prstGeom>
+          <a:solidFill>
+            <a:schemeClr val="accent1">
+              <a:lumMod val="20000"/>
+              <a:lumOff val="80000"/>
+            </a:schemeClr>
+          </a:solidFill>
+        </p:spPr>
+        <p:style>
+          <a:lnRef idx="2">
+            <a:schemeClr val="accent1">
+              <a:shade val="50000"/>
+            </a:schemeClr>
+          </a:lnRef>
+          <a:fillRef idx="1">
+            <a:schemeClr val="accent1"/>
+          </a:fillRef>
+          <a:effectRef idx="0">
+            <a:schemeClr val="accent1"/>
+          </a:effectRef>
+          <a:fontRef idx="minor">
+            <a:schemeClr val="lt1"/>
+          </a:fontRef>
+        </p:style>
+        <p:txBody>
+          <a:bodyPr rtlCol="0" anchor="ctr"/>
+          <a:lstStyle/>
+          <a:p>
+            <a:pPr marL="130645" indent="-130645">
+              <a:buFont typeface="Arial" panose="020B0604020202020204" pitchFamily="34" charset="0"/>
+              <a:buChar char="•"/>
+            </a:pPr>
+            <a:r>
+              <a:rPr lang="en-US" sz="914" dirty="0">
+                <a:solidFill>
+                  <a:schemeClr val="tx1"/>
+                </a:solidFill>
+              </a:rPr>
+              <a:t>Answers</a:t>
+            </a:r>
+            <a:endParaRPr lang="en-AU" sz="914" dirty="0">
+              <a:solidFill>
+                <a:schemeClr val="tx1"/>
+              </a:solidFill>
+            </a:endParaRPr>
+          </a:p>
+        </p:txBody>
+      </p:sp>
+      <p:sp>
+        <p:nvSpPr>
+          <p:cNvPr id="106" name="TextBox 105"/>
+          <p:cNvSpPr txBox="1"/>
+          <p:nvPr/>
+        </p:nvSpPr>
+        <p:spPr>
+          <a:xfrm>
+            <a:off x="976295" y="1288445"/>
+            <a:ext cx="404278" cy="233013"/>
+          </a:xfrm>
+          <a:prstGeom prst="rect">
+            <a:avLst/>
+          </a:prstGeom>
+          <a:noFill/>
+        </p:spPr>
+        <p:txBody>
+          <a:bodyPr wrap="none" rtlCol="0">
+            <a:spAutoFit/>
+          </a:bodyPr>
+          <a:lstStyle/>
+          <a:p>
+            <a:r>
+              <a:rPr lang="en-US" sz="914" dirty="0"/>
+              <a:t>User</a:t>
+            </a:r>
+            <a:endParaRPr lang="en-AU" sz="914" dirty="0"/>
+          </a:p>
+        </p:txBody>
+      </p:sp>
+    </p:spTree>
+    <p:extLst>
+      <p:ext uri="{BB962C8B-B14F-4D97-AF65-F5344CB8AC3E}">
+        <p14:creationId xmlns:p14="http://schemas.microsoft.com/office/powerpoint/2010/main" val="2239038504"/>
+      </p:ext>
+    </p:extLst>
+  </p:cSld>
+  <p:clrMapOvr>
+    <a:masterClrMapping/>
+  </p:clrMapOvr>
+  <p:timing>
+    <p:tnLst>
+      <p:par>
+        <p:cTn id="1" dur="indefinite" restart="never" nodeType="tmRoot"/>
+      </p:par>
+    </p:tnLst>
+  </p:timing>
 </p:sld>
 </file>
 

--- a/architecture/architecture.pptx
+++ b/architecture/architecture.pptx
@@ -3064,11 +3064,7 @@
           <a:p>
             <a:r>
               <a:rPr lang="en-US" sz="1260" b="1" dirty="0"/>
-              <a:t>Existing                       </a:t>
-            </a:r>
-            <a:r>
-              <a:rPr lang="en-US" sz="1260" b="1" dirty="0"/>
-              <a:t>Frontend</a:t>
+              <a:t>Existing                       Frontend</a:t>
             </a:r>
             <a:endParaRPr lang="en-AU" sz="1260" b="1" dirty="0"/>
           </a:p>
@@ -3348,23 +3344,7 @@
             </a:pPr>
             <a:r>
               <a:rPr lang="en-US" sz="1260" dirty="0"/>
-              <a:t>Purchase </a:t>
-            </a:r>
-            <a:r>
-              <a:rPr lang="en-US" sz="1260" dirty="0"/>
-              <a:t>- Card </a:t>
-            </a:r>
-            <a:r>
-              <a:rPr lang="en-US" sz="1260" dirty="0"/>
-              <a:t>etc. </a:t>
-            </a:r>
-            <a:r>
-              <a:rPr lang="en-US" sz="1260" dirty="0"/>
-              <a:t>(Issues</a:t>
-            </a:r>
-            <a:r>
-              <a:rPr lang="en-US" sz="1260" dirty="0"/>
-              <a:t>)</a:t>
+              <a:t>Purchase - Card etc. (Issues)</a:t>
             </a:r>
           </a:p>
         </p:txBody>
@@ -3511,11 +3491,7 @@
           <a:p>
             <a:r>
               <a:rPr lang="en-US" sz="1260" b="1" dirty="0"/>
-              <a:t>API</a:t>
-            </a:r>
-            <a:r>
-              <a:rPr lang="en-US" sz="1260" b="1" dirty="0"/>
-              <a:t>/ Backend Services</a:t>
+              <a:t>API/ Backend Services</a:t>
             </a:r>
             <a:endParaRPr lang="en-AU" sz="1260" b="1" dirty="0"/>
           </a:p>
@@ -3556,11 +3532,7 @@
             </a:r>
             <a:r>
               <a:rPr lang="en-US" sz="1260" dirty="0"/>
-              <a:t> </a:t>
-            </a:r>
-            <a:r>
-              <a:rPr lang="en-US" sz="1260" dirty="0"/>
-              <a:t>Service</a:t>
+              <a:t> Service</a:t>
             </a:r>
           </a:p>
           <a:p>
@@ -3586,13 +3558,8 @@
             </a:pPr>
             <a:r>
               <a:rPr lang="en-US" sz="1260" dirty="0"/>
-              <a:t>Shopping </a:t>
-            </a:r>
-            <a:r>
-              <a:rPr lang="en-US" sz="1260" dirty="0"/>
-              <a:t>Cart</a:t>
-            </a:r>
-            <a:endParaRPr lang="en-US" sz="1260" dirty="0"/>
+              <a:t>Shopping Cart</a:t>
+            </a:r>
           </a:p>
           <a:p>
             <a:pPr marL="257174" indent="-257174">
@@ -3999,7 +3966,6 @@
               <a:rPr lang="en-US" sz="1260" dirty="0"/>
               <a:t>        Image, Questionnaire &amp; Profile based</a:t>
             </a:r>
-            <a:endParaRPr lang="en-US" sz="1260" dirty="0"/>
           </a:p>
           <a:p>
             <a:pPr marL="257174" indent="-257174">
@@ -4026,7 +3992,6 @@
               <a:rPr lang="en-US" sz="1260" dirty="0"/>
               <a:t>Profile API (?)</a:t>
             </a:r>
-            <a:endParaRPr lang="en-US" sz="1260" dirty="0"/>
           </a:p>
           <a:p>
             <a:pPr marL="257174" indent="-257174">
@@ -4040,7 +4005,6 @@
               <a:rPr lang="en-US" sz="1260" dirty="0"/>
               <a:t>Support &amp; Returns API (?)</a:t>
             </a:r>
-            <a:endParaRPr lang="en-US" sz="1260" dirty="0"/>
           </a:p>
         </p:txBody>
       </p:sp>
@@ -5716,11 +5680,7 @@
           <a:p>
             <a:r>
               <a:rPr lang="en-US" sz="914" dirty="0"/>
-              <a:t>L</a:t>
-            </a:r>
-            <a:r>
-              <a:rPr lang="en-US" sz="914" dirty="0"/>
-              <a:t>OGIN</a:t>
+              <a:t>LOGIN</a:t>
             </a:r>
             <a:endParaRPr lang="en-AU" sz="914" dirty="0"/>
           </a:p>
@@ -5824,8 +5784,8 @@
         </p:nvSpPr>
         <p:spPr>
           <a:xfrm>
-            <a:off x="2950967" y="447319"/>
-            <a:ext cx="2146268" cy="1531527"/>
+            <a:off x="2950967" y="702860"/>
+            <a:ext cx="1812102" cy="880280"/>
           </a:xfrm>
           <a:prstGeom prst="rect">
             <a:avLst/>
@@ -5870,10 +5830,10 @@
         </p:nvGrpSpPr>
         <p:grpSpPr>
           <a:xfrm>
-            <a:off x="3045164" y="869364"/>
-            <a:ext cx="474810" cy="547828"/>
+            <a:off x="3045165" y="869364"/>
+            <a:ext cx="473206" cy="545647"/>
             <a:chOff x="3337214" y="1450230"/>
-            <a:chExt cx="623079" cy="718898"/>
+            <a:chExt cx="620974" cy="716036"/>
           </a:xfrm>
         </p:grpSpPr>
         <p:sp>
@@ -5912,7 +5872,7 @@
             <a:lstStyle/>
             <a:p>
               <a:pPr algn="ctr"/>
-              <a:endParaRPr lang="en-AU" sz="1372">
+              <a:endParaRPr lang="en-AU" sz="1200">
                 <a:solidFill>
                   <a:schemeClr val="tx1"/>
                 </a:solidFill>
@@ -5956,7 +5916,7 @@
             <a:lstStyle/>
             <a:p>
               <a:pPr algn="ctr"/>
-              <a:endParaRPr lang="en-AU" sz="1372"/>
+              <a:endParaRPr lang="en-AU" sz="1200"/>
             </a:p>
           </p:txBody>
         </p:sp>
@@ -5969,7 +5929,7 @@
           <p:spPr>
             <a:xfrm>
               <a:off x="3337214" y="1863352"/>
-              <a:ext cx="623079" cy="305776"/>
+              <a:ext cx="620974" cy="302914"/>
             </a:xfrm>
             <a:prstGeom prst="rect">
               <a:avLst/>
@@ -5983,10 +5943,10 @@
             <a:lstStyle/>
             <a:p>
               <a:r>
-                <a:rPr lang="en-US" sz="914" dirty="0"/>
+                <a:rPr lang="en-US" sz="900" dirty="0"/>
                 <a:t>Image</a:t>
               </a:r>
-              <a:endParaRPr lang="en-AU" sz="914" dirty="0"/>
+              <a:endParaRPr lang="en-AU" sz="900" dirty="0"/>
             </a:p>
           </p:txBody>
         </p:sp>
@@ -6000,7 +5960,7 @@
         <p:spPr>
           <a:xfrm>
             <a:off x="3682362" y="869364"/>
-            <a:ext cx="831908" cy="525899"/>
+            <a:ext cx="914838" cy="525899"/>
           </a:xfrm>
           <a:prstGeom prst="foldedCorner">
             <a:avLst/>
@@ -6028,14 +5988,14 @@
           <a:p>
             <a:pPr algn="ctr"/>
             <a:r>
-              <a:rPr lang="en-US" sz="914" dirty="0">
+              <a:rPr lang="en-US" sz="900" dirty="0">
                 <a:solidFill>
                   <a:schemeClr val="tx1"/>
                 </a:solidFill>
               </a:rPr>
               <a:t>Questionnaire</a:t>
             </a:r>
-            <a:endParaRPr lang="en-AU" sz="914" dirty="0">
+            <a:endParaRPr lang="en-AU" sz="900" dirty="0">
               <a:solidFill>
                 <a:schemeClr val="tx1"/>
               </a:solidFill>
@@ -6092,7 +6052,7 @@
         <p:spPr>
           <a:xfrm>
             <a:off x="5994160" y="2503562"/>
-            <a:ext cx="1488804" cy="370773"/>
+            <a:ext cx="1559876" cy="370773"/>
           </a:xfrm>
           <a:prstGeom prst="rect">
             <a:avLst/>
@@ -6556,11 +6516,7 @@
           <a:p>
             <a:r>
               <a:rPr lang="en-US" sz="914" dirty="0"/>
-              <a:t>L</a:t>
-            </a:r>
-            <a:r>
-              <a:rPr lang="en-US" sz="914" dirty="0"/>
-              <a:t>OGIN</a:t>
+              <a:t>LOGIN</a:t>
             </a:r>
             <a:endParaRPr lang="en-AU" sz="914" dirty="0"/>
           </a:p>
@@ -6665,7 +6621,7 @@
         <p:grpSpPr>
           <a:xfrm>
             <a:off x="6742459" y="3889229"/>
-            <a:ext cx="1560561" cy="1921167"/>
+            <a:ext cx="1676006" cy="1948726"/>
             <a:chOff x="4200525" y="2413236"/>
             <a:chExt cx="2047875" cy="3059062"/>
           </a:xfrm>
@@ -6796,7 +6752,6 @@
                 <a:rPr lang="en-US" sz="914" dirty="0"/>
                 <a:t>AI Explanation:</a:t>
               </a:r>
-              <a:endParaRPr lang="en-US" sz="914" dirty="0"/>
             </a:p>
             <a:p>
               <a:pPr marL="130645" indent="-130645">
@@ -6811,11 +6766,7 @@
             <a:p>
               <a:r>
                 <a:rPr lang="en-US" sz="914" dirty="0"/>
-                <a:t> </a:t>
-              </a:r>
-              <a:r>
-                <a:rPr lang="en-US" sz="914" dirty="0"/>
-                <a:t>    AI Explanation Texts</a:t>
+                <a:t>     AI Explanation Texts</a:t>
               </a:r>
             </a:p>
             <a:p>
@@ -6885,10 +6836,10 @@
         </p:nvGrpSpPr>
         <p:grpSpPr>
           <a:xfrm>
-            <a:off x="3045164" y="869364"/>
-            <a:ext cx="474810" cy="547828"/>
+            <a:off x="3045165" y="869363"/>
+            <a:ext cx="590885" cy="536548"/>
             <a:chOff x="3337214" y="1450230"/>
-            <a:chExt cx="623079" cy="718898"/>
+            <a:chExt cx="637845" cy="690121"/>
           </a:xfrm>
         </p:grpSpPr>
         <p:sp>
@@ -6983,8 +6934,8 @@
           </p:nvSpPr>
           <p:spPr>
             <a:xfrm>
-              <a:off x="3337214" y="1863352"/>
-              <a:ext cx="623079" cy="305776"/>
+              <a:off x="3351980" y="1818543"/>
+              <a:ext cx="623079" cy="305775"/>
             </a:xfrm>
             <a:prstGeom prst="rect">
               <a:avLst/>
@@ -7014,8 +6965,8 @@
         </p:nvSpPr>
         <p:spPr>
           <a:xfrm>
-            <a:off x="3841979" y="869364"/>
-            <a:ext cx="831908" cy="525899"/>
+            <a:off x="3812352" y="869364"/>
+            <a:ext cx="861535" cy="525899"/>
           </a:xfrm>
           <a:prstGeom prst="foldedCorner">
             <a:avLst/>
@@ -7191,7 +7142,7 @@
         <p:spPr>
           <a:xfrm>
             <a:off x="2706922" y="2293660"/>
-            <a:ext cx="1246083" cy="379001"/>
+            <a:ext cx="1297587" cy="379001"/>
           </a:xfrm>
           <a:prstGeom prst="rect">
             <a:avLst/>
@@ -7302,7 +7253,7 @@
         <p:grpSpPr>
           <a:xfrm>
             <a:off x="3545175" y="3653703"/>
-            <a:ext cx="2359285" cy="407993"/>
+            <a:ext cx="2555374" cy="407993"/>
             <a:chOff x="2951322" y="3685146"/>
             <a:chExt cx="3096015" cy="535396"/>
           </a:xfrm>
@@ -7345,7 +7296,11 @@
               <a:pPr algn="ctr"/>
               <a:r>
                 <a:rPr lang="en-US" sz="914" dirty="0"/>
-                <a:t>  LLM    .  </a:t>
+                <a:t>  LLM    </a:t>
+              </a:r>
+              <a:r>
+                <a:rPr lang="en-US" sz="914" dirty="0" smtClean="0"/>
+                <a:t>  </a:t>
               </a:r>
               <a:endParaRPr lang="en-AU" sz="914" dirty="0"/>
             </a:p>
@@ -7602,8 +7557,8 @@
         </p:nvSpPr>
         <p:spPr>
           <a:xfrm>
-            <a:off x="3641079" y="4377966"/>
-            <a:ext cx="1969212" cy="725347"/>
+            <a:off x="3571442" y="4377966"/>
+            <a:ext cx="2038849" cy="725347"/>
           </a:xfrm>
           <a:prstGeom prst="rect">
             <a:avLst/>
@@ -7645,21 +7600,22 @@
                   <a:schemeClr val="tx1"/>
                 </a:solidFill>
               </a:rPr>
-              <a:t>All Skin Concerns + </a:t>
-            </a:r>
+              <a:t>All Skin Concerns + AI Explanations</a:t>
+            </a:r>
+          </a:p>
+          <a:p>
+            <a:pPr marL="130645" indent="-130645">
+              <a:buFont typeface="Arial" panose="020B0604020202020204" pitchFamily="34" charset="0"/>
+              <a:buChar char="•"/>
+            </a:pPr>
             <a:r>
               <a:rPr lang="en-US" sz="914" dirty="0">
                 <a:solidFill>
                   <a:schemeClr val="tx1"/>
                 </a:solidFill>
               </a:rPr>
-              <a:t>AI Explanations</a:t>
-            </a:r>
-            <a:endParaRPr lang="en-US" sz="914" dirty="0">
-              <a:solidFill>
-                <a:schemeClr val="tx1"/>
-              </a:solidFill>
-            </a:endParaRPr>
+              <a:t>List of bases + AI Explanations</a:t>
+            </a:r>
           </a:p>
           <a:p>
             <a:pPr marL="130645" indent="-130645">
@@ -7672,69 +7628,21 @@
                   <a:schemeClr val="tx1"/>
                 </a:solidFill>
               </a:rPr>
-              <a:t>List of bases + </a:t>
-            </a:r>
+              <a:t>Actives + AI Explanations</a:t>
+            </a:r>
+          </a:p>
+          <a:p>
+            <a:pPr marL="558568" lvl="1" indent="-130645">
+              <a:buFont typeface="Courier New" panose="02070309020205020404" pitchFamily="49" charset="0"/>
+              <a:buChar char="o"/>
+            </a:pPr>
             <a:r>
               <a:rPr lang="en-US" sz="914" dirty="0">
                 <a:solidFill>
                   <a:schemeClr val="tx1"/>
                 </a:solidFill>
               </a:rPr>
-              <a:t>AI Explanations</a:t>
-            </a:r>
-            <a:endParaRPr lang="en-US" sz="914" dirty="0">
-              <a:solidFill>
-                <a:schemeClr val="tx1"/>
-              </a:solidFill>
-            </a:endParaRPr>
-          </a:p>
-          <a:p>
-            <a:pPr marL="130645" indent="-130645">
-              <a:buFont typeface="Arial" panose="020B0604020202020204" pitchFamily="34" charset="0"/>
-              <a:buChar char="•"/>
-            </a:pPr>
-            <a:r>
-              <a:rPr lang="en-US" sz="914" dirty="0">
-                <a:solidFill>
-                  <a:schemeClr val="tx1"/>
-                </a:solidFill>
-              </a:rPr>
-              <a:t>Actives + </a:t>
-            </a:r>
-            <a:r>
-              <a:rPr lang="en-US" sz="914" dirty="0">
-                <a:solidFill>
-                  <a:schemeClr val="tx1"/>
-                </a:solidFill>
-              </a:rPr>
-              <a:t>AI Explanations</a:t>
-            </a:r>
-            <a:endParaRPr lang="en-US" sz="914" dirty="0">
-              <a:solidFill>
-                <a:schemeClr val="tx1"/>
-              </a:solidFill>
-            </a:endParaRPr>
-          </a:p>
-          <a:p>
-            <a:pPr marL="558568" lvl="1" indent="-130645">
-              <a:buFont typeface="Courier New" panose="02070309020205020404" pitchFamily="49" charset="0"/>
-              <a:buChar char="o"/>
-            </a:pPr>
-            <a:r>
-              <a:rPr lang="en-US" sz="914" dirty="0">
-                <a:solidFill>
-                  <a:schemeClr val="tx1"/>
-                </a:solidFill>
-              </a:rPr>
-              <a:t>compatible to </a:t>
-            </a:r>
-            <a:r>
-              <a:rPr lang="en-US" sz="914" dirty="0">
-                <a:solidFill>
-                  <a:schemeClr val="tx1"/>
-                </a:solidFill>
-              </a:rPr>
-              <a:t>bases</a:t>
+              <a:t>compatible to bases</a:t>
             </a:r>
           </a:p>
           <a:p>

--- a/architecture/architecture.pptx
+++ b/architecture/architecture.pptx
@@ -9,6 +9,7 @@
     <p:sldId id="256" r:id="rId3"/>
     <p:sldId id="257" r:id="rId4"/>
     <p:sldId id="258" r:id="rId5"/>
+    <p:sldId id="260" r:id="rId6"/>
   </p:sldIdLst>
   <p:sldSz cx="12192000" cy="6858000"/>
   <p:notesSz cx="6858000" cy="9144000"/>
@@ -5778,6 +5779,228 @@
       </p:pic>
       <p:sp>
         <p:nvSpPr>
+          <p:cNvPr id="40" name="Left Arrow 39"/>
+          <p:cNvSpPr/>
+          <p:nvPr/>
+        </p:nvSpPr>
+        <p:spPr>
+          <a:xfrm rot="12961895">
+            <a:off x="3970934" y="2835936"/>
+            <a:ext cx="6352092" cy="363637"/>
+          </a:xfrm>
+          <a:prstGeom prst="leftArrow">
+            <a:avLst/>
+          </a:prstGeom>
+        </p:spPr>
+        <p:style>
+          <a:lnRef idx="2">
+            <a:schemeClr val="accent1">
+              <a:shade val="50000"/>
+            </a:schemeClr>
+          </a:lnRef>
+          <a:fillRef idx="1">
+            <a:schemeClr val="accent1"/>
+          </a:fillRef>
+          <a:effectRef idx="0">
+            <a:schemeClr val="accent1"/>
+          </a:effectRef>
+          <a:fontRef idx="minor">
+            <a:schemeClr val="lt1"/>
+          </a:fontRef>
+        </p:style>
+        <p:txBody>
+          <a:bodyPr rtlCol="0" anchor="ctr"/>
+          <a:lstStyle/>
+          <a:p>
+            <a:pPr algn="ctr"/>
+            <a:endParaRPr lang="en-AU" sz="1372"/>
+          </a:p>
+        </p:txBody>
+      </p:sp>
+      <p:sp>
+        <p:nvSpPr>
+          <p:cNvPr id="24" name="Rectangle 23"/>
+          <p:cNvSpPr/>
+          <p:nvPr/>
+        </p:nvSpPr>
+        <p:spPr>
+          <a:xfrm>
+            <a:off x="5994160" y="2503562"/>
+            <a:ext cx="1559876" cy="370773"/>
+          </a:xfrm>
+          <a:prstGeom prst="rect">
+            <a:avLst/>
+          </a:prstGeom>
+          <a:solidFill>
+            <a:schemeClr val="accent1">
+              <a:lumMod val="20000"/>
+              <a:lumOff val="80000"/>
+            </a:schemeClr>
+          </a:solidFill>
+        </p:spPr>
+        <p:style>
+          <a:lnRef idx="2">
+            <a:schemeClr val="accent1">
+              <a:shade val="50000"/>
+            </a:schemeClr>
+          </a:lnRef>
+          <a:fillRef idx="1">
+            <a:schemeClr val="accent1"/>
+          </a:fillRef>
+          <a:effectRef idx="0">
+            <a:schemeClr val="accent1"/>
+          </a:effectRef>
+          <a:fontRef idx="minor">
+            <a:schemeClr val="lt1"/>
+          </a:fontRef>
+        </p:style>
+        <p:txBody>
+          <a:bodyPr rtlCol="0" anchor="ctr"/>
+          <a:lstStyle/>
+          <a:p>
+            <a:r>
+              <a:rPr lang="en-US" sz="914" dirty="0">
+                <a:solidFill>
+                  <a:schemeClr val="tx1"/>
+                </a:solidFill>
+              </a:rPr>
+              <a:t>Concatenate 2 or 3 answers to questionnaire questions</a:t>
+            </a:r>
+            <a:endParaRPr lang="en-AU" sz="914" dirty="0">
+              <a:solidFill>
+                <a:schemeClr val="tx1"/>
+              </a:solidFill>
+            </a:endParaRPr>
+          </a:p>
+        </p:txBody>
+      </p:sp>
+      <p:grpSp>
+        <p:nvGrpSpPr>
+          <p:cNvPr id="25" name="Group 24"/>
+          <p:cNvGrpSpPr/>
+          <p:nvPr/>
+        </p:nvGrpSpPr>
+        <p:grpSpPr>
+          <a:xfrm>
+            <a:off x="9107228" y="4111837"/>
+            <a:ext cx="1596243" cy="397494"/>
+            <a:chOff x="4200525" y="2438400"/>
+            <a:chExt cx="2094700" cy="2984430"/>
+          </a:xfrm>
+        </p:grpSpPr>
+        <p:sp>
+          <p:nvSpPr>
+            <p:cNvPr id="27" name="Folded Corner 26"/>
+            <p:cNvSpPr/>
+            <p:nvPr/>
+          </p:nvSpPr>
+          <p:spPr>
+            <a:xfrm>
+              <a:off x="4200525" y="2438400"/>
+              <a:ext cx="2047875" cy="2892268"/>
+            </a:xfrm>
+            <a:prstGeom prst="foldedCorner">
+              <a:avLst/>
+            </a:prstGeom>
+            <a:solidFill>
+              <a:schemeClr val="accent1">
+                <a:lumMod val="20000"/>
+                <a:lumOff val="80000"/>
+              </a:schemeClr>
+            </a:solidFill>
+          </p:spPr>
+          <p:style>
+            <a:lnRef idx="2">
+              <a:schemeClr val="accent1">
+                <a:shade val="50000"/>
+              </a:schemeClr>
+            </a:lnRef>
+            <a:fillRef idx="1">
+              <a:schemeClr val="accent1"/>
+            </a:fillRef>
+            <a:effectRef idx="0">
+              <a:schemeClr val="accent1"/>
+            </a:effectRef>
+            <a:fontRef idx="minor">
+              <a:schemeClr val="lt1"/>
+            </a:fontRef>
+          </p:style>
+          <p:txBody>
+            <a:bodyPr rtlCol="0" anchor="ctr"/>
+            <a:lstStyle/>
+            <a:p>
+              <a:pPr algn="ctr"/>
+              <a:endParaRPr lang="en-AU" sz="1372" dirty="0"/>
+            </a:p>
+          </p:txBody>
+        </p:sp>
+        <p:sp>
+          <p:nvSpPr>
+            <p:cNvPr id="31" name="TextBox 30"/>
+            <p:cNvSpPr txBox="1"/>
+            <p:nvPr/>
+          </p:nvSpPr>
+          <p:spPr>
+            <a:xfrm>
+              <a:off x="4285895" y="2617108"/>
+              <a:ext cx="2009330" cy="2805722"/>
+            </a:xfrm>
+            <a:prstGeom prst="rect">
+              <a:avLst/>
+            </a:prstGeom>
+            <a:noFill/>
+          </p:spPr>
+          <p:txBody>
+            <a:bodyPr wrap="none" rtlCol="0">
+              <a:spAutoFit/>
+            </a:bodyPr>
+            <a:lstStyle/>
+            <a:p>
+              <a:r>
+                <a:rPr lang="en-US" sz="914" dirty="0"/>
+                <a:t>All Skin Concerns:</a:t>
+              </a:r>
+            </a:p>
+            <a:p>
+              <a:r>
+                <a:rPr lang="en-US" sz="914" dirty="0"/>
+                <a:t>Serum + Vitamin C + 8 hours</a:t>
+              </a:r>
+            </a:p>
+          </p:txBody>
+        </p:sp>
+      </p:grpSp>
+      <p:pic>
+        <p:nvPicPr>
+          <p:cNvPr id="32" name="Picture 31"/>
+          <p:cNvPicPr>
+            <a:picLocks noChangeAspect="1"/>
+          </p:cNvPicPr>
+          <p:nvPr/>
+        </p:nvPicPr>
+        <p:blipFill rotWithShape="1">
+          <a:blip r:embed="rId5" cstate="print">
+            <a:extLst>
+              <a:ext uri="{28A0092B-C50C-407E-A947-70E740481C1C}">
+                <a14:useLocalDpi xmlns:a14="http://schemas.microsoft.com/office/drawing/2010/main" val="0"/>
+              </a:ext>
+            </a:extLst>
+          </a:blip>
+          <a:srcRect t="28812" b="26164"/>
+          <a:stretch/>
+        </p:blipFill>
+        <p:spPr>
+          <a:xfrm>
+            <a:off x="6515890" y="507351"/>
+            <a:ext cx="1261387" cy="271709"/>
+          </a:xfrm>
+          <a:prstGeom prst="rect">
+            <a:avLst/>
+          </a:prstGeom>
+        </p:spPr>
+      </p:pic>
+      <p:sp>
+        <p:nvSpPr>
           <p:cNvPr id="41" name="Rectangle 40"/>
           <p:cNvSpPr/>
           <p:nvPr/>
@@ -6003,228 +6226,6 @@
           </a:p>
         </p:txBody>
       </p:sp>
-      <p:sp>
-        <p:nvSpPr>
-          <p:cNvPr id="40" name="Left Arrow 39"/>
-          <p:cNvSpPr/>
-          <p:nvPr/>
-        </p:nvSpPr>
-        <p:spPr>
-          <a:xfrm rot="12961895">
-            <a:off x="3970934" y="2835936"/>
-            <a:ext cx="6352092" cy="363637"/>
-          </a:xfrm>
-          <a:prstGeom prst="leftArrow">
-            <a:avLst/>
-          </a:prstGeom>
-        </p:spPr>
-        <p:style>
-          <a:lnRef idx="2">
-            <a:schemeClr val="accent1">
-              <a:shade val="50000"/>
-            </a:schemeClr>
-          </a:lnRef>
-          <a:fillRef idx="1">
-            <a:schemeClr val="accent1"/>
-          </a:fillRef>
-          <a:effectRef idx="0">
-            <a:schemeClr val="accent1"/>
-          </a:effectRef>
-          <a:fontRef idx="minor">
-            <a:schemeClr val="lt1"/>
-          </a:fontRef>
-        </p:style>
-        <p:txBody>
-          <a:bodyPr rtlCol="0" anchor="ctr"/>
-          <a:lstStyle/>
-          <a:p>
-            <a:pPr algn="ctr"/>
-            <a:endParaRPr lang="en-AU" sz="1372"/>
-          </a:p>
-        </p:txBody>
-      </p:sp>
-      <p:sp>
-        <p:nvSpPr>
-          <p:cNvPr id="24" name="Rectangle 23"/>
-          <p:cNvSpPr/>
-          <p:nvPr/>
-        </p:nvSpPr>
-        <p:spPr>
-          <a:xfrm>
-            <a:off x="5994160" y="2503562"/>
-            <a:ext cx="1559876" cy="370773"/>
-          </a:xfrm>
-          <a:prstGeom prst="rect">
-            <a:avLst/>
-          </a:prstGeom>
-          <a:solidFill>
-            <a:schemeClr val="accent1">
-              <a:lumMod val="20000"/>
-              <a:lumOff val="80000"/>
-            </a:schemeClr>
-          </a:solidFill>
-        </p:spPr>
-        <p:style>
-          <a:lnRef idx="2">
-            <a:schemeClr val="accent1">
-              <a:shade val="50000"/>
-            </a:schemeClr>
-          </a:lnRef>
-          <a:fillRef idx="1">
-            <a:schemeClr val="accent1"/>
-          </a:fillRef>
-          <a:effectRef idx="0">
-            <a:schemeClr val="accent1"/>
-          </a:effectRef>
-          <a:fontRef idx="minor">
-            <a:schemeClr val="lt1"/>
-          </a:fontRef>
-        </p:style>
-        <p:txBody>
-          <a:bodyPr rtlCol="0" anchor="ctr"/>
-          <a:lstStyle/>
-          <a:p>
-            <a:r>
-              <a:rPr lang="en-US" sz="914" dirty="0">
-                <a:solidFill>
-                  <a:schemeClr val="tx1"/>
-                </a:solidFill>
-              </a:rPr>
-              <a:t>Concatenate 2 or 3 answers to questionnaire questions</a:t>
-            </a:r>
-            <a:endParaRPr lang="en-AU" sz="914" dirty="0">
-              <a:solidFill>
-                <a:schemeClr val="tx1"/>
-              </a:solidFill>
-            </a:endParaRPr>
-          </a:p>
-        </p:txBody>
-      </p:sp>
-      <p:grpSp>
-        <p:nvGrpSpPr>
-          <p:cNvPr id="25" name="Group 24"/>
-          <p:cNvGrpSpPr/>
-          <p:nvPr/>
-        </p:nvGrpSpPr>
-        <p:grpSpPr>
-          <a:xfrm>
-            <a:off x="9107228" y="4111837"/>
-            <a:ext cx="1596243" cy="397494"/>
-            <a:chOff x="4200525" y="2438400"/>
-            <a:chExt cx="2094700" cy="2984430"/>
-          </a:xfrm>
-        </p:grpSpPr>
-        <p:sp>
-          <p:nvSpPr>
-            <p:cNvPr id="27" name="Folded Corner 26"/>
-            <p:cNvSpPr/>
-            <p:nvPr/>
-          </p:nvSpPr>
-          <p:spPr>
-            <a:xfrm>
-              <a:off x="4200525" y="2438400"/>
-              <a:ext cx="2047875" cy="2892268"/>
-            </a:xfrm>
-            <a:prstGeom prst="foldedCorner">
-              <a:avLst/>
-            </a:prstGeom>
-            <a:solidFill>
-              <a:schemeClr val="accent1">
-                <a:lumMod val="20000"/>
-                <a:lumOff val="80000"/>
-              </a:schemeClr>
-            </a:solidFill>
-          </p:spPr>
-          <p:style>
-            <a:lnRef idx="2">
-              <a:schemeClr val="accent1">
-                <a:shade val="50000"/>
-              </a:schemeClr>
-            </a:lnRef>
-            <a:fillRef idx="1">
-              <a:schemeClr val="accent1"/>
-            </a:fillRef>
-            <a:effectRef idx="0">
-              <a:schemeClr val="accent1"/>
-            </a:effectRef>
-            <a:fontRef idx="minor">
-              <a:schemeClr val="lt1"/>
-            </a:fontRef>
-          </p:style>
-          <p:txBody>
-            <a:bodyPr rtlCol="0" anchor="ctr"/>
-            <a:lstStyle/>
-            <a:p>
-              <a:pPr algn="ctr"/>
-              <a:endParaRPr lang="en-AU" sz="1372" dirty="0"/>
-            </a:p>
-          </p:txBody>
-        </p:sp>
-        <p:sp>
-          <p:nvSpPr>
-            <p:cNvPr id="31" name="TextBox 30"/>
-            <p:cNvSpPr txBox="1"/>
-            <p:nvPr/>
-          </p:nvSpPr>
-          <p:spPr>
-            <a:xfrm>
-              <a:off x="4285895" y="2617108"/>
-              <a:ext cx="2009330" cy="2805722"/>
-            </a:xfrm>
-            <a:prstGeom prst="rect">
-              <a:avLst/>
-            </a:prstGeom>
-            <a:noFill/>
-          </p:spPr>
-          <p:txBody>
-            <a:bodyPr wrap="none" rtlCol="0">
-              <a:spAutoFit/>
-            </a:bodyPr>
-            <a:lstStyle/>
-            <a:p>
-              <a:r>
-                <a:rPr lang="en-US" sz="914" dirty="0"/>
-                <a:t>All Skin Concerns:</a:t>
-              </a:r>
-            </a:p>
-            <a:p>
-              <a:r>
-                <a:rPr lang="en-US" sz="914" dirty="0"/>
-                <a:t>Serum + Vitamin C + 8 hours</a:t>
-              </a:r>
-            </a:p>
-          </p:txBody>
-        </p:sp>
-      </p:grpSp>
-      <p:pic>
-        <p:nvPicPr>
-          <p:cNvPr id="32" name="Picture 31"/>
-          <p:cNvPicPr>
-            <a:picLocks noChangeAspect="1"/>
-          </p:cNvPicPr>
-          <p:nvPr/>
-        </p:nvPicPr>
-        <p:blipFill rotWithShape="1">
-          <a:blip r:embed="rId5" cstate="print">
-            <a:extLst>
-              <a:ext uri="{28A0092B-C50C-407E-A947-70E740481C1C}">
-                <a14:useLocalDpi xmlns:a14="http://schemas.microsoft.com/office/drawing/2010/main" val="0"/>
-              </a:ext>
-            </a:extLst>
-          </a:blip>
-          <a:srcRect t="28812" b="26164"/>
-          <a:stretch/>
-        </p:blipFill>
-        <p:spPr>
-          <a:xfrm>
-            <a:off x="6515890" y="507351"/>
-            <a:ext cx="1261387" cy="271709"/>
-          </a:xfrm>
-          <a:prstGeom prst="rect">
-            <a:avLst/>
-          </a:prstGeom>
-        </p:spPr>
-      </p:pic>
     </p:spTree>
     <p:extLst>
       <p:ext uri="{BB962C8B-B14F-4D97-AF65-F5344CB8AC3E}">
@@ -6273,7 +6274,7 @@
             <a:off x="2539978" y="159685"/>
             <a:ext cx="8434288" cy="5792222"/>
             <a:chOff x="942975" y="419100"/>
-            <a:chExt cx="4981575" cy="7600950"/>
+            <a:chExt cx="4981575" cy="7600951"/>
           </a:xfrm>
         </p:grpSpPr>
         <p:sp>
@@ -6285,7 +6286,7 @@
           <p:spPr>
             <a:xfrm>
               <a:off x="942975" y="419100"/>
-              <a:ext cx="4981575" cy="7600950"/>
+              <a:ext cx="4981575" cy="7600951"/>
             </a:xfrm>
             <a:prstGeom prst="rect">
               <a:avLst/>
@@ -6620,10 +6621,10 @@
         </p:nvGrpSpPr>
         <p:grpSpPr>
           <a:xfrm>
-            <a:off x="6742459" y="3889229"/>
-            <a:ext cx="1676006" cy="1948726"/>
+            <a:off x="6939887" y="4459868"/>
+            <a:ext cx="1406908" cy="460105"/>
             <a:chOff x="4200525" y="2413236"/>
-            <a:chExt cx="2047875" cy="3059062"/>
+            <a:chExt cx="2047875" cy="2917432"/>
           </a:xfrm>
         </p:grpSpPr>
         <p:sp>
@@ -6681,7 +6682,7 @@
           <p:spPr>
             <a:xfrm>
               <a:off x="4414067" y="2413236"/>
-              <a:ext cx="1810333" cy="3059062"/>
+              <a:ext cx="1462346" cy="586612"/>
             </a:xfrm>
             <a:prstGeom prst="rect">
               <a:avLst/>
@@ -6695,8 +6696,12 @@
             <a:lstStyle/>
             <a:p>
               <a:r>
+                <a:rPr lang="en-US" sz="914" dirty="0" smtClean="0"/>
+                <a:t>Visual </a:t>
+              </a:r>
+              <a:r>
                 <a:rPr lang="en-US" sz="914" dirty="0"/>
-                <a:t>All Skin Concerns:</a:t>
+                <a:t>Skin Concerns:</a:t>
               </a:r>
             </a:p>
             <a:p>
@@ -6706,78 +6711,13 @@
               </a:pPr>
               <a:r>
                 <a:rPr lang="en-US" sz="914" dirty="0"/>
-                <a:t>SC00x + SC10y + …</a:t>
+                <a:t>SC00x + SC10y + </a:t>
               </a:r>
-            </a:p>
-            <a:p>
+              <a:r>
+                <a:rPr lang="en-US" sz="914" dirty="0" smtClean="0"/>
+                <a:t>…</a:t>
+              </a:r>
               <a:endParaRPr lang="en-US" sz="914" dirty="0"/>
-            </a:p>
-            <a:p>
-              <a:r>
-                <a:rPr lang="en-US" sz="914" dirty="0"/>
-                <a:t>Actives:</a:t>
-              </a:r>
-            </a:p>
-            <a:p>
-              <a:pPr marL="130645" indent="-130645">
-                <a:buFont typeface="Arial" panose="020B0604020202020204" pitchFamily="34" charset="0"/>
-                <a:buChar char="•"/>
-              </a:pPr>
-              <a:r>
-                <a:rPr lang="en-US" sz="914" dirty="0"/>
-                <a:t>Active a + Active b + …</a:t>
-              </a:r>
-            </a:p>
-            <a:p>
-              <a:r>
-                <a:rPr lang="en-US" sz="914" dirty="0"/>
-                <a:t>Base:</a:t>
-              </a:r>
-            </a:p>
-            <a:p>
-              <a:pPr marL="130645" indent="-130645">
-                <a:buFont typeface="Arial" panose="020B0604020202020204" pitchFamily="34" charset="0"/>
-                <a:buChar char="•"/>
-              </a:pPr>
-              <a:r>
-                <a:rPr lang="en-US" sz="914" dirty="0"/>
-                <a:t>Base n</a:t>
-              </a:r>
-            </a:p>
-            <a:p>
-              <a:endParaRPr lang="en-US" sz="914" dirty="0"/>
-            </a:p>
-            <a:p>
-              <a:r>
-                <a:rPr lang="en-US" sz="914" dirty="0"/>
-                <a:t>AI Explanation:</a:t>
-              </a:r>
-            </a:p>
-            <a:p>
-              <a:pPr marL="130645" indent="-130645">
-                <a:buFont typeface="Arial" panose="020B0604020202020204" pitchFamily="34" charset="0"/>
-                <a:buChar char="•"/>
-              </a:pPr>
-              <a:r>
-                <a:rPr lang="en-US" sz="914" dirty="0"/>
-                <a:t>Summation of </a:t>
-              </a:r>
-            </a:p>
-            <a:p>
-              <a:r>
-                <a:rPr lang="en-US" sz="914" dirty="0"/>
-                <a:t>     AI Explanation Texts</a:t>
-              </a:r>
-            </a:p>
-            <a:p>
-              <a:endParaRPr lang="en-US" sz="914" dirty="0"/>
-            </a:p>
-            <a:p>
-              <a:r>
-                <a:rPr lang="en-US" sz="914" strike="sngStrike" dirty="0"/>
-                <a:t>Price: $20</a:t>
-              </a:r>
-              <a:endParaRPr lang="en-AU" sz="914" strike="sngStrike" dirty="0"/>
             </a:p>
           </p:txBody>
         </p:sp>
@@ -6994,7 +6934,7 @@
           <a:p>
             <a:pPr algn="ctr"/>
             <a:r>
-              <a:rPr lang="en-US" sz="914" dirty="0">
+              <a:rPr lang="en-US" sz="914" dirty="0" smtClean="0">
                 <a:solidFill>
                   <a:schemeClr val="tx1"/>
                 </a:solidFill>
@@ -7135,24 +7075,18 @@
       </p:sp>
       <p:sp>
         <p:nvSpPr>
-          <p:cNvPr id="43" name="Rectangle 42"/>
+          <p:cNvPr id="59" name="Left Arrow 58"/>
           <p:cNvSpPr/>
           <p:nvPr/>
         </p:nvSpPr>
         <p:spPr>
-          <a:xfrm>
-            <a:off x="2706922" y="2293660"/>
-            <a:ext cx="1297587" cy="379001"/>
-          </a:xfrm>
-          <a:prstGeom prst="rect">
-            <a:avLst/>
-          </a:prstGeom>
-          <a:solidFill>
-            <a:schemeClr val="accent1">
-              <a:lumMod val="20000"/>
-              <a:lumOff val="80000"/>
-            </a:schemeClr>
-          </a:solidFill>
+          <a:xfrm rot="16200000">
+            <a:off x="3927466" y="1693507"/>
+            <a:ext cx="915454" cy="318962"/>
+          </a:xfrm>
+          <a:prstGeom prst="leftArrow">
+            <a:avLst/>
+          </a:prstGeom>
         </p:spPr>
         <p:style>
           <a:lnRef idx="2">
@@ -7174,46 +7108,73 @@
           <a:bodyPr rtlCol="0" anchor="ctr"/>
           <a:lstStyle/>
           <a:p>
-            <a:pPr marL="130645" indent="-130645">
-              <a:buFont typeface="Arial" panose="020B0604020202020204" pitchFamily="34" charset="0"/>
-              <a:buChar char="•"/>
-            </a:pPr>
-            <a:r>
-              <a:rPr lang="en-US" sz="914" dirty="0">
+            <a:pPr algn="ctr"/>
+            <a:endParaRPr lang="en-AU" sz="1372"/>
+          </a:p>
+        </p:txBody>
+      </p:sp>
+      <p:sp>
+        <p:nvSpPr>
+          <p:cNvPr id="46" name="TextBox 45"/>
+          <p:cNvSpPr txBox="1"/>
+          <p:nvPr/>
+        </p:nvSpPr>
+        <p:spPr>
+          <a:xfrm>
+            <a:off x="3141436" y="1342810"/>
+            <a:ext cx="259927" cy="303481"/>
+          </a:xfrm>
+          <a:prstGeom prst="rect">
+            <a:avLst/>
+          </a:prstGeom>
+          <a:noFill/>
+        </p:spPr>
+        <p:txBody>
+          <a:bodyPr wrap="square" rtlCol="0">
+            <a:spAutoFit/>
+          </a:bodyPr>
+          <a:lstStyle/>
+          <a:p>
+            <a:r>
+              <a:rPr lang="en-US" sz="1372" b="1" dirty="0">
                 <a:solidFill>
-                  <a:schemeClr val="tx1"/>
+                  <a:srgbClr val="FF0000"/>
                 </a:solidFill>
+                <a:effectLst>
+                  <a:outerShdw blurRad="38100" dist="38100" dir="2700000" algn="tl">
+                    <a:srgbClr val="000000">
+                      <a:alpha val="43137"/>
+                    </a:srgbClr>
+                  </a:outerShdw>
+                </a:effectLst>
               </a:rPr>
-              <a:t>Visual Skin Concerns</a:t>
-            </a:r>
-          </a:p>
-          <a:p>
-            <a:r>
-              <a:rPr lang="en-US" sz="914" dirty="0">
-                <a:solidFill>
-                  <a:schemeClr val="tx1"/>
-                </a:solidFill>
-              </a:rPr>
-              <a:t>     + AI Explanations</a:t>
-            </a:r>
-            <a:endParaRPr lang="en-AU" sz="914" dirty="0">
+              <a:t>1</a:t>
+            </a:r>
+            <a:endParaRPr lang="en-AU" sz="1372" b="1" dirty="0">
               <a:solidFill>
-                <a:schemeClr val="tx1"/>
+                <a:srgbClr val="FF0000"/>
               </a:solidFill>
+              <a:effectLst>
+                <a:outerShdw blurRad="38100" dist="38100" dir="2700000" algn="tl">
+                  <a:srgbClr val="000000">
+                    <a:alpha val="43137"/>
+                  </a:srgbClr>
+                </a:outerShdw>
+              </a:effectLst>
             </a:endParaRPr>
           </a:p>
         </p:txBody>
       </p:sp>
       <p:sp>
         <p:nvSpPr>
-          <p:cNvPr id="59" name="Left Arrow 58"/>
+          <p:cNvPr id="99" name="Left Arrow 98"/>
           <p:cNvSpPr/>
           <p:nvPr/>
         </p:nvSpPr>
         <p:spPr>
-          <a:xfrm rot="16200000">
-            <a:off x="3598393" y="2031580"/>
-            <a:ext cx="1582600" cy="309962"/>
+          <a:xfrm rot="12712082">
+            <a:off x="3229161" y="3475591"/>
+            <a:ext cx="4012336" cy="328332"/>
           </a:xfrm>
           <a:prstGeom prst="leftArrow">
             <a:avLst/>
@@ -7244,6 +7205,1337 @@
           </a:p>
         </p:txBody>
       </p:sp>
+      <p:sp>
+        <p:nvSpPr>
+          <p:cNvPr id="100" name="TextBox 99"/>
+          <p:cNvSpPr txBox="1"/>
+          <p:nvPr/>
+        </p:nvSpPr>
+        <p:spPr>
+          <a:xfrm rot="1972269">
+            <a:off x="5241689" y="3749793"/>
+            <a:ext cx="710451" cy="233013"/>
+          </a:xfrm>
+          <a:prstGeom prst="rect">
+            <a:avLst/>
+          </a:prstGeom>
+          <a:noFill/>
+        </p:spPr>
+        <p:txBody>
+          <a:bodyPr wrap="none" rtlCol="0">
+            <a:spAutoFit/>
+          </a:bodyPr>
+          <a:lstStyle/>
+          <a:p>
+            <a:r>
+              <a:rPr lang="en-US" sz="914" dirty="0"/>
+              <a:t>Formatting</a:t>
+            </a:r>
+            <a:endParaRPr lang="en-AU" sz="914" dirty="0"/>
+          </a:p>
+        </p:txBody>
+      </p:sp>
+      <p:sp>
+        <p:nvSpPr>
+          <p:cNvPr id="101" name="Left Arrow 100"/>
+          <p:cNvSpPr/>
+          <p:nvPr/>
+        </p:nvSpPr>
+        <p:spPr>
+          <a:xfrm rot="10800000">
+            <a:off x="8313665" y="4512963"/>
+            <a:ext cx="1724761" cy="320974"/>
+          </a:xfrm>
+          <a:prstGeom prst="leftArrow">
+            <a:avLst/>
+          </a:prstGeom>
+        </p:spPr>
+        <p:style>
+          <a:lnRef idx="2">
+            <a:schemeClr val="accent1">
+              <a:shade val="50000"/>
+            </a:schemeClr>
+          </a:lnRef>
+          <a:fillRef idx="1">
+            <a:schemeClr val="accent1"/>
+          </a:fillRef>
+          <a:effectRef idx="0">
+            <a:schemeClr val="accent1"/>
+          </a:effectRef>
+          <a:fontRef idx="minor">
+            <a:schemeClr val="lt1"/>
+          </a:fontRef>
+        </p:style>
+        <p:txBody>
+          <a:bodyPr rtlCol="0" anchor="ctr"/>
+          <a:lstStyle/>
+          <a:p>
+            <a:pPr algn="ctr"/>
+            <a:endParaRPr lang="en-AU" sz="1372"/>
+          </a:p>
+        </p:txBody>
+      </p:sp>
+      <p:sp>
+        <p:nvSpPr>
+          <p:cNvPr id="102" name="TextBox 101"/>
+          <p:cNvSpPr txBox="1"/>
+          <p:nvPr/>
+        </p:nvSpPr>
+        <p:spPr>
+          <a:xfrm>
+            <a:off x="8403302" y="4566516"/>
+            <a:ext cx="1510350" cy="233013"/>
+          </a:xfrm>
+          <a:prstGeom prst="rect">
+            <a:avLst/>
+          </a:prstGeom>
+          <a:noFill/>
+        </p:spPr>
+        <p:txBody>
+          <a:bodyPr wrap="none" rtlCol="0">
+            <a:spAutoFit/>
+          </a:bodyPr>
+          <a:lstStyle/>
+          <a:p>
+            <a:r>
+              <a:rPr lang="en-US" sz="914" dirty="0"/>
+              <a:t>To check out/ shopping cart</a:t>
+            </a:r>
+            <a:endParaRPr lang="en-AU" sz="914" dirty="0"/>
+          </a:p>
+        </p:txBody>
+      </p:sp>
+      <p:sp>
+        <p:nvSpPr>
+          <p:cNvPr id="103" name="TextBox 102"/>
+          <p:cNvSpPr txBox="1"/>
+          <p:nvPr/>
+        </p:nvSpPr>
+        <p:spPr>
+          <a:xfrm>
+            <a:off x="5152043" y="3521334"/>
+            <a:ext cx="274434" cy="303481"/>
+          </a:xfrm>
+          <a:prstGeom prst="rect">
+            <a:avLst/>
+          </a:prstGeom>
+          <a:noFill/>
+        </p:spPr>
+        <p:txBody>
+          <a:bodyPr wrap="none" rtlCol="0">
+            <a:spAutoFit/>
+          </a:bodyPr>
+          <a:lstStyle/>
+          <a:p>
+            <a:r>
+              <a:rPr lang="en-US" sz="1372" b="1" dirty="0">
+                <a:solidFill>
+                  <a:srgbClr val="FF0000"/>
+                </a:solidFill>
+                <a:effectLst>
+                  <a:outerShdw blurRad="38100" dist="38100" dir="2700000" algn="tl">
+                    <a:srgbClr val="000000">
+                      <a:alpha val="43137"/>
+                    </a:srgbClr>
+                  </a:outerShdw>
+                </a:effectLst>
+              </a:rPr>
+              <a:t>5</a:t>
+            </a:r>
+            <a:endParaRPr lang="en-AU" sz="1372" b="1" dirty="0">
+              <a:solidFill>
+                <a:srgbClr val="FF0000"/>
+              </a:solidFill>
+              <a:effectLst>
+                <a:outerShdw blurRad="38100" dist="38100" dir="2700000" algn="tl">
+                  <a:srgbClr val="000000">
+                    <a:alpha val="43137"/>
+                  </a:srgbClr>
+                </a:outerShdw>
+              </a:effectLst>
+            </a:endParaRPr>
+          </a:p>
+        </p:txBody>
+      </p:sp>
+      <p:sp>
+        <p:nvSpPr>
+          <p:cNvPr id="104" name="TextBox 103"/>
+          <p:cNvSpPr txBox="1"/>
+          <p:nvPr/>
+        </p:nvSpPr>
+        <p:spPr>
+          <a:xfrm>
+            <a:off x="9120491" y="4332245"/>
+            <a:ext cx="274434" cy="303481"/>
+          </a:xfrm>
+          <a:prstGeom prst="rect">
+            <a:avLst/>
+          </a:prstGeom>
+          <a:noFill/>
+        </p:spPr>
+        <p:txBody>
+          <a:bodyPr wrap="none" rtlCol="0">
+            <a:spAutoFit/>
+          </a:bodyPr>
+          <a:lstStyle/>
+          <a:p>
+            <a:r>
+              <a:rPr lang="en-US" sz="1372" b="1" dirty="0">
+                <a:solidFill>
+                  <a:srgbClr val="FF0000"/>
+                </a:solidFill>
+                <a:effectLst>
+                  <a:outerShdw blurRad="38100" dist="38100" dir="2700000" algn="tl">
+                    <a:srgbClr val="000000">
+                      <a:alpha val="43137"/>
+                    </a:srgbClr>
+                  </a:outerShdw>
+                </a:effectLst>
+              </a:rPr>
+              <a:t>6</a:t>
+            </a:r>
+            <a:endParaRPr lang="en-AU" sz="1372" b="1" dirty="0">
+              <a:solidFill>
+                <a:srgbClr val="FF0000"/>
+              </a:solidFill>
+              <a:effectLst>
+                <a:outerShdw blurRad="38100" dist="38100" dir="2700000" algn="tl">
+                  <a:srgbClr val="000000">
+                    <a:alpha val="43137"/>
+                  </a:srgbClr>
+                </a:outerShdw>
+              </a:effectLst>
+            </a:endParaRPr>
+          </a:p>
+        </p:txBody>
+      </p:sp>
+      <p:sp>
+        <p:nvSpPr>
+          <p:cNvPr id="105" name="Rectangle 104"/>
+          <p:cNvSpPr/>
+          <p:nvPr/>
+        </p:nvSpPr>
+        <p:spPr>
+          <a:xfrm>
+            <a:off x="4090240" y="1850305"/>
+            <a:ext cx="720286" cy="205629"/>
+          </a:xfrm>
+          <a:prstGeom prst="rect">
+            <a:avLst/>
+          </a:prstGeom>
+          <a:solidFill>
+            <a:schemeClr val="accent1">
+              <a:lumMod val="20000"/>
+              <a:lumOff val="80000"/>
+            </a:schemeClr>
+          </a:solidFill>
+        </p:spPr>
+        <p:style>
+          <a:lnRef idx="2">
+            <a:schemeClr val="accent1">
+              <a:shade val="50000"/>
+            </a:schemeClr>
+          </a:lnRef>
+          <a:fillRef idx="1">
+            <a:schemeClr val="accent1"/>
+          </a:fillRef>
+          <a:effectRef idx="0">
+            <a:schemeClr val="accent1"/>
+          </a:effectRef>
+          <a:fontRef idx="minor">
+            <a:schemeClr val="lt1"/>
+          </a:fontRef>
+        </p:style>
+        <p:txBody>
+          <a:bodyPr rtlCol="0" anchor="ctr"/>
+          <a:lstStyle/>
+          <a:p>
+            <a:pPr marL="130645" indent="-130645">
+              <a:buFont typeface="Arial" panose="020B0604020202020204" pitchFamily="34" charset="0"/>
+              <a:buChar char="•"/>
+            </a:pPr>
+            <a:r>
+              <a:rPr lang="en-US" sz="914" dirty="0">
+                <a:solidFill>
+                  <a:schemeClr val="tx1"/>
+                </a:solidFill>
+              </a:rPr>
+              <a:t>Answers</a:t>
+            </a:r>
+            <a:endParaRPr lang="en-AU" sz="914" dirty="0">
+              <a:solidFill>
+                <a:schemeClr val="tx1"/>
+              </a:solidFill>
+            </a:endParaRPr>
+          </a:p>
+        </p:txBody>
+      </p:sp>
+      <p:sp>
+        <p:nvSpPr>
+          <p:cNvPr id="106" name="TextBox 105"/>
+          <p:cNvSpPr txBox="1"/>
+          <p:nvPr/>
+        </p:nvSpPr>
+        <p:spPr>
+          <a:xfrm>
+            <a:off x="976295" y="1288445"/>
+            <a:ext cx="404278" cy="233013"/>
+          </a:xfrm>
+          <a:prstGeom prst="rect">
+            <a:avLst/>
+          </a:prstGeom>
+          <a:noFill/>
+        </p:spPr>
+        <p:txBody>
+          <a:bodyPr wrap="none" rtlCol="0">
+            <a:spAutoFit/>
+          </a:bodyPr>
+          <a:lstStyle/>
+          <a:p>
+            <a:r>
+              <a:rPr lang="en-US" sz="914" dirty="0"/>
+              <a:t>User</a:t>
+            </a:r>
+            <a:endParaRPr lang="en-AU" sz="914" dirty="0"/>
+          </a:p>
+        </p:txBody>
+      </p:sp>
+      <p:sp>
+        <p:nvSpPr>
+          <p:cNvPr id="43" name="Rectangle 42"/>
+          <p:cNvSpPr/>
+          <p:nvPr/>
+        </p:nvSpPr>
+        <p:spPr>
+          <a:xfrm>
+            <a:off x="2706922" y="2293660"/>
+            <a:ext cx="1297587" cy="379001"/>
+          </a:xfrm>
+          <a:prstGeom prst="rect">
+            <a:avLst/>
+          </a:prstGeom>
+          <a:solidFill>
+            <a:schemeClr val="accent1">
+              <a:lumMod val="20000"/>
+              <a:lumOff val="80000"/>
+            </a:schemeClr>
+          </a:solidFill>
+        </p:spPr>
+        <p:style>
+          <a:lnRef idx="2">
+            <a:schemeClr val="accent1">
+              <a:shade val="50000"/>
+            </a:schemeClr>
+          </a:lnRef>
+          <a:fillRef idx="1">
+            <a:schemeClr val="accent1"/>
+          </a:fillRef>
+          <a:effectRef idx="0">
+            <a:schemeClr val="accent1"/>
+          </a:effectRef>
+          <a:fontRef idx="minor">
+            <a:schemeClr val="lt1"/>
+          </a:fontRef>
+        </p:style>
+        <p:txBody>
+          <a:bodyPr rtlCol="0" anchor="ctr"/>
+          <a:lstStyle/>
+          <a:p>
+            <a:pPr marL="130645" indent="-130645">
+              <a:buFont typeface="Arial" panose="020B0604020202020204" pitchFamily="34" charset="0"/>
+              <a:buChar char="•"/>
+            </a:pPr>
+            <a:r>
+              <a:rPr lang="en-US" sz="914" dirty="0">
+                <a:solidFill>
+                  <a:schemeClr val="tx1"/>
+                </a:solidFill>
+              </a:rPr>
+              <a:t>Visual Skin Concerns</a:t>
+            </a:r>
+          </a:p>
+          <a:p>
+            <a:r>
+              <a:rPr lang="en-US" sz="914" dirty="0">
+                <a:solidFill>
+                  <a:schemeClr val="tx1"/>
+                </a:solidFill>
+              </a:rPr>
+              <a:t>     + AI Explanations</a:t>
+            </a:r>
+            <a:endParaRPr lang="en-AU" sz="914" dirty="0">
+              <a:solidFill>
+                <a:schemeClr val="tx1"/>
+              </a:solidFill>
+            </a:endParaRPr>
+          </a:p>
+        </p:txBody>
+      </p:sp>
+      <p:sp>
+        <p:nvSpPr>
+          <p:cNvPr id="83" name="TextBox 82"/>
+          <p:cNvSpPr txBox="1"/>
+          <p:nvPr/>
+        </p:nvSpPr>
+        <p:spPr>
+          <a:xfrm>
+            <a:off x="3152321" y="1969738"/>
+            <a:ext cx="274434" cy="303481"/>
+          </a:xfrm>
+          <a:prstGeom prst="rect">
+            <a:avLst/>
+          </a:prstGeom>
+          <a:noFill/>
+        </p:spPr>
+        <p:txBody>
+          <a:bodyPr wrap="none" rtlCol="0">
+            <a:spAutoFit/>
+          </a:bodyPr>
+          <a:lstStyle/>
+          <a:p>
+            <a:r>
+              <a:rPr lang="en-US" sz="1372" b="1" dirty="0">
+                <a:solidFill>
+                  <a:srgbClr val="FF0000"/>
+                </a:solidFill>
+                <a:effectLst>
+                  <a:outerShdw blurRad="38100" dist="38100" dir="2700000" algn="tl">
+                    <a:srgbClr val="000000">
+                      <a:alpha val="43137"/>
+                    </a:srgbClr>
+                  </a:outerShdw>
+                </a:effectLst>
+              </a:rPr>
+              <a:t>2</a:t>
+            </a:r>
+            <a:endParaRPr lang="en-AU" sz="1372" b="1" dirty="0">
+              <a:solidFill>
+                <a:srgbClr val="FF0000"/>
+              </a:solidFill>
+              <a:effectLst>
+                <a:outerShdw blurRad="38100" dist="38100" dir="2700000" algn="tl">
+                  <a:srgbClr val="000000">
+                    <a:alpha val="43137"/>
+                  </a:srgbClr>
+                </a:outerShdw>
+              </a:effectLst>
+            </a:endParaRPr>
+          </a:p>
+        </p:txBody>
+      </p:sp>
+    </p:spTree>
+    <p:extLst>
+      <p:ext uri="{BB962C8B-B14F-4D97-AF65-F5344CB8AC3E}">
+        <p14:creationId xmlns:p14="http://schemas.microsoft.com/office/powerpoint/2010/main" val="2239038504"/>
+      </p:ext>
+    </p:extLst>
+  </p:cSld>
+  <p:clrMapOvr>
+    <a:masterClrMapping/>
+  </p:clrMapOvr>
+  <p:timing>
+    <p:tnLst>
+      <p:par>
+        <p:cTn id="1" dur="indefinite" restart="never" nodeType="tmRoot"/>
+      </p:par>
+    </p:tnLst>
+  </p:timing>
+</p:sld>
+</file>
+
+<file path=ppt/slides/slide5.xml><?xml version="1.0" encoding="utf-8"?>
+<p:sld xmlns:a="http://schemas.openxmlformats.org/drawingml/2006/main" xmlns:r="http://schemas.openxmlformats.org/officeDocument/2006/relationships" xmlns:p="http://schemas.openxmlformats.org/presentationml/2006/main">
+  <p:cSld>
+    <p:spTree>
+      <p:nvGrpSpPr>
+        <p:cNvPr id="1" name=""/>
+        <p:cNvGrpSpPr/>
+        <p:nvPr/>
+      </p:nvGrpSpPr>
+      <p:grpSpPr>
+        <a:xfrm>
+          <a:off x="0" y="0"/>
+          <a:ext cx="0" cy="0"/>
+          <a:chOff x="0" y="0"/>
+          <a:chExt cx="0" cy="0"/>
+        </a:xfrm>
+      </p:grpSpPr>
+      <p:grpSp>
+        <p:nvGrpSpPr>
+          <p:cNvPr id="3" name="Group 2"/>
+          <p:cNvGrpSpPr/>
+          <p:nvPr/>
+        </p:nvGrpSpPr>
+        <p:grpSpPr>
+          <a:xfrm>
+            <a:off x="2525314" y="149081"/>
+            <a:ext cx="8434288" cy="5792222"/>
+            <a:chOff x="942975" y="429534"/>
+            <a:chExt cx="4981575" cy="7600950"/>
+          </a:xfrm>
+        </p:grpSpPr>
+        <p:sp>
+          <p:nvSpPr>
+            <p:cNvPr id="2" name="Rectangle 1"/>
+            <p:cNvSpPr/>
+            <p:nvPr/>
+          </p:nvSpPr>
+          <p:spPr>
+            <a:xfrm>
+              <a:off x="942975" y="429534"/>
+              <a:ext cx="4981575" cy="7600950"/>
+            </a:xfrm>
+            <a:prstGeom prst="rect">
+              <a:avLst/>
+            </a:prstGeom>
+            <a:solidFill>
+              <a:schemeClr val="accent6">
+                <a:lumMod val="20000"/>
+                <a:lumOff val="80000"/>
+              </a:schemeClr>
+            </a:solidFill>
+            <a:ln>
+              <a:solidFill>
+                <a:schemeClr val="tx1"/>
+              </a:solidFill>
+            </a:ln>
+          </p:spPr>
+          <p:style>
+            <a:lnRef idx="2">
+              <a:schemeClr val="accent1">
+                <a:shade val="50000"/>
+              </a:schemeClr>
+            </a:lnRef>
+            <a:fillRef idx="1">
+              <a:schemeClr val="accent1"/>
+            </a:fillRef>
+            <a:effectRef idx="0">
+              <a:schemeClr val="accent1"/>
+            </a:effectRef>
+            <a:fontRef idx="minor">
+              <a:schemeClr val="lt1"/>
+            </a:fontRef>
+          </p:style>
+          <p:txBody>
+            <a:bodyPr rtlCol="0" anchor="ctr"/>
+            <a:lstStyle/>
+            <a:p>
+              <a:pPr algn="ctr"/>
+              <a:endParaRPr lang="en-AU" sz="1372" dirty="0"/>
+            </a:p>
+          </p:txBody>
+        </p:sp>
+        <p:pic>
+          <p:nvPicPr>
+            <p:cNvPr id="30" name="Picture 29"/>
+            <p:cNvPicPr>
+              <a:picLocks noChangeAspect="1"/>
+            </p:cNvPicPr>
+            <p:nvPr/>
+          </p:nvPicPr>
+          <p:blipFill rotWithShape="1">
+            <a:blip r:embed="rId2" cstate="print">
+              <a:extLst>
+                <a:ext uri="{28A0092B-C50C-407E-A947-70E740481C1C}">
+                  <a14:useLocalDpi xmlns:a14="http://schemas.microsoft.com/office/drawing/2010/main" val="0"/>
+                </a:ext>
+              </a:extLst>
+            </a:blip>
+            <a:srcRect t="28812" b="26164"/>
+            <a:stretch/>
+          </p:blipFill>
+          <p:spPr>
+            <a:xfrm>
+              <a:off x="3291283" y="875330"/>
+              <a:ext cx="745018" cy="356555"/>
+            </a:xfrm>
+            <a:prstGeom prst="rect">
+              <a:avLst/>
+            </a:prstGeom>
+          </p:spPr>
+        </p:pic>
+      </p:grpSp>
+      <p:grpSp>
+        <p:nvGrpSpPr>
+          <p:cNvPr id="14" name="Group 13"/>
+          <p:cNvGrpSpPr/>
+          <p:nvPr/>
+        </p:nvGrpSpPr>
+        <p:grpSpPr>
+          <a:xfrm>
+            <a:off x="997563" y="921820"/>
+            <a:ext cx="301225" cy="399213"/>
+            <a:chOff x="8634412" y="1219200"/>
+            <a:chExt cx="676275" cy="933450"/>
+          </a:xfrm>
+        </p:grpSpPr>
+        <p:sp>
+          <p:nvSpPr>
+            <p:cNvPr id="5" name="Smiley Face 4"/>
+            <p:cNvSpPr/>
+            <p:nvPr/>
+          </p:nvSpPr>
+          <p:spPr>
+            <a:xfrm>
+              <a:off x="8753475" y="1219200"/>
+              <a:ext cx="438150" cy="428625"/>
+            </a:xfrm>
+            <a:prstGeom prst="smileyFace">
+              <a:avLst/>
+            </a:prstGeom>
+          </p:spPr>
+          <p:style>
+            <a:lnRef idx="2">
+              <a:schemeClr val="accent1">
+                <a:shade val="50000"/>
+              </a:schemeClr>
+            </a:lnRef>
+            <a:fillRef idx="1">
+              <a:schemeClr val="accent1"/>
+            </a:fillRef>
+            <a:effectRef idx="0">
+              <a:schemeClr val="accent1"/>
+            </a:effectRef>
+            <a:fontRef idx="minor">
+              <a:schemeClr val="lt1"/>
+            </a:fontRef>
+          </p:style>
+          <p:txBody>
+            <a:bodyPr rtlCol="0" anchor="ctr"/>
+            <a:lstStyle/>
+            <a:p>
+              <a:pPr algn="ctr"/>
+              <a:endParaRPr lang="en-AU" sz="1372"/>
+            </a:p>
+          </p:txBody>
+        </p:sp>
+        <p:sp>
+          <p:nvSpPr>
+            <p:cNvPr id="12" name="Snip Same Side Corner Rectangle 11"/>
+            <p:cNvSpPr/>
+            <p:nvPr/>
+          </p:nvSpPr>
+          <p:spPr>
+            <a:xfrm>
+              <a:off x="8634412" y="1647825"/>
+              <a:ext cx="676275" cy="504825"/>
+            </a:xfrm>
+            <a:prstGeom prst="snip2SameRect">
+              <a:avLst/>
+            </a:prstGeom>
+          </p:spPr>
+          <p:style>
+            <a:lnRef idx="2">
+              <a:schemeClr val="accent1">
+                <a:shade val="50000"/>
+              </a:schemeClr>
+            </a:lnRef>
+            <a:fillRef idx="1">
+              <a:schemeClr val="accent1"/>
+            </a:fillRef>
+            <a:effectRef idx="0">
+              <a:schemeClr val="accent1"/>
+            </a:effectRef>
+            <a:fontRef idx="minor">
+              <a:schemeClr val="lt1"/>
+            </a:fontRef>
+          </p:style>
+          <p:txBody>
+            <a:bodyPr rtlCol="0" anchor="ctr"/>
+            <a:lstStyle/>
+            <a:p>
+              <a:pPr algn="ctr"/>
+              <a:endParaRPr lang="en-AU" sz="1372"/>
+            </a:p>
+          </p:txBody>
+        </p:sp>
+      </p:grpSp>
+      <p:sp>
+        <p:nvSpPr>
+          <p:cNvPr id="15" name="Down Arrow 14"/>
+          <p:cNvSpPr/>
+          <p:nvPr/>
+        </p:nvSpPr>
+        <p:spPr>
+          <a:xfrm rot="16200000">
+            <a:off x="1921607" y="352035"/>
+            <a:ext cx="420989" cy="1560561"/>
+          </a:xfrm>
+          <a:prstGeom prst="downArrow">
+            <a:avLst/>
+          </a:prstGeom>
+        </p:spPr>
+        <p:style>
+          <a:lnRef idx="2">
+            <a:schemeClr val="accent1">
+              <a:shade val="50000"/>
+            </a:schemeClr>
+          </a:lnRef>
+          <a:fillRef idx="1">
+            <a:schemeClr val="accent1"/>
+          </a:fillRef>
+          <a:effectRef idx="0">
+            <a:schemeClr val="accent1"/>
+          </a:effectRef>
+          <a:fontRef idx="minor">
+            <a:schemeClr val="lt1"/>
+          </a:fontRef>
+        </p:style>
+        <p:txBody>
+          <a:bodyPr rtlCol="0" anchor="ctr"/>
+          <a:lstStyle/>
+          <a:p>
+            <a:pPr algn="ctr"/>
+            <a:endParaRPr lang="en-AU" sz="1372" dirty="0"/>
+          </a:p>
+        </p:txBody>
+      </p:sp>
+      <p:sp>
+        <p:nvSpPr>
+          <p:cNvPr id="16" name="TextBox 15"/>
+          <p:cNvSpPr txBox="1"/>
+          <p:nvPr/>
+        </p:nvSpPr>
+        <p:spPr>
+          <a:xfrm>
+            <a:off x="1793889" y="1026773"/>
+            <a:ext cx="489236" cy="233013"/>
+          </a:xfrm>
+          <a:prstGeom prst="rect">
+            <a:avLst/>
+          </a:prstGeom>
+          <a:noFill/>
+        </p:spPr>
+        <p:txBody>
+          <a:bodyPr wrap="none" rtlCol="0">
+            <a:spAutoFit/>
+          </a:bodyPr>
+          <a:lstStyle/>
+          <a:p>
+            <a:r>
+              <a:rPr lang="en-US" sz="914" dirty="0"/>
+              <a:t>LOGIN</a:t>
+            </a:r>
+            <a:endParaRPr lang="en-AU" sz="914" dirty="0"/>
+          </a:p>
+        </p:txBody>
+      </p:sp>
+      <p:pic>
+        <p:nvPicPr>
+          <p:cNvPr id="26" name="Picture 25"/>
+          <p:cNvPicPr>
+            <a:picLocks noChangeAspect="1"/>
+          </p:cNvPicPr>
+          <p:nvPr/>
+        </p:nvPicPr>
+        <p:blipFill>
+          <a:blip r:embed="rId3" cstate="print">
+            <a:extLst>
+              <a:ext uri="{28A0092B-C50C-407E-A947-70E740481C1C}">
+                <a14:useLocalDpi xmlns:a14="http://schemas.microsoft.com/office/drawing/2010/main" val="0"/>
+              </a:ext>
+            </a:extLst>
+          </a:blip>
+          <a:stretch>
+            <a:fillRect/>
+          </a:stretch>
+        </p:blipFill>
+        <p:spPr>
+          <a:xfrm>
+            <a:off x="8754034" y="4497056"/>
+            <a:ext cx="1340899" cy="1340899"/>
+          </a:xfrm>
+          <a:prstGeom prst="rect">
+            <a:avLst/>
+          </a:prstGeom>
+        </p:spPr>
+      </p:pic>
+      <p:pic>
+        <p:nvPicPr>
+          <p:cNvPr id="28" name="Picture 27"/>
+          <p:cNvPicPr>
+            <a:picLocks noChangeAspect="1"/>
+          </p:cNvPicPr>
+          <p:nvPr/>
+        </p:nvPicPr>
+        <p:blipFill>
+          <a:blip r:embed="rId4" cstate="print">
+            <a:extLst>
+              <a:ext uri="{28A0092B-C50C-407E-A947-70E740481C1C}">
+                <a14:useLocalDpi xmlns:a14="http://schemas.microsoft.com/office/drawing/2010/main" val="0"/>
+              </a:ext>
+            </a:extLst>
+          </a:blip>
+          <a:stretch>
+            <a:fillRect/>
+          </a:stretch>
+        </p:blipFill>
+        <p:spPr>
+          <a:xfrm>
+            <a:off x="10038427" y="4791312"/>
+            <a:ext cx="868805" cy="868805"/>
+          </a:xfrm>
+          <a:prstGeom prst="rect">
+            <a:avLst/>
+          </a:prstGeom>
+        </p:spPr>
+      </p:pic>
+      <p:pic>
+        <p:nvPicPr>
+          <p:cNvPr id="29" name="Picture 28"/>
+          <p:cNvPicPr>
+            <a:picLocks noChangeAspect="1"/>
+          </p:cNvPicPr>
+          <p:nvPr/>
+        </p:nvPicPr>
+        <p:blipFill>
+          <a:blip r:embed="rId5" cstate="print">
+            <a:extLst>
+              <a:ext uri="{28A0092B-C50C-407E-A947-70E740481C1C}">
+                <a14:useLocalDpi xmlns:a14="http://schemas.microsoft.com/office/drawing/2010/main" val="0"/>
+              </a:ext>
+            </a:extLst>
+          </a:blip>
+          <a:stretch>
+            <a:fillRect/>
+          </a:stretch>
+        </p:blipFill>
+        <p:spPr>
+          <a:xfrm rot="13345969">
+            <a:off x="9870005" y="4612532"/>
+            <a:ext cx="604688" cy="675930"/>
+          </a:xfrm>
+          <a:prstGeom prst="rect">
+            <a:avLst/>
+          </a:prstGeom>
+        </p:spPr>
+      </p:pic>
+      <p:grpSp>
+        <p:nvGrpSpPr>
+          <p:cNvPr id="37" name="Group 36"/>
+          <p:cNvGrpSpPr/>
+          <p:nvPr/>
+        </p:nvGrpSpPr>
+        <p:grpSpPr>
+          <a:xfrm>
+            <a:off x="6742458" y="3889229"/>
+            <a:ext cx="1765907" cy="1921167"/>
+            <a:chOff x="4200525" y="2413236"/>
+            <a:chExt cx="2157723" cy="3015801"/>
+          </a:xfrm>
+        </p:grpSpPr>
+        <p:sp>
+          <p:nvSpPr>
+            <p:cNvPr id="33" name="Folded Corner 32"/>
+            <p:cNvSpPr/>
+            <p:nvPr/>
+          </p:nvSpPr>
+          <p:spPr>
+            <a:xfrm>
+              <a:off x="4200525" y="2438400"/>
+              <a:ext cx="2047875" cy="2892268"/>
+            </a:xfrm>
+            <a:prstGeom prst="foldedCorner">
+              <a:avLst/>
+            </a:prstGeom>
+            <a:solidFill>
+              <a:schemeClr val="accent1">
+                <a:lumMod val="20000"/>
+                <a:lumOff val="80000"/>
+              </a:schemeClr>
+            </a:solidFill>
+          </p:spPr>
+          <p:style>
+            <a:lnRef idx="2">
+              <a:schemeClr val="accent1">
+                <a:shade val="50000"/>
+              </a:schemeClr>
+            </a:lnRef>
+            <a:fillRef idx="1">
+              <a:schemeClr val="accent1"/>
+            </a:fillRef>
+            <a:effectRef idx="0">
+              <a:schemeClr val="accent1"/>
+            </a:effectRef>
+            <a:fontRef idx="minor">
+              <a:schemeClr val="lt1"/>
+            </a:fontRef>
+          </p:style>
+          <p:txBody>
+            <a:bodyPr rtlCol="0" anchor="ctr"/>
+            <a:lstStyle/>
+            <a:p>
+              <a:pPr algn="ctr"/>
+              <a:endParaRPr lang="en-AU" sz="1372" dirty="0"/>
+            </a:p>
+          </p:txBody>
+        </p:sp>
+        <p:sp>
+          <p:nvSpPr>
+            <p:cNvPr id="35" name="TextBox 34"/>
+            <p:cNvSpPr txBox="1"/>
+            <p:nvPr/>
+          </p:nvSpPr>
+          <p:spPr>
+            <a:xfrm>
+              <a:off x="4292639" y="2413236"/>
+              <a:ext cx="2065609" cy="3015801"/>
+            </a:xfrm>
+            <a:prstGeom prst="rect">
+              <a:avLst/>
+            </a:prstGeom>
+            <a:noFill/>
+          </p:spPr>
+          <p:txBody>
+            <a:bodyPr wrap="square" rtlCol="0">
+              <a:spAutoFit/>
+            </a:bodyPr>
+            <a:lstStyle/>
+            <a:p>
+              <a:r>
+                <a:rPr lang="en-US" sz="914" dirty="0"/>
+                <a:t>All Skin Concerns:</a:t>
+              </a:r>
+            </a:p>
+            <a:p>
+              <a:pPr marL="130645" indent="-130645">
+                <a:buFont typeface="Arial" panose="020B0604020202020204" pitchFamily="34" charset="0"/>
+                <a:buChar char="•"/>
+              </a:pPr>
+              <a:r>
+                <a:rPr lang="en-US" sz="914" dirty="0"/>
+                <a:t>SC00x + SC10y + </a:t>
+              </a:r>
+              <a:r>
+                <a:rPr lang="en-US" sz="914" dirty="0" smtClean="0"/>
+                <a:t>SC20z + …</a:t>
+              </a:r>
+              <a:endParaRPr lang="en-US" sz="914" dirty="0"/>
+            </a:p>
+            <a:p>
+              <a:endParaRPr lang="en-US" sz="914" dirty="0"/>
+            </a:p>
+            <a:p>
+              <a:r>
+                <a:rPr lang="en-US" sz="914" dirty="0"/>
+                <a:t>Actives:</a:t>
+              </a:r>
+            </a:p>
+            <a:p>
+              <a:pPr marL="130645" indent="-130645">
+                <a:buFont typeface="Arial" panose="020B0604020202020204" pitchFamily="34" charset="0"/>
+                <a:buChar char="•"/>
+              </a:pPr>
+              <a:r>
+                <a:rPr lang="en-US" sz="914" dirty="0"/>
+                <a:t>Active a + Active b + …</a:t>
+              </a:r>
+            </a:p>
+            <a:p>
+              <a:r>
+                <a:rPr lang="en-US" sz="914" dirty="0"/>
+                <a:t>Base:</a:t>
+              </a:r>
+            </a:p>
+            <a:p>
+              <a:pPr marL="130645" indent="-130645">
+                <a:buFont typeface="Arial" panose="020B0604020202020204" pitchFamily="34" charset="0"/>
+                <a:buChar char="•"/>
+              </a:pPr>
+              <a:r>
+                <a:rPr lang="en-US" sz="914" dirty="0"/>
+                <a:t>Base n</a:t>
+              </a:r>
+            </a:p>
+            <a:p>
+              <a:endParaRPr lang="en-US" sz="914" dirty="0"/>
+            </a:p>
+            <a:p>
+              <a:r>
+                <a:rPr lang="en-US" sz="914" dirty="0"/>
+                <a:t>AI Explanation:</a:t>
+              </a:r>
+            </a:p>
+            <a:p>
+              <a:pPr marL="130645" indent="-130645">
+                <a:buFont typeface="Arial" panose="020B0604020202020204" pitchFamily="34" charset="0"/>
+                <a:buChar char="•"/>
+              </a:pPr>
+              <a:r>
+                <a:rPr lang="en-US" sz="914" dirty="0"/>
+                <a:t>Summation of </a:t>
+              </a:r>
+            </a:p>
+            <a:p>
+              <a:r>
+                <a:rPr lang="en-US" sz="914" dirty="0"/>
+                <a:t>     AI Explanation Texts</a:t>
+              </a:r>
+            </a:p>
+            <a:p>
+              <a:endParaRPr lang="en-US" sz="914" dirty="0"/>
+            </a:p>
+            <a:p>
+              <a:r>
+                <a:rPr lang="en-US" sz="914" strike="sngStrike" dirty="0"/>
+                <a:t>Price: $20</a:t>
+              </a:r>
+              <a:endParaRPr lang="en-AU" sz="914" strike="sngStrike" dirty="0"/>
+            </a:p>
+          </p:txBody>
+        </p:sp>
+      </p:grpSp>
+      <p:sp>
+        <p:nvSpPr>
+          <p:cNvPr id="41" name="Rectangle 40"/>
+          <p:cNvSpPr/>
+          <p:nvPr/>
+        </p:nvSpPr>
+        <p:spPr>
+          <a:xfrm>
+            <a:off x="2950967" y="710863"/>
+            <a:ext cx="1897189" cy="859659"/>
+          </a:xfrm>
+          <a:prstGeom prst="rect">
+            <a:avLst/>
+          </a:prstGeom>
+          <a:solidFill>
+            <a:schemeClr val="accent1">
+              <a:lumMod val="20000"/>
+              <a:lumOff val="80000"/>
+            </a:schemeClr>
+          </a:solidFill>
+        </p:spPr>
+        <p:style>
+          <a:lnRef idx="2">
+            <a:schemeClr val="accent1">
+              <a:shade val="50000"/>
+            </a:schemeClr>
+          </a:lnRef>
+          <a:fillRef idx="1">
+            <a:schemeClr val="accent1"/>
+          </a:fillRef>
+          <a:effectRef idx="0">
+            <a:schemeClr val="accent1"/>
+          </a:effectRef>
+          <a:fontRef idx="minor">
+            <a:schemeClr val="lt1"/>
+          </a:fontRef>
+        </p:style>
+        <p:txBody>
+          <a:bodyPr rtlCol="0" anchor="ctr"/>
+          <a:lstStyle/>
+          <a:p>
+            <a:pPr algn="ctr"/>
+            <a:endParaRPr lang="en-AU" sz="1372"/>
+          </a:p>
+        </p:txBody>
+      </p:sp>
+      <p:grpSp>
+        <p:nvGrpSpPr>
+          <p:cNvPr id="20" name="Group 19"/>
+          <p:cNvGrpSpPr/>
+          <p:nvPr/>
+        </p:nvGrpSpPr>
+        <p:grpSpPr>
+          <a:xfrm>
+            <a:off x="3045165" y="869363"/>
+            <a:ext cx="590885" cy="536548"/>
+            <a:chOff x="3337214" y="1450230"/>
+            <a:chExt cx="637845" cy="690121"/>
+          </a:xfrm>
+        </p:grpSpPr>
+        <p:sp>
+          <p:nvSpPr>
+            <p:cNvPr id="17" name="Frame 16"/>
+            <p:cNvSpPr/>
+            <p:nvPr/>
+          </p:nvSpPr>
+          <p:spPr>
+            <a:xfrm>
+              <a:off x="3337214" y="1450230"/>
+              <a:ext cx="568104" cy="690121"/>
+            </a:xfrm>
+            <a:prstGeom prst="frame">
+              <a:avLst/>
+            </a:prstGeom>
+          </p:spPr>
+          <p:style>
+            <a:lnRef idx="2">
+              <a:schemeClr val="accent1">
+                <a:shade val="50000"/>
+              </a:schemeClr>
+            </a:lnRef>
+            <a:fillRef idx="1">
+              <a:schemeClr val="accent1"/>
+            </a:fillRef>
+            <a:effectRef idx="0">
+              <a:schemeClr val="accent1"/>
+            </a:effectRef>
+            <a:fontRef idx="minor">
+              <a:schemeClr val="lt1"/>
+            </a:fontRef>
+          </p:style>
+          <p:txBody>
+            <a:bodyPr rtlCol="0" anchor="ctr"/>
+            <a:lstStyle/>
+            <a:p>
+              <a:pPr algn="ctr"/>
+              <a:endParaRPr lang="en-AU" sz="1372">
+                <a:solidFill>
+                  <a:schemeClr val="tx1"/>
+                </a:solidFill>
+              </a:endParaRPr>
+            </a:p>
+          </p:txBody>
+        </p:sp>
+        <p:sp>
+          <p:nvSpPr>
+            <p:cNvPr id="19" name="Smiley Face 18"/>
+            <p:cNvSpPr/>
+            <p:nvPr/>
+          </p:nvSpPr>
+          <p:spPr>
+            <a:xfrm>
+              <a:off x="3476950" y="1577604"/>
+              <a:ext cx="276225" cy="295273"/>
+            </a:xfrm>
+            <a:prstGeom prst="smileyFace">
+              <a:avLst/>
+            </a:prstGeom>
+          </p:spPr>
+          <p:style>
+            <a:lnRef idx="2">
+              <a:schemeClr val="accent1">
+                <a:shade val="50000"/>
+              </a:schemeClr>
+            </a:lnRef>
+            <a:fillRef idx="1">
+              <a:schemeClr val="accent1"/>
+            </a:fillRef>
+            <a:effectRef idx="0">
+              <a:schemeClr val="accent1"/>
+            </a:effectRef>
+            <a:fontRef idx="minor">
+              <a:schemeClr val="lt1"/>
+            </a:fontRef>
+          </p:style>
+          <p:txBody>
+            <a:bodyPr rtlCol="0" anchor="ctr"/>
+            <a:lstStyle/>
+            <a:p>
+              <a:pPr algn="ctr"/>
+              <a:endParaRPr lang="en-AU" sz="1372"/>
+            </a:p>
+          </p:txBody>
+        </p:sp>
+        <p:sp>
+          <p:nvSpPr>
+            <p:cNvPr id="39" name="TextBox 38"/>
+            <p:cNvSpPr txBox="1"/>
+            <p:nvPr/>
+          </p:nvSpPr>
+          <p:spPr>
+            <a:xfrm>
+              <a:off x="3351980" y="1818543"/>
+              <a:ext cx="623079" cy="305775"/>
+            </a:xfrm>
+            <a:prstGeom prst="rect">
+              <a:avLst/>
+            </a:prstGeom>
+            <a:noFill/>
+          </p:spPr>
+          <p:txBody>
+            <a:bodyPr wrap="none" rtlCol="0">
+              <a:spAutoFit/>
+            </a:bodyPr>
+            <a:lstStyle/>
+            <a:p>
+              <a:r>
+                <a:rPr lang="en-US" sz="914" dirty="0"/>
+                <a:t>Image</a:t>
+              </a:r>
+              <a:endParaRPr lang="en-AU" sz="914" dirty="0"/>
+            </a:p>
+          </p:txBody>
+        </p:sp>
+      </p:grpSp>
+      <p:sp>
+        <p:nvSpPr>
+          <p:cNvPr id="22" name="Folded Corner 21"/>
+          <p:cNvSpPr/>
+          <p:nvPr/>
+        </p:nvSpPr>
+        <p:spPr>
+          <a:xfrm>
+            <a:off x="3812352" y="869364"/>
+            <a:ext cx="861535" cy="525899"/>
+          </a:xfrm>
+          <a:prstGeom prst="foldedCorner">
+            <a:avLst/>
+          </a:prstGeom>
+        </p:spPr>
+        <p:style>
+          <a:lnRef idx="2">
+            <a:schemeClr val="accent1">
+              <a:shade val="50000"/>
+            </a:schemeClr>
+          </a:lnRef>
+          <a:fillRef idx="1">
+            <a:schemeClr val="accent1"/>
+          </a:fillRef>
+          <a:effectRef idx="0">
+            <a:schemeClr val="accent1"/>
+          </a:effectRef>
+          <a:fontRef idx="minor">
+            <a:schemeClr val="lt1"/>
+          </a:fontRef>
+        </p:style>
+        <p:txBody>
+          <a:bodyPr rtlCol="0" anchor="ctr"/>
+          <a:lstStyle/>
+          <a:p>
+            <a:pPr algn="ctr"/>
+            <a:r>
+              <a:rPr lang="en-US" sz="914" dirty="0" smtClean="0">
+                <a:solidFill>
+                  <a:schemeClr val="tx1"/>
+                </a:solidFill>
+              </a:rPr>
+              <a:t>Questionnaire</a:t>
+            </a:r>
+            <a:endParaRPr lang="en-AU" sz="914" dirty="0">
+              <a:solidFill>
+                <a:schemeClr val="tx1"/>
+              </a:solidFill>
+            </a:endParaRPr>
+          </a:p>
+        </p:txBody>
+      </p:sp>
+      <p:sp>
+        <p:nvSpPr>
+          <p:cNvPr id="40" name="Left Arrow 39"/>
+          <p:cNvSpPr/>
+          <p:nvPr/>
+        </p:nvSpPr>
+        <p:spPr>
+          <a:xfrm rot="16200000">
+            <a:off x="2878463" y="1652117"/>
+            <a:ext cx="772121" cy="286262"/>
+          </a:xfrm>
+          <a:prstGeom prst="leftArrow">
+            <a:avLst/>
+          </a:prstGeom>
+        </p:spPr>
+        <p:style>
+          <a:lnRef idx="2">
+            <a:schemeClr val="accent1">
+              <a:shade val="50000"/>
+            </a:schemeClr>
+          </a:lnRef>
+          <a:fillRef idx="1">
+            <a:schemeClr val="accent1"/>
+          </a:fillRef>
+          <a:effectRef idx="0">
+            <a:schemeClr val="accent1"/>
+          </a:effectRef>
+          <a:fontRef idx="minor">
+            <a:schemeClr val="lt1"/>
+          </a:fontRef>
+        </p:style>
+        <p:txBody>
+          <a:bodyPr rtlCol="0" anchor="ctr"/>
+          <a:lstStyle/>
+          <a:p>
+            <a:pPr algn="ctr"/>
+            <a:endParaRPr lang="en-AU" sz="1372" dirty="0"/>
+          </a:p>
+        </p:txBody>
+      </p:sp>
+      <p:sp>
+        <p:nvSpPr>
+          <p:cNvPr id="42" name="Rounded Rectangle 41"/>
+          <p:cNvSpPr/>
+          <p:nvPr/>
+        </p:nvSpPr>
+        <p:spPr>
+          <a:xfrm>
+            <a:off x="2934995" y="2191645"/>
+            <a:ext cx="672808" cy="228263"/>
+          </a:xfrm>
+          <a:prstGeom prst="roundRect">
+            <a:avLst/>
+          </a:prstGeom>
+        </p:spPr>
+        <p:style>
+          <a:lnRef idx="2">
+            <a:schemeClr val="accent1">
+              <a:shade val="50000"/>
+            </a:schemeClr>
+          </a:lnRef>
+          <a:fillRef idx="1">
+            <a:schemeClr val="accent1"/>
+          </a:fillRef>
+          <a:effectRef idx="0">
+            <a:schemeClr val="accent1"/>
+          </a:effectRef>
+          <a:fontRef idx="minor">
+            <a:schemeClr val="lt1"/>
+          </a:fontRef>
+        </p:style>
+        <p:txBody>
+          <a:bodyPr rtlCol="0" anchor="ctr"/>
+          <a:lstStyle/>
+          <a:p>
+            <a:pPr algn="ctr"/>
+            <a:r>
+              <a:rPr lang="en-US" sz="914" dirty="0"/>
+              <a:t>Visual AI</a:t>
+            </a:r>
+            <a:endParaRPr lang="en-AU" sz="914" dirty="0"/>
+          </a:p>
+        </p:txBody>
+      </p:sp>
+      <p:sp>
+        <p:nvSpPr>
+          <p:cNvPr id="58" name="Left Arrow 57"/>
+          <p:cNvSpPr/>
+          <p:nvPr/>
+        </p:nvSpPr>
+        <p:spPr>
+          <a:xfrm rot="16200000">
+            <a:off x="3113794" y="2422849"/>
+            <a:ext cx="327942" cy="322058"/>
+          </a:xfrm>
+          <a:prstGeom prst="leftArrow">
+            <a:avLst/>
+          </a:prstGeom>
+        </p:spPr>
+        <p:style>
+          <a:lnRef idx="2">
+            <a:schemeClr val="accent1">
+              <a:shade val="50000"/>
+            </a:schemeClr>
+          </a:lnRef>
+          <a:fillRef idx="1">
+            <a:schemeClr val="accent1"/>
+          </a:fillRef>
+          <a:effectRef idx="0">
+            <a:schemeClr val="accent1"/>
+          </a:effectRef>
+          <a:fontRef idx="minor">
+            <a:schemeClr val="lt1"/>
+          </a:fontRef>
+        </p:style>
+        <p:txBody>
+          <a:bodyPr rtlCol="0" anchor="ctr"/>
+          <a:lstStyle/>
+          <a:p>
+            <a:pPr algn="ctr"/>
+            <a:endParaRPr lang="en-AU" sz="1372"/>
+          </a:p>
+        </p:txBody>
+      </p:sp>
       <p:grpSp>
         <p:nvGrpSpPr>
           <p:cNvPr id="47" name="Group 46"/>
@@ -7252,8 +8544,8 @@
         </p:nvGrpSpPr>
         <p:grpSpPr>
           <a:xfrm>
-            <a:off x="3545175" y="3653703"/>
-            <a:ext cx="2555374" cy="407993"/>
+            <a:off x="2829259" y="3941341"/>
+            <a:ext cx="3288578" cy="407993"/>
             <a:chOff x="2951322" y="3685146"/>
             <a:chExt cx="3096015" cy="535396"/>
           </a:xfrm>
@@ -7295,12 +8587,8 @@
             <a:p>
               <a:pPr algn="ctr"/>
               <a:r>
-                <a:rPr lang="en-US" sz="914" dirty="0"/>
-                <a:t>  LLM    </a:t>
-              </a:r>
-              <a:r>
                 <a:rPr lang="en-US" sz="914" dirty="0" smtClean="0"/>
-                <a:t>  </a:t>
+                <a:t>              LLM    </a:t>
               </a:r>
               <a:endParaRPr lang="en-AU" sz="914" dirty="0"/>
             </a:p>
@@ -7389,8 +8677,8 @@
             <a:p>
               <a:pPr algn="ctr"/>
               <a:r>
-                <a:rPr lang="en-US" sz="914" dirty="0" err="1"/>
-                <a:t>CelRev</a:t>
+                <a:rPr lang="en-US" sz="914" dirty="0" smtClean="0"/>
+                <a:t>CelRevive</a:t>
               </a:r>
               <a:endParaRPr lang="en-US" sz="914" dirty="0"/>
             </a:p>
@@ -7413,7 +8701,7 @@
         </p:nvSpPr>
         <p:spPr>
           <a:xfrm>
-            <a:off x="3141436" y="1342810"/>
+            <a:off x="3127750" y="1826774"/>
             <a:ext cx="259927" cy="303481"/>
           </a:xfrm>
           <a:prstGeom prst="rect">
@@ -7459,13 +8747,605 @@
       </p:sp>
       <p:sp>
         <p:nvSpPr>
+          <p:cNvPr id="86" name="Left Arrow 85"/>
+          <p:cNvSpPr/>
+          <p:nvPr/>
+        </p:nvSpPr>
+        <p:spPr>
+          <a:xfrm rot="16200000">
+            <a:off x="3784306" y="4225409"/>
+            <a:ext cx="484411" cy="322058"/>
+          </a:xfrm>
+          <a:prstGeom prst="leftArrow">
+            <a:avLst/>
+          </a:prstGeom>
+        </p:spPr>
+        <p:style>
+          <a:lnRef idx="2">
+            <a:schemeClr val="accent1">
+              <a:shade val="50000"/>
+            </a:schemeClr>
+          </a:lnRef>
+          <a:fillRef idx="1">
+            <a:schemeClr val="accent1"/>
+          </a:fillRef>
+          <a:effectRef idx="0">
+            <a:schemeClr val="accent1"/>
+          </a:effectRef>
+          <a:fontRef idx="minor">
+            <a:schemeClr val="lt1"/>
+          </a:fontRef>
+        </p:style>
+        <p:txBody>
+          <a:bodyPr rtlCol="0" anchor="ctr"/>
+          <a:lstStyle/>
+          <a:p>
+            <a:pPr algn="ctr"/>
+            <a:endParaRPr lang="en-AU" sz="1372"/>
+          </a:p>
+        </p:txBody>
+      </p:sp>
+      <p:sp>
+        <p:nvSpPr>
+          <p:cNvPr id="90" name="Rectangle 89"/>
+          <p:cNvSpPr/>
+          <p:nvPr/>
+        </p:nvSpPr>
+        <p:spPr>
+          <a:xfrm>
+            <a:off x="3199565" y="4628644"/>
+            <a:ext cx="2367277" cy="725347"/>
+          </a:xfrm>
+          <a:prstGeom prst="rect">
+            <a:avLst/>
+          </a:prstGeom>
+          <a:solidFill>
+            <a:schemeClr val="accent1">
+              <a:lumMod val="20000"/>
+              <a:lumOff val="80000"/>
+            </a:schemeClr>
+          </a:solidFill>
+        </p:spPr>
+        <p:style>
+          <a:lnRef idx="2">
+            <a:schemeClr val="accent1">
+              <a:shade val="50000"/>
+            </a:schemeClr>
+          </a:lnRef>
+          <a:fillRef idx="1">
+            <a:schemeClr val="accent1"/>
+          </a:fillRef>
+          <a:effectRef idx="0">
+            <a:schemeClr val="accent1"/>
+          </a:effectRef>
+          <a:fontRef idx="minor">
+            <a:schemeClr val="lt1"/>
+          </a:fontRef>
+        </p:style>
+        <p:txBody>
+          <a:bodyPr rtlCol="0" anchor="ctr"/>
+          <a:lstStyle/>
+          <a:p>
+            <a:pPr marL="130645" indent="-130645">
+              <a:buFont typeface="Arial" panose="020B0604020202020204" pitchFamily="34" charset="0"/>
+              <a:buChar char="•"/>
+            </a:pPr>
+            <a:r>
+              <a:rPr lang="en-US" sz="914" dirty="0" smtClean="0">
+                <a:solidFill>
+                  <a:schemeClr val="tx1"/>
+                </a:solidFill>
+              </a:rPr>
+              <a:t>List </a:t>
+            </a:r>
+            <a:r>
+              <a:rPr lang="en-US" sz="914" dirty="0">
+                <a:solidFill>
+                  <a:schemeClr val="tx1"/>
+                </a:solidFill>
+              </a:rPr>
+              <a:t>of bases + AI Explanations</a:t>
+            </a:r>
+          </a:p>
+          <a:p>
+            <a:pPr marL="130645" indent="-130645">
+              <a:buFont typeface="Arial" panose="020B0604020202020204" pitchFamily="34" charset="0"/>
+              <a:buChar char="•"/>
+            </a:pPr>
+            <a:r>
+              <a:rPr lang="en-US" sz="914" dirty="0">
+                <a:solidFill>
+                  <a:schemeClr val="tx1"/>
+                </a:solidFill>
+              </a:rPr>
+              <a:t>Actives + AI Explanations</a:t>
+            </a:r>
+          </a:p>
+          <a:p>
+            <a:pPr marL="558568" lvl="1" indent="-130645">
+              <a:buFont typeface="Courier New" panose="02070309020205020404" pitchFamily="49" charset="0"/>
+              <a:buChar char="o"/>
+            </a:pPr>
+            <a:r>
+              <a:rPr lang="en-US" sz="914" dirty="0">
+                <a:solidFill>
+                  <a:schemeClr val="tx1"/>
+                </a:solidFill>
+              </a:rPr>
+              <a:t>compatible to bases</a:t>
+            </a:r>
+          </a:p>
+          <a:p>
+            <a:pPr marL="558568" lvl="1" indent="-130645">
+              <a:buFont typeface="Courier New" panose="02070309020205020404" pitchFamily="49" charset="0"/>
+              <a:buChar char="o"/>
+            </a:pPr>
+            <a:r>
+              <a:rPr lang="en-US" sz="914" dirty="0">
+                <a:solidFill>
+                  <a:schemeClr val="tx1"/>
+                </a:solidFill>
+              </a:rPr>
+              <a:t>effective for skin </a:t>
+            </a:r>
+            <a:r>
+              <a:rPr lang="en-US" sz="914" dirty="0" smtClean="0">
+                <a:solidFill>
+                  <a:schemeClr val="tx1"/>
+                </a:solidFill>
+              </a:rPr>
+              <a:t>concerns</a:t>
+            </a:r>
+            <a:endParaRPr lang="en-US" sz="914" dirty="0">
+              <a:solidFill>
+                <a:schemeClr val="tx1"/>
+              </a:solidFill>
+            </a:endParaRPr>
+          </a:p>
+          <a:p>
+            <a:pPr marL="142173" indent="-171450">
+              <a:buFont typeface="Arial" panose="020B0604020202020204" pitchFamily="34" charset="0"/>
+              <a:buChar char="•"/>
+            </a:pPr>
+            <a:r>
+              <a:rPr lang="en-US" sz="914" dirty="0" smtClean="0">
+                <a:solidFill>
+                  <a:schemeClr val="tx1"/>
+                </a:solidFill>
+              </a:rPr>
+              <a:t>Combined Skin </a:t>
+            </a:r>
+            <a:r>
+              <a:rPr lang="en-US" sz="914" dirty="0">
+                <a:solidFill>
+                  <a:schemeClr val="tx1"/>
+                </a:solidFill>
+              </a:rPr>
+              <a:t>Concerns + AI </a:t>
+            </a:r>
+            <a:r>
+              <a:rPr lang="en-US" sz="914" dirty="0" smtClean="0">
+                <a:solidFill>
+                  <a:schemeClr val="tx1"/>
+                </a:solidFill>
+              </a:rPr>
+              <a:t>Explanations</a:t>
+            </a:r>
+            <a:endParaRPr lang="en-US" sz="914" dirty="0">
+              <a:solidFill>
+                <a:schemeClr val="tx1"/>
+              </a:solidFill>
+            </a:endParaRPr>
+          </a:p>
+        </p:txBody>
+      </p:sp>
+      <p:sp>
+        <p:nvSpPr>
+          <p:cNvPr id="97" name="Left Arrow 96"/>
+          <p:cNvSpPr/>
+          <p:nvPr/>
+        </p:nvSpPr>
+        <p:spPr>
+          <a:xfrm rot="16200000">
+            <a:off x="3749860" y="2907712"/>
+            <a:ext cx="480140" cy="354264"/>
+          </a:xfrm>
+          <a:prstGeom prst="leftArrow">
+            <a:avLst/>
+          </a:prstGeom>
+        </p:spPr>
+        <p:style>
+          <a:lnRef idx="2">
+            <a:schemeClr val="accent1">
+              <a:shade val="50000"/>
+            </a:schemeClr>
+          </a:lnRef>
+          <a:fillRef idx="1">
+            <a:schemeClr val="accent1"/>
+          </a:fillRef>
+          <a:effectRef idx="0">
+            <a:schemeClr val="accent1"/>
+          </a:effectRef>
+          <a:fontRef idx="minor">
+            <a:schemeClr val="lt1"/>
+          </a:fontRef>
+        </p:style>
+        <p:txBody>
+          <a:bodyPr rtlCol="0" anchor="ctr"/>
+          <a:lstStyle/>
+          <a:p>
+            <a:pPr algn="ctr"/>
+            <a:endParaRPr lang="en-AU" sz="1372"/>
+          </a:p>
+        </p:txBody>
+      </p:sp>
+      <p:sp>
+        <p:nvSpPr>
+          <p:cNvPr id="99" name="Left Arrow 98"/>
+          <p:cNvSpPr/>
+          <p:nvPr/>
+        </p:nvSpPr>
+        <p:spPr>
+          <a:xfrm rot="10800000">
+            <a:off x="5564819" y="4715045"/>
+            <a:ext cx="1189030" cy="309962"/>
+          </a:xfrm>
+          <a:prstGeom prst="leftArrow">
+            <a:avLst/>
+          </a:prstGeom>
+        </p:spPr>
+        <p:style>
+          <a:lnRef idx="2">
+            <a:schemeClr val="accent1">
+              <a:shade val="50000"/>
+            </a:schemeClr>
+          </a:lnRef>
+          <a:fillRef idx="1">
+            <a:schemeClr val="accent1"/>
+          </a:fillRef>
+          <a:effectRef idx="0">
+            <a:schemeClr val="accent1"/>
+          </a:effectRef>
+          <a:fontRef idx="minor">
+            <a:schemeClr val="lt1"/>
+          </a:fontRef>
+        </p:style>
+        <p:txBody>
+          <a:bodyPr rtlCol="0" anchor="ctr"/>
+          <a:lstStyle/>
+          <a:p>
+            <a:pPr algn="ctr"/>
+            <a:endParaRPr lang="en-AU" sz="1372"/>
+          </a:p>
+        </p:txBody>
+      </p:sp>
+      <p:sp>
+        <p:nvSpPr>
+          <p:cNvPr id="100" name="TextBox 99"/>
+          <p:cNvSpPr txBox="1"/>
+          <p:nvPr/>
+        </p:nvSpPr>
+        <p:spPr>
+          <a:xfrm>
+            <a:off x="5805068" y="4764484"/>
+            <a:ext cx="710451" cy="233013"/>
+          </a:xfrm>
+          <a:prstGeom prst="rect">
+            <a:avLst/>
+          </a:prstGeom>
+          <a:noFill/>
+        </p:spPr>
+        <p:txBody>
+          <a:bodyPr wrap="none" rtlCol="0">
+            <a:spAutoFit/>
+          </a:bodyPr>
+          <a:lstStyle/>
+          <a:p>
+            <a:r>
+              <a:rPr lang="en-US" sz="914" dirty="0"/>
+              <a:t>Formatting</a:t>
+            </a:r>
+            <a:endParaRPr lang="en-AU" sz="914" dirty="0"/>
+          </a:p>
+        </p:txBody>
+      </p:sp>
+      <p:sp>
+        <p:nvSpPr>
+          <p:cNvPr id="101" name="Left Arrow 100"/>
+          <p:cNvSpPr/>
+          <p:nvPr/>
+        </p:nvSpPr>
+        <p:spPr>
+          <a:xfrm rot="10800000">
+            <a:off x="8313665" y="4512963"/>
+            <a:ext cx="1724761" cy="320974"/>
+          </a:xfrm>
+          <a:prstGeom prst="leftArrow">
+            <a:avLst/>
+          </a:prstGeom>
+        </p:spPr>
+        <p:style>
+          <a:lnRef idx="2">
+            <a:schemeClr val="accent1">
+              <a:shade val="50000"/>
+            </a:schemeClr>
+          </a:lnRef>
+          <a:fillRef idx="1">
+            <a:schemeClr val="accent1"/>
+          </a:fillRef>
+          <a:effectRef idx="0">
+            <a:schemeClr val="accent1"/>
+          </a:effectRef>
+          <a:fontRef idx="minor">
+            <a:schemeClr val="lt1"/>
+          </a:fontRef>
+        </p:style>
+        <p:txBody>
+          <a:bodyPr rtlCol="0" anchor="ctr"/>
+          <a:lstStyle/>
+          <a:p>
+            <a:pPr algn="ctr"/>
+            <a:endParaRPr lang="en-AU" sz="1372"/>
+          </a:p>
+        </p:txBody>
+      </p:sp>
+      <p:sp>
+        <p:nvSpPr>
+          <p:cNvPr id="102" name="TextBox 101"/>
+          <p:cNvSpPr txBox="1"/>
+          <p:nvPr/>
+        </p:nvSpPr>
+        <p:spPr>
+          <a:xfrm>
+            <a:off x="8403302" y="4566516"/>
+            <a:ext cx="1510350" cy="233013"/>
+          </a:xfrm>
+          <a:prstGeom prst="rect">
+            <a:avLst/>
+          </a:prstGeom>
+          <a:noFill/>
+        </p:spPr>
+        <p:txBody>
+          <a:bodyPr wrap="none" rtlCol="0">
+            <a:spAutoFit/>
+          </a:bodyPr>
+          <a:lstStyle/>
+          <a:p>
+            <a:r>
+              <a:rPr lang="en-US" sz="914" dirty="0"/>
+              <a:t>To check out/ shopping cart</a:t>
+            </a:r>
+            <a:endParaRPr lang="en-AU" sz="914" dirty="0"/>
+          </a:p>
+        </p:txBody>
+      </p:sp>
+      <p:sp>
+        <p:nvSpPr>
+          <p:cNvPr id="103" name="TextBox 102"/>
+          <p:cNvSpPr txBox="1"/>
+          <p:nvPr/>
+        </p:nvSpPr>
+        <p:spPr>
+          <a:xfrm>
+            <a:off x="5992411" y="4540403"/>
+            <a:ext cx="274434" cy="303481"/>
+          </a:xfrm>
+          <a:prstGeom prst="rect">
+            <a:avLst/>
+          </a:prstGeom>
+          <a:noFill/>
+        </p:spPr>
+        <p:txBody>
+          <a:bodyPr wrap="none" rtlCol="0">
+            <a:spAutoFit/>
+          </a:bodyPr>
+          <a:lstStyle/>
+          <a:p>
+            <a:r>
+              <a:rPr lang="en-US" sz="1372" b="1" dirty="0">
+                <a:solidFill>
+                  <a:srgbClr val="FF0000"/>
+                </a:solidFill>
+                <a:effectLst>
+                  <a:outerShdw blurRad="38100" dist="38100" dir="2700000" algn="tl">
+                    <a:srgbClr val="000000">
+                      <a:alpha val="43137"/>
+                    </a:srgbClr>
+                  </a:outerShdw>
+                </a:effectLst>
+              </a:rPr>
+              <a:t>5</a:t>
+            </a:r>
+            <a:endParaRPr lang="en-AU" sz="1372" b="1" dirty="0">
+              <a:solidFill>
+                <a:srgbClr val="FF0000"/>
+              </a:solidFill>
+              <a:effectLst>
+                <a:outerShdw blurRad="38100" dist="38100" dir="2700000" algn="tl">
+                  <a:srgbClr val="000000">
+                    <a:alpha val="43137"/>
+                  </a:srgbClr>
+                </a:outerShdw>
+              </a:effectLst>
+            </a:endParaRPr>
+          </a:p>
+        </p:txBody>
+      </p:sp>
+      <p:sp>
+        <p:nvSpPr>
+          <p:cNvPr id="104" name="TextBox 103"/>
+          <p:cNvSpPr txBox="1"/>
+          <p:nvPr/>
+        </p:nvSpPr>
+        <p:spPr>
+          <a:xfrm>
+            <a:off x="9120491" y="4332245"/>
+            <a:ext cx="274434" cy="303481"/>
+          </a:xfrm>
+          <a:prstGeom prst="rect">
+            <a:avLst/>
+          </a:prstGeom>
+          <a:noFill/>
+        </p:spPr>
+        <p:txBody>
+          <a:bodyPr wrap="none" rtlCol="0">
+            <a:spAutoFit/>
+          </a:bodyPr>
+          <a:lstStyle/>
+          <a:p>
+            <a:r>
+              <a:rPr lang="en-US" sz="1372" b="1" dirty="0">
+                <a:solidFill>
+                  <a:srgbClr val="FF0000"/>
+                </a:solidFill>
+                <a:effectLst>
+                  <a:outerShdw blurRad="38100" dist="38100" dir="2700000" algn="tl">
+                    <a:srgbClr val="000000">
+                      <a:alpha val="43137"/>
+                    </a:srgbClr>
+                  </a:outerShdw>
+                </a:effectLst>
+              </a:rPr>
+              <a:t>6</a:t>
+            </a:r>
+            <a:endParaRPr lang="en-AU" sz="1372" b="1" dirty="0">
+              <a:solidFill>
+                <a:srgbClr val="FF0000"/>
+              </a:solidFill>
+              <a:effectLst>
+                <a:outerShdw blurRad="38100" dist="38100" dir="2700000" algn="tl">
+                  <a:srgbClr val="000000">
+                    <a:alpha val="43137"/>
+                  </a:srgbClr>
+                </a:outerShdw>
+              </a:effectLst>
+            </a:endParaRPr>
+          </a:p>
+        </p:txBody>
+      </p:sp>
+      <p:sp>
+        <p:nvSpPr>
+          <p:cNvPr id="106" name="TextBox 105"/>
+          <p:cNvSpPr txBox="1"/>
+          <p:nvPr/>
+        </p:nvSpPr>
+        <p:spPr>
+          <a:xfrm>
+            <a:off x="976295" y="1288445"/>
+            <a:ext cx="404278" cy="233013"/>
+          </a:xfrm>
+          <a:prstGeom prst="rect">
+            <a:avLst/>
+          </a:prstGeom>
+          <a:noFill/>
+        </p:spPr>
+        <p:txBody>
+          <a:bodyPr wrap="none" rtlCol="0">
+            <a:spAutoFit/>
+          </a:bodyPr>
+          <a:lstStyle/>
+          <a:p>
+            <a:r>
+              <a:rPr lang="en-US" sz="914" dirty="0"/>
+              <a:t>User</a:t>
+            </a:r>
+            <a:endParaRPr lang="en-AU" sz="914" dirty="0"/>
+          </a:p>
+        </p:txBody>
+      </p:sp>
+      <p:sp>
+        <p:nvSpPr>
+          <p:cNvPr id="59" name="Left Arrow 58"/>
+          <p:cNvSpPr/>
+          <p:nvPr/>
+        </p:nvSpPr>
+        <p:spPr>
+          <a:xfrm rot="16200000">
+            <a:off x="3996669" y="1633304"/>
+            <a:ext cx="786047" cy="309962"/>
+          </a:xfrm>
+          <a:prstGeom prst="leftArrow">
+            <a:avLst/>
+          </a:prstGeom>
+        </p:spPr>
+        <p:style>
+          <a:lnRef idx="2">
+            <a:schemeClr val="accent1">
+              <a:shade val="50000"/>
+            </a:schemeClr>
+          </a:lnRef>
+          <a:fillRef idx="1">
+            <a:schemeClr val="accent1"/>
+          </a:fillRef>
+          <a:effectRef idx="0">
+            <a:schemeClr val="accent1"/>
+          </a:effectRef>
+          <a:fontRef idx="minor">
+            <a:schemeClr val="lt1"/>
+          </a:fontRef>
+        </p:style>
+        <p:txBody>
+          <a:bodyPr rtlCol="0" anchor="ctr"/>
+          <a:lstStyle/>
+          <a:p>
+            <a:pPr algn="ctr"/>
+            <a:endParaRPr lang="en-AU" sz="1372"/>
+          </a:p>
+        </p:txBody>
+      </p:sp>
+      <p:sp>
+        <p:nvSpPr>
+          <p:cNvPr id="48" name="Rounded Rectangle 47"/>
+          <p:cNvSpPr/>
+          <p:nvPr/>
+        </p:nvSpPr>
+        <p:spPr>
+          <a:xfrm>
+            <a:off x="4077027" y="2191644"/>
+            <a:ext cx="672808" cy="228263"/>
+          </a:xfrm>
+          <a:prstGeom prst="roundRect">
+            <a:avLst/>
+          </a:prstGeom>
+        </p:spPr>
+        <p:style>
+          <a:lnRef idx="2">
+            <a:schemeClr val="accent1">
+              <a:shade val="50000"/>
+            </a:schemeClr>
+          </a:lnRef>
+          <a:fillRef idx="1">
+            <a:schemeClr val="accent1"/>
+          </a:fillRef>
+          <a:effectRef idx="0">
+            <a:schemeClr val="accent1"/>
+          </a:effectRef>
+          <a:fontRef idx="minor">
+            <a:schemeClr val="lt1"/>
+          </a:fontRef>
+        </p:style>
+        <p:txBody>
+          <a:bodyPr rtlCol="0" anchor="ctr"/>
+          <a:lstStyle/>
+          <a:p>
+            <a:pPr algn="ctr"/>
+            <a:r>
+              <a:rPr lang="en-US" sz="914" dirty="0" smtClean="0"/>
+              <a:t>LLM</a:t>
+            </a:r>
+            <a:endParaRPr lang="en-AU" sz="914" dirty="0"/>
+          </a:p>
+        </p:txBody>
+      </p:sp>
+      <p:sp>
+        <p:nvSpPr>
           <p:cNvPr id="83" name="TextBox 82"/>
           <p:cNvSpPr txBox="1"/>
           <p:nvPr/>
         </p:nvSpPr>
         <p:spPr>
           <a:xfrm>
-            <a:off x="3152321" y="1969738"/>
+            <a:off x="4261160" y="1822868"/>
             <a:ext cx="274434" cy="303481"/>
           </a:xfrm>
           <a:prstGeom prst="rect">
@@ -7511,13 +9391,13 @@
       </p:sp>
       <p:sp>
         <p:nvSpPr>
-          <p:cNvPr id="86" name="Left Arrow 85"/>
+          <p:cNvPr id="49" name="Left Arrow 48"/>
           <p:cNvSpPr/>
           <p:nvPr/>
         </p:nvSpPr>
         <p:spPr>
           <a:xfrm rot="16200000">
-            <a:off x="3163522" y="2638422"/>
+            <a:off x="4239763" y="2419964"/>
             <a:ext cx="327942" cy="322058"/>
           </a:xfrm>
           <a:prstGeom prst="leftArrow">
@@ -7551,14 +9431,14 @@
       </p:sp>
       <p:sp>
         <p:nvSpPr>
-          <p:cNvPr id="90" name="Rectangle 89"/>
+          <p:cNvPr id="50" name="Rectangle 49"/>
           <p:cNvSpPr/>
           <p:nvPr/>
         </p:nvSpPr>
         <p:spPr>
           <a:xfrm>
-            <a:off x="3571442" y="4377966"/>
-            <a:ext cx="2038849" cy="725347"/>
+            <a:off x="4004542" y="2729252"/>
+            <a:ext cx="1605748" cy="274924"/>
           </a:xfrm>
           <a:prstGeom prst="rect">
             <a:avLst/>
@@ -7595,86 +9475,49 @@
               <a:buChar char="•"/>
             </a:pPr>
             <a:r>
+              <a:rPr lang="en-US" sz="914" dirty="0" smtClean="0">
+                <a:solidFill>
+                  <a:schemeClr val="tx1"/>
+                </a:solidFill>
+              </a:rPr>
+              <a:t>Questionnaire Skin Concerns + </a:t>
+            </a:r>
+            <a:r>
               <a:rPr lang="en-US" sz="914" dirty="0">
                 <a:solidFill>
                   <a:schemeClr val="tx1"/>
                 </a:solidFill>
               </a:rPr>
-              <a:t>All Skin Concerns + AI Explanations</a:t>
-            </a:r>
-          </a:p>
-          <a:p>
-            <a:pPr marL="130645" indent="-130645">
-              <a:buFont typeface="Arial" panose="020B0604020202020204" pitchFamily="34" charset="0"/>
-              <a:buChar char="•"/>
-            </a:pPr>
-            <a:r>
-              <a:rPr lang="en-US" sz="914" dirty="0">
-                <a:solidFill>
-                  <a:schemeClr val="tx1"/>
-                </a:solidFill>
-              </a:rPr>
-              <a:t>List of bases + AI Explanations</a:t>
-            </a:r>
-          </a:p>
-          <a:p>
-            <a:pPr marL="130645" indent="-130645">
-              <a:buFont typeface="Arial" panose="020B0604020202020204" pitchFamily="34" charset="0"/>
-              <a:buChar char="•"/>
-            </a:pPr>
-            <a:r>
-              <a:rPr lang="en-US" sz="914" dirty="0">
-                <a:solidFill>
-                  <a:schemeClr val="tx1"/>
-                </a:solidFill>
-              </a:rPr>
-              <a:t>Actives + AI Explanations</a:t>
-            </a:r>
-          </a:p>
-          <a:p>
-            <a:pPr marL="558568" lvl="1" indent="-130645">
-              <a:buFont typeface="Courier New" panose="02070309020205020404" pitchFamily="49" charset="0"/>
-              <a:buChar char="o"/>
-            </a:pPr>
-            <a:r>
-              <a:rPr lang="en-US" sz="914" dirty="0">
-                <a:solidFill>
-                  <a:schemeClr val="tx1"/>
-                </a:solidFill>
-              </a:rPr>
-              <a:t>compatible to bases</a:t>
-            </a:r>
-          </a:p>
-          <a:p>
-            <a:pPr marL="558568" lvl="1" indent="-130645">
-              <a:buFont typeface="Courier New" panose="02070309020205020404" pitchFamily="49" charset="0"/>
-              <a:buChar char="o"/>
-            </a:pPr>
-            <a:r>
-              <a:rPr lang="en-US" sz="914" dirty="0">
-                <a:solidFill>
-                  <a:schemeClr val="tx1"/>
-                </a:solidFill>
-              </a:rPr>
-              <a:t>effective for skin concerns</a:t>
-            </a:r>
-          </a:p>
-        </p:txBody>
-      </p:sp>
-      <p:sp>
-        <p:nvSpPr>
-          <p:cNvPr id="91" name="Left Arrow 90"/>
+              <a:t>AI Explanations</a:t>
+            </a:r>
+            <a:endParaRPr lang="en-AU" sz="914" dirty="0">
+              <a:solidFill>
+                <a:schemeClr val="tx1"/>
+              </a:solidFill>
+            </a:endParaRPr>
+          </a:p>
+        </p:txBody>
+      </p:sp>
+      <p:sp>
+        <p:nvSpPr>
+          <p:cNvPr id="43" name="Rectangle 42"/>
           <p:cNvSpPr/>
           <p:nvPr/>
         </p:nvSpPr>
         <p:spPr>
-          <a:xfrm rot="16200000">
-            <a:off x="3583254" y="3929463"/>
-            <a:ext cx="541217" cy="318877"/>
-          </a:xfrm>
-          <a:prstGeom prst="leftArrow">
-            <a:avLst/>
-          </a:prstGeom>
+          <a:xfrm>
+            <a:off x="2709745" y="2730795"/>
+            <a:ext cx="1284308" cy="274924"/>
+          </a:xfrm>
+          <a:prstGeom prst="rect">
+            <a:avLst/>
+          </a:prstGeom>
+          <a:solidFill>
+            <a:schemeClr val="accent1">
+              <a:lumMod val="20000"/>
+              <a:lumOff val="80000"/>
+            </a:schemeClr>
+          </a:solidFill>
         </p:spPr>
         <p:style>
           <a:lnRef idx="2">
@@ -7696,6 +9539,192 @@
           <a:bodyPr rtlCol="0" anchor="ctr"/>
           <a:lstStyle/>
           <a:p>
+            <a:pPr marL="130645" indent="-130645">
+              <a:buFont typeface="Arial" panose="020B0604020202020204" pitchFamily="34" charset="0"/>
+              <a:buChar char="•"/>
+            </a:pPr>
+            <a:r>
+              <a:rPr lang="en-US" sz="914" dirty="0">
+                <a:solidFill>
+                  <a:schemeClr val="tx1"/>
+                </a:solidFill>
+              </a:rPr>
+              <a:t>Visual Skin Concerns</a:t>
+            </a:r>
+          </a:p>
+          <a:p>
+            <a:r>
+              <a:rPr lang="en-US" sz="914" dirty="0">
+                <a:solidFill>
+                  <a:schemeClr val="tx1"/>
+                </a:solidFill>
+              </a:rPr>
+              <a:t>     + AI Explanations</a:t>
+            </a:r>
+            <a:endParaRPr lang="en-AU" sz="914" dirty="0">
+              <a:solidFill>
+                <a:schemeClr val="tx1"/>
+              </a:solidFill>
+            </a:endParaRPr>
+          </a:p>
+        </p:txBody>
+      </p:sp>
+      <p:sp>
+        <p:nvSpPr>
+          <p:cNvPr id="51" name="Rectangle 50"/>
+          <p:cNvSpPr/>
+          <p:nvPr/>
+        </p:nvSpPr>
+        <p:spPr>
+          <a:xfrm>
+            <a:off x="3218571" y="3313423"/>
+            <a:ext cx="1491252" cy="274924"/>
+          </a:xfrm>
+          <a:prstGeom prst="rect">
+            <a:avLst/>
+          </a:prstGeom>
+          <a:solidFill>
+            <a:schemeClr val="accent1">
+              <a:lumMod val="20000"/>
+              <a:lumOff val="80000"/>
+            </a:schemeClr>
+          </a:solidFill>
+        </p:spPr>
+        <p:style>
+          <a:lnRef idx="2">
+            <a:schemeClr val="accent1">
+              <a:shade val="50000"/>
+            </a:schemeClr>
+          </a:lnRef>
+          <a:fillRef idx="1">
+            <a:schemeClr val="accent1"/>
+          </a:fillRef>
+          <a:effectRef idx="0">
+            <a:schemeClr val="accent1"/>
+          </a:effectRef>
+          <a:fontRef idx="minor">
+            <a:schemeClr val="lt1"/>
+          </a:fontRef>
+        </p:style>
+        <p:txBody>
+          <a:bodyPr rtlCol="0" anchor="ctr"/>
+          <a:lstStyle/>
+          <a:p>
+            <a:pPr marL="130645" indent="-130645">
+              <a:buFont typeface="Arial" panose="020B0604020202020204" pitchFamily="34" charset="0"/>
+              <a:buChar char="•"/>
+            </a:pPr>
+            <a:r>
+              <a:rPr lang="en-US" sz="914" dirty="0" smtClean="0">
+                <a:solidFill>
+                  <a:schemeClr val="tx1"/>
+                </a:solidFill>
+              </a:rPr>
+              <a:t>Combined Skin Concerns + </a:t>
+            </a:r>
+            <a:r>
+              <a:rPr lang="en-US" sz="914" dirty="0">
+                <a:solidFill>
+                  <a:schemeClr val="tx1"/>
+                </a:solidFill>
+              </a:rPr>
+              <a:t>AI Explanations</a:t>
+            </a:r>
+            <a:endParaRPr lang="en-AU" sz="914" dirty="0">
+              <a:solidFill>
+                <a:schemeClr val="tx1"/>
+              </a:solidFill>
+            </a:endParaRPr>
+          </a:p>
+        </p:txBody>
+      </p:sp>
+      <p:sp>
+        <p:nvSpPr>
+          <p:cNvPr id="52" name="TextBox 51"/>
+          <p:cNvSpPr txBox="1"/>
+          <p:nvPr/>
+        </p:nvSpPr>
+        <p:spPr>
+          <a:xfrm>
+            <a:off x="3855634" y="3010059"/>
+            <a:ext cx="274434" cy="303481"/>
+          </a:xfrm>
+          <a:prstGeom prst="rect">
+            <a:avLst/>
+          </a:prstGeom>
+          <a:noFill/>
+        </p:spPr>
+        <p:txBody>
+          <a:bodyPr wrap="none" rtlCol="0">
+            <a:spAutoFit/>
+          </a:bodyPr>
+          <a:lstStyle/>
+          <a:p>
+            <a:r>
+              <a:rPr lang="en-US" sz="1372" b="1" dirty="0">
+                <a:solidFill>
+                  <a:srgbClr val="FF0000"/>
+                </a:solidFill>
+                <a:effectLst>
+                  <a:outerShdw blurRad="38100" dist="38100" dir="2700000" algn="tl">
+                    <a:srgbClr val="000000">
+                      <a:alpha val="43137"/>
+                    </a:srgbClr>
+                  </a:outerShdw>
+                </a:effectLst>
+              </a:rPr>
+              <a:t>3</a:t>
+            </a:r>
+            <a:endParaRPr lang="en-AU" sz="1372" b="1" dirty="0">
+              <a:solidFill>
+                <a:srgbClr val="FF0000"/>
+              </a:solidFill>
+              <a:effectLst>
+                <a:outerShdw blurRad="38100" dist="38100" dir="2700000" algn="tl">
+                  <a:srgbClr val="000000">
+                    <a:alpha val="43137"/>
+                  </a:srgbClr>
+                </a:outerShdw>
+              </a:effectLst>
+            </a:endParaRPr>
+          </a:p>
+        </p:txBody>
+      </p:sp>
+      <p:sp>
+        <p:nvSpPr>
+          <p:cNvPr id="91" name="Left Arrow 90"/>
+          <p:cNvSpPr/>
+          <p:nvPr/>
+        </p:nvSpPr>
+        <p:spPr>
+          <a:xfrm rot="16200000">
+            <a:off x="3741860" y="3715506"/>
+            <a:ext cx="541217" cy="318877"/>
+          </a:xfrm>
+          <a:prstGeom prst="leftArrow">
+            <a:avLst/>
+          </a:prstGeom>
+        </p:spPr>
+        <p:style>
+          <a:lnRef idx="2">
+            <a:schemeClr val="accent1">
+              <a:shade val="50000"/>
+            </a:schemeClr>
+          </a:lnRef>
+          <a:fillRef idx="1">
+            <a:schemeClr val="accent1"/>
+          </a:fillRef>
+          <a:effectRef idx="0">
+            <a:schemeClr val="accent1"/>
+          </a:effectRef>
+          <a:fontRef idx="minor">
+            <a:schemeClr val="lt1"/>
+          </a:fontRef>
+        </p:style>
+        <p:txBody>
+          <a:bodyPr rtlCol="0" anchor="ctr"/>
+          <a:lstStyle/>
+          <a:p>
             <a:pPr algn="ctr"/>
             <a:endParaRPr lang="en-AU" sz="1372"/>
           </a:p>
@@ -7709,7 +9738,7 @@
         </p:nvSpPr>
         <p:spPr>
           <a:xfrm>
-            <a:off x="3730689" y="4026634"/>
+            <a:off x="3875252" y="3698984"/>
             <a:ext cx="274434" cy="303481"/>
           </a:xfrm>
           <a:prstGeom prst="rect">
@@ -7755,19 +9784,22 @@
       </p:sp>
       <p:sp>
         <p:nvSpPr>
-          <p:cNvPr id="54" name="Half Frame 53"/>
+          <p:cNvPr id="4" name="U-Turn Arrow 3"/>
           <p:cNvSpPr/>
           <p:nvPr/>
         </p:nvSpPr>
         <p:spPr>
-          <a:xfrm rot="13475004">
-            <a:off x="3431497" y="2441386"/>
-            <a:ext cx="871663" cy="880726"/>
-          </a:xfrm>
-          <a:prstGeom prst="halfFrame">
+          <a:xfrm rot="5400000">
+            <a:off x="3934691" y="1844556"/>
+            <a:ext cx="2214450" cy="1952680"/>
+          </a:xfrm>
+          <a:prstGeom prst="uturnArrow">
             <a:avLst>
-              <a:gd name="adj1" fmla="val 11711"/>
-              <a:gd name="adj2" fmla="val 13527"/>
+              <a:gd name="adj1" fmla="val 7720"/>
+              <a:gd name="adj2" fmla="val 7169"/>
+              <a:gd name="adj3" fmla="val 9390"/>
+              <a:gd name="adj4" fmla="val 43750"/>
+              <a:gd name="adj5" fmla="val 100000"/>
             </a:avLst>
           </a:prstGeom>
         </p:spPr>
@@ -7792,7 +9824,7 @@
           <a:lstStyle/>
           <a:p>
             <a:pPr algn="ctr"/>
-            <a:endParaRPr lang="en-AU" sz="1372">
+            <a:endParaRPr lang="en-AU">
               <a:solidFill>
                 <a:schemeClr val="tx1"/>
               </a:solidFill>
@@ -7802,18 +9834,24 @@
       </p:sp>
       <p:sp>
         <p:nvSpPr>
-          <p:cNvPr id="97" name="Left Arrow 96"/>
+          <p:cNvPr id="105" name="Rectangle 104"/>
           <p:cNvSpPr/>
           <p:nvPr/>
         </p:nvSpPr>
         <p:spPr>
-          <a:xfrm rot="16200000">
-            <a:off x="3621881" y="3393495"/>
-            <a:ext cx="480140" cy="354264"/>
-          </a:xfrm>
-          <a:prstGeom prst="leftArrow">
-            <a:avLst/>
-          </a:prstGeom>
+          <a:xfrm>
+            <a:off x="4029549" y="1686375"/>
+            <a:ext cx="720286" cy="205629"/>
+          </a:xfrm>
+          <a:prstGeom prst="rect">
+            <a:avLst/>
+          </a:prstGeom>
+          <a:solidFill>
+            <a:schemeClr val="accent1">
+              <a:lumMod val="20000"/>
+              <a:lumOff val="80000"/>
+            </a:schemeClr>
+          </a:solidFill>
         </p:spPr>
         <p:style>
           <a:lnRef idx="2">
@@ -7835,348 +9873,6 @@
           <a:bodyPr rtlCol="0" anchor="ctr"/>
           <a:lstStyle/>
           <a:p>
-            <a:pPr algn="ctr"/>
-            <a:endParaRPr lang="en-AU" sz="1372"/>
-          </a:p>
-        </p:txBody>
-      </p:sp>
-      <p:sp>
-        <p:nvSpPr>
-          <p:cNvPr id="98" name="TextBox 97"/>
-          <p:cNvSpPr txBox="1"/>
-          <p:nvPr/>
-        </p:nvSpPr>
-        <p:spPr>
-          <a:xfrm>
-            <a:off x="3730689" y="3350072"/>
-            <a:ext cx="273820" cy="303481"/>
-          </a:xfrm>
-          <a:prstGeom prst="rect">
-            <a:avLst/>
-          </a:prstGeom>
-          <a:noFill/>
-        </p:spPr>
-        <p:txBody>
-          <a:bodyPr wrap="square" rtlCol="0">
-            <a:spAutoFit/>
-          </a:bodyPr>
-          <a:lstStyle/>
-          <a:p>
-            <a:r>
-              <a:rPr lang="en-US" sz="1372" b="1" dirty="0">
-                <a:solidFill>
-                  <a:srgbClr val="FF0000"/>
-                </a:solidFill>
-                <a:effectLst>
-                  <a:outerShdw blurRad="38100" dist="38100" dir="2700000" algn="tl">
-                    <a:srgbClr val="000000">
-                      <a:alpha val="43137"/>
-                    </a:srgbClr>
-                  </a:outerShdw>
-                </a:effectLst>
-              </a:rPr>
-              <a:t>3</a:t>
-            </a:r>
-            <a:endParaRPr lang="en-AU" sz="1372" b="1" dirty="0">
-              <a:solidFill>
-                <a:srgbClr val="FF0000"/>
-              </a:solidFill>
-              <a:effectLst>
-                <a:outerShdw blurRad="38100" dist="38100" dir="2700000" algn="tl">
-                  <a:srgbClr val="000000">
-                    <a:alpha val="43137"/>
-                  </a:srgbClr>
-                </a:outerShdw>
-              </a:effectLst>
-            </a:endParaRPr>
-          </a:p>
-        </p:txBody>
-      </p:sp>
-      <p:sp>
-        <p:nvSpPr>
-          <p:cNvPr id="99" name="Left Arrow 98"/>
-          <p:cNvSpPr/>
-          <p:nvPr/>
-        </p:nvSpPr>
-        <p:spPr>
-          <a:xfrm rot="10800000">
-            <a:off x="5610291" y="4523976"/>
-            <a:ext cx="1189030" cy="309962"/>
-          </a:xfrm>
-          <a:prstGeom prst="leftArrow">
-            <a:avLst/>
-          </a:prstGeom>
-        </p:spPr>
-        <p:style>
-          <a:lnRef idx="2">
-            <a:schemeClr val="accent1">
-              <a:shade val="50000"/>
-            </a:schemeClr>
-          </a:lnRef>
-          <a:fillRef idx="1">
-            <a:schemeClr val="accent1"/>
-          </a:fillRef>
-          <a:effectRef idx="0">
-            <a:schemeClr val="accent1"/>
-          </a:effectRef>
-          <a:fontRef idx="minor">
-            <a:schemeClr val="lt1"/>
-          </a:fontRef>
-        </p:style>
-        <p:txBody>
-          <a:bodyPr rtlCol="0" anchor="ctr"/>
-          <a:lstStyle/>
-          <a:p>
-            <a:pPr algn="ctr"/>
-            <a:endParaRPr lang="en-AU" sz="1372"/>
-          </a:p>
-        </p:txBody>
-      </p:sp>
-      <p:sp>
-        <p:nvSpPr>
-          <p:cNvPr id="100" name="TextBox 99"/>
-          <p:cNvSpPr txBox="1"/>
-          <p:nvPr/>
-        </p:nvSpPr>
-        <p:spPr>
-          <a:xfrm>
-            <a:off x="5850540" y="4573415"/>
-            <a:ext cx="710451" cy="233013"/>
-          </a:xfrm>
-          <a:prstGeom prst="rect">
-            <a:avLst/>
-          </a:prstGeom>
-          <a:noFill/>
-        </p:spPr>
-        <p:txBody>
-          <a:bodyPr wrap="none" rtlCol="0">
-            <a:spAutoFit/>
-          </a:bodyPr>
-          <a:lstStyle/>
-          <a:p>
-            <a:r>
-              <a:rPr lang="en-US" sz="914" dirty="0"/>
-              <a:t>Formatting</a:t>
-            </a:r>
-            <a:endParaRPr lang="en-AU" sz="914" dirty="0"/>
-          </a:p>
-        </p:txBody>
-      </p:sp>
-      <p:sp>
-        <p:nvSpPr>
-          <p:cNvPr id="101" name="Left Arrow 100"/>
-          <p:cNvSpPr/>
-          <p:nvPr/>
-        </p:nvSpPr>
-        <p:spPr>
-          <a:xfrm rot="10800000">
-            <a:off x="8313665" y="4512963"/>
-            <a:ext cx="1724761" cy="320974"/>
-          </a:xfrm>
-          <a:prstGeom prst="leftArrow">
-            <a:avLst/>
-          </a:prstGeom>
-        </p:spPr>
-        <p:style>
-          <a:lnRef idx="2">
-            <a:schemeClr val="accent1">
-              <a:shade val="50000"/>
-            </a:schemeClr>
-          </a:lnRef>
-          <a:fillRef idx="1">
-            <a:schemeClr val="accent1"/>
-          </a:fillRef>
-          <a:effectRef idx="0">
-            <a:schemeClr val="accent1"/>
-          </a:effectRef>
-          <a:fontRef idx="minor">
-            <a:schemeClr val="lt1"/>
-          </a:fontRef>
-        </p:style>
-        <p:txBody>
-          <a:bodyPr rtlCol="0" anchor="ctr"/>
-          <a:lstStyle/>
-          <a:p>
-            <a:pPr algn="ctr"/>
-            <a:endParaRPr lang="en-AU" sz="1372"/>
-          </a:p>
-        </p:txBody>
-      </p:sp>
-      <p:sp>
-        <p:nvSpPr>
-          <p:cNvPr id="102" name="TextBox 101"/>
-          <p:cNvSpPr txBox="1"/>
-          <p:nvPr/>
-        </p:nvSpPr>
-        <p:spPr>
-          <a:xfrm>
-            <a:off x="8403302" y="4566516"/>
-            <a:ext cx="1510350" cy="233013"/>
-          </a:xfrm>
-          <a:prstGeom prst="rect">
-            <a:avLst/>
-          </a:prstGeom>
-          <a:noFill/>
-        </p:spPr>
-        <p:txBody>
-          <a:bodyPr wrap="none" rtlCol="0">
-            <a:spAutoFit/>
-          </a:bodyPr>
-          <a:lstStyle/>
-          <a:p>
-            <a:r>
-              <a:rPr lang="en-US" sz="914" dirty="0"/>
-              <a:t>To check out/ shopping cart</a:t>
-            </a:r>
-            <a:endParaRPr lang="en-AU" sz="914" dirty="0"/>
-          </a:p>
-        </p:txBody>
-      </p:sp>
-      <p:sp>
-        <p:nvSpPr>
-          <p:cNvPr id="103" name="TextBox 102"/>
-          <p:cNvSpPr txBox="1"/>
-          <p:nvPr/>
-        </p:nvSpPr>
-        <p:spPr>
-          <a:xfrm>
-            <a:off x="6037883" y="4349334"/>
-            <a:ext cx="274434" cy="303481"/>
-          </a:xfrm>
-          <a:prstGeom prst="rect">
-            <a:avLst/>
-          </a:prstGeom>
-          <a:noFill/>
-        </p:spPr>
-        <p:txBody>
-          <a:bodyPr wrap="none" rtlCol="0">
-            <a:spAutoFit/>
-          </a:bodyPr>
-          <a:lstStyle/>
-          <a:p>
-            <a:r>
-              <a:rPr lang="en-US" sz="1372" b="1" dirty="0">
-                <a:solidFill>
-                  <a:srgbClr val="FF0000"/>
-                </a:solidFill>
-                <a:effectLst>
-                  <a:outerShdw blurRad="38100" dist="38100" dir="2700000" algn="tl">
-                    <a:srgbClr val="000000">
-                      <a:alpha val="43137"/>
-                    </a:srgbClr>
-                  </a:outerShdw>
-                </a:effectLst>
-              </a:rPr>
-              <a:t>5</a:t>
-            </a:r>
-            <a:endParaRPr lang="en-AU" sz="1372" b="1" dirty="0">
-              <a:solidFill>
-                <a:srgbClr val="FF0000"/>
-              </a:solidFill>
-              <a:effectLst>
-                <a:outerShdw blurRad="38100" dist="38100" dir="2700000" algn="tl">
-                  <a:srgbClr val="000000">
-                    <a:alpha val="43137"/>
-                  </a:srgbClr>
-                </a:outerShdw>
-              </a:effectLst>
-            </a:endParaRPr>
-          </a:p>
-        </p:txBody>
-      </p:sp>
-      <p:sp>
-        <p:nvSpPr>
-          <p:cNvPr id="104" name="TextBox 103"/>
-          <p:cNvSpPr txBox="1"/>
-          <p:nvPr/>
-        </p:nvSpPr>
-        <p:spPr>
-          <a:xfrm>
-            <a:off x="9120491" y="4332245"/>
-            <a:ext cx="274434" cy="303481"/>
-          </a:xfrm>
-          <a:prstGeom prst="rect">
-            <a:avLst/>
-          </a:prstGeom>
-          <a:noFill/>
-        </p:spPr>
-        <p:txBody>
-          <a:bodyPr wrap="none" rtlCol="0">
-            <a:spAutoFit/>
-          </a:bodyPr>
-          <a:lstStyle/>
-          <a:p>
-            <a:r>
-              <a:rPr lang="en-US" sz="1372" b="1" dirty="0">
-                <a:solidFill>
-                  <a:srgbClr val="FF0000"/>
-                </a:solidFill>
-                <a:effectLst>
-                  <a:outerShdw blurRad="38100" dist="38100" dir="2700000" algn="tl">
-                    <a:srgbClr val="000000">
-                      <a:alpha val="43137"/>
-                    </a:srgbClr>
-                  </a:outerShdw>
-                </a:effectLst>
-              </a:rPr>
-              <a:t>6</a:t>
-            </a:r>
-            <a:endParaRPr lang="en-AU" sz="1372" b="1" dirty="0">
-              <a:solidFill>
-                <a:srgbClr val="FF0000"/>
-              </a:solidFill>
-              <a:effectLst>
-                <a:outerShdw blurRad="38100" dist="38100" dir="2700000" algn="tl">
-                  <a:srgbClr val="000000">
-                    <a:alpha val="43137"/>
-                  </a:srgbClr>
-                </a:outerShdw>
-              </a:effectLst>
-            </a:endParaRPr>
-          </a:p>
-        </p:txBody>
-      </p:sp>
-      <p:sp>
-        <p:nvSpPr>
-          <p:cNvPr id="105" name="Rectangle 104"/>
-          <p:cNvSpPr/>
-          <p:nvPr/>
-        </p:nvSpPr>
-        <p:spPr>
-          <a:xfrm>
-            <a:off x="4090240" y="1850305"/>
-            <a:ext cx="720286" cy="205629"/>
-          </a:xfrm>
-          <a:prstGeom prst="rect">
-            <a:avLst/>
-          </a:prstGeom>
-          <a:solidFill>
-            <a:schemeClr val="accent1">
-              <a:lumMod val="20000"/>
-              <a:lumOff val="80000"/>
-            </a:schemeClr>
-          </a:solidFill>
-        </p:spPr>
-        <p:style>
-          <a:lnRef idx="2">
-            <a:schemeClr val="accent1">
-              <a:shade val="50000"/>
-            </a:schemeClr>
-          </a:lnRef>
-          <a:fillRef idx="1">
-            <a:schemeClr val="accent1"/>
-          </a:fillRef>
-          <a:effectRef idx="0">
-            <a:schemeClr val="accent1"/>
-          </a:effectRef>
-          <a:fontRef idx="minor">
-            <a:schemeClr val="lt1"/>
-          </a:fontRef>
-        </p:style>
-        <p:txBody>
-          <a:bodyPr rtlCol="0" anchor="ctr"/>
-          <a:lstStyle/>
-          <a:p>
             <a:pPr marL="130645" indent="-130645">
               <a:buFont typeface="Arial" panose="020B0604020202020204" pitchFamily="34" charset="0"/>
               <a:buChar char="•"/>
@@ -8197,40 +9893,10 @@
           </a:p>
         </p:txBody>
       </p:sp>
-      <p:sp>
-        <p:nvSpPr>
-          <p:cNvPr id="106" name="TextBox 105"/>
-          <p:cNvSpPr txBox="1"/>
-          <p:nvPr/>
-        </p:nvSpPr>
-        <p:spPr>
-          <a:xfrm>
-            <a:off x="976295" y="1288445"/>
-            <a:ext cx="404278" cy="233013"/>
-          </a:xfrm>
-          <a:prstGeom prst="rect">
-            <a:avLst/>
-          </a:prstGeom>
-          <a:noFill/>
-        </p:spPr>
-        <p:txBody>
-          <a:bodyPr wrap="none" rtlCol="0">
-            <a:spAutoFit/>
-          </a:bodyPr>
-          <a:lstStyle/>
-          <a:p>
-            <a:r>
-              <a:rPr lang="en-US" sz="914" dirty="0"/>
-              <a:t>User</a:t>
-            </a:r>
-            <a:endParaRPr lang="en-AU" sz="914" dirty="0"/>
-          </a:p>
-        </p:txBody>
-      </p:sp>
     </p:spTree>
     <p:extLst>
       <p:ext uri="{BB962C8B-B14F-4D97-AF65-F5344CB8AC3E}">
-        <p14:creationId xmlns:p14="http://schemas.microsoft.com/office/powerpoint/2010/main" val="2239038504"/>
+        <p14:creationId xmlns:p14="http://schemas.microsoft.com/office/powerpoint/2010/main" val="1309759944"/>
       </p:ext>
     </p:extLst>
   </p:cSld>

--- a/architecture/architecture.pptx
+++ b/architecture/architecture.pptx
@@ -10,6 +10,7 @@
     <p:sldId id="257" r:id="rId4"/>
     <p:sldId id="258" r:id="rId5"/>
     <p:sldId id="260" r:id="rId6"/>
+    <p:sldId id="261" r:id="rId7"/>
   </p:sldIdLst>
   <p:sldSz cx="12192000" cy="6858000"/>
   <p:notesSz cx="6858000" cy="9144000"/>
@@ -247,7 +248,7 @@
           <a:p>
             <a:fld id="{3CA2CC2A-5CFF-450D-AB10-594363CFED2D}" type="datetimeFigureOut">
               <a:rPr lang="en-AU" smtClean="0"/>
-              <a:t>25/08/2026</a:t>
+              <a:t>4/09/2026</a:t>
             </a:fld>
             <a:endParaRPr lang="en-AU"/>
           </a:p>
@@ -417,7 +418,7 @@
           <a:p>
             <a:fld id="{3CA2CC2A-5CFF-450D-AB10-594363CFED2D}" type="datetimeFigureOut">
               <a:rPr lang="en-AU" smtClean="0"/>
-              <a:t>25/08/2026</a:t>
+              <a:t>4/09/2026</a:t>
             </a:fld>
             <a:endParaRPr lang="en-AU"/>
           </a:p>
@@ -597,7 +598,7 @@
           <a:p>
             <a:fld id="{3CA2CC2A-5CFF-450D-AB10-594363CFED2D}" type="datetimeFigureOut">
               <a:rPr lang="en-AU" smtClean="0"/>
-              <a:t>25/08/2026</a:t>
+              <a:t>4/09/2026</a:t>
             </a:fld>
             <a:endParaRPr lang="en-AU"/>
           </a:p>
@@ -767,7 +768,7 @@
           <a:p>
             <a:fld id="{3CA2CC2A-5CFF-450D-AB10-594363CFED2D}" type="datetimeFigureOut">
               <a:rPr lang="en-AU" smtClean="0"/>
-              <a:t>25/08/2026</a:t>
+              <a:t>4/09/2026</a:t>
             </a:fld>
             <a:endParaRPr lang="en-AU"/>
           </a:p>
@@ -1013,7 +1014,7 @@
           <a:p>
             <a:fld id="{3CA2CC2A-5CFF-450D-AB10-594363CFED2D}" type="datetimeFigureOut">
               <a:rPr lang="en-AU" smtClean="0"/>
-              <a:t>25/08/2026</a:t>
+              <a:t>4/09/2026</a:t>
             </a:fld>
             <a:endParaRPr lang="en-AU"/>
           </a:p>
@@ -1245,7 +1246,7 @@
           <a:p>
             <a:fld id="{3CA2CC2A-5CFF-450D-AB10-594363CFED2D}" type="datetimeFigureOut">
               <a:rPr lang="en-AU" smtClean="0"/>
-              <a:t>25/08/2026</a:t>
+              <a:t>4/09/2026</a:t>
             </a:fld>
             <a:endParaRPr lang="en-AU"/>
           </a:p>
@@ -1612,7 +1613,7 @@
           <a:p>
             <a:fld id="{3CA2CC2A-5CFF-450D-AB10-594363CFED2D}" type="datetimeFigureOut">
               <a:rPr lang="en-AU" smtClean="0"/>
-              <a:t>25/08/2026</a:t>
+              <a:t>4/09/2026</a:t>
             </a:fld>
             <a:endParaRPr lang="en-AU"/>
           </a:p>
@@ -1730,7 +1731,7 @@
           <a:p>
             <a:fld id="{3CA2CC2A-5CFF-450D-AB10-594363CFED2D}" type="datetimeFigureOut">
               <a:rPr lang="en-AU" smtClean="0"/>
-              <a:t>25/08/2026</a:t>
+              <a:t>4/09/2026</a:t>
             </a:fld>
             <a:endParaRPr lang="en-AU"/>
           </a:p>
@@ -1825,7 +1826,7 @@
           <a:p>
             <a:fld id="{3CA2CC2A-5CFF-450D-AB10-594363CFED2D}" type="datetimeFigureOut">
               <a:rPr lang="en-AU" smtClean="0"/>
-              <a:t>25/08/2026</a:t>
+              <a:t>4/09/2026</a:t>
             </a:fld>
             <a:endParaRPr lang="en-AU"/>
           </a:p>
@@ -2102,7 +2103,7 @@
           <a:p>
             <a:fld id="{3CA2CC2A-5CFF-450D-AB10-594363CFED2D}" type="datetimeFigureOut">
               <a:rPr lang="en-AU" smtClean="0"/>
-              <a:t>25/08/2026</a:t>
+              <a:t>4/09/2026</a:t>
             </a:fld>
             <a:endParaRPr lang="en-AU"/>
           </a:p>
@@ -2355,7 +2356,7 @@
           <a:p>
             <a:fld id="{3CA2CC2A-5CFF-450D-AB10-594363CFED2D}" type="datetimeFigureOut">
               <a:rPr lang="en-AU" smtClean="0"/>
-              <a:t>25/08/2026</a:t>
+              <a:t>4/09/2026</a:t>
             </a:fld>
             <a:endParaRPr lang="en-AU"/>
           </a:p>
@@ -2568,7 +2569,7 @@
           <a:p>
             <a:fld id="{3CA2CC2A-5CFF-450D-AB10-594363CFED2D}" type="datetimeFigureOut">
               <a:rPr lang="en-AU" smtClean="0"/>
-              <a:t>25/08/2026</a:t>
+              <a:t>4/09/2026</a:t>
             </a:fld>
             <a:endParaRPr lang="en-AU"/>
           </a:p>
@@ -9913,6 +9914,2613 @@
 </p:sld>
 </file>
 
+<file path=ppt/slides/slide6.xml><?xml version="1.0" encoding="utf-8"?>
+<p:sld xmlns:a="http://schemas.openxmlformats.org/drawingml/2006/main" xmlns:r="http://schemas.openxmlformats.org/officeDocument/2006/relationships" xmlns:p="http://schemas.openxmlformats.org/presentationml/2006/main">
+  <p:cSld>
+    <p:spTree>
+      <p:nvGrpSpPr>
+        <p:cNvPr id="1" name=""/>
+        <p:cNvGrpSpPr/>
+        <p:nvPr/>
+      </p:nvGrpSpPr>
+      <p:grpSpPr>
+        <a:xfrm>
+          <a:off x="0" y="0"/>
+          <a:ext cx="0" cy="0"/>
+          <a:chOff x="0" y="0"/>
+          <a:chExt cx="0" cy="0"/>
+        </a:xfrm>
+      </p:grpSpPr>
+      <p:grpSp>
+        <p:nvGrpSpPr>
+          <p:cNvPr id="3" name="Group 2"/>
+          <p:cNvGrpSpPr/>
+          <p:nvPr/>
+        </p:nvGrpSpPr>
+        <p:grpSpPr>
+          <a:xfrm>
+            <a:off x="2525314" y="149081"/>
+            <a:ext cx="8434288" cy="5792222"/>
+            <a:chOff x="942975" y="429534"/>
+            <a:chExt cx="4981575" cy="7600950"/>
+          </a:xfrm>
+        </p:grpSpPr>
+        <p:sp>
+          <p:nvSpPr>
+            <p:cNvPr id="2" name="Rectangle 1"/>
+            <p:cNvSpPr/>
+            <p:nvPr/>
+          </p:nvSpPr>
+          <p:spPr>
+            <a:xfrm>
+              <a:off x="942975" y="429534"/>
+              <a:ext cx="4981575" cy="7600950"/>
+            </a:xfrm>
+            <a:prstGeom prst="rect">
+              <a:avLst/>
+            </a:prstGeom>
+            <a:solidFill>
+              <a:schemeClr val="accent6">
+                <a:lumMod val="20000"/>
+                <a:lumOff val="80000"/>
+              </a:schemeClr>
+            </a:solidFill>
+            <a:ln>
+              <a:solidFill>
+                <a:schemeClr val="tx1"/>
+              </a:solidFill>
+            </a:ln>
+          </p:spPr>
+          <p:style>
+            <a:lnRef idx="2">
+              <a:schemeClr val="accent1">
+                <a:shade val="50000"/>
+              </a:schemeClr>
+            </a:lnRef>
+            <a:fillRef idx="1">
+              <a:schemeClr val="accent1"/>
+            </a:fillRef>
+            <a:effectRef idx="0">
+              <a:schemeClr val="accent1"/>
+            </a:effectRef>
+            <a:fontRef idx="minor">
+              <a:schemeClr val="lt1"/>
+            </a:fontRef>
+          </p:style>
+          <p:txBody>
+            <a:bodyPr rtlCol="0" anchor="ctr"/>
+            <a:lstStyle/>
+            <a:p>
+              <a:pPr algn="ctr"/>
+              <a:endParaRPr lang="en-AU" sz="1372" dirty="0"/>
+            </a:p>
+          </p:txBody>
+        </p:sp>
+        <p:pic>
+          <p:nvPicPr>
+            <p:cNvPr id="30" name="Picture 29"/>
+            <p:cNvPicPr>
+              <a:picLocks noChangeAspect="1"/>
+            </p:cNvPicPr>
+            <p:nvPr/>
+          </p:nvPicPr>
+          <p:blipFill rotWithShape="1">
+            <a:blip r:embed="rId2" cstate="print">
+              <a:extLst>
+                <a:ext uri="{28A0092B-C50C-407E-A947-70E740481C1C}">
+                  <a14:useLocalDpi xmlns:a14="http://schemas.microsoft.com/office/drawing/2010/main" val="0"/>
+                </a:ext>
+              </a:extLst>
+            </a:blip>
+            <a:srcRect t="28812" b="26164"/>
+            <a:stretch/>
+          </p:blipFill>
+          <p:spPr>
+            <a:xfrm>
+              <a:off x="3291283" y="875330"/>
+              <a:ext cx="745018" cy="356555"/>
+            </a:xfrm>
+            <a:prstGeom prst="rect">
+              <a:avLst/>
+            </a:prstGeom>
+          </p:spPr>
+        </p:pic>
+      </p:grpSp>
+      <p:grpSp>
+        <p:nvGrpSpPr>
+          <p:cNvPr id="14" name="Group 13"/>
+          <p:cNvGrpSpPr/>
+          <p:nvPr/>
+        </p:nvGrpSpPr>
+        <p:grpSpPr>
+          <a:xfrm>
+            <a:off x="997563" y="921820"/>
+            <a:ext cx="301225" cy="399213"/>
+            <a:chOff x="8634412" y="1219200"/>
+            <a:chExt cx="676275" cy="933450"/>
+          </a:xfrm>
+        </p:grpSpPr>
+        <p:sp>
+          <p:nvSpPr>
+            <p:cNvPr id="5" name="Smiley Face 4"/>
+            <p:cNvSpPr/>
+            <p:nvPr/>
+          </p:nvSpPr>
+          <p:spPr>
+            <a:xfrm>
+              <a:off x="8753475" y="1219200"/>
+              <a:ext cx="438150" cy="428625"/>
+            </a:xfrm>
+            <a:prstGeom prst="smileyFace">
+              <a:avLst/>
+            </a:prstGeom>
+          </p:spPr>
+          <p:style>
+            <a:lnRef idx="2">
+              <a:schemeClr val="accent1">
+                <a:shade val="50000"/>
+              </a:schemeClr>
+            </a:lnRef>
+            <a:fillRef idx="1">
+              <a:schemeClr val="accent1"/>
+            </a:fillRef>
+            <a:effectRef idx="0">
+              <a:schemeClr val="accent1"/>
+            </a:effectRef>
+            <a:fontRef idx="minor">
+              <a:schemeClr val="lt1"/>
+            </a:fontRef>
+          </p:style>
+          <p:txBody>
+            <a:bodyPr rtlCol="0" anchor="ctr"/>
+            <a:lstStyle/>
+            <a:p>
+              <a:pPr algn="ctr"/>
+              <a:endParaRPr lang="en-AU" sz="1372"/>
+            </a:p>
+          </p:txBody>
+        </p:sp>
+        <p:sp>
+          <p:nvSpPr>
+            <p:cNvPr id="12" name="Snip Same Side Corner Rectangle 11"/>
+            <p:cNvSpPr/>
+            <p:nvPr/>
+          </p:nvSpPr>
+          <p:spPr>
+            <a:xfrm>
+              <a:off x="8634412" y="1647825"/>
+              <a:ext cx="676275" cy="504825"/>
+            </a:xfrm>
+            <a:prstGeom prst="snip2SameRect">
+              <a:avLst/>
+            </a:prstGeom>
+          </p:spPr>
+          <p:style>
+            <a:lnRef idx="2">
+              <a:schemeClr val="accent1">
+                <a:shade val="50000"/>
+              </a:schemeClr>
+            </a:lnRef>
+            <a:fillRef idx="1">
+              <a:schemeClr val="accent1"/>
+            </a:fillRef>
+            <a:effectRef idx="0">
+              <a:schemeClr val="accent1"/>
+            </a:effectRef>
+            <a:fontRef idx="minor">
+              <a:schemeClr val="lt1"/>
+            </a:fontRef>
+          </p:style>
+          <p:txBody>
+            <a:bodyPr rtlCol="0" anchor="ctr"/>
+            <a:lstStyle/>
+            <a:p>
+              <a:pPr algn="ctr"/>
+              <a:endParaRPr lang="en-AU" sz="1372"/>
+            </a:p>
+          </p:txBody>
+        </p:sp>
+      </p:grpSp>
+      <p:sp>
+        <p:nvSpPr>
+          <p:cNvPr id="15" name="Down Arrow 14"/>
+          <p:cNvSpPr/>
+          <p:nvPr/>
+        </p:nvSpPr>
+        <p:spPr>
+          <a:xfrm rot="16200000">
+            <a:off x="1921607" y="352035"/>
+            <a:ext cx="420989" cy="1560561"/>
+          </a:xfrm>
+          <a:prstGeom prst="downArrow">
+            <a:avLst/>
+          </a:prstGeom>
+        </p:spPr>
+        <p:style>
+          <a:lnRef idx="2">
+            <a:schemeClr val="accent1">
+              <a:shade val="50000"/>
+            </a:schemeClr>
+          </a:lnRef>
+          <a:fillRef idx="1">
+            <a:schemeClr val="accent1"/>
+          </a:fillRef>
+          <a:effectRef idx="0">
+            <a:schemeClr val="accent1"/>
+          </a:effectRef>
+          <a:fontRef idx="minor">
+            <a:schemeClr val="lt1"/>
+          </a:fontRef>
+        </p:style>
+        <p:txBody>
+          <a:bodyPr rtlCol="0" anchor="ctr"/>
+          <a:lstStyle/>
+          <a:p>
+            <a:pPr algn="ctr"/>
+            <a:endParaRPr lang="en-AU" sz="1372" dirty="0"/>
+          </a:p>
+        </p:txBody>
+      </p:sp>
+      <p:sp>
+        <p:nvSpPr>
+          <p:cNvPr id="16" name="TextBox 15"/>
+          <p:cNvSpPr txBox="1"/>
+          <p:nvPr/>
+        </p:nvSpPr>
+        <p:spPr>
+          <a:xfrm>
+            <a:off x="1793889" y="1026773"/>
+            <a:ext cx="489236" cy="233013"/>
+          </a:xfrm>
+          <a:prstGeom prst="rect">
+            <a:avLst/>
+          </a:prstGeom>
+          <a:noFill/>
+        </p:spPr>
+        <p:txBody>
+          <a:bodyPr wrap="none" rtlCol="0">
+            <a:spAutoFit/>
+          </a:bodyPr>
+          <a:lstStyle/>
+          <a:p>
+            <a:r>
+              <a:rPr lang="en-US" sz="914" dirty="0"/>
+              <a:t>LOGIN</a:t>
+            </a:r>
+            <a:endParaRPr lang="en-AU" sz="914" dirty="0"/>
+          </a:p>
+        </p:txBody>
+      </p:sp>
+      <p:pic>
+        <p:nvPicPr>
+          <p:cNvPr id="26" name="Picture 25"/>
+          <p:cNvPicPr>
+            <a:picLocks noChangeAspect="1"/>
+          </p:cNvPicPr>
+          <p:nvPr/>
+        </p:nvPicPr>
+        <p:blipFill>
+          <a:blip r:embed="rId3" cstate="print">
+            <a:extLst>
+              <a:ext uri="{28A0092B-C50C-407E-A947-70E740481C1C}">
+                <a14:useLocalDpi xmlns:a14="http://schemas.microsoft.com/office/drawing/2010/main" val="0"/>
+              </a:ext>
+            </a:extLst>
+          </a:blip>
+          <a:stretch>
+            <a:fillRect/>
+          </a:stretch>
+        </p:blipFill>
+        <p:spPr>
+          <a:xfrm>
+            <a:off x="8754034" y="4497056"/>
+            <a:ext cx="1340899" cy="1340899"/>
+          </a:xfrm>
+          <a:prstGeom prst="rect">
+            <a:avLst/>
+          </a:prstGeom>
+        </p:spPr>
+      </p:pic>
+      <p:pic>
+        <p:nvPicPr>
+          <p:cNvPr id="28" name="Picture 27"/>
+          <p:cNvPicPr>
+            <a:picLocks noChangeAspect="1"/>
+          </p:cNvPicPr>
+          <p:nvPr/>
+        </p:nvPicPr>
+        <p:blipFill>
+          <a:blip r:embed="rId4" cstate="print">
+            <a:extLst>
+              <a:ext uri="{28A0092B-C50C-407E-A947-70E740481C1C}">
+                <a14:useLocalDpi xmlns:a14="http://schemas.microsoft.com/office/drawing/2010/main" val="0"/>
+              </a:ext>
+            </a:extLst>
+          </a:blip>
+          <a:stretch>
+            <a:fillRect/>
+          </a:stretch>
+        </p:blipFill>
+        <p:spPr>
+          <a:xfrm>
+            <a:off x="10038427" y="4791312"/>
+            <a:ext cx="868805" cy="868805"/>
+          </a:xfrm>
+          <a:prstGeom prst="rect">
+            <a:avLst/>
+          </a:prstGeom>
+        </p:spPr>
+      </p:pic>
+      <p:pic>
+        <p:nvPicPr>
+          <p:cNvPr id="29" name="Picture 28"/>
+          <p:cNvPicPr>
+            <a:picLocks noChangeAspect="1"/>
+          </p:cNvPicPr>
+          <p:nvPr/>
+        </p:nvPicPr>
+        <p:blipFill>
+          <a:blip r:embed="rId5" cstate="print">
+            <a:extLst>
+              <a:ext uri="{28A0092B-C50C-407E-A947-70E740481C1C}">
+                <a14:useLocalDpi xmlns:a14="http://schemas.microsoft.com/office/drawing/2010/main" val="0"/>
+              </a:ext>
+            </a:extLst>
+          </a:blip>
+          <a:stretch>
+            <a:fillRect/>
+          </a:stretch>
+        </p:blipFill>
+        <p:spPr>
+          <a:xfrm rot="13345969">
+            <a:off x="9870005" y="4612532"/>
+            <a:ext cx="604688" cy="675930"/>
+          </a:xfrm>
+          <a:prstGeom prst="rect">
+            <a:avLst/>
+          </a:prstGeom>
+        </p:spPr>
+      </p:pic>
+      <p:grpSp>
+        <p:nvGrpSpPr>
+          <p:cNvPr id="37" name="Group 36"/>
+          <p:cNvGrpSpPr/>
+          <p:nvPr/>
+        </p:nvGrpSpPr>
+        <p:grpSpPr>
+          <a:xfrm>
+            <a:off x="6701513" y="3585146"/>
+            <a:ext cx="1959148" cy="2248788"/>
+            <a:chOff x="4200525" y="2413236"/>
+            <a:chExt cx="2393841" cy="2917432"/>
+          </a:xfrm>
+        </p:grpSpPr>
+        <p:sp>
+          <p:nvSpPr>
+            <p:cNvPr id="33" name="Folded Corner 32"/>
+            <p:cNvSpPr/>
+            <p:nvPr/>
+          </p:nvSpPr>
+          <p:spPr>
+            <a:xfrm>
+              <a:off x="4200525" y="2438400"/>
+              <a:ext cx="2047875" cy="2892268"/>
+            </a:xfrm>
+            <a:prstGeom prst="foldedCorner">
+              <a:avLst/>
+            </a:prstGeom>
+            <a:solidFill>
+              <a:schemeClr val="accent1">
+                <a:lumMod val="20000"/>
+                <a:lumOff val="80000"/>
+              </a:schemeClr>
+            </a:solidFill>
+          </p:spPr>
+          <p:style>
+            <a:lnRef idx="2">
+              <a:schemeClr val="accent1">
+                <a:shade val="50000"/>
+              </a:schemeClr>
+            </a:lnRef>
+            <a:fillRef idx="1">
+              <a:schemeClr val="accent1"/>
+            </a:fillRef>
+            <a:effectRef idx="0">
+              <a:schemeClr val="accent1"/>
+            </a:effectRef>
+            <a:fontRef idx="minor">
+              <a:schemeClr val="lt1"/>
+            </a:fontRef>
+          </p:style>
+          <p:txBody>
+            <a:bodyPr rtlCol="0" anchor="ctr"/>
+            <a:lstStyle/>
+            <a:p>
+              <a:pPr algn="ctr"/>
+              <a:endParaRPr lang="en-AU" sz="1372" dirty="0"/>
+            </a:p>
+          </p:txBody>
+        </p:sp>
+        <p:sp>
+          <p:nvSpPr>
+            <p:cNvPr id="35" name="TextBox 34"/>
+            <p:cNvSpPr txBox="1"/>
+            <p:nvPr/>
+          </p:nvSpPr>
+          <p:spPr>
+            <a:xfrm>
+              <a:off x="4250948" y="2413236"/>
+              <a:ext cx="2343418" cy="2857415"/>
+            </a:xfrm>
+            <a:prstGeom prst="rect">
+              <a:avLst/>
+            </a:prstGeom>
+            <a:noFill/>
+          </p:spPr>
+          <p:txBody>
+            <a:bodyPr wrap="square" rtlCol="0">
+              <a:spAutoFit/>
+            </a:bodyPr>
+            <a:lstStyle/>
+            <a:p>
+              <a:r>
+                <a:rPr lang="en-US" sz="914" dirty="0"/>
+                <a:t>All Skin Concerns:</a:t>
+              </a:r>
+            </a:p>
+            <a:p>
+              <a:pPr marL="130645" indent="-130645">
+                <a:buFont typeface="Arial" panose="020B0604020202020204" pitchFamily="34" charset="0"/>
+                <a:buChar char="•"/>
+              </a:pPr>
+              <a:r>
+                <a:rPr lang="en-US" sz="914" dirty="0"/>
+                <a:t>SC00x + SC10y + </a:t>
+              </a:r>
+              <a:r>
+                <a:rPr lang="en-US" sz="914" dirty="0" smtClean="0"/>
+                <a:t>SC20z + …</a:t>
+              </a:r>
+              <a:endParaRPr lang="en-US" sz="914" dirty="0"/>
+            </a:p>
+            <a:p>
+              <a:endParaRPr lang="en-US" sz="914" dirty="0"/>
+            </a:p>
+            <a:p>
+              <a:r>
+                <a:rPr lang="en-US" sz="914" dirty="0"/>
+                <a:t>Actives:</a:t>
+              </a:r>
+            </a:p>
+            <a:p>
+              <a:pPr marL="130645" indent="-130645">
+                <a:buFont typeface="Arial" panose="020B0604020202020204" pitchFamily="34" charset="0"/>
+                <a:buChar char="•"/>
+              </a:pPr>
+              <a:r>
+                <a:rPr lang="en-US" sz="914" dirty="0"/>
+                <a:t>Active a + Active b + …</a:t>
+              </a:r>
+            </a:p>
+            <a:p>
+              <a:r>
+                <a:rPr lang="en-US" sz="914" dirty="0"/>
+                <a:t>Base:</a:t>
+              </a:r>
+            </a:p>
+            <a:p>
+              <a:pPr marL="130645" indent="-130645">
+                <a:buFont typeface="Arial" panose="020B0604020202020204" pitchFamily="34" charset="0"/>
+                <a:buChar char="•"/>
+              </a:pPr>
+              <a:r>
+                <a:rPr lang="en-US" sz="914" dirty="0"/>
+                <a:t>Base n</a:t>
+              </a:r>
+            </a:p>
+            <a:p>
+              <a:endParaRPr lang="en-US" sz="914" dirty="0"/>
+            </a:p>
+            <a:p>
+              <a:r>
+                <a:rPr lang="en-US" sz="914" dirty="0"/>
+                <a:t>AI Explanation:</a:t>
+              </a:r>
+            </a:p>
+            <a:p>
+              <a:pPr marL="130645" indent="-130645">
+                <a:buFont typeface="Arial" panose="020B0604020202020204" pitchFamily="34" charset="0"/>
+                <a:buChar char="•"/>
+              </a:pPr>
+              <a:r>
+                <a:rPr lang="en-US" sz="914" dirty="0"/>
+                <a:t>Summation of </a:t>
+              </a:r>
+            </a:p>
+            <a:p>
+              <a:r>
+                <a:rPr lang="en-US" sz="914" dirty="0"/>
+                <a:t>     AI Explanation Texts</a:t>
+              </a:r>
+            </a:p>
+            <a:p>
+              <a:endParaRPr lang="en-US" sz="914" dirty="0"/>
+            </a:p>
+            <a:p>
+              <a:r>
+                <a:rPr lang="en-US" sz="914" b="1" dirty="0" smtClean="0">
+                  <a:solidFill>
+                    <a:srgbClr val="FF0000"/>
+                  </a:solidFill>
+                  <a:effectLst>
+                    <a:outerShdw blurRad="38100" dist="38100" dir="2700000" algn="tl">
+                      <a:srgbClr val="000000">
+                        <a:alpha val="43137"/>
+                      </a:srgbClr>
+                    </a:outerShdw>
+                  </a:effectLst>
+                </a:rPr>
+                <a:t>Size based Price Options:</a:t>
+              </a:r>
+            </a:p>
+            <a:p>
+              <a:pPr marL="171450" indent="-171450">
+                <a:buFont typeface="Arial" panose="020B0604020202020204" pitchFamily="34" charset="0"/>
+                <a:buChar char="•"/>
+              </a:pPr>
+              <a:r>
+                <a:rPr lang="en-US" sz="914" b="1" dirty="0" smtClean="0">
+                  <a:solidFill>
+                    <a:srgbClr val="FF0000"/>
+                  </a:solidFill>
+                  <a:effectLst>
+                    <a:outerShdw blurRad="38100" dist="38100" dir="2700000" algn="tl">
+                      <a:srgbClr val="000000">
+                        <a:alpha val="43137"/>
+                      </a:srgbClr>
+                    </a:outerShdw>
+                  </a:effectLst>
+                </a:rPr>
+                <a:t>50gms - $N</a:t>
+              </a:r>
+            </a:p>
+            <a:p>
+              <a:pPr marL="171450" indent="-171450">
+                <a:buFont typeface="Arial" panose="020B0604020202020204" pitchFamily="34" charset="0"/>
+                <a:buChar char="•"/>
+              </a:pPr>
+              <a:r>
+                <a:rPr lang="en-US" sz="914" b="1" dirty="0" smtClean="0">
+                  <a:solidFill>
+                    <a:srgbClr val="FF0000"/>
+                  </a:solidFill>
+                  <a:effectLst>
+                    <a:outerShdw blurRad="38100" dist="38100" dir="2700000" algn="tl">
+                      <a:srgbClr val="000000">
+                        <a:alpha val="43137"/>
+                      </a:srgbClr>
+                    </a:outerShdw>
+                  </a:effectLst>
+                </a:rPr>
+                <a:t>100gms - $M</a:t>
+              </a:r>
+              <a:endParaRPr lang="en-AU" sz="914" b="1" dirty="0">
+                <a:solidFill>
+                  <a:srgbClr val="FF0000"/>
+                </a:solidFill>
+                <a:effectLst>
+                  <a:outerShdw blurRad="38100" dist="38100" dir="2700000" algn="tl">
+                    <a:srgbClr val="000000">
+                      <a:alpha val="43137"/>
+                    </a:srgbClr>
+                  </a:outerShdw>
+                </a:effectLst>
+              </a:endParaRPr>
+            </a:p>
+          </p:txBody>
+        </p:sp>
+      </p:grpSp>
+      <p:sp>
+        <p:nvSpPr>
+          <p:cNvPr id="41" name="Rectangle 40"/>
+          <p:cNvSpPr/>
+          <p:nvPr/>
+        </p:nvSpPr>
+        <p:spPr>
+          <a:xfrm>
+            <a:off x="2950967" y="710863"/>
+            <a:ext cx="1897189" cy="859659"/>
+          </a:xfrm>
+          <a:prstGeom prst="rect">
+            <a:avLst/>
+          </a:prstGeom>
+          <a:solidFill>
+            <a:schemeClr val="accent1">
+              <a:lumMod val="20000"/>
+              <a:lumOff val="80000"/>
+            </a:schemeClr>
+          </a:solidFill>
+        </p:spPr>
+        <p:style>
+          <a:lnRef idx="2">
+            <a:schemeClr val="accent1">
+              <a:shade val="50000"/>
+            </a:schemeClr>
+          </a:lnRef>
+          <a:fillRef idx="1">
+            <a:schemeClr val="accent1"/>
+          </a:fillRef>
+          <a:effectRef idx="0">
+            <a:schemeClr val="accent1"/>
+          </a:effectRef>
+          <a:fontRef idx="minor">
+            <a:schemeClr val="lt1"/>
+          </a:fontRef>
+        </p:style>
+        <p:txBody>
+          <a:bodyPr rtlCol="0" anchor="ctr"/>
+          <a:lstStyle/>
+          <a:p>
+            <a:pPr algn="ctr"/>
+            <a:endParaRPr lang="en-AU" sz="1372"/>
+          </a:p>
+        </p:txBody>
+      </p:sp>
+      <p:grpSp>
+        <p:nvGrpSpPr>
+          <p:cNvPr id="20" name="Group 19"/>
+          <p:cNvGrpSpPr/>
+          <p:nvPr/>
+        </p:nvGrpSpPr>
+        <p:grpSpPr>
+          <a:xfrm>
+            <a:off x="3045165" y="869363"/>
+            <a:ext cx="590885" cy="536548"/>
+            <a:chOff x="3337214" y="1450230"/>
+            <a:chExt cx="637845" cy="690121"/>
+          </a:xfrm>
+        </p:grpSpPr>
+        <p:sp>
+          <p:nvSpPr>
+            <p:cNvPr id="17" name="Frame 16"/>
+            <p:cNvSpPr/>
+            <p:nvPr/>
+          </p:nvSpPr>
+          <p:spPr>
+            <a:xfrm>
+              <a:off x="3337214" y="1450230"/>
+              <a:ext cx="568104" cy="690121"/>
+            </a:xfrm>
+            <a:prstGeom prst="frame">
+              <a:avLst/>
+            </a:prstGeom>
+          </p:spPr>
+          <p:style>
+            <a:lnRef idx="2">
+              <a:schemeClr val="accent1">
+                <a:shade val="50000"/>
+              </a:schemeClr>
+            </a:lnRef>
+            <a:fillRef idx="1">
+              <a:schemeClr val="accent1"/>
+            </a:fillRef>
+            <a:effectRef idx="0">
+              <a:schemeClr val="accent1"/>
+            </a:effectRef>
+            <a:fontRef idx="minor">
+              <a:schemeClr val="lt1"/>
+            </a:fontRef>
+          </p:style>
+          <p:txBody>
+            <a:bodyPr rtlCol="0" anchor="ctr"/>
+            <a:lstStyle/>
+            <a:p>
+              <a:pPr algn="ctr"/>
+              <a:endParaRPr lang="en-AU" sz="1372">
+                <a:solidFill>
+                  <a:schemeClr val="tx1"/>
+                </a:solidFill>
+              </a:endParaRPr>
+            </a:p>
+          </p:txBody>
+        </p:sp>
+        <p:sp>
+          <p:nvSpPr>
+            <p:cNvPr id="19" name="Smiley Face 18"/>
+            <p:cNvSpPr/>
+            <p:nvPr/>
+          </p:nvSpPr>
+          <p:spPr>
+            <a:xfrm>
+              <a:off x="3476950" y="1577604"/>
+              <a:ext cx="276225" cy="295273"/>
+            </a:xfrm>
+            <a:prstGeom prst="smileyFace">
+              <a:avLst/>
+            </a:prstGeom>
+          </p:spPr>
+          <p:style>
+            <a:lnRef idx="2">
+              <a:schemeClr val="accent1">
+                <a:shade val="50000"/>
+              </a:schemeClr>
+            </a:lnRef>
+            <a:fillRef idx="1">
+              <a:schemeClr val="accent1"/>
+            </a:fillRef>
+            <a:effectRef idx="0">
+              <a:schemeClr val="accent1"/>
+            </a:effectRef>
+            <a:fontRef idx="minor">
+              <a:schemeClr val="lt1"/>
+            </a:fontRef>
+          </p:style>
+          <p:txBody>
+            <a:bodyPr rtlCol="0" anchor="ctr"/>
+            <a:lstStyle/>
+            <a:p>
+              <a:pPr algn="ctr"/>
+              <a:endParaRPr lang="en-AU" sz="1372"/>
+            </a:p>
+          </p:txBody>
+        </p:sp>
+        <p:sp>
+          <p:nvSpPr>
+            <p:cNvPr id="39" name="TextBox 38"/>
+            <p:cNvSpPr txBox="1"/>
+            <p:nvPr/>
+          </p:nvSpPr>
+          <p:spPr>
+            <a:xfrm>
+              <a:off x="3351980" y="1818543"/>
+              <a:ext cx="623079" cy="305775"/>
+            </a:xfrm>
+            <a:prstGeom prst="rect">
+              <a:avLst/>
+            </a:prstGeom>
+            <a:noFill/>
+          </p:spPr>
+          <p:txBody>
+            <a:bodyPr wrap="none" rtlCol="0">
+              <a:spAutoFit/>
+            </a:bodyPr>
+            <a:lstStyle/>
+            <a:p>
+              <a:r>
+                <a:rPr lang="en-US" sz="914" dirty="0"/>
+                <a:t>Image</a:t>
+              </a:r>
+              <a:endParaRPr lang="en-AU" sz="914" dirty="0"/>
+            </a:p>
+          </p:txBody>
+        </p:sp>
+      </p:grpSp>
+      <p:sp>
+        <p:nvSpPr>
+          <p:cNvPr id="22" name="Folded Corner 21"/>
+          <p:cNvSpPr/>
+          <p:nvPr/>
+        </p:nvSpPr>
+        <p:spPr>
+          <a:xfrm>
+            <a:off x="3812352" y="869364"/>
+            <a:ext cx="861535" cy="525899"/>
+          </a:xfrm>
+          <a:prstGeom prst="foldedCorner">
+            <a:avLst/>
+          </a:prstGeom>
+        </p:spPr>
+        <p:style>
+          <a:lnRef idx="2">
+            <a:schemeClr val="accent1">
+              <a:shade val="50000"/>
+            </a:schemeClr>
+          </a:lnRef>
+          <a:fillRef idx="1">
+            <a:schemeClr val="accent1"/>
+          </a:fillRef>
+          <a:effectRef idx="0">
+            <a:schemeClr val="accent1"/>
+          </a:effectRef>
+          <a:fontRef idx="minor">
+            <a:schemeClr val="lt1"/>
+          </a:fontRef>
+        </p:style>
+        <p:txBody>
+          <a:bodyPr rtlCol="0" anchor="ctr"/>
+          <a:lstStyle/>
+          <a:p>
+            <a:pPr algn="ctr"/>
+            <a:r>
+              <a:rPr lang="en-US" sz="914" b="1" dirty="0" smtClean="0">
+                <a:solidFill>
+                  <a:srgbClr val="FF0000"/>
+                </a:solidFill>
+                <a:effectLst>
+                  <a:outerShdw blurRad="38100" dist="38100" dir="2700000" algn="tl">
+                    <a:srgbClr val="000000">
+                      <a:alpha val="43137"/>
+                    </a:srgbClr>
+                  </a:outerShdw>
+                </a:effectLst>
+              </a:rPr>
+              <a:t>Reorganized &amp; Optimized</a:t>
+            </a:r>
+            <a:r>
+              <a:rPr lang="en-US" sz="914" b="1" dirty="0" smtClean="0">
+                <a:solidFill>
+                  <a:schemeClr val="bg1"/>
+                </a:solidFill>
+                <a:effectLst>
+                  <a:outerShdw blurRad="38100" dist="38100" dir="2700000" algn="tl">
+                    <a:srgbClr val="000000">
+                      <a:alpha val="43137"/>
+                    </a:srgbClr>
+                  </a:outerShdw>
+                </a:effectLst>
+              </a:rPr>
+              <a:t> </a:t>
+            </a:r>
+            <a:r>
+              <a:rPr lang="en-US" sz="914" dirty="0" smtClean="0">
+                <a:solidFill>
+                  <a:schemeClr val="tx1"/>
+                </a:solidFill>
+              </a:rPr>
+              <a:t>Questionnaire</a:t>
+            </a:r>
+            <a:endParaRPr lang="en-AU" sz="914" dirty="0">
+              <a:solidFill>
+                <a:schemeClr val="tx1"/>
+              </a:solidFill>
+            </a:endParaRPr>
+          </a:p>
+        </p:txBody>
+      </p:sp>
+      <p:sp>
+        <p:nvSpPr>
+          <p:cNvPr id="40" name="Left Arrow 39"/>
+          <p:cNvSpPr/>
+          <p:nvPr/>
+        </p:nvSpPr>
+        <p:spPr>
+          <a:xfrm rot="16200000">
+            <a:off x="2878463" y="1652117"/>
+            <a:ext cx="772121" cy="286262"/>
+          </a:xfrm>
+          <a:prstGeom prst="leftArrow">
+            <a:avLst/>
+          </a:prstGeom>
+        </p:spPr>
+        <p:style>
+          <a:lnRef idx="2">
+            <a:schemeClr val="accent1">
+              <a:shade val="50000"/>
+            </a:schemeClr>
+          </a:lnRef>
+          <a:fillRef idx="1">
+            <a:schemeClr val="accent1"/>
+          </a:fillRef>
+          <a:effectRef idx="0">
+            <a:schemeClr val="accent1"/>
+          </a:effectRef>
+          <a:fontRef idx="minor">
+            <a:schemeClr val="lt1"/>
+          </a:fontRef>
+        </p:style>
+        <p:txBody>
+          <a:bodyPr rtlCol="0" anchor="ctr"/>
+          <a:lstStyle/>
+          <a:p>
+            <a:pPr algn="ctr"/>
+            <a:endParaRPr lang="en-AU" sz="1372" dirty="0"/>
+          </a:p>
+        </p:txBody>
+      </p:sp>
+      <p:sp>
+        <p:nvSpPr>
+          <p:cNvPr id="42" name="Rounded Rectangle 41"/>
+          <p:cNvSpPr/>
+          <p:nvPr/>
+        </p:nvSpPr>
+        <p:spPr>
+          <a:xfrm>
+            <a:off x="2934995" y="2191645"/>
+            <a:ext cx="672808" cy="228263"/>
+          </a:xfrm>
+          <a:prstGeom prst="roundRect">
+            <a:avLst/>
+          </a:prstGeom>
+        </p:spPr>
+        <p:style>
+          <a:lnRef idx="2">
+            <a:schemeClr val="accent1">
+              <a:shade val="50000"/>
+            </a:schemeClr>
+          </a:lnRef>
+          <a:fillRef idx="1">
+            <a:schemeClr val="accent1"/>
+          </a:fillRef>
+          <a:effectRef idx="0">
+            <a:schemeClr val="accent1"/>
+          </a:effectRef>
+          <a:fontRef idx="minor">
+            <a:schemeClr val="lt1"/>
+          </a:fontRef>
+        </p:style>
+        <p:txBody>
+          <a:bodyPr rtlCol="0" anchor="ctr"/>
+          <a:lstStyle/>
+          <a:p>
+            <a:pPr algn="ctr"/>
+            <a:r>
+              <a:rPr lang="en-US" sz="914" dirty="0"/>
+              <a:t>Visual AI</a:t>
+            </a:r>
+            <a:endParaRPr lang="en-AU" sz="914" dirty="0"/>
+          </a:p>
+        </p:txBody>
+      </p:sp>
+      <p:sp>
+        <p:nvSpPr>
+          <p:cNvPr id="58" name="Left Arrow 57"/>
+          <p:cNvSpPr/>
+          <p:nvPr/>
+        </p:nvSpPr>
+        <p:spPr>
+          <a:xfrm rot="16200000">
+            <a:off x="3113794" y="2422849"/>
+            <a:ext cx="327942" cy="322058"/>
+          </a:xfrm>
+          <a:prstGeom prst="leftArrow">
+            <a:avLst/>
+          </a:prstGeom>
+        </p:spPr>
+        <p:style>
+          <a:lnRef idx="2">
+            <a:schemeClr val="accent1">
+              <a:shade val="50000"/>
+            </a:schemeClr>
+          </a:lnRef>
+          <a:fillRef idx="1">
+            <a:schemeClr val="accent1"/>
+          </a:fillRef>
+          <a:effectRef idx="0">
+            <a:schemeClr val="accent1"/>
+          </a:effectRef>
+          <a:fontRef idx="minor">
+            <a:schemeClr val="lt1"/>
+          </a:fontRef>
+        </p:style>
+        <p:txBody>
+          <a:bodyPr rtlCol="0" anchor="ctr"/>
+          <a:lstStyle/>
+          <a:p>
+            <a:pPr algn="ctr"/>
+            <a:endParaRPr lang="en-AU" sz="1372"/>
+          </a:p>
+        </p:txBody>
+      </p:sp>
+      <p:grpSp>
+        <p:nvGrpSpPr>
+          <p:cNvPr id="47" name="Group 46"/>
+          <p:cNvGrpSpPr/>
+          <p:nvPr/>
+        </p:nvGrpSpPr>
+        <p:grpSpPr>
+          <a:xfrm>
+            <a:off x="2590424" y="3859339"/>
+            <a:ext cx="3846470" cy="540363"/>
+            <a:chOff x="2951322" y="3577539"/>
+            <a:chExt cx="3096015" cy="709101"/>
+          </a:xfrm>
+        </p:grpSpPr>
+        <p:sp>
+          <p:nvSpPr>
+            <p:cNvPr id="60" name="Rounded Rectangle 59"/>
+            <p:cNvSpPr/>
+            <p:nvPr/>
+          </p:nvSpPr>
+          <p:spPr>
+            <a:xfrm>
+              <a:off x="2951322" y="3690688"/>
+              <a:ext cx="2425306" cy="529854"/>
+            </a:xfrm>
+            <a:prstGeom prst="roundRect">
+              <a:avLst/>
+            </a:prstGeom>
+          </p:spPr>
+          <p:style>
+            <a:lnRef idx="2">
+              <a:schemeClr val="accent1">
+                <a:shade val="50000"/>
+              </a:schemeClr>
+            </a:lnRef>
+            <a:fillRef idx="1">
+              <a:schemeClr val="accent1"/>
+            </a:fillRef>
+            <a:effectRef idx="0">
+              <a:schemeClr val="accent1"/>
+            </a:effectRef>
+            <a:fontRef idx="minor">
+              <a:schemeClr val="lt1"/>
+            </a:fontRef>
+          </p:style>
+          <p:txBody>
+            <a:bodyPr rtlCol="0" anchor="ctr"/>
+            <a:lstStyle/>
+            <a:p>
+              <a:pPr algn="ctr"/>
+              <a:r>
+                <a:rPr lang="en-US" sz="914" b="1" dirty="0" smtClean="0">
+                  <a:solidFill>
+                    <a:srgbClr val="FF0000"/>
+                  </a:solidFill>
+                  <a:effectLst>
+                    <a:outerShdw blurRad="38100" dist="38100" dir="2700000" algn="tl">
+                      <a:srgbClr val="000000">
+                        <a:alpha val="43137"/>
+                      </a:srgbClr>
+                    </a:outerShdw>
+                  </a:effectLst>
+                </a:rPr>
+                <a:t>Deterministic Rule </a:t>
+              </a:r>
+              <a:r>
+                <a:rPr lang="en-US" sz="914" b="1" dirty="0">
+                  <a:solidFill>
+                    <a:srgbClr val="FF0000"/>
+                  </a:solidFill>
+                  <a:effectLst>
+                    <a:outerShdw blurRad="38100" dist="38100" dir="2700000" algn="tl">
+                      <a:srgbClr val="000000">
+                        <a:alpha val="43137"/>
+                      </a:srgbClr>
+                    </a:outerShdw>
+                  </a:effectLst>
+                </a:rPr>
+                <a:t>Engine </a:t>
+              </a:r>
+              <a:r>
+                <a:rPr lang="en-US" sz="914" b="1" dirty="0" smtClean="0">
+                  <a:solidFill>
+                    <a:srgbClr val="FF0000"/>
+                  </a:solidFill>
+                  <a:effectLst>
+                    <a:outerShdw blurRad="38100" dist="38100" dir="2700000" algn="tl">
+                      <a:srgbClr val="000000">
+                        <a:alpha val="43137"/>
+                      </a:srgbClr>
+                    </a:outerShdw>
+                  </a:effectLst>
+                </a:rPr>
+                <a:t>2</a:t>
+              </a:r>
+              <a:r>
+                <a:rPr lang="en-AU" sz="914" b="1" dirty="0" smtClean="0">
+                  <a:effectLst>
+                    <a:outerShdw blurRad="38100" dist="38100" dir="2700000" algn="tl">
+                      <a:srgbClr val="000000">
+                        <a:alpha val="43137"/>
+                      </a:srgbClr>
+                    </a:outerShdw>
+                  </a:effectLst>
+                </a:rPr>
+                <a:t/>
+              </a:r>
+              <a:br>
+                <a:rPr lang="en-AU" sz="914" b="1" dirty="0" smtClean="0">
+                  <a:effectLst>
+                    <a:outerShdw blurRad="38100" dist="38100" dir="2700000" algn="tl">
+                      <a:srgbClr val="000000">
+                        <a:alpha val="43137"/>
+                      </a:srgbClr>
+                    </a:outerShdw>
+                  </a:effectLst>
+                </a:rPr>
+              </a:br>
+              <a:r>
+                <a:rPr lang="en-US" sz="914" strike="sngStrike" dirty="0" smtClean="0"/>
+                <a:t>LLM</a:t>
+              </a:r>
+              <a:r>
+                <a:rPr lang="en-US" sz="914" dirty="0" smtClean="0"/>
+                <a:t>    </a:t>
+              </a:r>
+              <a:endParaRPr lang="en-AU" sz="914" dirty="0"/>
+            </a:p>
+          </p:txBody>
+        </p:sp>
+        <p:sp>
+          <p:nvSpPr>
+            <p:cNvPr id="68" name="Left Arrow 67"/>
+            <p:cNvSpPr/>
+            <p:nvPr/>
+          </p:nvSpPr>
+          <p:spPr>
+            <a:xfrm>
+              <a:off x="5040693" y="3718773"/>
+              <a:ext cx="472314" cy="426053"/>
+            </a:xfrm>
+            <a:prstGeom prst="leftArrow">
+              <a:avLst/>
+            </a:prstGeom>
+            <a:solidFill>
+              <a:schemeClr val="accent1">
+                <a:lumMod val="60000"/>
+                <a:lumOff val="40000"/>
+              </a:schemeClr>
+            </a:solidFill>
+          </p:spPr>
+          <p:style>
+            <a:lnRef idx="2">
+              <a:schemeClr val="accent1">
+                <a:shade val="50000"/>
+              </a:schemeClr>
+            </a:lnRef>
+            <a:fillRef idx="1">
+              <a:schemeClr val="accent1"/>
+            </a:fillRef>
+            <a:effectRef idx="0">
+              <a:schemeClr val="accent1"/>
+            </a:effectRef>
+            <a:fontRef idx="minor">
+              <a:schemeClr val="lt1"/>
+            </a:fontRef>
+          </p:style>
+          <p:txBody>
+            <a:bodyPr rtlCol="0" anchor="ctr"/>
+            <a:lstStyle/>
+            <a:p>
+              <a:pPr algn="ctr"/>
+              <a:endParaRPr lang="en-AU" sz="1372"/>
+            </a:p>
+          </p:txBody>
+        </p:sp>
+        <p:sp>
+          <p:nvSpPr>
+            <p:cNvPr id="67" name="Rounded Rectangle 66"/>
+            <p:cNvSpPr/>
+            <p:nvPr/>
+          </p:nvSpPr>
+          <p:spPr>
+            <a:xfrm>
+              <a:off x="5383997" y="3577539"/>
+              <a:ext cx="663340" cy="709101"/>
+            </a:xfrm>
+            <a:prstGeom prst="roundRect">
+              <a:avLst/>
+            </a:prstGeom>
+          </p:spPr>
+          <p:style>
+            <a:lnRef idx="2">
+              <a:schemeClr val="accent1">
+                <a:shade val="50000"/>
+              </a:schemeClr>
+            </a:lnRef>
+            <a:fillRef idx="1">
+              <a:schemeClr val="accent1"/>
+            </a:fillRef>
+            <a:effectRef idx="0">
+              <a:schemeClr val="accent1"/>
+            </a:effectRef>
+            <a:fontRef idx="minor">
+              <a:schemeClr val="lt1"/>
+            </a:fontRef>
+          </p:style>
+          <p:txBody>
+            <a:bodyPr rtlCol="0" anchor="ctr"/>
+            <a:lstStyle/>
+            <a:p>
+              <a:pPr algn="ctr"/>
+              <a:r>
+                <a:rPr lang="en-US" sz="914" dirty="0" smtClean="0"/>
+                <a:t>CelRevive</a:t>
+              </a:r>
+              <a:endParaRPr lang="en-US" sz="914" dirty="0"/>
+            </a:p>
+            <a:p>
+              <a:pPr algn="ctr"/>
+              <a:r>
+                <a:rPr lang="en-US" sz="914" strike="sngStrike" dirty="0" smtClean="0"/>
+                <a:t>RAG</a:t>
+              </a:r>
+              <a:r>
+                <a:rPr lang="en-US" sz="914" dirty="0" smtClean="0"/>
+                <a:t> </a:t>
+              </a:r>
+              <a:r>
+                <a:rPr lang="en-US" sz="914" b="1" dirty="0" smtClean="0">
+                  <a:solidFill>
+                    <a:srgbClr val="FF0000"/>
+                  </a:solidFill>
+                  <a:effectLst>
+                    <a:outerShdw blurRad="38100" dist="38100" dir="2700000" algn="tl">
+                      <a:srgbClr val="000000">
+                        <a:alpha val="43137"/>
+                      </a:srgbClr>
+                    </a:outerShdw>
+                  </a:effectLst>
+                </a:rPr>
+                <a:t>Proprietary Logic</a:t>
+              </a:r>
+              <a:endParaRPr lang="en-AU" sz="914" b="1" dirty="0">
+                <a:solidFill>
+                  <a:srgbClr val="FF0000"/>
+                </a:solidFill>
+                <a:effectLst>
+                  <a:outerShdw blurRad="38100" dist="38100" dir="2700000" algn="tl">
+                    <a:srgbClr val="000000">
+                      <a:alpha val="43137"/>
+                    </a:srgbClr>
+                  </a:outerShdw>
+                </a:effectLst>
+              </a:endParaRPr>
+            </a:p>
+          </p:txBody>
+        </p:sp>
+      </p:grpSp>
+      <p:sp>
+        <p:nvSpPr>
+          <p:cNvPr id="46" name="TextBox 45"/>
+          <p:cNvSpPr txBox="1"/>
+          <p:nvPr/>
+        </p:nvSpPr>
+        <p:spPr>
+          <a:xfrm>
+            <a:off x="3127750" y="1826774"/>
+            <a:ext cx="259927" cy="303481"/>
+          </a:xfrm>
+          <a:prstGeom prst="rect">
+            <a:avLst/>
+          </a:prstGeom>
+          <a:noFill/>
+        </p:spPr>
+        <p:txBody>
+          <a:bodyPr wrap="square" rtlCol="0">
+            <a:spAutoFit/>
+          </a:bodyPr>
+          <a:lstStyle/>
+          <a:p>
+            <a:r>
+              <a:rPr lang="en-US" sz="1372" b="1" dirty="0">
+                <a:solidFill>
+                  <a:srgbClr val="FF0000"/>
+                </a:solidFill>
+                <a:effectLst>
+                  <a:outerShdw blurRad="38100" dist="38100" dir="2700000" algn="tl">
+                    <a:srgbClr val="000000">
+                      <a:alpha val="43137"/>
+                    </a:srgbClr>
+                  </a:outerShdw>
+                </a:effectLst>
+              </a:rPr>
+              <a:t>1</a:t>
+            </a:r>
+            <a:endParaRPr lang="en-AU" sz="1372" b="1" dirty="0">
+              <a:solidFill>
+                <a:srgbClr val="FF0000"/>
+              </a:solidFill>
+              <a:effectLst>
+                <a:outerShdw blurRad="38100" dist="38100" dir="2700000" algn="tl">
+                  <a:srgbClr val="000000">
+                    <a:alpha val="43137"/>
+                  </a:srgbClr>
+                </a:outerShdw>
+              </a:effectLst>
+            </a:endParaRPr>
+          </a:p>
+        </p:txBody>
+      </p:sp>
+      <p:sp>
+        <p:nvSpPr>
+          <p:cNvPr id="86" name="Left Arrow 85"/>
+          <p:cNvSpPr/>
+          <p:nvPr/>
+        </p:nvSpPr>
+        <p:spPr>
+          <a:xfrm rot="16200000">
+            <a:off x="3861082" y="4334593"/>
+            <a:ext cx="330859" cy="322058"/>
+          </a:xfrm>
+          <a:prstGeom prst="leftArrow">
+            <a:avLst/>
+          </a:prstGeom>
+        </p:spPr>
+        <p:style>
+          <a:lnRef idx="2">
+            <a:schemeClr val="accent1">
+              <a:shade val="50000"/>
+            </a:schemeClr>
+          </a:lnRef>
+          <a:fillRef idx="1">
+            <a:schemeClr val="accent1"/>
+          </a:fillRef>
+          <a:effectRef idx="0">
+            <a:schemeClr val="accent1"/>
+          </a:effectRef>
+          <a:fontRef idx="minor">
+            <a:schemeClr val="lt1"/>
+          </a:fontRef>
+        </p:style>
+        <p:txBody>
+          <a:bodyPr rtlCol="0" anchor="ctr"/>
+          <a:lstStyle/>
+          <a:p>
+            <a:pPr algn="ctr"/>
+            <a:endParaRPr lang="en-AU" sz="1372"/>
+          </a:p>
+        </p:txBody>
+      </p:sp>
+      <p:sp>
+        <p:nvSpPr>
+          <p:cNvPr id="90" name="Rectangle 89"/>
+          <p:cNvSpPr/>
+          <p:nvPr/>
+        </p:nvSpPr>
+        <p:spPr>
+          <a:xfrm>
+            <a:off x="3199565" y="4628644"/>
+            <a:ext cx="2367277" cy="725347"/>
+          </a:xfrm>
+          <a:prstGeom prst="rect">
+            <a:avLst/>
+          </a:prstGeom>
+          <a:solidFill>
+            <a:schemeClr val="accent1">
+              <a:lumMod val="20000"/>
+              <a:lumOff val="80000"/>
+            </a:schemeClr>
+          </a:solidFill>
+        </p:spPr>
+        <p:style>
+          <a:lnRef idx="2">
+            <a:schemeClr val="accent1">
+              <a:shade val="50000"/>
+            </a:schemeClr>
+          </a:lnRef>
+          <a:fillRef idx="1">
+            <a:schemeClr val="accent1"/>
+          </a:fillRef>
+          <a:effectRef idx="0">
+            <a:schemeClr val="accent1"/>
+          </a:effectRef>
+          <a:fontRef idx="minor">
+            <a:schemeClr val="lt1"/>
+          </a:fontRef>
+        </p:style>
+        <p:txBody>
+          <a:bodyPr rtlCol="0" anchor="ctr"/>
+          <a:lstStyle/>
+          <a:p>
+            <a:pPr marL="130645" indent="-130645">
+              <a:buFont typeface="Arial" panose="020B0604020202020204" pitchFamily="34" charset="0"/>
+              <a:buChar char="•"/>
+            </a:pPr>
+            <a:r>
+              <a:rPr lang="en-US" sz="914" dirty="0" smtClean="0">
+                <a:solidFill>
+                  <a:schemeClr val="tx1"/>
+                </a:solidFill>
+              </a:rPr>
+              <a:t>List </a:t>
+            </a:r>
+            <a:r>
+              <a:rPr lang="en-US" sz="914" dirty="0">
+                <a:solidFill>
+                  <a:schemeClr val="tx1"/>
+                </a:solidFill>
+              </a:rPr>
+              <a:t>of bases + AI Explanations</a:t>
+            </a:r>
+          </a:p>
+          <a:p>
+            <a:pPr marL="130645" indent="-130645">
+              <a:buFont typeface="Arial" panose="020B0604020202020204" pitchFamily="34" charset="0"/>
+              <a:buChar char="•"/>
+            </a:pPr>
+            <a:r>
+              <a:rPr lang="en-US" sz="914" dirty="0">
+                <a:solidFill>
+                  <a:schemeClr val="tx1"/>
+                </a:solidFill>
+              </a:rPr>
+              <a:t>Actives + AI Explanations</a:t>
+            </a:r>
+          </a:p>
+          <a:p>
+            <a:pPr marL="558568" lvl="1" indent="-130645">
+              <a:buFont typeface="Courier New" panose="02070309020205020404" pitchFamily="49" charset="0"/>
+              <a:buChar char="o"/>
+            </a:pPr>
+            <a:r>
+              <a:rPr lang="en-US" sz="914" dirty="0">
+                <a:solidFill>
+                  <a:schemeClr val="tx1"/>
+                </a:solidFill>
+              </a:rPr>
+              <a:t>compatible to bases</a:t>
+            </a:r>
+          </a:p>
+          <a:p>
+            <a:pPr marL="558568" lvl="1" indent="-130645">
+              <a:buFont typeface="Courier New" panose="02070309020205020404" pitchFamily="49" charset="0"/>
+              <a:buChar char="o"/>
+            </a:pPr>
+            <a:r>
+              <a:rPr lang="en-US" sz="914" dirty="0">
+                <a:solidFill>
+                  <a:schemeClr val="tx1"/>
+                </a:solidFill>
+              </a:rPr>
+              <a:t>effective for skin </a:t>
+            </a:r>
+            <a:r>
+              <a:rPr lang="en-US" sz="914" dirty="0" smtClean="0">
+                <a:solidFill>
+                  <a:schemeClr val="tx1"/>
+                </a:solidFill>
+              </a:rPr>
+              <a:t>concerns</a:t>
+            </a:r>
+            <a:endParaRPr lang="en-US" sz="914" dirty="0">
+              <a:solidFill>
+                <a:schemeClr val="tx1"/>
+              </a:solidFill>
+            </a:endParaRPr>
+          </a:p>
+          <a:p>
+            <a:pPr marL="142173" indent="-171450">
+              <a:buFont typeface="Arial" panose="020B0604020202020204" pitchFamily="34" charset="0"/>
+              <a:buChar char="•"/>
+            </a:pPr>
+            <a:r>
+              <a:rPr lang="en-US" sz="914" dirty="0" smtClean="0">
+                <a:solidFill>
+                  <a:schemeClr val="tx1"/>
+                </a:solidFill>
+              </a:rPr>
+              <a:t>Combined Skin </a:t>
+            </a:r>
+            <a:r>
+              <a:rPr lang="en-US" sz="914" dirty="0">
+                <a:solidFill>
+                  <a:schemeClr val="tx1"/>
+                </a:solidFill>
+              </a:rPr>
+              <a:t>Concerns + AI </a:t>
+            </a:r>
+            <a:r>
+              <a:rPr lang="en-US" sz="914" dirty="0" smtClean="0">
+                <a:solidFill>
+                  <a:schemeClr val="tx1"/>
+                </a:solidFill>
+              </a:rPr>
+              <a:t>Explanations</a:t>
+            </a:r>
+            <a:endParaRPr lang="en-US" sz="914" dirty="0">
+              <a:solidFill>
+                <a:schemeClr val="tx1"/>
+              </a:solidFill>
+            </a:endParaRPr>
+          </a:p>
+        </p:txBody>
+      </p:sp>
+      <p:sp>
+        <p:nvSpPr>
+          <p:cNvPr id="97" name="Left Arrow 96"/>
+          <p:cNvSpPr/>
+          <p:nvPr/>
+        </p:nvSpPr>
+        <p:spPr>
+          <a:xfrm rot="16200000">
+            <a:off x="3749860" y="2907712"/>
+            <a:ext cx="480140" cy="354264"/>
+          </a:xfrm>
+          <a:prstGeom prst="leftArrow">
+            <a:avLst/>
+          </a:prstGeom>
+        </p:spPr>
+        <p:style>
+          <a:lnRef idx="2">
+            <a:schemeClr val="accent1">
+              <a:shade val="50000"/>
+            </a:schemeClr>
+          </a:lnRef>
+          <a:fillRef idx="1">
+            <a:schemeClr val="accent1"/>
+          </a:fillRef>
+          <a:effectRef idx="0">
+            <a:schemeClr val="accent1"/>
+          </a:effectRef>
+          <a:fontRef idx="minor">
+            <a:schemeClr val="lt1"/>
+          </a:fontRef>
+        </p:style>
+        <p:txBody>
+          <a:bodyPr rtlCol="0" anchor="ctr"/>
+          <a:lstStyle/>
+          <a:p>
+            <a:pPr algn="ctr"/>
+            <a:endParaRPr lang="en-AU" sz="1372"/>
+          </a:p>
+        </p:txBody>
+      </p:sp>
+      <p:sp>
+        <p:nvSpPr>
+          <p:cNvPr id="99" name="Left Arrow 98"/>
+          <p:cNvSpPr/>
+          <p:nvPr/>
+        </p:nvSpPr>
+        <p:spPr>
+          <a:xfrm rot="10800000">
+            <a:off x="5564819" y="4715045"/>
+            <a:ext cx="1189030" cy="309962"/>
+          </a:xfrm>
+          <a:prstGeom prst="leftArrow">
+            <a:avLst/>
+          </a:prstGeom>
+        </p:spPr>
+        <p:style>
+          <a:lnRef idx="2">
+            <a:schemeClr val="accent1">
+              <a:shade val="50000"/>
+            </a:schemeClr>
+          </a:lnRef>
+          <a:fillRef idx="1">
+            <a:schemeClr val="accent1"/>
+          </a:fillRef>
+          <a:effectRef idx="0">
+            <a:schemeClr val="accent1"/>
+          </a:effectRef>
+          <a:fontRef idx="minor">
+            <a:schemeClr val="lt1"/>
+          </a:fontRef>
+        </p:style>
+        <p:txBody>
+          <a:bodyPr rtlCol="0" anchor="ctr"/>
+          <a:lstStyle/>
+          <a:p>
+            <a:pPr algn="ctr"/>
+            <a:endParaRPr lang="en-AU" sz="1372"/>
+          </a:p>
+        </p:txBody>
+      </p:sp>
+      <p:sp>
+        <p:nvSpPr>
+          <p:cNvPr id="100" name="TextBox 99"/>
+          <p:cNvSpPr txBox="1"/>
+          <p:nvPr/>
+        </p:nvSpPr>
+        <p:spPr>
+          <a:xfrm>
+            <a:off x="5805068" y="4764484"/>
+            <a:ext cx="710451" cy="233013"/>
+          </a:xfrm>
+          <a:prstGeom prst="rect">
+            <a:avLst/>
+          </a:prstGeom>
+          <a:noFill/>
+        </p:spPr>
+        <p:txBody>
+          <a:bodyPr wrap="none" rtlCol="0">
+            <a:spAutoFit/>
+          </a:bodyPr>
+          <a:lstStyle/>
+          <a:p>
+            <a:r>
+              <a:rPr lang="en-US" sz="914" dirty="0"/>
+              <a:t>Formatting</a:t>
+            </a:r>
+            <a:endParaRPr lang="en-AU" sz="914" dirty="0"/>
+          </a:p>
+        </p:txBody>
+      </p:sp>
+      <p:sp>
+        <p:nvSpPr>
+          <p:cNvPr id="101" name="Left Arrow 100"/>
+          <p:cNvSpPr/>
+          <p:nvPr/>
+        </p:nvSpPr>
+        <p:spPr>
+          <a:xfrm rot="10800000">
+            <a:off x="8313665" y="4512963"/>
+            <a:ext cx="1724761" cy="320974"/>
+          </a:xfrm>
+          <a:prstGeom prst="leftArrow">
+            <a:avLst/>
+          </a:prstGeom>
+        </p:spPr>
+        <p:style>
+          <a:lnRef idx="2">
+            <a:schemeClr val="accent1">
+              <a:shade val="50000"/>
+            </a:schemeClr>
+          </a:lnRef>
+          <a:fillRef idx="1">
+            <a:schemeClr val="accent1"/>
+          </a:fillRef>
+          <a:effectRef idx="0">
+            <a:schemeClr val="accent1"/>
+          </a:effectRef>
+          <a:fontRef idx="minor">
+            <a:schemeClr val="lt1"/>
+          </a:fontRef>
+        </p:style>
+        <p:txBody>
+          <a:bodyPr rtlCol="0" anchor="ctr"/>
+          <a:lstStyle/>
+          <a:p>
+            <a:pPr algn="ctr"/>
+            <a:endParaRPr lang="en-AU" sz="1372"/>
+          </a:p>
+        </p:txBody>
+      </p:sp>
+      <p:sp>
+        <p:nvSpPr>
+          <p:cNvPr id="102" name="TextBox 101"/>
+          <p:cNvSpPr txBox="1"/>
+          <p:nvPr/>
+        </p:nvSpPr>
+        <p:spPr>
+          <a:xfrm>
+            <a:off x="8403302" y="4566516"/>
+            <a:ext cx="1510350" cy="233013"/>
+          </a:xfrm>
+          <a:prstGeom prst="rect">
+            <a:avLst/>
+          </a:prstGeom>
+          <a:noFill/>
+        </p:spPr>
+        <p:txBody>
+          <a:bodyPr wrap="none" rtlCol="0">
+            <a:spAutoFit/>
+          </a:bodyPr>
+          <a:lstStyle/>
+          <a:p>
+            <a:r>
+              <a:rPr lang="en-US" sz="914" dirty="0"/>
+              <a:t>To check out/ shopping cart</a:t>
+            </a:r>
+            <a:endParaRPr lang="en-AU" sz="914" dirty="0"/>
+          </a:p>
+        </p:txBody>
+      </p:sp>
+      <p:sp>
+        <p:nvSpPr>
+          <p:cNvPr id="103" name="TextBox 102"/>
+          <p:cNvSpPr txBox="1"/>
+          <p:nvPr/>
+        </p:nvSpPr>
+        <p:spPr>
+          <a:xfrm>
+            <a:off x="5992411" y="4540403"/>
+            <a:ext cx="274434" cy="303481"/>
+          </a:xfrm>
+          <a:prstGeom prst="rect">
+            <a:avLst/>
+          </a:prstGeom>
+          <a:noFill/>
+        </p:spPr>
+        <p:txBody>
+          <a:bodyPr wrap="none" rtlCol="0">
+            <a:spAutoFit/>
+          </a:bodyPr>
+          <a:lstStyle/>
+          <a:p>
+            <a:r>
+              <a:rPr lang="en-US" sz="1372" b="1" dirty="0">
+                <a:solidFill>
+                  <a:srgbClr val="FF0000"/>
+                </a:solidFill>
+                <a:effectLst>
+                  <a:outerShdw blurRad="38100" dist="38100" dir="2700000" algn="tl">
+                    <a:srgbClr val="000000">
+                      <a:alpha val="43137"/>
+                    </a:srgbClr>
+                  </a:outerShdw>
+                </a:effectLst>
+              </a:rPr>
+              <a:t>5</a:t>
+            </a:r>
+            <a:endParaRPr lang="en-AU" sz="1372" b="1" dirty="0">
+              <a:solidFill>
+                <a:srgbClr val="FF0000"/>
+              </a:solidFill>
+              <a:effectLst>
+                <a:outerShdw blurRad="38100" dist="38100" dir="2700000" algn="tl">
+                  <a:srgbClr val="000000">
+                    <a:alpha val="43137"/>
+                  </a:srgbClr>
+                </a:outerShdw>
+              </a:effectLst>
+            </a:endParaRPr>
+          </a:p>
+        </p:txBody>
+      </p:sp>
+      <p:sp>
+        <p:nvSpPr>
+          <p:cNvPr id="104" name="TextBox 103"/>
+          <p:cNvSpPr txBox="1"/>
+          <p:nvPr/>
+        </p:nvSpPr>
+        <p:spPr>
+          <a:xfrm>
+            <a:off x="9120491" y="4332245"/>
+            <a:ext cx="274434" cy="303481"/>
+          </a:xfrm>
+          <a:prstGeom prst="rect">
+            <a:avLst/>
+          </a:prstGeom>
+          <a:noFill/>
+        </p:spPr>
+        <p:txBody>
+          <a:bodyPr wrap="none" rtlCol="0">
+            <a:spAutoFit/>
+          </a:bodyPr>
+          <a:lstStyle/>
+          <a:p>
+            <a:r>
+              <a:rPr lang="en-US" sz="1372" b="1" dirty="0">
+                <a:solidFill>
+                  <a:srgbClr val="FF0000"/>
+                </a:solidFill>
+                <a:effectLst>
+                  <a:outerShdw blurRad="38100" dist="38100" dir="2700000" algn="tl">
+                    <a:srgbClr val="000000">
+                      <a:alpha val="43137"/>
+                    </a:srgbClr>
+                  </a:outerShdw>
+                </a:effectLst>
+              </a:rPr>
+              <a:t>6</a:t>
+            </a:r>
+            <a:endParaRPr lang="en-AU" sz="1372" b="1" dirty="0">
+              <a:solidFill>
+                <a:srgbClr val="FF0000"/>
+              </a:solidFill>
+              <a:effectLst>
+                <a:outerShdw blurRad="38100" dist="38100" dir="2700000" algn="tl">
+                  <a:srgbClr val="000000">
+                    <a:alpha val="43137"/>
+                  </a:srgbClr>
+                </a:outerShdw>
+              </a:effectLst>
+            </a:endParaRPr>
+          </a:p>
+        </p:txBody>
+      </p:sp>
+      <p:sp>
+        <p:nvSpPr>
+          <p:cNvPr id="106" name="TextBox 105"/>
+          <p:cNvSpPr txBox="1"/>
+          <p:nvPr/>
+        </p:nvSpPr>
+        <p:spPr>
+          <a:xfrm>
+            <a:off x="976295" y="1288445"/>
+            <a:ext cx="404278" cy="233013"/>
+          </a:xfrm>
+          <a:prstGeom prst="rect">
+            <a:avLst/>
+          </a:prstGeom>
+          <a:noFill/>
+        </p:spPr>
+        <p:txBody>
+          <a:bodyPr wrap="none" rtlCol="0">
+            <a:spAutoFit/>
+          </a:bodyPr>
+          <a:lstStyle/>
+          <a:p>
+            <a:r>
+              <a:rPr lang="en-US" sz="914" dirty="0"/>
+              <a:t>User</a:t>
+            </a:r>
+            <a:endParaRPr lang="en-AU" sz="914" dirty="0"/>
+          </a:p>
+        </p:txBody>
+      </p:sp>
+      <p:sp>
+        <p:nvSpPr>
+          <p:cNvPr id="59" name="Left Arrow 58"/>
+          <p:cNvSpPr/>
+          <p:nvPr/>
+        </p:nvSpPr>
+        <p:spPr>
+          <a:xfrm rot="16200000">
+            <a:off x="3996669" y="1633304"/>
+            <a:ext cx="786047" cy="309962"/>
+          </a:xfrm>
+          <a:prstGeom prst="leftArrow">
+            <a:avLst/>
+          </a:prstGeom>
+        </p:spPr>
+        <p:style>
+          <a:lnRef idx="2">
+            <a:schemeClr val="accent1">
+              <a:shade val="50000"/>
+            </a:schemeClr>
+          </a:lnRef>
+          <a:fillRef idx="1">
+            <a:schemeClr val="accent1"/>
+          </a:fillRef>
+          <a:effectRef idx="0">
+            <a:schemeClr val="accent1"/>
+          </a:effectRef>
+          <a:fontRef idx="minor">
+            <a:schemeClr val="lt1"/>
+          </a:fontRef>
+        </p:style>
+        <p:txBody>
+          <a:bodyPr rtlCol="0" anchor="ctr"/>
+          <a:lstStyle/>
+          <a:p>
+            <a:pPr algn="ctr"/>
+            <a:endParaRPr lang="en-AU" sz="1372"/>
+          </a:p>
+        </p:txBody>
+      </p:sp>
+      <p:sp>
+        <p:nvSpPr>
+          <p:cNvPr id="48" name="Rounded Rectangle 47"/>
+          <p:cNvSpPr/>
+          <p:nvPr/>
+        </p:nvSpPr>
+        <p:spPr>
+          <a:xfrm>
+            <a:off x="3965677" y="2101268"/>
+            <a:ext cx="895508" cy="429432"/>
+          </a:xfrm>
+          <a:prstGeom prst="roundRect">
+            <a:avLst/>
+          </a:prstGeom>
+        </p:spPr>
+        <p:style>
+          <a:lnRef idx="2">
+            <a:schemeClr val="accent1">
+              <a:shade val="50000"/>
+            </a:schemeClr>
+          </a:lnRef>
+          <a:fillRef idx="1">
+            <a:schemeClr val="accent1"/>
+          </a:fillRef>
+          <a:effectRef idx="0">
+            <a:schemeClr val="accent1"/>
+          </a:effectRef>
+          <a:fontRef idx="minor">
+            <a:schemeClr val="lt1"/>
+          </a:fontRef>
+        </p:style>
+        <p:txBody>
+          <a:bodyPr rtlCol="0" anchor="ctr"/>
+          <a:lstStyle/>
+          <a:p>
+            <a:pPr algn="ctr"/>
+            <a:r>
+              <a:rPr lang="en-US" sz="914" strike="sngStrike" dirty="0" smtClean="0">
+                <a:solidFill>
+                  <a:schemeClr val="bg1"/>
+                </a:solidFill>
+                <a:effectLst>
+                  <a:outerShdw blurRad="38100" dist="38100" dir="2700000" algn="tl">
+                    <a:srgbClr val="000000">
+                      <a:alpha val="43137"/>
+                    </a:srgbClr>
+                  </a:outerShdw>
+                </a:effectLst>
+              </a:rPr>
+              <a:t>LLM</a:t>
+            </a:r>
+          </a:p>
+          <a:p>
+            <a:pPr algn="ctr"/>
+            <a:r>
+              <a:rPr lang="en-US" sz="914" b="1" dirty="0" smtClean="0">
+                <a:solidFill>
+                  <a:srgbClr val="FF0000"/>
+                </a:solidFill>
+                <a:effectLst>
+                  <a:outerShdw blurRad="38100" dist="38100" dir="2700000" algn="tl">
+                    <a:srgbClr val="000000">
+                      <a:alpha val="43137"/>
+                    </a:srgbClr>
+                  </a:outerShdw>
+                </a:effectLst>
+              </a:rPr>
+              <a:t>Deterministic Rule Engine 1</a:t>
+            </a:r>
+            <a:endParaRPr lang="en-AU" sz="914" b="1" dirty="0">
+              <a:solidFill>
+                <a:srgbClr val="FF0000"/>
+              </a:solidFill>
+              <a:effectLst>
+                <a:outerShdw blurRad="38100" dist="38100" dir="2700000" algn="tl">
+                  <a:srgbClr val="000000">
+                    <a:alpha val="43137"/>
+                  </a:srgbClr>
+                </a:outerShdw>
+              </a:effectLst>
+            </a:endParaRPr>
+          </a:p>
+        </p:txBody>
+      </p:sp>
+      <p:sp>
+        <p:nvSpPr>
+          <p:cNvPr id="83" name="TextBox 82"/>
+          <p:cNvSpPr txBox="1"/>
+          <p:nvPr/>
+        </p:nvSpPr>
+        <p:spPr>
+          <a:xfrm>
+            <a:off x="4261160" y="1822868"/>
+            <a:ext cx="274434" cy="303481"/>
+          </a:xfrm>
+          <a:prstGeom prst="rect">
+            <a:avLst/>
+          </a:prstGeom>
+          <a:noFill/>
+        </p:spPr>
+        <p:txBody>
+          <a:bodyPr wrap="none" rtlCol="0">
+            <a:spAutoFit/>
+          </a:bodyPr>
+          <a:lstStyle/>
+          <a:p>
+            <a:r>
+              <a:rPr lang="en-US" sz="1372" b="1" dirty="0">
+                <a:solidFill>
+                  <a:srgbClr val="FF0000"/>
+                </a:solidFill>
+                <a:effectLst>
+                  <a:outerShdw blurRad="38100" dist="38100" dir="2700000" algn="tl">
+                    <a:srgbClr val="000000">
+                      <a:alpha val="43137"/>
+                    </a:srgbClr>
+                  </a:outerShdw>
+                </a:effectLst>
+              </a:rPr>
+              <a:t>2</a:t>
+            </a:r>
+            <a:endParaRPr lang="en-AU" sz="1372" b="1" dirty="0">
+              <a:solidFill>
+                <a:srgbClr val="FF0000"/>
+              </a:solidFill>
+              <a:effectLst>
+                <a:outerShdw blurRad="38100" dist="38100" dir="2700000" algn="tl">
+                  <a:srgbClr val="000000">
+                    <a:alpha val="43137"/>
+                  </a:srgbClr>
+                </a:outerShdw>
+              </a:effectLst>
+            </a:endParaRPr>
+          </a:p>
+        </p:txBody>
+      </p:sp>
+      <p:sp>
+        <p:nvSpPr>
+          <p:cNvPr id="49" name="Left Arrow 48"/>
+          <p:cNvSpPr/>
+          <p:nvPr/>
+        </p:nvSpPr>
+        <p:spPr>
+          <a:xfrm rot="16200000">
+            <a:off x="4268221" y="2501852"/>
+            <a:ext cx="271026" cy="322058"/>
+          </a:xfrm>
+          <a:prstGeom prst="leftArrow">
+            <a:avLst/>
+          </a:prstGeom>
+        </p:spPr>
+        <p:style>
+          <a:lnRef idx="2">
+            <a:schemeClr val="accent1">
+              <a:shade val="50000"/>
+            </a:schemeClr>
+          </a:lnRef>
+          <a:fillRef idx="1">
+            <a:schemeClr val="accent1"/>
+          </a:fillRef>
+          <a:effectRef idx="0">
+            <a:schemeClr val="accent1"/>
+          </a:effectRef>
+          <a:fontRef idx="minor">
+            <a:schemeClr val="lt1"/>
+          </a:fontRef>
+        </p:style>
+        <p:txBody>
+          <a:bodyPr rtlCol="0" anchor="ctr"/>
+          <a:lstStyle/>
+          <a:p>
+            <a:pPr algn="ctr"/>
+            <a:endParaRPr lang="en-AU" sz="1372"/>
+          </a:p>
+        </p:txBody>
+      </p:sp>
+      <p:sp>
+        <p:nvSpPr>
+          <p:cNvPr id="50" name="Rectangle 49"/>
+          <p:cNvSpPr/>
+          <p:nvPr/>
+        </p:nvSpPr>
+        <p:spPr>
+          <a:xfrm>
+            <a:off x="4004542" y="2729252"/>
+            <a:ext cx="1605748" cy="274924"/>
+          </a:xfrm>
+          <a:prstGeom prst="rect">
+            <a:avLst/>
+          </a:prstGeom>
+          <a:solidFill>
+            <a:schemeClr val="accent1">
+              <a:lumMod val="20000"/>
+              <a:lumOff val="80000"/>
+            </a:schemeClr>
+          </a:solidFill>
+        </p:spPr>
+        <p:style>
+          <a:lnRef idx="2">
+            <a:schemeClr val="accent1">
+              <a:shade val="50000"/>
+            </a:schemeClr>
+          </a:lnRef>
+          <a:fillRef idx="1">
+            <a:schemeClr val="accent1"/>
+          </a:fillRef>
+          <a:effectRef idx="0">
+            <a:schemeClr val="accent1"/>
+          </a:effectRef>
+          <a:fontRef idx="minor">
+            <a:schemeClr val="lt1"/>
+          </a:fontRef>
+        </p:style>
+        <p:txBody>
+          <a:bodyPr rtlCol="0" anchor="ctr"/>
+          <a:lstStyle/>
+          <a:p>
+            <a:pPr marL="130645" indent="-130645">
+              <a:buFont typeface="Arial" panose="020B0604020202020204" pitchFamily="34" charset="0"/>
+              <a:buChar char="•"/>
+            </a:pPr>
+            <a:r>
+              <a:rPr lang="en-US" sz="914" dirty="0" smtClean="0">
+                <a:solidFill>
+                  <a:schemeClr val="tx1"/>
+                </a:solidFill>
+              </a:rPr>
+              <a:t>Questionnaire Skin Concerns + </a:t>
+            </a:r>
+            <a:r>
+              <a:rPr lang="en-US" sz="914" dirty="0">
+                <a:solidFill>
+                  <a:schemeClr val="tx1"/>
+                </a:solidFill>
+              </a:rPr>
+              <a:t>AI Explanations</a:t>
+            </a:r>
+            <a:endParaRPr lang="en-AU" sz="914" dirty="0">
+              <a:solidFill>
+                <a:schemeClr val="tx1"/>
+              </a:solidFill>
+            </a:endParaRPr>
+          </a:p>
+        </p:txBody>
+      </p:sp>
+      <p:sp>
+        <p:nvSpPr>
+          <p:cNvPr id="43" name="Rectangle 42"/>
+          <p:cNvSpPr/>
+          <p:nvPr/>
+        </p:nvSpPr>
+        <p:spPr>
+          <a:xfrm>
+            <a:off x="2709745" y="2730795"/>
+            <a:ext cx="1284308" cy="274924"/>
+          </a:xfrm>
+          <a:prstGeom prst="rect">
+            <a:avLst/>
+          </a:prstGeom>
+          <a:solidFill>
+            <a:schemeClr val="accent1">
+              <a:lumMod val="20000"/>
+              <a:lumOff val="80000"/>
+            </a:schemeClr>
+          </a:solidFill>
+        </p:spPr>
+        <p:style>
+          <a:lnRef idx="2">
+            <a:schemeClr val="accent1">
+              <a:shade val="50000"/>
+            </a:schemeClr>
+          </a:lnRef>
+          <a:fillRef idx="1">
+            <a:schemeClr val="accent1"/>
+          </a:fillRef>
+          <a:effectRef idx="0">
+            <a:schemeClr val="accent1"/>
+          </a:effectRef>
+          <a:fontRef idx="minor">
+            <a:schemeClr val="lt1"/>
+          </a:fontRef>
+        </p:style>
+        <p:txBody>
+          <a:bodyPr rtlCol="0" anchor="ctr"/>
+          <a:lstStyle/>
+          <a:p>
+            <a:pPr marL="130645" indent="-130645">
+              <a:buFont typeface="Arial" panose="020B0604020202020204" pitchFamily="34" charset="0"/>
+              <a:buChar char="•"/>
+            </a:pPr>
+            <a:r>
+              <a:rPr lang="en-US" sz="914" dirty="0">
+                <a:solidFill>
+                  <a:schemeClr val="tx1"/>
+                </a:solidFill>
+              </a:rPr>
+              <a:t>Visual Skin Concerns</a:t>
+            </a:r>
+          </a:p>
+          <a:p>
+            <a:r>
+              <a:rPr lang="en-US" sz="914" dirty="0">
+                <a:solidFill>
+                  <a:schemeClr val="tx1"/>
+                </a:solidFill>
+              </a:rPr>
+              <a:t>     + AI Explanations</a:t>
+            </a:r>
+            <a:endParaRPr lang="en-AU" sz="914" dirty="0">
+              <a:solidFill>
+                <a:schemeClr val="tx1"/>
+              </a:solidFill>
+            </a:endParaRPr>
+          </a:p>
+        </p:txBody>
+      </p:sp>
+      <p:sp>
+        <p:nvSpPr>
+          <p:cNvPr id="51" name="Rectangle 50"/>
+          <p:cNvSpPr/>
+          <p:nvPr/>
+        </p:nvSpPr>
+        <p:spPr>
+          <a:xfrm>
+            <a:off x="3218571" y="3313423"/>
+            <a:ext cx="1491252" cy="274924"/>
+          </a:xfrm>
+          <a:prstGeom prst="rect">
+            <a:avLst/>
+          </a:prstGeom>
+          <a:solidFill>
+            <a:schemeClr val="accent1">
+              <a:lumMod val="20000"/>
+              <a:lumOff val="80000"/>
+            </a:schemeClr>
+          </a:solidFill>
+        </p:spPr>
+        <p:style>
+          <a:lnRef idx="2">
+            <a:schemeClr val="accent1">
+              <a:shade val="50000"/>
+            </a:schemeClr>
+          </a:lnRef>
+          <a:fillRef idx="1">
+            <a:schemeClr val="accent1"/>
+          </a:fillRef>
+          <a:effectRef idx="0">
+            <a:schemeClr val="accent1"/>
+          </a:effectRef>
+          <a:fontRef idx="minor">
+            <a:schemeClr val="lt1"/>
+          </a:fontRef>
+        </p:style>
+        <p:txBody>
+          <a:bodyPr rtlCol="0" anchor="ctr"/>
+          <a:lstStyle/>
+          <a:p>
+            <a:pPr marL="130645" indent="-130645">
+              <a:buFont typeface="Arial" panose="020B0604020202020204" pitchFamily="34" charset="0"/>
+              <a:buChar char="•"/>
+            </a:pPr>
+            <a:r>
+              <a:rPr lang="en-US" sz="914" dirty="0" smtClean="0">
+                <a:solidFill>
+                  <a:schemeClr val="tx1"/>
+                </a:solidFill>
+              </a:rPr>
+              <a:t>Combined Skin Concerns + </a:t>
+            </a:r>
+            <a:r>
+              <a:rPr lang="en-US" sz="914" dirty="0">
+                <a:solidFill>
+                  <a:schemeClr val="tx1"/>
+                </a:solidFill>
+              </a:rPr>
+              <a:t>AI Explanations</a:t>
+            </a:r>
+            <a:endParaRPr lang="en-AU" sz="914" dirty="0">
+              <a:solidFill>
+                <a:schemeClr val="tx1"/>
+              </a:solidFill>
+            </a:endParaRPr>
+          </a:p>
+        </p:txBody>
+      </p:sp>
+      <p:sp>
+        <p:nvSpPr>
+          <p:cNvPr id="52" name="TextBox 51"/>
+          <p:cNvSpPr txBox="1"/>
+          <p:nvPr/>
+        </p:nvSpPr>
+        <p:spPr>
+          <a:xfrm>
+            <a:off x="3855634" y="3010059"/>
+            <a:ext cx="274434" cy="303481"/>
+          </a:xfrm>
+          <a:prstGeom prst="rect">
+            <a:avLst/>
+          </a:prstGeom>
+          <a:noFill/>
+        </p:spPr>
+        <p:txBody>
+          <a:bodyPr wrap="none" rtlCol="0">
+            <a:spAutoFit/>
+          </a:bodyPr>
+          <a:lstStyle/>
+          <a:p>
+            <a:r>
+              <a:rPr lang="en-US" sz="1372" b="1" dirty="0">
+                <a:solidFill>
+                  <a:srgbClr val="FF0000"/>
+                </a:solidFill>
+                <a:effectLst>
+                  <a:outerShdw blurRad="38100" dist="38100" dir="2700000" algn="tl">
+                    <a:srgbClr val="000000">
+                      <a:alpha val="43137"/>
+                    </a:srgbClr>
+                  </a:outerShdw>
+                </a:effectLst>
+              </a:rPr>
+              <a:t>3</a:t>
+            </a:r>
+            <a:endParaRPr lang="en-AU" sz="1372" b="1" dirty="0">
+              <a:solidFill>
+                <a:srgbClr val="FF0000"/>
+              </a:solidFill>
+              <a:effectLst>
+                <a:outerShdw blurRad="38100" dist="38100" dir="2700000" algn="tl">
+                  <a:srgbClr val="000000">
+                    <a:alpha val="43137"/>
+                  </a:srgbClr>
+                </a:outerShdw>
+              </a:effectLst>
+            </a:endParaRPr>
+          </a:p>
+        </p:txBody>
+      </p:sp>
+      <p:sp>
+        <p:nvSpPr>
+          <p:cNvPr id="91" name="Left Arrow 90"/>
+          <p:cNvSpPr/>
+          <p:nvPr/>
+        </p:nvSpPr>
+        <p:spPr>
+          <a:xfrm rot="16200000">
+            <a:off x="3809156" y="3626794"/>
+            <a:ext cx="406624" cy="318877"/>
+          </a:xfrm>
+          <a:prstGeom prst="leftArrow">
+            <a:avLst/>
+          </a:prstGeom>
+        </p:spPr>
+        <p:style>
+          <a:lnRef idx="2">
+            <a:schemeClr val="accent1">
+              <a:shade val="50000"/>
+            </a:schemeClr>
+          </a:lnRef>
+          <a:fillRef idx="1">
+            <a:schemeClr val="accent1"/>
+          </a:fillRef>
+          <a:effectRef idx="0">
+            <a:schemeClr val="accent1"/>
+          </a:effectRef>
+          <a:fontRef idx="minor">
+            <a:schemeClr val="lt1"/>
+          </a:fontRef>
+        </p:style>
+        <p:txBody>
+          <a:bodyPr rtlCol="0" anchor="ctr"/>
+          <a:lstStyle/>
+          <a:p>
+            <a:pPr algn="ctr"/>
+            <a:endParaRPr lang="en-AU" sz="1372"/>
+          </a:p>
+        </p:txBody>
+      </p:sp>
+      <p:sp>
+        <p:nvSpPr>
+          <p:cNvPr id="92" name="TextBox 91"/>
+          <p:cNvSpPr txBox="1"/>
+          <p:nvPr/>
+        </p:nvSpPr>
+        <p:spPr>
+          <a:xfrm>
+            <a:off x="3875252" y="3576152"/>
+            <a:ext cx="274434" cy="303481"/>
+          </a:xfrm>
+          <a:prstGeom prst="rect">
+            <a:avLst/>
+          </a:prstGeom>
+          <a:noFill/>
+        </p:spPr>
+        <p:txBody>
+          <a:bodyPr wrap="none" rtlCol="0">
+            <a:spAutoFit/>
+          </a:bodyPr>
+          <a:lstStyle/>
+          <a:p>
+            <a:r>
+              <a:rPr lang="en-US" sz="1372" b="1" dirty="0">
+                <a:solidFill>
+                  <a:srgbClr val="FF0000"/>
+                </a:solidFill>
+                <a:effectLst>
+                  <a:outerShdw blurRad="38100" dist="38100" dir="2700000" algn="tl">
+                    <a:srgbClr val="000000">
+                      <a:alpha val="43137"/>
+                    </a:srgbClr>
+                  </a:outerShdw>
+                </a:effectLst>
+              </a:rPr>
+              <a:t>4</a:t>
+            </a:r>
+            <a:endParaRPr lang="en-AU" sz="1372" b="1" dirty="0">
+              <a:solidFill>
+                <a:srgbClr val="FF0000"/>
+              </a:solidFill>
+              <a:effectLst>
+                <a:outerShdw blurRad="38100" dist="38100" dir="2700000" algn="tl">
+                  <a:srgbClr val="000000">
+                    <a:alpha val="43137"/>
+                  </a:srgbClr>
+                </a:outerShdw>
+              </a:effectLst>
+            </a:endParaRPr>
+          </a:p>
+        </p:txBody>
+      </p:sp>
+      <p:sp>
+        <p:nvSpPr>
+          <p:cNvPr id="4" name="U-Turn Arrow 3"/>
+          <p:cNvSpPr/>
+          <p:nvPr/>
+        </p:nvSpPr>
+        <p:spPr>
+          <a:xfrm rot="5400000">
+            <a:off x="3934691" y="1830908"/>
+            <a:ext cx="2214450" cy="1952680"/>
+          </a:xfrm>
+          <a:prstGeom prst="uturnArrow">
+            <a:avLst>
+              <a:gd name="adj1" fmla="val 7720"/>
+              <a:gd name="adj2" fmla="val 7169"/>
+              <a:gd name="adj3" fmla="val 9390"/>
+              <a:gd name="adj4" fmla="val 43750"/>
+              <a:gd name="adj5" fmla="val 100000"/>
+            </a:avLst>
+          </a:prstGeom>
+        </p:spPr>
+        <p:style>
+          <a:lnRef idx="2">
+            <a:schemeClr val="accent1">
+              <a:shade val="50000"/>
+            </a:schemeClr>
+          </a:lnRef>
+          <a:fillRef idx="1">
+            <a:schemeClr val="accent1"/>
+          </a:fillRef>
+          <a:effectRef idx="0">
+            <a:schemeClr val="accent1"/>
+          </a:effectRef>
+          <a:fontRef idx="minor">
+            <a:schemeClr val="lt1"/>
+          </a:fontRef>
+        </p:style>
+        <p:txBody>
+          <a:bodyPr rtlCol="0" anchor="ctr"/>
+          <a:lstStyle/>
+          <a:p>
+            <a:pPr algn="ctr"/>
+            <a:endParaRPr lang="en-AU">
+              <a:solidFill>
+                <a:schemeClr val="tx1"/>
+              </a:solidFill>
+            </a:endParaRPr>
+          </a:p>
+        </p:txBody>
+      </p:sp>
+      <p:sp>
+        <p:nvSpPr>
+          <p:cNvPr id="105" name="Rectangle 104"/>
+          <p:cNvSpPr/>
+          <p:nvPr/>
+        </p:nvSpPr>
+        <p:spPr>
+          <a:xfrm>
+            <a:off x="4029549" y="1686375"/>
+            <a:ext cx="720286" cy="205629"/>
+          </a:xfrm>
+          <a:prstGeom prst="rect">
+            <a:avLst/>
+          </a:prstGeom>
+          <a:solidFill>
+            <a:schemeClr val="accent1">
+              <a:lumMod val="20000"/>
+              <a:lumOff val="80000"/>
+            </a:schemeClr>
+          </a:solidFill>
+        </p:spPr>
+        <p:style>
+          <a:lnRef idx="2">
+            <a:schemeClr val="accent1">
+              <a:shade val="50000"/>
+            </a:schemeClr>
+          </a:lnRef>
+          <a:fillRef idx="1">
+            <a:schemeClr val="accent1"/>
+          </a:fillRef>
+          <a:effectRef idx="0">
+            <a:schemeClr val="accent1"/>
+          </a:effectRef>
+          <a:fontRef idx="minor">
+            <a:schemeClr val="lt1"/>
+          </a:fontRef>
+        </p:style>
+        <p:txBody>
+          <a:bodyPr rtlCol="0" anchor="ctr"/>
+          <a:lstStyle/>
+          <a:p>
+            <a:pPr marL="130645" indent="-130645">
+              <a:buFont typeface="Arial" panose="020B0604020202020204" pitchFamily="34" charset="0"/>
+              <a:buChar char="•"/>
+            </a:pPr>
+            <a:r>
+              <a:rPr lang="en-US" sz="914" dirty="0">
+                <a:solidFill>
+                  <a:schemeClr val="tx1"/>
+                </a:solidFill>
+              </a:rPr>
+              <a:t>Answers</a:t>
+            </a:r>
+            <a:endParaRPr lang="en-AU" sz="914" dirty="0">
+              <a:solidFill>
+                <a:schemeClr val="tx1"/>
+              </a:solidFill>
+            </a:endParaRPr>
+          </a:p>
+        </p:txBody>
+      </p:sp>
+      <p:sp>
+        <p:nvSpPr>
+          <p:cNvPr id="6" name="Bent Arrow 5"/>
+          <p:cNvSpPr/>
+          <p:nvPr/>
+        </p:nvSpPr>
+        <p:spPr>
+          <a:xfrm rot="10800000" flipH="1">
+            <a:off x="1362603" y="1372104"/>
+            <a:ext cx="5496494" cy="4340504"/>
+          </a:xfrm>
+          <a:prstGeom prst="bentArrow">
+            <a:avLst>
+              <a:gd name="adj1" fmla="val 4004"/>
+              <a:gd name="adj2" fmla="val 2831"/>
+              <a:gd name="adj3" fmla="val 2892"/>
+              <a:gd name="adj4" fmla="val 9251"/>
+            </a:avLst>
+          </a:prstGeom>
+        </p:spPr>
+        <p:style>
+          <a:lnRef idx="2">
+            <a:schemeClr val="accent1">
+              <a:shade val="50000"/>
+            </a:schemeClr>
+          </a:lnRef>
+          <a:fillRef idx="1">
+            <a:schemeClr val="accent1"/>
+          </a:fillRef>
+          <a:effectRef idx="0">
+            <a:schemeClr val="accent1"/>
+          </a:effectRef>
+          <a:fontRef idx="minor">
+            <a:schemeClr val="lt1"/>
+          </a:fontRef>
+        </p:style>
+        <p:txBody>
+          <a:bodyPr rtlCol="0" anchor="ctr"/>
+          <a:lstStyle/>
+          <a:p>
+            <a:pPr algn="ctr"/>
+            <a:endParaRPr lang="en-AU">
+              <a:solidFill>
+                <a:schemeClr val="tx1"/>
+              </a:solidFill>
+            </a:endParaRPr>
+          </a:p>
+        </p:txBody>
+      </p:sp>
+      <p:sp>
+        <p:nvSpPr>
+          <p:cNvPr id="53" name="TextBox 52"/>
+          <p:cNvSpPr txBox="1"/>
+          <p:nvPr/>
+        </p:nvSpPr>
+        <p:spPr>
+          <a:xfrm>
+            <a:off x="3748128" y="5459068"/>
+            <a:ext cx="840295" cy="233013"/>
+          </a:xfrm>
+          <a:prstGeom prst="rect">
+            <a:avLst/>
+          </a:prstGeom>
+          <a:noFill/>
+        </p:spPr>
+        <p:txBody>
+          <a:bodyPr wrap="none" rtlCol="0">
+            <a:spAutoFit/>
+          </a:bodyPr>
+          <a:lstStyle/>
+          <a:p>
+            <a:r>
+              <a:rPr lang="en-US" sz="914" b="1" dirty="0" smtClean="0">
+                <a:solidFill>
+                  <a:srgbClr val="FF0000"/>
+                </a:solidFill>
+                <a:effectLst>
+                  <a:outerShdw blurRad="38100" dist="38100" dir="2700000" algn="tl">
+                    <a:srgbClr val="000000">
+                      <a:alpha val="43137"/>
+                    </a:srgbClr>
+                  </a:outerShdw>
+                </a:effectLst>
+              </a:rPr>
+              <a:t>Size selection</a:t>
+            </a:r>
+            <a:endParaRPr lang="en-AU" sz="914" b="1" dirty="0">
+              <a:solidFill>
+                <a:srgbClr val="FF0000"/>
+              </a:solidFill>
+              <a:effectLst>
+                <a:outerShdw blurRad="38100" dist="38100" dir="2700000" algn="tl">
+                  <a:srgbClr val="000000">
+                    <a:alpha val="43137"/>
+                  </a:srgbClr>
+                </a:outerShdw>
+              </a:effectLst>
+            </a:endParaRPr>
+          </a:p>
+        </p:txBody>
+      </p:sp>
+    </p:spTree>
+    <p:extLst>
+      <p:ext uri="{BB962C8B-B14F-4D97-AF65-F5344CB8AC3E}">
+        <p14:creationId xmlns:p14="http://schemas.microsoft.com/office/powerpoint/2010/main" val="1384315453"/>
+      </p:ext>
+    </p:extLst>
+  </p:cSld>
+  <p:clrMapOvr>
+    <a:masterClrMapping/>
+  </p:clrMapOvr>
+  <p:timing>
+    <p:tnLst>
+      <p:par>
+        <p:cTn id="1" dur="indefinite" restart="never" nodeType="tmRoot"/>
+      </p:par>
+    </p:tnLst>
+  </p:timing>
+</p:sld>
+</file>
+
 <file path=ppt/theme/theme1.xml><?xml version="1.0" encoding="utf-8"?>
 <a:theme xmlns:a="http://schemas.openxmlformats.org/drawingml/2006/main" name="Office Theme">
   <a:themeElements>
